--- a/FIM_BookJ2_MondeAssociatif_V6-01062026SHY-TE.pptx
+++ b/FIM_BookJ2_MondeAssociatif_V6-01062026SHY-TE.pptx
@@ -8,6 +8,7 @@
     <p:sldId id="256" r:id="rId7"/>
     <p:sldId id="257" r:id="rId8"/>
     <p:sldId id="258" r:id="rId9"/>
+    <p:sldId id="259" r:id="rId10"/>
   </p:sldIdLst>
   <p:sldSz cx="12188952" cy="6858000" type="screen4x3"/>
   <p:notesSz cx="6858000" cy="9144000"/>
@@ -3142,13 +3143,13 @@
         <p:spPr>
           <a:xfrm>
             <a:off x="0" y="0"/>
-            <a:ext cx="12188952" cy="2377440"/>
+            <a:ext cx="12188952" cy="2286000"/>
           </a:xfrm>
           <a:prstGeom prst="rect">
             <a:avLst/>
           </a:prstGeom>
           <a:solidFill>
-            <a:srgbClr val="005050"/>
+            <a:srgbClr val="005555"/>
           </a:solidFill>
           <a:ln>
             <a:noFill/>
@@ -3184,14 +3185,14 @@
         </p:nvSpPr>
         <p:spPr>
           <a:xfrm>
-            <a:off x="0" y="2331720"/>
-            <a:ext cx="12188952" cy="91440"/>
+            <a:off x="0" y="2267712"/>
+            <a:ext cx="12188952" cy="73152"/>
           </a:xfrm>
           <a:prstGeom prst="rect">
             <a:avLst/>
           </a:prstGeom>
           <a:solidFill>
-            <a:srgbClr val="C9A84C"/>
+            <a:srgbClr val="FF0000"/>
           </a:solidFill>
           <a:ln>
             <a:noFill/>
@@ -3221,14 +3222,57 @@
       </p:sp>
       <p:sp>
         <p:nvSpPr>
-          <p:cNvPr id="5" name="TextBox 4"/>
+          <p:cNvPr id="5" name="Rectangle 4"/>
+          <p:cNvSpPr/>
+          <p:nvPr/>
+        </p:nvSpPr>
+        <p:spPr>
+          <a:xfrm>
+            <a:off x="274320" y="109728"/>
+            <a:ext cx="2926080" cy="822960"/>
+          </a:xfrm>
+          <a:prstGeom prst="rect">
+            <a:avLst/>
+          </a:prstGeom>
+          <a:solidFill>
+            <a:srgbClr val="008080"/>
+          </a:solidFill>
+          <a:ln>
+            <a:noFill/>
+          </a:ln>
+        </p:spPr>
+        <p:style>
+          <a:lnRef idx="1">
+            <a:schemeClr val="accent1"/>
+          </a:lnRef>
+          <a:fillRef idx="3">
+            <a:schemeClr val="accent1"/>
+          </a:fillRef>
+          <a:effectRef idx="2">
+            <a:schemeClr val="accent1"/>
+          </a:effectRef>
+          <a:fontRef idx="minor">
+            <a:schemeClr val="lt1"/>
+          </a:fontRef>
+        </p:style>
+        <p:txBody>
+          <a:bodyPr rtlCol="0" anchor="ctr"/>
+          <a:lstStyle/>
+          <a:p>
+            <a:pPr algn="ctr"/>
+          </a:p>
+        </p:txBody>
+      </p:sp>
+      <p:sp>
+        <p:nvSpPr>
+          <p:cNvPr id="6" name="TextBox 5"/>
           <p:cNvSpPr txBox="1"/>
           <p:nvPr/>
         </p:nvSpPr>
         <p:spPr>
           <a:xfrm>
-            <a:off x="365760" y="182880"/>
-            <a:ext cx="3657600" cy="365760"/>
+            <a:off x="320040" y="118872"/>
+            <a:ext cx="1097280" cy="804672"/>
           </a:xfrm>
           <a:prstGeom prst="rect">
             <a:avLst/>
@@ -3243,26 +3287,26 @@
           <a:p>
             <a:pPr algn="l"/>
             <a:r>
-              <a:rPr sz="1000" b="1" i="0">
-                <a:solidFill>
-                  <a:srgbClr val="C9A84C"/>
+              <a:rPr sz="3600" b="1" i="0">
+                <a:solidFill>
+                  <a:srgbClr val="FFFFFF"/>
                 </a:solidFill>
               </a:rPr>
-              <a:t>BOOK J2 · Journée 2</a:t>
-            </a:r>
-          </a:p>
-        </p:txBody>
-      </p:sp>
-      <p:sp>
-        <p:nvSpPr>
-          <p:cNvPr id="6" name="TextBox 5"/>
+              <a:t>SHY</a:t>
+            </a:r>
+          </a:p>
+        </p:txBody>
+      </p:sp>
+      <p:sp>
+        <p:nvSpPr>
+          <p:cNvPr id="7" name="TextBox 6"/>
           <p:cNvSpPr txBox="1"/>
           <p:nvPr/>
         </p:nvSpPr>
         <p:spPr>
           <a:xfrm>
-            <a:off x="457200" y="502920"/>
-            <a:ext cx="11247120" cy="1371600"/>
+            <a:off x="1371600" y="347472"/>
+            <a:ext cx="1828800" cy="411480"/>
           </a:xfrm>
           <a:prstGeom prst="rect">
             <a:avLst/>
@@ -3277,26 +3321,69 @@
           <a:p>
             <a:pPr algn="l"/>
             <a:r>
-              <a:rPr sz="3000" b="1" i="0">
+              <a:rPr sz="1400" b="1" i="0">
                 <a:solidFill>
                   <a:srgbClr val="FFFFFF"/>
                 </a:solidFill>
               </a:rPr>
-              <a:t>Monde Associatif</a:t>
-            </a:r>
-          </a:p>
-        </p:txBody>
-      </p:sp>
-      <p:sp>
-        <p:nvSpPr>
-          <p:cNvPr id="7" name="TextBox 6"/>
+              <a:t>Performance</a:t>
+            </a:r>
+          </a:p>
+        </p:txBody>
+      </p:sp>
+      <p:sp>
+        <p:nvSpPr>
+          <p:cNvPr id="8" name="Rectangle 7"/>
+          <p:cNvSpPr/>
+          <p:nvPr/>
+        </p:nvSpPr>
+        <p:spPr>
+          <a:xfrm>
+            <a:off x="3337560" y="164592"/>
+            <a:ext cx="36576" cy="658368"/>
+          </a:xfrm>
+          <a:prstGeom prst="rect">
+            <a:avLst/>
+          </a:prstGeom>
+          <a:solidFill>
+            <a:srgbClr val="FF0000"/>
+          </a:solidFill>
+          <a:ln>
+            <a:noFill/>
+          </a:ln>
+        </p:spPr>
+        <p:style>
+          <a:lnRef idx="1">
+            <a:schemeClr val="accent1"/>
+          </a:lnRef>
+          <a:fillRef idx="3">
+            <a:schemeClr val="accent1"/>
+          </a:fillRef>
+          <a:effectRef idx="2">
+            <a:schemeClr val="accent1"/>
+          </a:effectRef>
+          <a:fontRef idx="minor">
+            <a:schemeClr val="lt1"/>
+          </a:fontRef>
+        </p:style>
+        <p:txBody>
+          <a:bodyPr rtlCol="0" anchor="ctr"/>
+          <a:lstStyle/>
+          <a:p>
+            <a:pPr algn="ctr"/>
+          </a:p>
+        </p:txBody>
+      </p:sp>
+      <p:sp>
+        <p:nvSpPr>
+          <p:cNvPr id="9" name="TextBox 8"/>
           <p:cNvSpPr txBox="1"/>
           <p:nvPr/>
         </p:nvSpPr>
         <p:spPr>
           <a:xfrm>
-            <a:off x="457200" y="1828800"/>
-            <a:ext cx="11247120" cy="502920"/>
+            <a:off x="3474720" y="164592"/>
+            <a:ext cx="8503920" cy="347472"/>
           </a:xfrm>
           <a:prstGeom prst="rect">
             <a:avLst/>
@@ -3311,26 +3398,26 @@
           <a:p>
             <a:pPr algn="l"/>
             <a:r>
-              <a:rPr sz="1300" b="0" i="1">
-                <a:solidFill>
-                  <a:srgbClr val="DDEEEE"/>
+              <a:rPr sz="900" b="1" i="0">
+                <a:solidFill>
+                  <a:srgbClr val="BBEEEE"/>
                 </a:solidFill>
               </a:rPr>
-              <a:t>Contextualisation · Écosystème ONG Maroc &amp; international · Économie du don</a:t>
-            </a:r>
-          </a:p>
-        </p:txBody>
-      </p:sp>
-      <p:sp>
-        <p:nvSpPr>
-          <p:cNvPr id="8" name="TextBox 7"/>
+              <a:t>BOOK J2  ·  Journée 2  ·  Donateurs français &amp; Don régulier</a:t>
+            </a:r>
+          </a:p>
+        </p:txBody>
+      </p:sp>
+      <p:sp>
+        <p:nvSpPr>
+          <p:cNvPr id="10" name="TextBox 9"/>
           <p:cNvSpPr txBox="1"/>
           <p:nvPr/>
         </p:nvSpPr>
         <p:spPr>
           <a:xfrm>
-            <a:off x="0" y="6492240"/>
-            <a:ext cx="12188952" cy="365760"/>
+            <a:off x="320040" y="960120"/>
+            <a:ext cx="11521440" cy="1143000"/>
           </a:xfrm>
           <a:prstGeom prst="rect">
             <a:avLst/>
@@ -3343,14 +3430,161 @@
           </a:bodyPr>
           <a:lstStyle/>
           <a:p>
+            <a:pPr algn="l"/>
+            <a:r>
+              <a:rPr sz="3000" b="1" i="0">
+                <a:solidFill>
+                  <a:srgbClr val="FFFFFF"/>
+                </a:solidFill>
+              </a:rPr>
+              <a:t>Le Monde du Don en France</a:t>
+            </a:r>
+          </a:p>
+        </p:txBody>
+      </p:sp>
+      <p:sp>
+        <p:nvSpPr>
+          <p:cNvPr id="11" name="TextBox 10"/>
+          <p:cNvSpPr txBox="1"/>
+          <p:nvPr/>
+        </p:nvSpPr>
+        <p:spPr>
+          <a:xfrm>
+            <a:off x="320040" y="1920240"/>
+            <a:ext cx="11521440" cy="347472"/>
+          </a:xfrm>
+          <a:prstGeom prst="rect">
+            <a:avLst/>
+          </a:prstGeom>
+          <a:noFill/>
+        </p:spPr>
+        <p:txBody>
+          <a:bodyPr wrap="square">
+            <a:spAutoFit/>
+          </a:bodyPr>
+          <a:lstStyle/>
+          <a:p>
+            <a:pPr algn="l"/>
+            <a:r>
+              <a:rPr sz="1200" b="0" i="1">
+                <a:solidFill>
+                  <a:srgbClr val="CCEEEE"/>
+                </a:solidFill>
+              </a:rPr>
+              <a:t>Comprendre qui sont vos donateurs et pourquoi ils donnent</a:t>
+            </a:r>
+          </a:p>
+        </p:txBody>
+      </p:sp>
+      <p:sp>
+        <p:nvSpPr>
+          <p:cNvPr id="12" name="Rectangle 11"/>
+          <p:cNvSpPr/>
+          <p:nvPr/>
+        </p:nvSpPr>
+        <p:spPr>
+          <a:xfrm>
+            <a:off x="0" y="6492240"/>
+            <a:ext cx="12188952" cy="365760"/>
+          </a:xfrm>
+          <a:prstGeom prst="rect">
+            <a:avLst/>
+          </a:prstGeom>
+          <a:solidFill>
+            <a:srgbClr val="005555"/>
+          </a:solidFill>
+          <a:ln>
+            <a:noFill/>
+          </a:ln>
+        </p:spPr>
+        <p:style>
+          <a:lnRef idx="1">
+            <a:schemeClr val="accent1"/>
+          </a:lnRef>
+          <a:fillRef idx="3">
+            <a:schemeClr val="accent1"/>
+          </a:fillRef>
+          <a:effectRef idx="2">
+            <a:schemeClr val="accent1"/>
+          </a:effectRef>
+          <a:fontRef idx="minor">
+            <a:schemeClr val="lt1"/>
+          </a:fontRef>
+        </p:style>
+        <p:txBody>
+          <a:bodyPr rtlCol="0" anchor="ctr"/>
+          <a:lstStyle/>
+          <a:p>
             <a:pPr algn="ctr"/>
+          </a:p>
+        </p:txBody>
+      </p:sp>
+      <p:sp>
+        <p:nvSpPr>
+          <p:cNvPr id="13" name="TextBox 12"/>
+          <p:cNvSpPr txBox="1"/>
+          <p:nvPr/>
+        </p:nvSpPr>
+        <p:spPr>
+          <a:xfrm>
+            <a:off x="0" y="6519672"/>
+            <a:ext cx="12188952" cy="274320"/>
+          </a:xfrm>
+          <a:prstGeom prst="rect">
+            <a:avLst/>
+          </a:prstGeom>
+          <a:noFill/>
+        </p:spPr>
+        <p:txBody>
+          <a:bodyPr wrap="square">
+            <a:spAutoFit/>
+          </a:bodyPr>
+          <a:lstStyle/>
+          <a:p>
+            <a:pPr algn="ctr"/>
             <a:r>
               <a:rPr sz="900" b="0" i="0">
                 <a:solidFill>
-                  <a:srgbClr val="888888"/>
+                  <a:srgbClr val="FFFFFF"/>
                 </a:solidFill>
               </a:rPr>
-              <a:t>SHY-Performance · V6-01062026SHY-TE · Référentiel UM6P/CMC 2025</a:t>
+              <a:t>SHY-Performance  ·  Formation FIM  ·  V6-01062026SHY-TE</a:t>
+            </a:r>
+          </a:p>
+        </p:txBody>
+      </p:sp>
+      <p:sp>
+        <p:nvSpPr>
+          <p:cNvPr id="14" name="TextBox 13"/>
+          <p:cNvSpPr txBox="1"/>
+          <p:nvPr/>
+        </p:nvSpPr>
+        <p:spPr>
+          <a:xfrm>
+            <a:off x="457200" y="2514600"/>
+            <a:ext cx="11247120" cy="1051560"/>
+          </a:xfrm>
+          <a:prstGeom prst="rect">
+            <a:avLst/>
+          </a:prstGeom>
+          <a:noFill/>
+        </p:spPr>
+        <p:txBody>
+          <a:bodyPr wrap="square">
+            <a:spAutoFit/>
+          </a:bodyPr>
+          <a:lstStyle/>
+          <a:p>
+            <a:pPr algn="l"/>
+            <a:r>
+              <a:rPr sz="1400" b="0" i="0">
+                <a:solidFill>
+                  <a:srgbClr val="1A1A1A"/>
+                </a:solidFill>
+              </a:rPr>
+              <a:t>Aujourd'hui, vous allez comprendre le comportement des donateurs français,
+le modèle économique du don régulier et pourquoi il change tout
+pour les programmes humanitaires de l'UNICEF.</a:t>
             </a:r>
           </a:p>
         </p:txBody>
@@ -3425,13 +3659,13 @@
         <p:spPr>
           <a:xfrm>
             <a:off x="0" y="0"/>
-            <a:ext cx="12188952" cy="685800"/>
+            <a:ext cx="12188952" cy="658368"/>
           </a:xfrm>
           <a:prstGeom prst="rect">
             <a:avLst/>
           </a:prstGeom>
           <a:solidFill>
-            <a:srgbClr val="005050"/>
+            <a:srgbClr val="005555"/>
           </a:solidFill>
           <a:ln>
             <a:noFill/>
@@ -3467,14 +3701,14 @@
         </p:nvSpPr>
         <p:spPr>
           <a:xfrm>
-            <a:off x="0" y="667512"/>
-            <a:ext cx="12188952" cy="36576"/>
+            <a:off x="0" y="640080"/>
+            <a:ext cx="12188952" cy="54864"/>
           </a:xfrm>
           <a:prstGeom prst="rect">
             <a:avLst/>
           </a:prstGeom>
           <a:solidFill>
-            <a:srgbClr val="C9A84C"/>
+            <a:srgbClr val="FF0000"/>
           </a:solidFill>
           <a:ln>
             <a:noFill/>
@@ -3510,8 +3744,8 @@
         </p:nvSpPr>
         <p:spPr>
           <a:xfrm>
-            <a:off x="274320" y="73152"/>
-            <a:ext cx="11612880" cy="566928"/>
+            <a:off x="164592" y="64008"/>
+            <a:ext cx="685800" cy="530352"/>
           </a:xfrm>
           <a:prstGeom prst="rect">
             <a:avLst/>
@@ -3526,66 +3760,32 @@
           <a:p>
             <a:pPr algn="l"/>
             <a:r>
-              <a:rPr sz="1800" b="1" i="0">
+              <a:rPr sz="2000" b="1" i="0">
                 <a:solidFill>
                   <a:srgbClr val="FFFFFF"/>
                 </a:solidFill>
               </a:rPr>
-              <a:t>Objectifs &amp; Séquence Kolb — Journée 2</a:t>
-            </a:r>
-          </a:p>
-        </p:txBody>
-      </p:sp>
-      <p:sp>
-        <p:nvSpPr>
-          <p:cNvPr id="6" name="TextBox 5"/>
-          <p:cNvSpPr txBox="1"/>
-          <p:nvPr/>
-        </p:nvSpPr>
-        <p:spPr>
-          <a:xfrm>
-            <a:off x="0" y="6492240"/>
-            <a:ext cx="12188952" cy="365760"/>
-          </a:xfrm>
-          <a:prstGeom prst="rect">
-            <a:avLst/>
-          </a:prstGeom>
-          <a:noFill/>
-        </p:spPr>
-        <p:txBody>
-          <a:bodyPr wrap="square">
-            <a:spAutoFit/>
-          </a:bodyPr>
-          <a:lstStyle/>
-          <a:p>
-            <a:pPr algn="ctr"/>
-            <a:r>
-              <a:rPr sz="800" b="0" i="0">
-                <a:solidFill>
-                  <a:srgbClr val="888888"/>
-                </a:solidFill>
-              </a:rPr>
-              <a:t>SHY-Performance · V6-01062026SHY-TE</a:t>
-            </a:r>
-          </a:p>
-        </p:txBody>
-      </p:sp>
-      <p:sp>
-        <p:nvSpPr>
-          <p:cNvPr id="7" name="Rectangle 6"/>
+              <a:t>SHY</a:t>
+            </a:r>
+          </a:p>
+        </p:txBody>
+      </p:sp>
+      <p:sp>
+        <p:nvSpPr>
+          <p:cNvPr id="6" name="Rectangle 5"/>
           <p:cNvSpPr/>
           <p:nvPr/>
         </p:nvSpPr>
         <p:spPr>
           <a:xfrm>
-            <a:off x="274320" y="868680"/>
-            <a:ext cx="5486400" cy="347472"/>
+            <a:off x="914400" y="91440"/>
+            <a:ext cx="36576" cy="475488"/>
           </a:xfrm>
           <a:prstGeom prst="rect">
             <a:avLst/>
           </a:prstGeom>
           <a:solidFill>
-            <a:srgbClr val="007A7A"/>
+            <a:srgbClr val="FF0000"/>
           </a:solidFill>
           <a:ln>
             <a:noFill/>
@@ -3615,14 +3815,14 @@
       </p:sp>
       <p:sp>
         <p:nvSpPr>
-          <p:cNvPr id="8" name="TextBox 7"/>
+          <p:cNvPr id="7" name="TextBox 6"/>
           <p:cNvSpPr txBox="1"/>
           <p:nvPr/>
         </p:nvSpPr>
         <p:spPr>
           <a:xfrm>
-            <a:off x="365760" y="905256"/>
-            <a:ext cx="5303520" cy="292608"/>
+            <a:off x="1024128" y="91440"/>
+            <a:ext cx="10881360" cy="475488"/>
           </a:xfrm>
           <a:prstGeom prst="rect">
             <a:avLst/>
@@ -3637,32 +3837,32 @@
           <a:p>
             <a:pPr algn="l"/>
             <a:r>
-              <a:rPr sz="1200" b="1" i="0">
+              <a:rPr sz="1700" b="1" i="0">
                 <a:solidFill>
                   <a:srgbClr val="FFFFFF"/>
                 </a:solidFill>
               </a:rPr>
-              <a:t>Objectifs V6 — Bloom Niv. 2–4</a:t>
-            </a:r>
-          </a:p>
-        </p:txBody>
-      </p:sp>
-      <p:sp>
-        <p:nvSpPr>
-          <p:cNvPr id="9" name="Rectangle 8"/>
+              <a:t>Journée 2 — Ce que vous allez vivre aujourd'hui</a:t>
+            </a:r>
+          </a:p>
+        </p:txBody>
+      </p:sp>
+      <p:sp>
+        <p:nvSpPr>
+          <p:cNvPr id="8" name="Rectangle 7"/>
           <p:cNvSpPr/>
           <p:nvPr/>
         </p:nvSpPr>
         <p:spPr>
           <a:xfrm>
-            <a:off x="6126480" y="868680"/>
-            <a:ext cx="5486400" cy="347472"/>
+            <a:off x="0" y="6492240"/>
+            <a:ext cx="12188952" cy="365760"/>
           </a:xfrm>
           <a:prstGeom prst="rect">
             <a:avLst/>
           </a:prstGeom>
           <a:solidFill>
-            <a:srgbClr val="007A7A"/>
+            <a:srgbClr val="005555"/>
           </a:solidFill>
           <a:ln>
             <a:noFill/>
@@ -3692,14 +3892,14 @@
       </p:sp>
       <p:sp>
         <p:nvSpPr>
-          <p:cNvPr id="10" name="TextBox 9"/>
+          <p:cNvPr id="9" name="TextBox 8"/>
           <p:cNvSpPr txBox="1"/>
           <p:nvPr/>
         </p:nvSpPr>
         <p:spPr>
           <a:xfrm>
-            <a:off x="6217920" y="905256"/>
-            <a:ext cx="5303520" cy="292608"/>
+            <a:off x="0" y="6519672"/>
+            <a:ext cx="12188952" cy="274320"/>
           </a:xfrm>
           <a:prstGeom prst="rect">
             <a:avLst/>
@@ -3712,340 +3912,34 @@
           </a:bodyPr>
           <a:lstStyle/>
           <a:p>
-            <a:pPr algn="l"/>
-            <a:r>
-              <a:rPr sz="1200" b="1" i="0">
+            <a:pPr algn="ctr"/>
+            <a:r>
+              <a:rPr sz="900" b="0" i="0">
                 <a:solidFill>
                   <a:srgbClr val="FFFFFF"/>
                 </a:solidFill>
               </a:rPr>
-              <a:t>Apports théoriques clés</a:t>
-            </a:r>
-          </a:p>
-        </p:txBody>
-      </p:sp>
-      <p:sp>
-        <p:nvSpPr>
-          <p:cNvPr id="11" name="TextBox 10"/>
-          <p:cNvSpPr txBox="1"/>
-          <p:nvPr/>
-        </p:nvSpPr>
-        <p:spPr>
-          <a:xfrm>
-            <a:off x="365760" y="1280160"/>
-            <a:ext cx="5303520" cy="347472"/>
-          </a:xfrm>
-          <a:prstGeom prst="rect">
-            <a:avLst/>
-          </a:prstGeom>
-          <a:noFill/>
-        </p:spPr>
-        <p:txBody>
-          <a:bodyPr wrap="square">
-            <a:spAutoFit/>
-          </a:bodyPr>
-          <a:lstStyle/>
-          <a:p>
-            <a:pPr algn="l"/>
-            <a:r>
-              <a:rPr sz="1100" b="0" i="0">
-                <a:solidFill>
-                  <a:srgbClr val="1A1A1A"/>
-                </a:solidFill>
-              </a:rPr>
-              <a:t>• Expliquer le modèle économique du don régulier vs ponctuel</a:t>
-            </a:r>
-          </a:p>
-        </p:txBody>
-      </p:sp>
-      <p:sp>
-        <p:nvSpPr>
-          <p:cNvPr id="12" name="TextBox 11"/>
-          <p:cNvSpPr txBox="1"/>
-          <p:nvPr/>
-        </p:nvSpPr>
-        <p:spPr>
-          <a:xfrm>
-            <a:off x="365760" y="1645919"/>
-            <a:ext cx="5303520" cy="347472"/>
-          </a:xfrm>
-          <a:prstGeom prst="rect">
-            <a:avLst/>
-          </a:prstGeom>
-          <a:noFill/>
-        </p:spPr>
-        <p:txBody>
-          <a:bodyPr wrap="square">
-            <a:spAutoFit/>
-          </a:bodyPr>
-          <a:lstStyle/>
-          <a:p>
-            <a:pPr algn="l"/>
-            <a:r>
-              <a:rPr sz="1100" b="0" i="0">
-                <a:solidFill>
-                  <a:srgbClr val="1A1A1A"/>
-                </a:solidFill>
-              </a:rPr>
-              <a:t>• Distinguer les acteurs du secteur associatif marocain</a:t>
-            </a:r>
-          </a:p>
-        </p:txBody>
-      </p:sp>
-      <p:sp>
-        <p:nvSpPr>
-          <p:cNvPr id="13" name="TextBox 12"/>
-          <p:cNvSpPr txBox="1"/>
-          <p:nvPr/>
-        </p:nvSpPr>
-        <p:spPr>
-          <a:xfrm>
-            <a:off x="365760" y="2011679"/>
-            <a:ext cx="5303520" cy="347472"/>
-          </a:xfrm>
-          <a:prstGeom prst="rect">
-            <a:avLst/>
-          </a:prstGeom>
-          <a:noFill/>
-        </p:spPr>
-        <p:txBody>
-          <a:bodyPr wrap="square">
-            <a:spAutoFit/>
-          </a:bodyPr>
-          <a:lstStyle/>
-          <a:p>
-            <a:pPr algn="l"/>
-            <a:r>
-              <a:rPr sz="1100" b="0" i="0">
-                <a:solidFill>
-                  <a:srgbClr val="1A1A1A"/>
-                </a:solidFill>
-              </a:rPr>
-              <a:t>• Analyser pourquoi le don régulier est le plus efficace</a:t>
-            </a:r>
-          </a:p>
-        </p:txBody>
-      </p:sp>
-      <p:sp>
-        <p:nvSpPr>
-          <p:cNvPr id="14" name="TextBox 13"/>
-          <p:cNvSpPr txBox="1"/>
-          <p:nvPr/>
-        </p:nvSpPr>
-        <p:spPr>
-          <a:xfrm>
-            <a:off x="365760" y="2377439"/>
-            <a:ext cx="5303520" cy="347472"/>
-          </a:xfrm>
-          <a:prstGeom prst="rect">
-            <a:avLst/>
-          </a:prstGeom>
-          <a:noFill/>
-        </p:spPr>
-        <p:txBody>
-          <a:bodyPr wrap="square">
-            <a:spAutoFit/>
-          </a:bodyPr>
-          <a:lstStyle/>
-          <a:p>
-            <a:pPr algn="l"/>
-            <a:r>
-              <a:rPr sz="1100" b="0" i="0">
-                <a:solidFill>
-                  <a:srgbClr val="1A1A1A"/>
-                </a:solidFill>
-              </a:rPr>
-              <a:t>• Identifier le cadre juridique (Loi 75-00 Maroc)</a:t>
-            </a:r>
-          </a:p>
-        </p:txBody>
-      </p:sp>
-      <p:sp>
-        <p:nvSpPr>
-          <p:cNvPr id="15" name="TextBox 14"/>
-          <p:cNvSpPr txBox="1"/>
-          <p:nvPr/>
-        </p:nvSpPr>
-        <p:spPr>
-          <a:xfrm>
-            <a:off x="6217920" y="1280160"/>
-            <a:ext cx="5303520" cy="347472"/>
-          </a:xfrm>
-          <a:prstGeom prst="rect">
-            <a:avLst/>
-          </a:prstGeom>
-          <a:noFill/>
-        </p:spPr>
-        <p:txBody>
-          <a:bodyPr wrap="square">
-            <a:spAutoFit/>
-          </a:bodyPr>
-          <a:lstStyle/>
-          <a:p>
-            <a:pPr algn="l"/>
-            <a:r>
-              <a:rPr sz="1100" b="0" i="0">
-                <a:solidFill>
-                  <a:srgbClr val="1A1A1A"/>
-                </a:solidFill>
-              </a:rPr>
-              <a:t>• Loi 75-00 sur les associations au Maroc</a:t>
-            </a:r>
-          </a:p>
-        </p:txBody>
-      </p:sp>
-      <p:sp>
-        <p:nvSpPr>
-          <p:cNvPr id="16" name="TextBox 15"/>
-          <p:cNvSpPr txBox="1"/>
-          <p:nvPr/>
-        </p:nvSpPr>
-        <p:spPr>
-          <a:xfrm>
-            <a:off x="6217920" y="1645919"/>
-            <a:ext cx="5303520" cy="347472"/>
-          </a:xfrm>
-          <a:prstGeom prst="rect">
-            <a:avLst/>
-          </a:prstGeom>
-          <a:noFill/>
-        </p:spPr>
-        <p:txBody>
-          <a:bodyPr wrap="square">
-            <a:spAutoFit/>
-          </a:bodyPr>
-          <a:lstStyle/>
-          <a:p>
-            <a:pPr algn="l"/>
-            <a:r>
-              <a:rPr sz="1100" b="0" i="0">
-                <a:solidFill>
-                  <a:srgbClr val="1A1A1A"/>
-                </a:solidFill>
-              </a:rPr>
-              <a:t>• Économie du don : théorie de la réciprocité (Mauss)</a:t>
-            </a:r>
-          </a:p>
-        </p:txBody>
-      </p:sp>
-      <p:sp>
-        <p:nvSpPr>
-          <p:cNvPr id="17" name="TextBox 16"/>
-          <p:cNvSpPr txBox="1"/>
-          <p:nvPr/>
-        </p:nvSpPr>
-        <p:spPr>
-          <a:xfrm>
-            <a:off x="6217920" y="2011679"/>
-            <a:ext cx="5303520" cy="347472"/>
-          </a:xfrm>
-          <a:prstGeom prst="rect">
-            <a:avLst/>
-          </a:prstGeom>
-          <a:noFill/>
-        </p:spPr>
-        <p:txBody>
-          <a:bodyPr wrap="square">
-            <a:spAutoFit/>
-          </a:bodyPr>
-          <a:lstStyle/>
-          <a:p>
-            <a:pPr algn="l"/>
-            <a:r>
-              <a:rPr sz="1100" b="0" i="0">
-                <a:solidFill>
-                  <a:srgbClr val="1A1A1A"/>
-                </a:solidFill>
-              </a:rPr>
-              <a:t>• Données : marché fundraising MENA 2024–2026</a:t>
-            </a:r>
-          </a:p>
-        </p:txBody>
-      </p:sp>
-      <p:sp>
-        <p:nvSpPr>
-          <p:cNvPr id="18" name="TextBox 17"/>
-          <p:cNvSpPr txBox="1"/>
-          <p:nvPr/>
-        </p:nvSpPr>
-        <p:spPr>
-          <a:xfrm>
-            <a:off x="6217920" y="2377439"/>
-            <a:ext cx="5303520" cy="347472"/>
-          </a:xfrm>
-          <a:prstGeom prst="rect">
-            <a:avLst/>
-          </a:prstGeom>
-          <a:noFill/>
-        </p:spPr>
-        <p:txBody>
-          <a:bodyPr wrap="square">
-            <a:spAutoFit/>
-          </a:bodyPr>
-          <a:lstStyle/>
-          <a:p>
-            <a:pPr algn="l"/>
-            <a:r>
-              <a:rPr sz="1100" b="0" i="0">
-                <a:solidFill>
-                  <a:srgbClr val="1A1A1A"/>
-                </a:solidFill>
-              </a:rPr>
-              <a:t>• UNICEF Maroc : budget, programmes actifs, bénéficiaires</a:t>
-            </a:r>
-          </a:p>
-        </p:txBody>
-      </p:sp>
-      <p:sp>
-        <p:nvSpPr>
-          <p:cNvPr id="19" name="TextBox 18"/>
-          <p:cNvSpPr txBox="1"/>
-          <p:nvPr/>
-        </p:nvSpPr>
-        <p:spPr>
-          <a:xfrm>
-            <a:off x="6217920" y="2743199"/>
-            <a:ext cx="5303520" cy="347472"/>
-          </a:xfrm>
-          <a:prstGeom prst="rect">
-            <a:avLst/>
-          </a:prstGeom>
-          <a:noFill/>
-        </p:spPr>
-        <p:txBody>
-          <a:bodyPr wrap="square">
-            <a:spAutoFit/>
-          </a:bodyPr>
-          <a:lstStyle/>
-          <a:p>
-            <a:pPr algn="l"/>
-            <a:r>
-              <a:rPr sz="1100" b="0" i="0">
-                <a:solidFill>
-                  <a:srgbClr val="1A1A1A"/>
-                </a:solidFill>
-              </a:rPr>
-              <a:t>• Don régulier vs ponctuel : LTV donateur × 8</a:t>
-            </a:r>
-          </a:p>
-        </p:txBody>
-      </p:sp>
-      <p:sp>
-        <p:nvSpPr>
-          <p:cNvPr id="20" name="Rectangle 19"/>
+              <a:t>SHY-Performance  ·  Formation FIM  ·  V6-01062026SHY-TE</a:t>
+            </a:r>
+          </a:p>
+        </p:txBody>
+      </p:sp>
+      <p:sp>
+        <p:nvSpPr>
+          <p:cNvPr id="10" name="Rectangle 9"/>
           <p:cNvSpPr/>
           <p:nvPr/>
         </p:nvSpPr>
         <p:spPr>
           <a:xfrm>
-            <a:off x="274320" y="4160520"/>
-            <a:ext cx="2882646" cy="256032"/>
+            <a:off x="274320" y="804672"/>
+            <a:ext cx="2910078" cy="274320"/>
           </a:xfrm>
           <a:prstGeom prst="rect">
             <a:avLst/>
           </a:prstGeom>
           <a:solidFill>
-            <a:srgbClr val="2E86AB"/>
+            <a:srgbClr val="005555"/>
           </a:solidFill>
           <a:ln>
             <a:noFill/>
@@ -4075,14 +3969,14 @@
       </p:sp>
       <p:sp>
         <p:nvSpPr>
-          <p:cNvPr id="21" name="TextBox 20"/>
+          <p:cNvPr id="11" name="TextBox 10"/>
           <p:cNvSpPr txBox="1"/>
           <p:nvPr/>
         </p:nvSpPr>
         <p:spPr>
           <a:xfrm>
-            <a:off x="320040" y="4187952"/>
-            <a:ext cx="2791206" cy="201168"/>
+            <a:off x="347472" y="841248"/>
+            <a:ext cx="2763774" cy="219456"/>
           </a:xfrm>
           <a:prstGeom prst="rect">
             <a:avLst/>
@@ -4102,21 +3996,21 @@
                   <a:srgbClr val="FFFFFF"/>
                 </a:solidFill>
               </a:rPr>
-              <a:t>EC — Expérience Concrète</a:t>
-            </a:r>
-          </a:p>
-        </p:txBody>
-      </p:sp>
-      <p:sp>
-        <p:nvSpPr>
-          <p:cNvPr id="22" name="Rectangle 21"/>
+              <a:t>DÉCOUVERTE</a:t>
+            </a:r>
+          </a:p>
+        </p:txBody>
+      </p:sp>
+      <p:sp>
+        <p:nvSpPr>
+          <p:cNvPr id="12" name="Rectangle 11"/>
           <p:cNvSpPr/>
           <p:nvPr/>
         </p:nvSpPr>
         <p:spPr>
           <a:xfrm>
-            <a:off x="274320" y="4416552"/>
-            <a:ext cx="2882646" cy="1481328"/>
+            <a:off x="274320" y="1078992"/>
+            <a:ext cx="2910078" cy="3840480"/>
           </a:xfrm>
           <a:prstGeom prst="rect">
             <a:avLst/>
@@ -4126,7 +4020,7 @@
           </a:solidFill>
           <a:ln w="12700">
             <a:solidFill>
-              <a:srgbClr val="2E86AB"/>
+              <a:srgbClr val="005555"/>
             </a:solidFill>
           </a:ln>
         </p:spPr>
@@ -4154,14 +4048,14 @@
       </p:sp>
       <p:sp>
         <p:nvSpPr>
-          <p:cNvPr id="23" name="TextBox 22"/>
+          <p:cNvPr id="13" name="TextBox 12"/>
           <p:cNvSpPr txBox="1"/>
           <p:nvPr/>
         </p:nvSpPr>
         <p:spPr>
           <a:xfrm>
-            <a:off x="365760" y="4453128"/>
-            <a:ext cx="2699765" cy="1371600"/>
+            <a:off x="384048" y="1124712"/>
+            <a:ext cx="2690622" cy="3657600"/>
           </a:xfrm>
           <a:prstGeom prst="rect">
             <a:avLst/>
@@ -4181,27 +4075,29 @@
                   <a:srgbClr val="1A1A1A"/>
                 </a:solidFill>
               </a:rPr>
-              <a:t>Analyse de 3 campagnes de fundraising (succès / échec)</a:t>
-            </a:r>
-          </a:p>
-        </p:txBody>
-      </p:sp>
-      <p:sp>
-        <p:nvSpPr>
-          <p:cNvPr id="24" name="Rectangle 23"/>
+              <a:t>Vous analysez 3 campagnes
+de collecte en France :
+deux succès, un échec.</a:t>
+            </a:r>
+          </a:p>
+        </p:txBody>
+      </p:sp>
+      <p:sp>
+        <p:nvSpPr>
+          <p:cNvPr id="14" name="Rectangle 13"/>
           <p:cNvSpPr/>
           <p:nvPr/>
         </p:nvSpPr>
         <p:spPr>
           <a:xfrm>
-            <a:off x="3184397" y="4160520"/>
-            <a:ext cx="2882646" cy="256032"/>
+            <a:off x="3202686" y="804672"/>
+            <a:ext cx="2910078" cy="274320"/>
           </a:xfrm>
           <a:prstGeom prst="rect">
             <a:avLst/>
           </a:prstGeom>
           <a:solidFill>
-            <a:srgbClr val="4CAF82"/>
+            <a:srgbClr val="008080"/>
           </a:solidFill>
           <a:ln>
             <a:noFill/>
@@ -4231,14 +4127,14 @@
       </p:sp>
       <p:sp>
         <p:nvSpPr>
-          <p:cNvPr id="25" name="TextBox 24"/>
+          <p:cNvPr id="15" name="TextBox 14"/>
           <p:cNvSpPr txBox="1"/>
           <p:nvPr/>
         </p:nvSpPr>
         <p:spPr>
           <a:xfrm>
-            <a:off x="3230117" y="4187952"/>
-            <a:ext cx="2791206" cy="201168"/>
+            <a:off x="3275838" y="841248"/>
+            <a:ext cx="2763774" cy="219456"/>
           </a:xfrm>
           <a:prstGeom prst="rect">
             <a:avLst/>
@@ -4258,21 +4154,21 @@
                   <a:srgbClr val="FFFFFF"/>
                 </a:solidFill>
               </a:rPr>
-              <a:t>OR — Observation Réfléchie</a:t>
-            </a:r>
-          </a:p>
-        </p:txBody>
-      </p:sp>
-      <p:sp>
-        <p:nvSpPr>
-          <p:cNvPr id="26" name="Rectangle 25"/>
+              <a:t>ANALYSE</a:t>
+            </a:r>
+          </a:p>
+        </p:txBody>
+      </p:sp>
+      <p:sp>
+        <p:nvSpPr>
+          <p:cNvPr id="16" name="Rectangle 15"/>
           <p:cNvSpPr/>
           <p:nvPr/>
         </p:nvSpPr>
         <p:spPr>
           <a:xfrm>
-            <a:off x="3184397" y="4416552"/>
-            <a:ext cx="2882646" cy="1481328"/>
+            <a:off x="3202686" y="1078992"/>
+            <a:ext cx="2910078" cy="3840480"/>
           </a:xfrm>
           <a:prstGeom prst="rect">
             <a:avLst/>
@@ -4282,7 +4178,7 @@
           </a:solidFill>
           <a:ln w="12700">
             <a:solidFill>
-              <a:srgbClr val="4CAF82"/>
+              <a:srgbClr val="008080"/>
             </a:solidFill>
           </a:ln>
         </p:spPr>
@@ -4310,14 +4206,14 @@
       </p:sp>
       <p:sp>
         <p:nvSpPr>
-          <p:cNvPr id="27" name="TextBox 26"/>
+          <p:cNvPr id="17" name="TextBox 16"/>
           <p:cNvSpPr txBox="1"/>
           <p:nvPr/>
         </p:nvSpPr>
         <p:spPr>
           <a:xfrm>
-            <a:off x="3275837" y="4453128"/>
-            <a:ext cx="2699765" cy="1371600"/>
+            <a:off x="3312414" y="1124712"/>
+            <a:ext cx="2690622" cy="3657600"/>
           </a:xfrm>
           <a:prstGeom prst="rect">
             <a:avLst/>
@@ -4337,27 +4233,29 @@
                   <a:srgbClr val="1A1A1A"/>
                 </a:solidFill>
               </a:rPr>
-              <a:t>'Qu'est-ce qui a fait la différence ?' — liste collective</a:t>
-            </a:r>
-          </a:p>
-        </p:txBody>
-      </p:sp>
-      <p:sp>
-        <p:nvSpPr>
-          <p:cNvPr id="28" name="Rectangle 27"/>
+              <a:t>'Qu'est-ce qui a fait
+la différence ?
+Pourquoi ça a marché ?'</a:t>
+            </a:r>
+          </a:p>
+        </p:txBody>
+      </p:sp>
+      <p:sp>
+        <p:nvSpPr>
+          <p:cNvPr id="18" name="Rectangle 17"/>
           <p:cNvSpPr/>
           <p:nvPr/>
         </p:nvSpPr>
         <p:spPr>
           <a:xfrm>
-            <a:off x="6094475" y="4160520"/>
-            <a:ext cx="2882646" cy="256032"/>
+            <a:off x="6131052" y="804672"/>
+            <a:ext cx="2910078" cy="274320"/>
           </a:xfrm>
           <a:prstGeom prst="rect">
             <a:avLst/>
           </a:prstGeom>
           <a:solidFill>
-            <a:srgbClr val="F4AE2D"/>
+            <a:srgbClr val="2A7A50"/>
           </a:solidFill>
           <a:ln>
             <a:noFill/>
@@ -4387,14 +4285,14 @@
       </p:sp>
       <p:sp>
         <p:nvSpPr>
-          <p:cNvPr id="29" name="TextBox 28"/>
+          <p:cNvPr id="19" name="TextBox 18"/>
           <p:cNvSpPr txBox="1"/>
           <p:nvPr/>
         </p:nvSpPr>
         <p:spPr>
           <a:xfrm>
-            <a:off x="6140195" y="4187952"/>
-            <a:ext cx="2791206" cy="201168"/>
+            <a:off x="6204204" y="841248"/>
+            <a:ext cx="2763774" cy="219456"/>
           </a:xfrm>
           <a:prstGeom prst="rect">
             <a:avLst/>
@@ -4414,21 +4312,21 @@
                   <a:srgbClr val="FFFFFF"/>
                 </a:solidFill>
               </a:rPr>
-              <a:t>CA — Conceptualisation</a:t>
-            </a:r>
-          </a:p>
-        </p:txBody>
-      </p:sp>
-      <p:sp>
-        <p:nvSpPr>
-          <p:cNvPr id="30" name="Rectangle 29"/>
+              <a:t>APPORT</a:t>
+            </a:r>
+          </a:p>
+        </p:txBody>
+      </p:sp>
+      <p:sp>
+        <p:nvSpPr>
+          <p:cNvPr id="20" name="Rectangle 19"/>
           <p:cNvSpPr/>
           <p:nvPr/>
         </p:nvSpPr>
         <p:spPr>
           <a:xfrm>
-            <a:off x="6094475" y="4416552"/>
-            <a:ext cx="2882646" cy="1481328"/>
+            <a:off x="6131052" y="1078992"/>
+            <a:ext cx="2910078" cy="3840480"/>
           </a:xfrm>
           <a:prstGeom prst="rect">
             <a:avLst/>
@@ -4438,7 +4336,7 @@
           </a:solidFill>
           <a:ln w="12700">
             <a:solidFill>
-              <a:srgbClr val="F4AE2D"/>
+              <a:srgbClr val="2A7A50"/>
             </a:solidFill>
           </a:ln>
         </p:spPr>
@@ -4466,14 +4364,14 @@
       </p:sp>
       <p:sp>
         <p:nvSpPr>
-          <p:cNvPr id="31" name="TextBox 30"/>
+          <p:cNvPr id="21" name="TextBox 20"/>
           <p:cNvSpPr txBox="1"/>
           <p:nvPr/>
         </p:nvSpPr>
         <p:spPr>
           <a:xfrm>
-            <a:off x="6185915" y="4453128"/>
-            <a:ext cx="2699765" cy="1371600"/>
+            <a:off x="6240780" y="1124712"/>
+            <a:ext cx="2690622" cy="3657600"/>
           </a:xfrm>
           <a:prstGeom prst="rect">
             <a:avLst/>
@@ -4493,27 +4391,29 @@
                   <a:srgbClr val="1A1A1A"/>
                 </a:solidFill>
               </a:rPr>
-              <a:t>Cadre juridique associatif + économie du don (Mauss)</a:t>
-            </a:r>
-          </a:p>
-        </p:txBody>
-      </p:sp>
-      <p:sp>
-        <p:nvSpPr>
-          <p:cNvPr id="32" name="Rectangle 31"/>
+              <a:t>Portrait du donateur
+français. Économie
+du don régulier.</a:t>
+            </a:r>
+          </a:p>
+        </p:txBody>
+      </p:sp>
+      <p:sp>
+        <p:nvSpPr>
+          <p:cNvPr id="22" name="Rectangle 21"/>
           <p:cNvSpPr/>
           <p:nvPr/>
         </p:nvSpPr>
         <p:spPr>
           <a:xfrm>
-            <a:off x="9004554" y="4160520"/>
-            <a:ext cx="2882646" cy="256032"/>
+            <a:off x="9059418" y="804672"/>
+            <a:ext cx="2910078" cy="274320"/>
           </a:xfrm>
           <a:prstGeom prst="rect">
             <a:avLst/>
           </a:prstGeom>
           <a:solidFill>
-            <a:srgbClr val="E84855"/>
+            <a:srgbClr val="FF0000"/>
           </a:solidFill>
           <a:ln>
             <a:noFill/>
@@ -4543,14 +4443,14 @@
       </p:sp>
       <p:sp>
         <p:nvSpPr>
-          <p:cNvPr id="33" name="TextBox 32"/>
+          <p:cNvPr id="23" name="TextBox 22"/>
           <p:cNvSpPr txBox="1"/>
           <p:nvPr/>
         </p:nvSpPr>
         <p:spPr>
           <a:xfrm>
-            <a:off x="9050274" y="4187952"/>
-            <a:ext cx="2791206" cy="201168"/>
+            <a:off x="9132570" y="841248"/>
+            <a:ext cx="2763774" cy="219456"/>
           </a:xfrm>
           <a:prstGeom prst="rect">
             <a:avLst/>
@@ -4570,21 +4470,21 @@
                   <a:srgbClr val="FFFFFF"/>
                 </a:solidFill>
               </a:rPr>
-              <a:t>EA — Expérimentation Active</a:t>
-            </a:r>
-          </a:p>
-        </p:txBody>
-      </p:sp>
-      <p:sp>
-        <p:nvSpPr>
-          <p:cNvPr id="34" name="Rectangle 33"/>
+              <a:t>MISE EN PRATIQUE</a:t>
+            </a:r>
+          </a:p>
+        </p:txBody>
+      </p:sp>
+      <p:sp>
+        <p:nvSpPr>
+          <p:cNvPr id="24" name="Rectangle 23"/>
           <p:cNvSpPr/>
           <p:nvPr/>
         </p:nvSpPr>
         <p:spPr>
           <a:xfrm>
-            <a:off x="9004554" y="4416552"/>
-            <a:ext cx="2882646" cy="1481328"/>
+            <a:off x="9059418" y="1078992"/>
+            <a:ext cx="2910078" cy="3840480"/>
           </a:xfrm>
           <a:prstGeom prst="rect">
             <a:avLst/>
@@ -4594,7 +4494,7 @@
           </a:solidFill>
           <a:ln w="12700">
             <a:solidFill>
-              <a:srgbClr val="E84855"/>
+              <a:srgbClr val="FF0000"/>
             </a:solidFill>
           </a:ln>
         </p:spPr>
@@ -4622,14 +4522,14 @@
       </p:sp>
       <p:sp>
         <p:nvSpPr>
-          <p:cNvPr id="35" name="TextBox 34"/>
+          <p:cNvPr id="25" name="TextBox 24"/>
           <p:cNvSpPr txBox="1"/>
           <p:nvPr/>
         </p:nvSpPr>
         <p:spPr>
           <a:xfrm>
-            <a:off x="9095994" y="4453128"/>
-            <a:ext cx="2699765" cy="1371600"/>
+            <a:off x="9169146" y="1124712"/>
+            <a:ext cx="2690622" cy="3657600"/>
           </a:xfrm>
           <a:prstGeom prst="rect">
             <a:avLst/>
@@ -4649,27 +4549,29 @@
                   <a:srgbClr val="1A1A1A"/>
                 </a:solidFill>
               </a:rPr>
-              <a:t>Simulation budgétaire : 100 donneurs × 100 DH/mois = ?</a:t>
-            </a:r>
-          </a:p>
-        </p:txBody>
-      </p:sp>
-      <p:sp>
-        <p:nvSpPr>
-          <p:cNvPr id="36" name="Rectangle 35"/>
+              <a:t>Simulation : 'Si 50
+français donnent 10€/mois,
+quel impact en 1 an ?'</a:t>
+            </a:r>
+          </a:p>
+        </p:txBody>
+      </p:sp>
+      <p:sp>
+        <p:nvSpPr>
+          <p:cNvPr id="26" name="Rectangle 25"/>
           <p:cNvSpPr/>
           <p:nvPr/>
         </p:nvSpPr>
         <p:spPr>
           <a:xfrm>
-            <a:off x="274320" y="5486400"/>
-            <a:ext cx="11612880" cy="274320"/>
+            <a:off x="274320" y="5074920"/>
+            <a:ext cx="11640312" cy="274320"/>
           </a:xfrm>
           <a:prstGeom prst="rect">
             <a:avLst/>
           </a:prstGeom>
           <a:solidFill>
-            <a:srgbClr val="C9A84C"/>
+            <a:srgbClr val="FF0000"/>
           </a:solidFill>
           <a:ln>
             <a:noFill/>
@@ -4699,13 +4601,13 @@
       </p:sp>
       <p:sp>
         <p:nvSpPr>
-          <p:cNvPr id="37" name="TextBox 36"/>
+          <p:cNvPr id="27" name="TextBox 26"/>
           <p:cNvSpPr txBox="1"/>
           <p:nvPr/>
         </p:nvSpPr>
         <p:spPr>
           <a:xfrm>
-            <a:off x="365760" y="5522976"/>
+            <a:off x="384048" y="5111496"/>
             <a:ext cx="11430000" cy="219456"/>
           </a:xfrm>
           <a:prstGeom prst="rect">
@@ -4721,26 +4623,71 @@
           <a:p>
             <a:pPr algn="l"/>
             <a:r>
-              <a:rPr sz="1000" b="1" i="0">
-                <a:solidFill>
-                  <a:srgbClr val="005050"/>
+              <a:rPr sz="900" b="1" i="0">
+                <a:solidFill>
+                  <a:srgbClr val="FFFFFF"/>
                 </a:solidFill>
               </a:rPr>
-              <a:t>🎯 Évaluation formative</a:t>
-            </a:r>
-          </a:p>
-        </p:txBody>
-      </p:sp>
-      <p:sp>
-        <p:nvSpPr>
-          <p:cNvPr id="38" name="TextBox 37"/>
+              <a:t>Vos 3 réussites à valider aujourd'hui</a:t>
+            </a:r>
+          </a:p>
+        </p:txBody>
+      </p:sp>
+      <p:sp>
+        <p:nvSpPr>
+          <p:cNvPr id="28" name="Rectangle 27"/>
+          <p:cNvSpPr/>
+          <p:nvPr/>
+        </p:nvSpPr>
+        <p:spPr>
+          <a:xfrm>
+            <a:off x="274320" y="5367528"/>
+            <a:ext cx="3843528" cy="502920"/>
+          </a:xfrm>
+          <a:prstGeom prst="rect">
+            <a:avLst/>
+          </a:prstGeom>
+          <a:solidFill>
+            <a:srgbClr val="FFFFFF"/>
+          </a:solidFill>
+          <a:ln w="10160">
+            <a:solidFill>
+              <a:srgbClr val="FF0000"/>
+            </a:solidFill>
+          </a:ln>
+        </p:spPr>
+        <p:style>
+          <a:lnRef idx="1">
+            <a:schemeClr val="accent1"/>
+          </a:lnRef>
+          <a:fillRef idx="3">
+            <a:schemeClr val="accent1"/>
+          </a:fillRef>
+          <a:effectRef idx="2">
+            <a:schemeClr val="accent1"/>
+          </a:effectRef>
+          <a:fontRef idx="minor">
+            <a:schemeClr val="lt1"/>
+          </a:fontRef>
+        </p:style>
+        <p:txBody>
+          <a:bodyPr rtlCol="0" anchor="ctr"/>
+          <a:lstStyle/>
+          <a:p>
+            <a:pPr algn="ctr"/>
+          </a:p>
+        </p:txBody>
+      </p:sp>
+      <p:sp>
+        <p:nvSpPr>
+          <p:cNvPr id="29" name="TextBox 28"/>
           <p:cNvSpPr txBox="1"/>
           <p:nvPr/>
         </p:nvSpPr>
         <p:spPr>
           <a:xfrm>
-            <a:off x="365760" y="5779008"/>
-            <a:ext cx="3718560" cy="502920"/>
+            <a:off x="365760" y="5404104"/>
+            <a:ext cx="3715512" cy="420624"/>
           </a:xfrm>
           <a:prstGeom prst="rect">
             <a:avLst/>
@@ -4760,21 +4707,66 @@
                   <a:srgbClr val="1A1A1A"/>
                 </a:solidFill>
               </a:rPr>
-              <a:t>✓ Restitution orale étude de cas (5 min/groupe)</a:t>
-            </a:r>
-          </a:p>
-        </p:txBody>
-      </p:sp>
-      <p:sp>
-        <p:nvSpPr>
-          <p:cNvPr id="39" name="TextBox 38"/>
+              <a:t>✔ Restitution orale de l'étude de cas (5 min)</a:t>
+            </a:r>
+          </a:p>
+        </p:txBody>
+      </p:sp>
+      <p:sp>
+        <p:nvSpPr>
+          <p:cNvPr id="30" name="Rectangle 29"/>
+          <p:cNvSpPr/>
+          <p:nvPr/>
+        </p:nvSpPr>
+        <p:spPr>
+          <a:xfrm>
+            <a:off x="4154423" y="5367528"/>
+            <a:ext cx="3843528" cy="502920"/>
+          </a:xfrm>
+          <a:prstGeom prst="rect">
+            <a:avLst/>
+          </a:prstGeom>
+          <a:solidFill>
+            <a:srgbClr val="FFFFFF"/>
+          </a:solidFill>
+          <a:ln w="10160">
+            <a:solidFill>
+              <a:srgbClr val="FF0000"/>
+            </a:solidFill>
+          </a:ln>
+        </p:spPr>
+        <p:style>
+          <a:lnRef idx="1">
+            <a:schemeClr val="accent1"/>
+          </a:lnRef>
+          <a:fillRef idx="3">
+            <a:schemeClr val="accent1"/>
+          </a:fillRef>
+          <a:effectRef idx="2">
+            <a:schemeClr val="accent1"/>
+          </a:effectRef>
+          <a:fontRef idx="minor">
+            <a:schemeClr val="lt1"/>
+          </a:fontRef>
+        </p:style>
+        <p:txBody>
+          <a:bodyPr rtlCol="0" anchor="ctr"/>
+          <a:lstStyle/>
+          <a:p>
+            <a:pPr algn="ctr"/>
+          </a:p>
+        </p:txBody>
+      </p:sp>
+      <p:sp>
+        <p:nvSpPr>
+          <p:cNvPr id="31" name="TextBox 30"/>
           <p:cNvSpPr txBox="1"/>
           <p:nvPr/>
         </p:nvSpPr>
         <p:spPr>
           <a:xfrm>
-            <a:off x="4175760" y="5779008"/>
-            <a:ext cx="3718560" cy="502920"/>
+            <a:off x="4245863" y="5404104"/>
+            <a:ext cx="3715512" cy="420624"/>
           </a:xfrm>
           <a:prstGeom prst="rect">
             <a:avLst/>
@@ -4794,21 +4786,66 @@
                   <a:srgbClr val="1A1A1A"/>
                 </a:solidFill>
               </a:rPr>
-              <a:t>✓ Fiche 'Monde associatif' complétée individuellement</a:t>
-            </a:r>
-          </a:p>
-        </p:txBody>
-      </p:sp>
-      <p:sp>
-        <p:nvSpPr>
-          <p:cNvPr id="40" name="TextBox 39"/>
+              <a:t>✔ Fiche 'Portrait donateur' complétée</a:t>
+            </a:r>
+          </a:p>
+        </p:txBody>
+      </p:sp>
+      <p:sp>
+        <p:nvSpPr>
+          <p:cNvPr id="32" name="Rectangle 31"/>
+          <p:cNvSpPr/>
+          <p:nvPr/>
+        </p:nvSpPr>
+        <p:spPr>
+          <a:xfrm>
+            <a:off x="8034527" y="5367528"/>
+            <a:ext cx="3843528" cy="502920"/>
+          </a:xfrm>
+          <a:prstGeom prst="rect">
+            <a:avLst/>
+          </a:prstGeom>
+          <a:solidFill>
+            <a:srgbClr val="FFFFFF"/>
+          </a:solidFill>
+          <a:ln w="10160">
+            <a:solidFill>
+              <a:srgbClr val="FF0000"/>
+            </a:solidFill>
+          </a:ln>
+        </p:spPr>
+        <p:style>
+          <a:lnRef idx="1">
+            <a:schemeClr val="accent1"/>
+          </a:lnRef>
+          <a:fillRef idx="3">
+            <a:schemeClr val="accent1"/>
+          </a:fillRef>
+          <a:effectRef idx="2">
+            <a:schemeClr val="accent1"/>
+          </a:effectRef>
+          <a:fontRef idx="minor">
+            <a:schemeClr val="lt1"/>
+          </a:fontRef>
+        </p:style>
+        <p:txBody>
+          <a:bodyPr rtlCol="0" anchor="ctr"/>
+          <a:lstStyle/>
+          <a:p>
+            <a:pPr algn="ctr"/>
+          </a:p>
+        </p:txBody>
+      </p:sp>
+      <p:sp>
+        <p:nvSpPr>
+          <p:cNvPr id="33" name="TextBox 32"/>
           <p:cNvSpPr txBox="1"/>
           <p:nvPr/>
         </p:nvSpPr>
         <p:spPr>
           <a:xfrm>
-            <a:off x="7985760" y="5779008"/>
-            <a:ext cx="3718560" cy="502920"/>
+            <a:off x="8125967" y="5404104"/>
+            <a:ext cx="3715512" cy="420624"/>
           </a:xfrm>
           <a:prstGeom prst="rect">
             <a:avLst/>
@@ -4828,7 +4865,7 @@
                   <a:srgbClr val="1A1A1A"/>
                 </a:solidFill>
               </a:rPr>
-              <a:t>✓ 1 question réflexion LFI sur l'objection 'méfiance ONG'</a:t>
+              <a:t>✔ 1 réflexion dans votre livret personnel</a:t>
             </a:r>
           </a:p>
         </p:txBody>
@@ -4903,13 +4940,13 @@
         <p:spPr>
           <a:xfrm>
             <a:off x="0" y="0"/>
-            <a:ext cx="12188952" cy="685800"/>
+            <a:ext cx="12188952" cy="658368"/>
           </a:xfrm>
           <a:prstGeom prst="rect">
             <a:avLst/>
           </a:prstGeom>
           <a:solidFill>
-            <a:srgbClr val="005050"/>
+            <a:srgbClr val="005555"/>
           </a:solidFill>
           <a:ln>
             <a:noFill/>
@@ -4945,14 +4982,14 @@
         </p:nvSpPr>
         <p:spPr>
           <a:xfrm>
-            <a:off x="0" y="667512"/>
-            <a:ext cx="12188952" cy="36576"/>
+            <a:off x="0" y="640080"/>
+            <a:ext cx="12188952" cy="54864"/>
           </a:xfrm>
           <a:prstGeom prst="rect">
             <a:avLst/>
           </a:prstGeom>
           <a:solidFill>
-            <a:srgbClr val="C9A84C"/>
+            <a:srgbClr val="FF0000"/>
           </a:solidFill>
           <a:ln>
             <a:noFill/>
@@ -4988,8 +5025,8 @@
         </p:nvSpPr>
         <p:spPr>
           <a:xfrm>
-            <a:off x="274320" y="73152"/>
-            <a:ext cx="11612880" cy="566928"/>
+            <a:off x="164592" y="64008"/>
+            <a:ext cx="685800" cy="530352"/>
           </a:xfrm>
           <a:prstGeom prst="rect">
             <a:avLst/>
@@ -5004,12 +5041,12 @@
           <a:p>
             <a:pPr algn="l"/>
             <a:r>
-              <a:rPr sz="1800" b="1" i="0">
+              <a:rPr sz="2000" b="1" i="0">
                 <a:solidFill>
                   <a:srgbClr val="FFFFFF"/>
                 </a:solidFill>
               </a:rPr>
-              <a:t>Étude de Cas — 3 Campagnes Fundraising</a:t>
+              <a:t>SHY</a:t>
             </a:r>
           </a:p>
         </p:txBody>
@@ -5022,14 +5059,14 @@
         </p:nvSpPr>
         <p:spPr>
           <a:xfrm>
-            <a:off x="274320" y="822960"/>
-            <a:ext cx="3749039" cy="347472"/>
+            <a:off x="914400" y="91440"/>
+            <a:ext cx="36576" cy="475488"/>
           </a:xfrm>
           <a:prstGeom prst="rect">
             <a:avLst/>
           </a:prstGeom>
           <a:solidFill>
-            <a:srgbClr val="1A7A1A"/>
+            <a:srgbClr val="FF0000"/>
           </a:solidFill>
           <a:ln>
             <a:noFill/>
@@ -5065,8 +5102,8 @@
         </p:nvSpPr>
         <p:spPr>
           <a:xfrm>
-            <a:off x="365760" y="859536"/>
-            <a:ext cx="3566160" cy="274320"/>
+            <a:off x="1024128" y="91440"/>
+            <a:ext cx="10881360" cy="475488"/>
           </a:xfrm>
           <a:prstGeom prst="rect">
             <a:avLst/>
@@ -5081,12 +5118,12 @@
           <a:p>
             <a:pPr algn="l"/>
             <a:r>
-              <a:rPr sz="1100" b="1" i="0">
+              <a:rPr sz="1700" b="1" i="0">
                 <a:solidFill>
                   <a:srgbClr val="FFFFFF"/>
                 </a:solidFill>
               </a:rPr>
-              <a:t>CAS A — SUCCÈS</a:t>
+              <a:t>Le Donateur Français — Qui est-il vraiment ?</a:t>
             </a:r>
           </a:p>
         </p:txBody>
@@ -5099,8 +5136,163 @@
         </p:nvSpPr>
         <p:spPr>
           <a:xfrm>
-            <a:off x="274320" y="1170432"/>
-            <a:ext cx="3749039" cy="2194560"/>
+            <a:off x="0" y="6492240"/>
+            <a:ext cx="12188952" cy="365760"/>
+          </a:xfrm>
+          <a:prstGeom prst="rect">
+            <a:avLst/>
+          </a:prstGeom>
+          <a:solidFill>
+            <a:srgbClr val="005555"/>
+          </a:solidFill>
+          <a:ln>
+            <a:noFill/>
+          </a:ln>
+        </p:spPr>
+        <p:style>
+          <a:lnRef idx="1">
+            <a:schemeClr val="accent1"/>
+          </a:lnRef>
+          <a:fillRef idx="3">
+            <a:schemeClr val="accent1"/>
+          </a:fillRef>
+          <a:effectRef idx="2">
+            <a:schemeClr val="accent1"/>
+          </a:effectRef>
+          <a:fontRef idx="minor">
+            <a:schemeClr val="lt1"/>
+          </a:fontRef>
+        </p:style>
+        <p:txBody>
+          <a:bodyPr rtlCol="0" anchor="ctr"/>
+          <a:lstStyle/>
+          <a:p>
+            <a:pPr algn="ctr"/>
+          </a:p>
+        </p:txBody>
+      </p:sp>
+      <p:sp>
+        <p:nvSpPr>
+          <p:cNvPr id="9" name="TextBox 8"/>
+          <p:cNvSpPr txBox="1"/>
+          <p:nvPr/>
+        </p:nvSpPr>
+        <p:spPr>
+          <a:xfrm>
+            <a:off x="0" y="6519672"/>
+            <a:ext cx="12188952" cy="274320"/>
+          </a:xfrm>
+          <a:prstGeom prst="rect">
+            <a:avLst/>
+          </a:prstGeom>
+          <a:noFill/>
+        </p:spPr>
+        <p:txBody>
+          <a:bodyPr wrap="square">
+            <a:spAutoFit/>
+          </a:bodyPr>
+          <a:lstStyle/>
+          <a:p>
+            <a:pPr algn="ctr"/>
+            <a:r>
+              <a:rPr sz="900" b="0" i="0">
+                <a:solidFill>
+                  <a:srgbClr val="FFFFFF"/>
+                </a:solidFill>
+              </a:rPr>
+              <a:t>SHY-Performance  ·  Formation FIM  ·  V6-01062026SHY-TE</a:t>
+            </a:r>
+          </a:p>
+        </p:txBody>
+      </p:sp>
+      <p:sp>
+        <p:nvSpPr>
+          <p:cNvPr id="10" name="Rectangle 9"/>
+          <p:cNvSpPr/>
+          <p:nvPr/>
+        </p:nvSpPr>
+        <p:spPr>
+          <a:xfrm>
+            <a:off x="274320" y="804672"/>
+            <a:ext cx="3794760" cy="457200"/>
+          </a:xfrm>
+          <a:prstGeom prst="rect">
+            <a:avLst/>
+          </a:prstGeom>
+          <a:solidFill>
+            <a:srgbClr val="005555"/>
+          </a:solidFill>
+          <a:ln>
+            <a:noFill/>
+          </a:ln>
+        </p:spPr>
+        <p:style>
+          <a:lnRef idx="1">
+            <a:schemeClr val="accent1"/>
+          </a:lnRef>
+          <a:fillRef idx="3">
+            <a:schemeClr val="accent1"/>
+          </a:fillRef>
+          <a:effectRef idx="2">
+            <a:schemeClr val="accent1"/>
+          </a:effectRef>
+          <a:fontRef idx="minor">
+            <a:schemeClr val="lt1"/>
+          </a:fontRef>
+        </p:style>
+        <p:txBody>
+          <a:bodyPr rtlCol="0" anchor="ctr"/>
+          <a:lstStyle/>
+          <a:p>
+            <a:pPr algn="ctr"/>
+          </a:p>
+        </p:txBody>
+      </p:sp>
+      <p:sp>
+        <p:nvSpPr>
+          <p:cNvPr id="11" name="TextBox 10"/>
+          <p:cNvSpPr txBox="1"/>
+          <p:nvPr/>
+        </p:nvSpPr>
+        <p:spPr>
+          <a:xfrm>
+            <a:off x="384048" y="841248"/>
+            <a:ext cx="3566160" cy="384048"/>
+          </a:xfrm>
+          <a:prstGeom prst="rect">
+            <a:avLst/>
+          </a:prstGeom>
+          <a:noFill/>
+        </p:spPr>
+        <p:txBody>
+          <a:bodyPr wrap="square">
+            <a:spAutoFit/>
+          </a:bodyPr>
+          <a:lstStyle/>
+          <a:p>
+            <a:pPr algn="l"/>
+            <a:r>
+              <a:rPr sz="1200" b="1" i="0">
+                <a:solidFill>
+                  <a:srgbClr val="FFFFFF"/>
+                </a:solidFill>
+              </a:rPr>
+              <a:t>Profil A
+Le Régulier engagé</a:t>
+            </a:r>
+          </a:p>
+        </p:txBody>
+      </p:sp>
+      <p:sp>
+        <p:nvSpPr>
+          <p:cNvPr id="12" name="Rectangle 11"/>
+          <p:cNvSpPr/>
+          <p:nvPr/>
+        </p:nvSpPr>
+        <p:spPr>
+          <a:xfrm>
+            <a:off x="274320" y="1261872"/>
+            <a:ext cx="3794760" cy="2926080"/>
           </a:xfrm>
           <a:prstGeom prst="rect">
             <a:avLst/>
@@ -5110,7 +5302,7 @@
           </a:solidFill>
           <a:ln w="19050">
             <a:solidFill>
-              <a:srgbClr val="1A7A1A"/>
+              <a:srgbClr val="005555"/>
             </a:solidFill>
           </a:ln>
         </p:spPr>
@@ -5138,14 +5330,14 @@
       </p:sp>
       <p:sp>
         <p:nvSpPr>
-          <p:cNvPr id="9" name="TextBox 8"/>
+          <p:cNvPr id="13" name="TextBox 12"/>
           <p:cNvSpPr txBox="1"/>
           <p:nvPr/>
         </p:nvSpPr>
         <p:spPr>
           <a:xfrm>
-            <a:off x="411479" y="1234440"/>
-            <a:ext cx="3474720" cy="2011680"/>
+            <a:off x="411479" y="1335024"/>
+            <a:ext cx="3520440" cy="2743200"/>
           </a:xfrm>
           <a:prstGeom prst="rect">
             <a:avLst/>
@@ -5165,31 +5357,29 @@
                   <a:srgbClr val="1A1A1A"/>
                 </a:solidFill>
               </a:rPr>
-              <a:t>Greenpeace Maroc 2023
-Objectif : 500 donateurs/mois
-Résultat : 720 donateurs (+44%)
-Facteurs : script émotionnel fort,
-formation 5J intensive, suivi J+30</a:t>
-            </a:r>
-          </a:p>
-        </p:txBody>
-      </p:sp>
-      <p:sp>
-        <p:nvSpPr>
-          <p:cNvPr id="10" name="Rectangle 9"/>
+              <a:t>35–55 ans · CSP+ · Sensible aux causes humanitaires
+Donne déjà à 1 ou 2 associations · Cherche un impact mesurable
+▶ Votre message : transparence des fonds + chiffres concrets</a:t>
+            </a:r>
+          </a:p>
+        </p:txBody>
+      </p:sp>
+      <p:sp>
+        <p:nvSpPr>
+          <p:cNvPr id="14" name="Rectangle 13"/>
           <p:cNvSpPr/>
           <p:nvPr/>
         </p:nvSpPr>
         <p:spPr>
           <a:xfrm>
-            <a:off x="4160520" y="822960"/>
-            <a:ext cx="3749039" cy="347472"/>
+            <a:off x="4178807" y="804672"/>
+            <a:ext cx="3794760" cy="457200"/>
           </a:xfrm>
           <a:prstGeom prst="rect">
             <a:avLst/>
           </a:prstGeom>
           <a:solidFill>
-            <a:srgbClr val="D27A42"/>
+            <a:srgbClr val="2A7A50"/>
           </a:solidFill>
           <a:ln>
             <a:noFill/>
@@ -5219,14 +5409,14 @@
       </p:sp>
       <p:sp>
         <p:nvSpPr>
-          <p:cNvPr id="11" name="TextBox 10"/>
+          <p:cNvPr id="15" name="TextBox 14"/>
           <p:cNvSpPr txBox="1"/>
           <p:nvPr/>
         </p:nvSpPr>
         <p:spPr>
           <a:xfrm>
-            <a:off x="4251959" y="859536"/>
-            <a:ext cx="3566160" cy="274320"/>
+            <a:off x="4288536" y="841248"/>
+            <a:ext cx="3566160" cy="384048"/>
           </a:xfrm>
           <a:prstGeom prst="rect">
             <a:avLst/>
@@ -5241,26 +5431,27 @@
           <a:p>
             <a:pPr algn="l"/>
             <a:r>
-              <a:rPr sz="1100" b="1" i="0">
+              <a:rPr sz="1200" b="1" i="0">
                 <a:solidFill>
                   <a:srgbClr val="FFFFFF"/>
                 </a:solidFill>
               </a:rPr>
-              <a:t>CAS B — ÉCHEC PARTIEL</a:t>
-            </a:r>
-          </a:p>
-        </p:txBody>
-      </p:sp>
-      <p:sp>
-        <p:nvSpPr>
-          <p:cNvPr id="12" name="Rectangle 11"/>
+              <a:t>Profil B
+Le Curieux bienveillant</a:t>
+            </a:r>
+          </a:p>
+        </p:txBody>
+      </p:sp>
+      <p:sp>
+        <p:nvSpPr>
+          <p:cNvPr id="16" name="Rectangle 15"/>
           <p:cNvSpPr/>
           <p:nvPr/>
         </p:nvSpPr>
         <p:spPr>
           <a:xfrm>
-            <a:off x="4160520" y="1170432"/>
-            <a:ext cx="3749039" cy="2194560"/>
+            <a:off x="4178807" y="1261872"/>
+            <a:ext cx="3794760" cy="2926080"/>
           </a:xfrm>
           <a:prstGeom prst="rect">
             <a:avLst/>
@@ -5270,7 +5461,7 @@
           </a:solidFill>
           <a:ln w="19050">
             <a:solidFill>
-              <a:srgbClr val="D27A42"/>
+              <a:srgbClr val="2A7A50"/>
             </a:solidFill>
           </a:ln>
         </p:spPr>
@@ -5298,14 +5489,14 @@
       </p:sp>
       <p:sp>
         <p:nvSpPr>
-          <p:cNvPr id="13" name="TextBox 12"/>
+          <p:cNvPr id="17" name="TextBox 16"/>
           <p:cNvSpPr txBox="1"/>
           <p:nvPr/>
         </p:nvSpPr>
         <p:spPr>
           <a:xfrm>
-            <a:off x="4297680" y="1234440"/>
-            <a:ext cx="3474720" cy="2011680"/>
+            <a:off x="4315968" y="1335024"/>
+            <a:ext cx="3520440" cy="2743200"/>
           </a:xfrm>
           <a:prstGeom prst="rect">
             <a:avLst/>
@@ -5325,31 +5516,29 @@
                   <a:srgbClr val="1A1A1A"/>
                 </a:solidFill>
               </a:rPr>
-              <a:t>ONG X Rabat 2022
-Objectif : 300 donateurs/mois
-Résultat : 180 donateurs (-40%)
-Facteurs : formation 2J seulement,
-pas de gestion des objections</a:t>
-            </a:r>
-          </a:p>
-        </p:txBody>
-      </p:sp>
-      <p:sp>
-        <p:nvSpPr>
-          <p:cNvPr id="14" name="Rectangle 13"/>
+              <a:t>25–40 ans · Actif · Empathique mais pressé
+N'a jamais fait de don régulier · Sensible aux histoires vraies
+▶ Votre message : Impact Story + facilité du prélèvement</a:t>
+            </a:r>
+          </a:p>
+        </p:txBody>
+      </p:sp>
+      <p:sp>
+        <p:nvSpPr>
+          <p:cNvPr id="18" name="Rectangle 17"/>
           <p:cNvSpPr/>
           <p:nvPr/>
         </p:nvSpPr>
         <p:spPr>
           <a:xfrm>
-            <a:off x="8046720" y="822960"/>
-            <a:ext cx="3749039" cy="347472"/>
+            <a:off x="8083296" y="804672"/>
+            <a:ext cx="3794760" cy="457200"/>
           </a:xfrm>
           <a:prstGeom prst="rect">
             <a:avLst/>
           </a:prstGeom>
           <a:solidFill>
-            <a:srgbClr val="007A7A"/>
+            <a:srgbClr val="FF0000"/>
           </a:solidFill>
           <a:ln>
             <a:noFill/>
@@ -5379,14 +5568,14 @@
       </p:sp>
       <p:sp>
         <p:nvSpPr>
-          <p:cNvPr id="15" name="TextBox 14"/>
+          <p:cNvPr id="19" name="TextBox 18"/>
           <p:cNvSpPr txBox="1"/>
           <p:nvPr/>
         </p:nvSpPr>
         <p:spPr>
           <a:xfrm>
-            <a:off x="8138160" y="859536"/>
-            <a:ext cx="3566160" cy="274320"/>
+            <a:off x="8193023" y="841248"/>
+            <a:ext cx="3566160" cy="384048"/>
           </a:xfrm>
           <a:prstGeom prst="rect">
             <a:avLst/>
@@ -5401,26 +5590,27 @@
           <a:p>
             <a:pPr algn="l"/>
             <a:r>
-              <a:rPr sz="1100" b="1" i="0">
+              <a:rPr sz="1200" b="1" i="0">
                 <a:solidFill>
                   <a:srgbClr val="FFFFFF"/>
                 </a:solidFill>
               </a:rPr>
-              <a:t>CAS C — RETOURNEMENT</a:t>
-            </a:r>
-          </a:p>
-        </p:txBody>
-      </p:sp>
-      <p:sp>
-        <p:nvSpPr>
-          <p:cNvPr id="16" name="Rectangle 15"/>
+              <a:t>Profil C
+Le Méfiant converti</a:t>
+            </a:r>
+          </a:p>
+        </p:txBody>
+      </p:sp>
+      <p:sp>
+        <p:nvSpPr>
+          <p:cNvPr id="20" name="Rectangle 19"/>
           <p:cNvSpPr/>
           <p:nvPr/>
         </p:nvSpPr>
         <p:spPr>
           <a:xfrm>
-            <a:off x="8046720" y="1170432"/>
-            <a:ext cx="3749039" cy="2194560"/>
+            <a:off x="8083296" y="1261872"/>
+            <a:ext cx="3794760" cy="2926080"/>
           </a:xfrm>
           <a:prstGeom prst="rect">
             <a:avLst/>
@@ -5430,7 +5620,7 @@
           </a:solidFill>
           <a:ln w="19050">
             <a:solidFill>
-              <a:srgbClr val="007A7A"/>
+              <a:srgbClr val="FF0000"/>
             </a:solidFill>
           </a:ln>
         </p:spPr>
@@ -5458,14 +5648,14 @@
       </p:sp>
       <p:sp>
         <p:nvSpPr>
-          <p:cNvPr id="17" name="TextBox 16"/>
+          <p:cNvPr id="21" name="TextBox 20"/>
           <p:cNvSpPr txBox="1"/>
           <p:nvPr/>
         </p:nvSpPr>
         <p:spPr>
           <a:xfrm>
-            <a:off x="8183880" y="1234440"/>
-            <a:ext cx="3474720" cy="2011680"/>
+            <a:off x="8220456" y="1335024"/>
+            <a:ext cx="3520440" cy="2743200"/>
           </a:xfrm>
           <a:prstGeom prst="rect">
             <a:avLst/>
@@ -5485,25 +5675,23 @@
                   <a:srgbClr val="1A1A1A"/>
                 </a:solidFill>
               </a:rPr>
-              <a:t>Croix Rouge Maroc 2024
-Objectif : 200 donateurs/mois
-Résultat : 95 → 310 après FIM
-Facteurs : refonte programme,
-intégration Kolb + Kirkpatrick</a:t>
-            </a:r>
-          </a:p>
-        </p:txBody>
-      </p:sp>
-      <p:sp>
-        <p:nvSpPr>
-          <p:cNvPr id="18" name="TextBox 17"/>
+              <a:t>40–65 ans · Expérience passée négative avec les ONG
+Demande des preuves · Teste votre connaissance du sujet
+▶ Votre message : preuves d'audit, rapport annuel public, traçabilité</a:t>
+            </a:r>
+          </a:p>
+        </p:txBody>
+      </p:sp>
+      <p:sp>
+        <p:nvSpPr>
+          <p:cNvPr id="22" name="TextBox 21"/>
           <p:cNvSpPr txBox="1"/>
           <p:nvPr/>
         </p:nvSpPr>
         <p:spPr>
           <a:xfrm>
-            <a:off x="274320" y="3566160"/>
-            <a:ext cx="11612880" cy="274320"/>
+            <a:off x="274320" y="4352544"/>
+            <a:ext cx="11640312" cy="274320"/>
           </a:xfrm>
           <a:prstGeom prst="rect">
             <a:avLst/>
@@ -5520,24 +5708,67 @@
             <a:r>
               <a:rPr sz="1200" b="1" i="0">
                 <a:solidFill>
-                  <a:srgbClr val="005050"/>
+                  <a:srgbClr val="005555"/>
                 </a:solidFill>
               </a:rPr>
-              <a:t>Simulation budgétaire (Bloom 3) — Activité collective</a:t>
-            </a:r>
-          </a:p>
-        </p:txBody>
-      </p:sp>
-      <p:sp>
-        <p:nvSpPr>
-          <p:cNvPr id="19" name="TextBox 18"/>
+              <a:t>Données clés France 2024 :</a:t>
+            </a:r>
+          </a:p>
+        </p:txBody>
+      </p:sp>
+      <p:sp>
+        <p:nvSpPr>
+          <p:cNvPr id="23" name="Rectangle 22"/>
+          <p:cNvSpPr/>
+          <p:nvPr/>
+        </p:nvSpPr>
+        <p:spPr>
+          <a:xfrm>
+            <a:off x="274320" y="4663440"/>
+            <a:ext cx="2798064" cy="841248"/>
+          </a:xfrm>
+          <a:prstGeom prst="rect">
+            <a:avLst/>
+          </a:prstGeom>
+          <a:solidFill>
+            <a:srgbClr val="005555"/>
+          </a:solidFill>
+          <a:ln>
+            <a:noFill/>
+          </a:ln>
+        </p:spPr>
+        <p:style>
+          <a:lnRef idx="1">
+            <a:schemeClr val="accent1"/>
+          </a:lnRef>
+          <a:fillRef idx="3">
+            <a:schemeClr val="accent1"/>
+          </a:fillRef>
+          <a:effectRef idx="2">
+            <a:schemeClr val="accent1"/>
+          </a:effectRef>
+          <a:fontRef idx="minor">
+            <a:schemeClr val="lt1"/>
+          </a:fontRef>
+        </p:style>
+        <p:txBody>
+          <a:bodyPr rtlCol="0" anchor="ctr"/>
+          <a:lstStyle/>
+          <a:p>
+            <a:pPr algn="ctr"/>
+          </a:p>
+        </p:txBody>
+      </p:sp>
+      <p:sp>
+        <p:nvSpPr>
+          <p:cNvPr id="24" name="TextBox 23"/>
           <p:cNvSpPr txBox="1"/>
           <p:nvPr/>
         </p:nvSpPr>
         <p:spPr>
           <a:xfrm>
-            <a:off x="274320" y="3886200"/>
-            <a:ext cx="11612880" cy="1371600"/>
+            <a:off x="365760" y="4681728"/>
+            <a:ext cx="2615184" cy="457200"/>
           </a:xfrm>
           <a:prstGeom prst="rect">
             <a:avLst/>
@@ -5550,31 +5781,28 @@
           </a:bodyPr>
           <a:lstStyle/>
           <a:p>
-            <a:pPr algn="l"/>
-            <a:r>
-              <a:rPr sz="1100" b="0" i="0">
-                <a:solidFill>
-                  <a:srgbClr val="1A1A1A"/>
+            <a:pPr algn="ctr"/>
+            <a:r>
+              <a:rPr sz="2200" b="1" i="0">
+                <a:solidFill>
+                  <a:srgbClr val="FFFFFF"/>
                 </a:solidFill>
               </a:rPr>
-              <a:t>Si 100 fundraisers actifs × 1 don régulier/heure × 6h/jour × 20 jours/mois :
-= 12 000 donateurs potentiels/mois · Montant moyen : 80 DH/mois
-= 960 000 DH collectés/mois · Soit 11,5 M DH/an
-Impact UNICEF : vaccination de 50 000 enfants · alimentation 8 000 nourrissons</a:t>
-            </a:r>
-          </a:p>
-        </p:txBody>
-      </p:sp>
-      <p:sp>
-        <p:nvSpPr>
-          <p:cNvPr id="20" name="TextBox 19"/>
+              <a:t>5,2M</a:t>
+            </a:r>
+          </a:p>
+        </p:txBody>
+      </p:sp>
+      <p:sp>
+        <p:nvSpPr>
+          <p:cNvPr id="25" name="TextBox 24"/>
           <p:cNvSpPr txBox="1"/>
           <p:nvPr/>
         </p:nvSpPr>
         <p:spPr>
           <a:xfrm>
-            <a:off x="274320" y="5349240"/>
-            <a:ext cx="11612880" cy="365760"/>
+            <a:off x="365760" y="5138928"/>
+            <a:ext cx="2615184" cy="329184"/>
           </a:xfrm>
           <a:prstGeom prst="rect">
             <a:avLst/>
@@ -5589,26 +5817,70 @@
           <a:p>
             <a:pPr algn="ctr"/>
             <a:r>
-              <a:rPr sz="1200" b="1" i="0">
-                <a:solidFill>
-                  <a:srgbClr val="005050"/>
+              <a:rPr sz="900" b="0" i="0">
+                <a:solidFill>
+                  <a:srgbClr val="CCEEEE"/>
                 </a:solidFill>
               </a:rPr>
-              <a:t>🔑 Message clé : chaque fundraiser actif = entre 150 et 300 enfants aidés par an</a:t>
-            </a:r>
-          </a:p>
-        </p:txBody>
-      </p:sp>
-      <p:sp>
-        <p:nvSpPr>
-          <p:cNvPr id="21" name="TextBox 20"/>
+              <a:t>donateurs
+réguliers en France</a:t>
+            </a:r>
+          </a:p>
+        </p:txBody>
+      </p:sp>
+      <p:sp>
+        <p:nvSpPr>
+          <p:cNvPr id="26" name="Rectangle 25"/>
+          <p:cNvSpPr/>
+          <p:nvPr/>
+        </p:nvSpPr>
+        <p:spPr>
+          <a:xfrm>
+            <a:off x="3182112" y="4663440"/>
+            <a:ext cx="2798064" cy="841248"/>
+          </a:xfrm>
+          <a:prstGeom prst="rect">
+            <a:avLst/>
+          </a:prstGeom>
+          <a:solidFill>
+            <a:srgbClr val="005555"/>
+          </a:solidFill>
+          <a:ln>
+            <a:noFill/>
+          </a:ln>
+        </p:spPr>
+        <p:style>
+          <a:lnRef idx="1">
+            <a:schemeClr val="accent1"/>
+          </a:lnRef>
+          <a:fillRef idx="3">
+            <a:schemeClr val="accent1"/>
+          </a:fillRef>
+          <a:effectRef idx="2">
+            <a:schemeClr val="accent1"/>
+          </a:effectRef>
+          <a:fontRef idx="minor">
+            <a:schemeClr val="lt1"/>
+          </a:fontRef>
+        </p:style>
+        <p:txBody>
+          <a:bodyPr rtlCol="0" anchor="ctr"/>
+          <a:lstStyle/>
+          <a:p>
+            <a:pPr algn="ctr"/>
+          </a:p>
+        </p:txBody>
+      </p:sp>
+      <p:sp>
+        <p:nvSpPr>
+          <p:cNvPr id="27" name="TextBox 26"/>
           <p:cNvSpPr txBox="1"/>
           <p:nvPr/>
         </p:nvSpPr>
         <p:spPr>
           <a:xfrm>
-            <a:off x="0" y="6492240"/>
-            <a:ext cx="12188952" cy="365760"/>
+            <a:off x="3273552" y="4681728"/>
+            <a:ext cx="2615184" cy="457200"/>
           </a:xfrm>
           <a:prstGeom prst="rect">
             <a:avLst/>
@@ -5623,12 +5895,2549 @@
           <a:p>
             <a:pPr algn="ctr"/>
             <a:r>
-              <a:rPr sz="800" b="0" i="0">
-                <a:solidFill>
-                  <a:srgbClr val="888888"/>
+              <a:rPr sz="2200" b="1" i="0">
+                <a:solidFill>
+                  <a:srgbClr val="FFFFFF"/>
                 </a:solidFill>
               </a:rPr>
-              <a:t>SHY-Performance · V6-01062026SHY-TE</a:t>
+              <a:t>24€/mois</a:t>
+            </a:r>
+          </a:p>
+        </p:txBody>
+      </p:sp>
+      <p:sp>
+        <p:nvSpPr>
+          <p:cNvPr id="28" name="TextBox 27"/>
+          <p:cNvSpPr txBox="1"/>
+          <p:nvPr/>
+        </p:nvSpPr>
+        <p:spPr>
+          <a:xfrm>
+            <a:off x="3273552" y="5138928"/>
+            <a:ext cx="2615184" cy="329184"/>
+          </a:xfrm>
+          <a:prstGeom prst="rect">
+            <a:avLst/>
+          </a:prstGeom>
+          <a:noFill/>
+        </p:spPr>
+        <p:txBody>
+          <a:bodyPr wrap="square">
+            <a:spAutoFit/>
+          </a:bodyPr>
+          <a:lstStyle/>
+          <a:p>
+            <a:pPr algn="ctr"/>
+            <a:r>
+              <a:rPr sz="900" b="0" i="0">
+                <a:solidFill>
+                  <a:srgbClr val="CCEEEE"/>
+                </a:solidFill>
+              </a:rPr>
+              <a:t>montant moyen
+don régulier</a:t>
+            </a:r>
+          </a:p>
+        </p:txBody>
+      </p:sp>
+      <p:sp>
+        <p:nvSpPr>
+          <p:cNvPr id="29" name="Rectangle 28"/>
+          <p:cNvSpPr/>
+          <p:nvPr/>
+        </p:nvSpPr>
+        <p:spPr>
+          <a:xfrm>
+            <a:off x="6089904" y="4663440"/>
+            <a:ext cx="2798064" cy="841248"/>
+          </a:xfrm>
+          <a:prstGeom prst="rect">
+            <a:avLst/>
+          </a:prstGeom>
+          <a:solidFill>
+            <a:srgbClr val="005555"/>
+          </a:solidFill>
+          <a:ln>
+            <a:noFill/>
+          </a:ln>
+        </p:spPr>
+        <p:style>
+          <a:lnRef idx="1">
+            <a:schemeClr val="accent1"/>
+          </a:lnRef>
+          <a:fillRef idx="3">
+            <a:schemeClr val="accent1"/>
+          </a:fillRef>
+          <a:effectRef idx="2">
+            <a:schemeClr val="accent1"/>
+          </a:effectRef>
+          <a:fontRef idx="minor">
+            <a:schemeClr val="lt1"/>
+          </a:fontRef>
+        </p:style>
+        <p:txBody>
+          <a:bodyPr rtlCol="0" anchor="ctr"/>
+          <a:lstStyle/>
+          <a:p>
+            <a:pPr algn="ctr"/>
+          </a:p>
+        </p:txBody>
+      </p:sp>
+      <p:sp>
+        <p:nvSpPr>
+          <p:cNvPr id="30" name="TextBox 29"/>
+          <p:cNvSpPr txBox="1"/>
+          <p:nvPr/>
+        </p:nvSpPr>
+        <p:spPr>
+          <a:xfrm>
+            <a:off x="6181344" y="4681728"/>
+            <a:ext cx="2615184" cy="457200"/>
+          </a:xfrm>
+          <a:prstGeom prst="rect">
+            <a:avLst/>
+          </a:prstGeom>
+          <a:noFill/>
+        </p:spPr>
+        <p:txBody>
+          <a:bodyPr wrap="square">
+            <a:spAutoFit/>
+          </a:bodyPr>
+          <a:lstStyle/>
+          <a:p>
+            <a:pPr algn="ctr"/>
+            <a:r>
+              <a:rPr sz="2200" b="1" i="0">
+                <a:solidFill>
+                  <a:srgbClr val="FFFFFF"/>
+                </a:solidFill>
+              </a:rPr>
+              <a:t>8×</a:t>
+            </a:r>
+          </a:p>
+        </p:txBody>
+      </p:sp>
+      <p:sp>
+        <p:nvSpPr>
+          <p:cNvPr id="31" name="TextBox 30"/>
+          <p:cNvSpPr txBox="1"/>
+          <p:nvPr/>
+        </p:nvSpPr>
+        <p:spPr>
+          <a:xfrm>
+            <a:off x="6181344" y="5138928"/>
+            <a:ext cx="2615184" cy="329184"/>
+          </a:xfrm>
+          <a:prstGeom prst="rect">
+            <a:avLst/>
+          </a:prstGeom>
+          <a:noFill/>
+        </p:spPr>
+        <p:txBody>
+          <a:bodyPr wrap="square">
+            <a:spAutoFit/>
+          </a:bodyPr>
+          <a:lstStyle/>
+          <a:p>
+            <a:pPr algn="ctr"/>
+            <a:r>
+              <a:rPr sz="900" b="0" i="0">
+                <a:solidFill>
+                  <a:srgbClr val="CCEEEE"/>
+                </a:solidFill>
+              </a:rPr>
+              <a:t>LTV donateur régulier
+vs ponctuel</a:t>
+            </a:r>
+          </a:p>
+        </p:txBody>
+      </p:sp>
+      <p:sp>
+        <p:nvSpPr>
+          <p:cNvPr id="32" name="Rectangle 31"/>
+          <p:cNvSpPr/>
+          <p:nvPr/>
+        </p:nvSpPr>
+        <p:spPr>
+          <a:xfrm>
+            <a:off x="8997696" y="4663440"/>
+            <a:ext cx="2798064" cy="841248"/>
+          </a:xfrm>
+          <a:prstGeom prst="rect">
+            <a:avLst/>
+          </a:prstGeom>
+          <a:solidFill>
+            <a:srgbClr val="005555"/>
+          </a:solidFill>
+          <a:ln>
+            <a:noFill/>
+          </a:ln>
+        </p:spPr>
+        <p:style>
+          <a:lnRef idx="1">
+            <a:schemeClr val="accent1"/>
+          </a:lnRef>
+          <a:fillRef idx="3">
+            <a:schemeClr val="accent1"/>
+          </a:fillRef>
+          <a:effectRef idx="2">
+            <a:schemeClr val="accent1"/>
+          </a:effectRef>
+          <a:fontRef idx="minor">
+            <a:schemeClr val="lt1"/>
+          </a:fontRef>
+        </p:style>
+        <p:txBody>
+          <a:bodyPr rtlCol="0" anchor="ctr"/>
+          <a:lstStyle/>
+          <a:p>
+            <a:pPr algn="ctr"/>
+          </a:p>
+        </p:txBody>
+      </p:sp>
+      <p:sp>
+        <p:nvSpPr>
+          <p:cNvPr id="33" name="TextBox 32"/>
+          <p:cNvSpPr txBox="1"/>
+          <p:nvPr/>
+        </p:nvSpPr>
+        <p:spPr>
+          <a:xfrm>
+            <a:off x="9089136" y="4681728"/>
+            <a:ext cx="2615184" cy="457200"/>
+          </a:xfrm>
+          <a:prstGeom prst="rect">
+            <a:avLst/>
+          </a:prstGeom>
+          <a:noFill/>
+        </p:spPr>
+        <p:txBody>
+          <a:bodyPr wrap="square">
+            <a:spAutoFit/>
+          </a:bodyPr>
+          <a:lstStyle/>
+          <a:p>
+            <a:pPr algn="ctr"/>
+            <a:r>
+              <a:rPr sz="2200" b="1" i="0">
+                <a:solidFill>
+                  <a:srgbClr val="FFFFFF"/>
+                </a:solidFill>
+              </a:rPr>
+              <a:t>63%</a:t>
+            </a:r>
+          </a:p>
+        </p:txBody>
+      </p:sp>
+      <p:sp>
+        <p:nvSpPr>
+          <p:cNvPr id="34" name="TextBox 33"/>
+          <p:cNvSpPr txBox="1"/>
+          <p:nvPr/>
+        </p:nvSpPr>
+        <p:spPr>
+          <a:xfrm>
+            <a:off x="9089136" y="5138928"/>
+            <a:ext cx="2615184" cy="329184"/>
+          </a:xfrm>
+          <a:prstGeom prst="rect">
+            <a:avLst/>
+          </a:prstGeom>
+          <a:noFill/>
+        </p:spPr>
+        <p:txBody>
+          <a:bodyPr wrap="square">
+            <a:spAutoFit/>
+          </a:bodyPr>
+          <a:lstStyle/>
+          <a:p>
+            <a:pPr algn="ctr"/>
+            <a:r>
+              <a:rPr sz="900" b="0" i="0">
+                <a:solidFill>
+                  <a:srgbClr val="CCEEEE"/>
+                </a:solidFill>
+              </a:rPr>
+              <a:t>des Français font
+un don chaque année</a:t>
+            </a:r>
+          </a:p>
+        </p:txBody>
+      </p:sp>
+    </p:spTree>
+  </p:cSld>
+  <p:clrMapOvr>
+    <a:masterClrMapping/>
+  </p:clrMapOvr>
+</p:sld>
+</file>
+
+<file path=ppt/slides/slide4.xml><?xml version="1.0" encoding="utf-8"?>
+<p:sld xmlns:a="http://schemas.openxmlformats.org/drawingml/2006/main" xmlns:p="http://schemas.openxmlformats.org/presentationml/2006/main" xmlns:r="http://schemas.openxmlformats.org/officeDocument/2006/relationships">
+  <p:cSld>
+    <p:spTree>
+      <p:nvGrpSpPr>
+        <p:cNvPr id="1" name=""/>
+        <p:cNvGrpSpPr/>
+        <p:nvPr/>
+      </p:nvGrpSpPr>
+      <p:grpSpPr/>
+      <p:sp>
+        <p:nvSpPr>
+          <p:cNvPr id="2" name="Rectangle 1"/>
+          <p:cNvSpPr/>
+          <p:nvPr/>
+        </p:nvSpPr>
+        <p:spPr>
+          <a:xfrm>
+            <a:off x="0" y="0"/>
+            <a:ext cx="12188952" cy="6858000"/>
+          </a:xfrm>
+          <a:prstGeom prst="rect">
+            <a:avLst/>
+          </a:prstGeom>
+          <a:solidFill>
+            <a:srgbClr val="F0F7F7"/>
+          </a:solidFill>
+          <a:ln>
+            <a:noFill/>
+          </a:ln>
+        </p:spPr>
+        <p:style>
+          <a:lnRef idx="1">
+            <a:schemeClr val="accent1"/>
+          </a:lnRef>
+          <a:fillRef idx="3">
+            <a:schemeClr val="accent1"/>
+          </a:fillRef>
+          <a:effectRef idx="2">
+            <a:schemeClr val="accent1"/>
+          </a:effectRef>
+          <a:fontRef idx="minor">
+            <a:schemeClr val="lt1"/>
+          </a:fontRef>
+        </p:style>
+        <p:txBody>
+          <a:bodyPr rtlCol="0" anchor="ctr"/>
+          <a:lstStyle/>
+          <a:p>
+            <a:pPr algn="ctr"/>
+          </a:p>
+        </p:txBody>
+      </p:sp>
+      <p:sp>
+        <p:nvSpPr>
+          <p:cNvPr id="3" name="Rectangle 2"/>
+          <p:cNvSpPr/>
+          <p:nvPr/>
+        </p:nvSpPr>
+        <p:spPr>
+          <a:xfrm>
+            <a:off x="0" y="0"/>
+            <a:ext cx="12188952" cy="658368"/>
+          </a:xfrm>
+          <a:prstGeom prst="rect">
+            <a:avLst/>
+          </a:prstGeom>
+          <a:solidFill>
+            <a:srgbClr val="005555"/>
+          </a:solidFill>
+          <a:ln>
+            <a:noFill/>
+          </a:ln>
+        </p:spPr>
+        <p:style>
+          <a:lnRef idx="1">
+            <a:schemeClr val="accent1"/>
+          </a:lnRef>
+          <a:fillRef idx="3">
+            <a:schemeClr val="accent1"/>
+          </a:fillRef>
+          <a:effectRef idx="2">
+            <a:schemeClr val="accent1"/>
+          </a:effectRef>
+          <a:fontRef idx="minor">
+            <a:schemeClr val="lt1"/>
+          </a:fontRef>
+        </p:style>
+        <p:txBody>
+          <a:bodyPr rtlCol="0" anchor="ctr"/>
+          <a:lstStyle/>
+          <a:p>
+            <a:pPr algn="ctr"/>
+          </a:p>
+        </p:txBody>
+      </p:sp>
+      <p:sp>
+        <p:nvSpPr>
+          <p:cNvPr id="4" name="Rectangle 3"/>
+          <p:cNvSpPr/>
+          <p:nvPr/>
+        </p:nvSpPr>
+        <p:spPr>
+          <a:xfrm>
+            <a:off x="0" y="640080"/>
+            <a:ext cx="12188952" cy="54864"/>
+          </a:xfrm>
+          <a:prstGeom prst="rect">
+            <a:avLst/>
+          </a:prstGeom>
+          <a:solidFill>
+            <a:srgbClr val="FF0000"/>
+          </a:solidFill>
+          <a:ln>
+            <a:noFill/>
+          </a:ln>
+        </p:spPr>
+        <p:style>
+          <a:lnRef idx="1">
+            <a:schemeClr val="accent1"/>
+          </a:lnRef>
+          <a:fillRef idx="3">
+            <a:schemeClr val="accent1"/>
+          </a:fillRef>
+          <a:effectRef idx="2">
+            <a:schemeClr val="accent1"/>
+          </a:effectRef>
+          <a:fontRef idx="minor">
+            <a:schemeClr val="lt1"/>
+          </a:fontRef>
+        </p:style>
+        <p:txBody>
+          <a:bodyPr rtlCol="0" anchor="ctr"/>
+          <a:lstStyle/>
+          <a:p>
+            <a:pPr algn="ctr"/>
+          </a:p>
+        </p:txBody>
+      </p:sp>
+      <p:sp>
+        <p:nvSpPr>
+          <p:cNvPr id="5" name="TextBox 4"/>
+          <p:cNvSpPr txBox="1"/>
+          <p:nvPr/>
+        </p:nvSpPr>
+        <p:spPr>
+          <a:xfrm>
+            <a:off x="164592" y="64008"/>
+            <a:ext cx="685800" cy="530352"/>
+          </a:xfrm>
+          <a:prstGeom prst="rect">
+            <a:avLst/>
+          </a:prstGeom>
+          <a:noFill/>
+        </p:spPr>
+        <p:txBody>
+          <a:bodyPr wrap="square">
+            <a:spAutoFit/>
+          </a:bodyPr>
+          <a:lstStyle/>
+          <a:p>
+            <a:pPr algn="l"/>
+            <a:r>
+              <a:rPr sz="2000" b="1" i="0">
+                <a:solidFill>
+                  <a:srgbClr val="FFFFFF"/>
+                </a:solidFill>
+              </a:rPr>
+              <a:t>SHY</a:t>
+            </a:r>
+          </a:p>
+        </p:txBody>
+      </p:sp>
+      <p:sp>
+        <p:nvSpPr>
+          <p:cNvPr id="6" name="Rectangle 5"/>
+          <p:cNvSpPr/>
+          <p:nvPr/>
+        </p:nvSpPr>
+        <p:spPr>
+          <a:xfrm>
+            <a:off x="914400" y="91440"/>
+            <a:ext cx="36576" cy="475488"/>
+          </a:xfrm>
+          <a:prstGeom prst="rect">
+            <a:avLst/>
+          </a:prstGeom>
+          <a:solidFill>
+            <a:srgbClr val="FF0000"/>
+          </a:solidFill>
+          <a:ln>
+            <a:noFill/>
+          </a:ln>
+        </p:spPr>
+        <p:style>
+          <a:lnRef idx="1">
+            <a:schemeClr val="accent1"/>
+          </a:lnRef>
+          <a:fillRef idx="3">
+            <a:schemeClr val="accent1"/>
+          </a:fillRef>
+          <a:effectRef idx="2">
+            <a:schemeClr val="accent1"/>
+          </a:effectRef>
+          <a:fontRef idx="minor">
+            <a:schemeClr val="lt1"/>
+          </a:fontRef>
+        </p:style>
+        <p:txBody>
+          <a:bodyPr rtlCol="0" anchor="ctr"/>
+          <a:lstStyle/>
+          <a:p>
+            <a:pPr algn="ctr"/>
+          </a:p>
+        </p:txBody>
+      </p:sp>
+      <p:sp>
+        <p:nvSpPr>
+          <p:cNvPr id="7" name="TextBox 6"/>
+          <p:cNvSpPr txBox="1"/>
+          <p:nvPr/>
+        </p:nvSpPr>
+        <p:spPr>
+          <a:xfrm>
+            <a:off x="1024128" y="91440"/>
+            <a:ext cx="10881360" cy="475488"/>
+          </a:xfrm>
+          <a:prstGeom prst="rect">
+            <a:avLst/>
+          </a:prstGeom>
+          <a:noFill/>
+        </p:spPr>
+        <p:txBody>
+          <a:bodyPr wrap="square">
+            <a:spAutoFit/>
+          </a:bodyPr>
+          <a:lstStyle/>
+          <a:p>
+            <a:pPr algn="l"/>
+            <a:r>
+              <a:rPr sz="1700" b="1" i="0">
+                <a:solidFill>
+                  <a:srgbClr val="FFFFFF"/>
+                </a:solidFill>
+              </a:rPr>
+              <a:t>L'Impact de Votre Travail — Chaque Signature Compte</a:t>
+            </a:r>
+          </a:p>
+        </p:txBody>
+      </p:sp>
+      <p:sp>
+        <p:nvSpPr>
+          <p:cNvPr id="8" name="Rectangle 7"/>
+          <p:cNvSpPr/>
+          <p:nvPr/>
+        </p:nvSpPr>
+        <p:spPr>
+          <a:xfrm>
+            <a:off x="0" y="6492240"/>
+            <a:ext cx="12188952" cy="365760"/>
+          </a:xfrm>
+          <a:prstGeom prst="rect">
+            <a:avLst/>
+          </a:prstGeom>
+          <a:solidFill>
+            <a:srgbClr val="005555"/>
+          </a:solidFill>
+          <a:ln>
+            <a:noFill/>
+          </a:ln>
+        </p:spPr>
+        <p:style>
+          <a:lnRef idx="1">
+            <a:schemeClr val="accent1"/>
+          </a:lnRef>
+          <a:fillRef idx="3">
+            <a:schemeClr val="accent1"/>
+          </a:fillRef>
+          <a:effectRef idx="2">
+            <a:schemeClr val="accent1"/>
+          </a:effectRef>
+          <a:fontRef idx="minor">
+            <a:schemeClr val="lt1"/>
+          </a:fontRef>
+        </p:style>
+        <p:txBody>
+          <a:bodyPr rtlCol="0" anchor="ctr"/>
+          <a:lstStyle/>
+          <a:p>
+            <a:pPr algn="ctr"/>
+          </a:p>
+        </p:txBody>
+      </p:sp>
+      <p:sp>
+        <p:nvSpPr>
+          <p:cNvPr id="9" name="TextBox 8"/>
+          <p:cNvSpPr txBox="1"/>
+          <p:nvPr/>
+        </p:nvSpPr>
+        <p:spPr>
+          <a:xfrm>
+            <a:off x="0" y="6519672"/>
+            <a:ext cx="12188952" cy="274320"/>
+          </a:xfrm>
+          <a:prstGeom prst="rect">
+            <a:avLst/>
+          </a:prstGeom>
+          <a:noFill/>
+        </p:spPr>
+        <p:txBody>
+          <a:bodyPr wrap="square">
+            <a:spAutoFit/>
+          </a:bodyPr>
+          <a:lstStyle/>
+          <a:p>
+            <a:pPr algn="ctr"/>
+            <a:r>
+              <a:rPr sz="900" b="0" i="0">
+                <a:solidFill>
+                  <a:srgbClr val="FFFFFF"/>
+                </a:solidFill>
+              </a:rPr>
+              <a:t>SHY-Performance  ·  Formation FIM  ·  V6-01062026SHY-TE</a:t>
+            </a:r>
+          </a:p>
+        </p:txBody>
+      </p:sp>
+      <p:sp>
+        <p:nvSpPr>
+          <p:cNvPr id="10" name="TextBox 9"/>
+          <p:cNvSpPr txBox="1"/>
+          <p:nvPr/>
+        </p:nvSpPr>
+        <p:spPr>
+          <a:xfrm>
+            <a:off x="274320" y="804672"/>
+            <a:ext cx="11640312" cy="329184"/>
+          </a:xfrm>
+          <a:prstGeom prst="rect">
+            <a:avLst/>
+          </a:prstGeom>
+          <a:noFill/>
+        </p:spPr>
+        <p:txBody>
+          <a:bodyPr wrap="square">
+            <a:spAutoFit/>
+          </a:bodyPr>
+          <a:lstStyle/>
+          <a:p>
+            <a:pPr algn="l"/>
+            <a:r>
+              <a:rPr sz="1300" b="1" i="0">
+                <a:solidFill>
+                  <a:srgbClr val="005555"/>
+                </a:solidFill>
+              </a:rPr>
+              <a:t>Simulation collective — Ce que représente 1 journée de travail :</a:t>
+            </a:r>
+          </a:p>
+        </p:txBody>
+      </p:sp>
+      <p:sp>
+        <p:nvSpPr>
+          <p:cNvPr id="11" name="Rectangle 10"/>
+          <p:cNvSpPr/>
+          <p:nvPr/>
+        </p:nvSpPr>
+        <p:spPr>
+          <a:xfrm>
+            <a:off x="274320" y="1234440"/>
+            <a:ext cx="2240280" cy="457200"/>
+          </a:xfrm>
+          <a:prstGeom prst="rect">
+            <a:avLst/>
+          </a:prstGeom>
+          <a:solidFill>
+            <a:srgbClr val="005555"/>
+          </a:solidFill>
+          <a:ln>
+            <a:noFill/>
+          </a:ln>
+        </p:spPr>
+        <p:style>
+          <a:lnRef idx="1">
+            <a:schemeClr val="accent1"/>
+          </a:lnRef>
+          <a:fillRef idx="3">
+            <a:schemeClr val="accent1"/>
+          </a:fillRef>
+          <a:effectRef idx="2">
+            <a:schemeClr val="accent1"/>
+          </a:effectRef>
+          <a:fontRef idx="minor">
+            <a:schemeClr val="lt1"/>
+          </a:fontRef>
+        </p:style>
+        <p:txBody>
+          <a:bodyPr rtlCol="0" anchor="ctr"/>
+          <a:lstStyle/>
+          <a:p>
+            <a:pPr algn="ctr"/>
+          </a:p>
+        </p:txBody>
+      </p:sp>
+      <p:sp>
+        <p:nvSpPr>
+          <p:cNvPr id="12" name="TextBox 11"/>
+          <p:cNvSpPr txBox="1"/>
+          <p:nvPr/>
+        </p:nvSpPr>
+        <p:spPr>
+          <a:xfrm>
+            <a:off x="365760" y="1261872"/>
+            <a:ext cx="2057400" cy="384048"/>
+          </a:xfrm>
+          <a:prstGeom prst="rect">
+            <a:avLst/>
+          </a:prstGeom>
+          <a:noFill/>
+        </p:spPr>
+        <p:txBody>
+          <a:bodyPr wrap="square">
+            <a:spAutoFit/>
+          </a:bodyPr>
+          <a:lstStyle/>
+          <a:p>
+            <a:pPr algn="ctr"/>
+            <a:r>
+              <a:rPr sz="900" b="1" i="0">
+                <a:solidFill>
+                  <a:srgbClr val="FFFFFF"/>
+                </a:solidFill>
+              </a:rPr>
+              <a:t>Vous signez</a:t>
+            </a:r>
+          </a:p>
+        </p:txBody>
+      </p:sp>
+      <p:sp>
+        <p:nvSpPr>
+          <p:cNvPr id="13" name="Rectangle 12"/>
+          <p:cNvSpPr/>
+          <p:nvPr/>
+        </p:nvSpPr>
+        <p:spPr>
+          <a:xfrm>
+            <a:off x="274320" y="1691640"/>
+            <a:ext cx="2240280" cy="1097280"/>
+          </a:xfrm>
+          <a:prstGeom prst="rect">
+            <a:avLst/>
+          </a:prstGeom>
+          <a:solidFill>
+            <a:srgbClr val="FFFFFF"/>
+          </a:solidFill>
+          <a:ln w="19050">
+            <a:solidFill>
+              <a:srgbClr val="005555"/>
+            </a:solidFill>
+          </a:ln>
+        </p:spPr>
+        <p:style>
+          <a:lnRef idx="1">
+            <a:schemeClr val="accent1"/>
+          </a:lnRef>
+          <a:fillRef idx="3">
+            <a:schemeClr val="accent1"/>
+          </a:fillRef>
+          <a:effectRef idx="2">
+            <a:schemeClr val="accent1"/>
+          </a:effectRef>
+          <a:fontRef idx="minor">
+            <a:schemeClr val="lt1"/>
+          </a:fontRef>
+        </p:style>
+        <p:txBody>
+          <a:bodyPr rtlCol="0" anchor="ctr"/>
+          <a:lstStyle/>
+          <a:p>
+            <a:pPr algn="ctr"/>
+          </a:p>
+        </p:txBody>
+      </p:sp>
+      <p:sp>
+        <p:nvSpPr>
+          <p:cNvPr id="14" name="TextBox 13"/>
+          <p:cNvSpPr txBox="1"/>
+          <p:nvPr/>
+        </p:nvSpPr>
+        <p:spPr>
+          <a:xfrm>
+            <a:off x="365760" y="1783080"/>
+            <a:ext cx="2057400" cy="914400"/>
+          </a:xfrm>
+          <a:prstGeom prst="rect">
+            <a:avLst/>
+          </a:prstGeom>
+          <a:noFill/>
+        </p:spPr>
+        <p:txBody>
+          <a:bodyPr wrap="square">
+            <a:spAutoFit/>
+          </a:bodyPr>
+          <a:lstStyle/>
+          <a:p>
+            <a:pPr algn="ctr"/>
+            <a:r>
+              <a:rPr sz="1300" b="1" i="0">
+                <a:solidFill>
+                  <a:srgbClr val="005555"/>
+                </a:solidFill>
+              </a:rPr>
+              <a:t>1 don régulier
+par heure</a:t>
+            </a:r>
+          </a:p>
+        </p:txBody>
+      </p:sp>
+      <p:sp>
+        <p:nvSpPr>
+          <p:cNvPr id="15" name="TextBox 14"/>
+          <p:cNvSpPr txBox="1"/>
+          <p:nvPr/>
+        </p:nvSpPr>
+        <p:spPr>
+          <a:xfrm>
+            <a:off x="2542032" y="2057400"/>
+            <a:ext cx="256032" cy="548640"/>
+          </a:xfrm>
+          <a:prstGeom prst="rect">
+            <a:avLst/>
+          </a:prstGeom>
+          <a:noFill/>
+        </p:spPr>
+        <p:txBody>
+          <a:bodyPr wrap="square">
+            <a:spAutoFit/>
+          </a:bodyPr>
+          <a:lstStyle/>
+          <a:p>
+            <a:pPr algn="l"/>
+            <a:r>
+              <a:rPr sz="2000" b="1" i="0">
+                <a:solidFill>
+                  <a:srgbClr val="008080"/>
+                </a:solidFill>
+              </a:rPr>
+              <a:t>=</a:t>
+            </a:r>
+          </a:p>
+        </p:txBody>
+      </p:sp>
+      <p:sp>
+        <p:nvSpPr>
+          <p:cNvPr id="16" name="Rectangle 15"/>
+          <p:cNvSpPr/>
+          <p:nvPr/>
+        </p:nvSpPr>
+        <p:spPr>
+          <a:xfrm>
+            <a:off x="2633472" y="1234440"/>
+            <a:ext cx="2240280" cy="457200"/>
+          </a:xfrm>
+          <a:prstGeom prst="rect">
+            <a:avLst/>
+          </a:prstGeom>
+          <a:solidFill>
+            <a:srgbClr val="008080"/>
+          </a:solidFill>
+          <a:ln>
+            <a:noFill/>
+          </a:ln>
+        </p:spPr>
+        <p:style>
+          <a:lnRef idx="1">
+            <a:schemeClr val="accent1"/>
+          </a:lnRef>
+          <a:fillRef idx="3">
+            <a:schemeClr val="accent1"/>
+          </a:fillRef>
+          <a:effectRef idx="2">
+            <a:schemeClr val="accent1"/>
+          </a:effectRef>
+          <a:fontRef idx="minor">
+            <a:schemeClr val="lt1"/>
+          </a:fontRef>
+        </p:style>
+        <p:txBody>
+          <a:bodyPr rtlCol="0" anchor="ctr"/>
+          <a:lstStyle/>
+          <a:p>
+            <a:pPr algn="ctr"/>
+          </a:p>
+        </p:txBody>
+      </p:sp>
+      <p:sp>
+        <p:nvSpPr>
+          <p:cNvPr id="17" name="TextBox 16"/>
+          <p:cNvSpPr txBox="1"/>
+          <p:nvPr/>
+        </p:nvSpPr>
+        <p:spPr>
+          <a:xfrm>
+            <a:off x="2724912" y="1261872"/>
+            <a:ext cx="2057400" cy="384048"/>
+          </a:xfrm>
+          <a:prstGeom prst="rect">
+            <a:avLst/>
+          </a:prstGeom>
+          <a:noFill/>
+        </p:spPr>
+        <p:txBody>
+          <a:bodyPr wrap="square">
+            <a:spAutoFit/>
+          </a:bodyPr>
+          <a:lstStyle/>
+          <a:p>
+            <a:pPr algn="ctr"/>
+            <a:r>
+              <a:rPr sz="900" b="1" i="0">
+                <a:solidFill>
+                  <a:srgbClr val="FFFFFF"/>
+                </a:solidFill>
+              </a:rPr>
+              <a:t>En 1 journée
+(6h actives)</a:t>
+            </a:r>
+          </a:p>
+        </p:txBody>
+      </p:sp>
+      <p:sp>
+        <p:nvSpPr>
+          <p:cNvPr id="18" name="Rectangle 17"/>
+          <p:cNvSpPr/>
+          <p:nvPr/>
+        </p:nvSpPr>
+        <p:spPr>
+          <a:xfrm>
+            <a:off x="2633472" y="1691640"/>
+            <a:ext cx="2240280" cy="1097280"/>
+          </a:xfrm>
+          <a:prstGeom prst="rect">
+            <a:avLst/>
+          </a:prstGeom>
+          <a:solidFill>
+            <a:srgbClr val="FFFFFF"/>
+          </a:solidFill>
+          <a:ln w="19050">
+            <a:solidFill>
+              <a:srgbClr val="008080"/>
+            </a:solidFill>
+          </a:ln>
+        </p:spPr>
+        <p:style>
+          <a:lnRef idx="1">
+            <a:schemeClr val="accent1"/>
+          </a:lnRef>
+          <a:fillRef idx="3">
+            <a:schemeClr val="accent1"/>
+          </a:fillRef>
+          <a:effectRef idx="2">
+            <a:schemeClr val="accent1"/>
+          </a:effectRef>
+          <a:fontRef idx="minor">
+            <a:schemeClr val="lt1"/>
+          </a:fontRef>
+        </p:style>
+        <p:txBody>
+          <a:bodyPr rtlCol="0" anchor="ctr"/>
+          <a:lstStyle/>
+          <a:p>
+            <a:pPr algn="ctr"/>
+          </a:p>
+        </p:txBody>
+      </p:sp>
+      <p:sp>
+        <p:nvSpPr>
+          <p:cNvPr id="19" name="TextBox 18"/>
+          <p:cNvSpPr txBox="1"/>
+          <p:nvPr/>
+        </p:nvSpPr>
+        <p:spPr>
+          <a:xfrm>
+            <a:off x="2724912" y="1783080"/>
+            <a:ext cx="2057400" cy="914400"/>
+          </a:xfrm>
+          <a:prstGeom prst="rect">
+            <a:avLst/>
+          </a:prstGeom>
+          <a:noFill/>
+        </p:spPr>
+        <p:txBody>
+          <a:bodyPr wrap="square">
+            <a:spAutoFit/>
+          </a:bodyPr>
+          <a:lstStyle/>
+          <a:p>
+            <a:pPr algn="ctr"/>
+            <a:r>
+              <a:rPr sz="1300" b="1" i="0">
+                <a:solidFill>
+                  <a:srgbClr val="008080"/>
+                </a:solidFill>
+              </a:rPr>
+              <a:t>6 nouveaux
+donateurs</a:t>
+            </a:r>
+          </a:p>
+        </p:txBody>
+      </p:sp>
+      <p:sp>
+        <p:nvSpPr>
+          <p:cNvPr id="20" name="TextBox 19"/>
+          <p:cNvSpPr txBox="1"/>
+          <p:nvPr/>
+        </p:nvSpPr>
+        <p:spPr>
+          <a:xfrm>
+            <a:off x="4901183" y="2057400"/>
+            <a:ext cx="256032" cy="548640"/>
+          </a:xfrm>
+          <a:prstGeom prst="rect">
+            <a:avLst/>
+          </a:prstGeom>
+          <a:noFill/>
+        </p:spPr>
+        <p:txBody>
+          <a:bodyPr wrap="square">
+            <a:spAutoFit/>
+          </a:bodyPr>
+          <a:lstStyle/>
+          <a:p>
+            <a:pPr algn="l"/>
+            <a:r>
+              <a:rPr sz="2000" b="1" i="0">
+                <a:solidFill>
+                  <a:srgbClr val="008080"/>
+                </a:solidFill>
+              </a:rPr>
+              <a:t>=</a:t>
+            </a:r>
+          </a:p>
+        </p:txBody>
+      </p:sp>
+      <p:sp>
+        <p:nvSpPr>
+          <p:cNvPr id="21" name="Rectangle 20"/>
+          <p:cNvSpPr/>
+          <p:nvPr/>
+        </p:nvSpPr>
+        <p:spPr>
+          <a:xfrm>
+            <a:off x="4992624" y="1234440"/>
+            <a:ext cx="2240280" cy="457200"/>
+          </a:xfrm>
+          <a:prstGeom prst="rect">
+            <a:avLst/>
+          </a:prstGeom>
+          <a:solidFill>
+            <a:srgbClr val="2A7A50"/>
+          </a:solidFill>
+          <a:ln>
+            <a:noFill/>
+          </a:ln>
+        </p:spPr>
+        <p:style>
+          <a:lnRef idx="1">
+            <a:schemeClr val="accent1"/>
+          </a:lnRef>
+          <a:fillRef idx="3">
+            <a:schemeClr val="accent1"/>
+          </a:fillRef>
+          <a:effectRef idx="2">
+            <a:schemeClr val="accent1"/>
+          </a:effectRef>
+          <a:fontRef idx="minor">
+            <a:schemeClr val="lt1"/>
+          </a:fontRef>
+        </p:style>
+        <p:txBody>
+          <a:bodyPr rtlCol="0" anchor="ctr"/>
+          <a:lstStyle/>
+          <a:p>
+            <a:pPr algn="ctr"/>
+          </a:p>
+        </p:txBody>
+      </p:sp>
+      <p:sp>
+        <p:nvSpPr>
+          <p:cNvPr id="22" name="TextBox 21"/>
+          <p:cNvSpPr txBox="1"/>
+          <p:nvPr/>
+        </p:nvSpPr>
+        <p:spPr>
+          <a:xfrm>
+            <a:off x="5084064" y="1261872"/>
+            <a:ext cx="2057400" cy="384048"/>
+          </a:xfrm>
+          <a:prstGeom prst="rect">
+            <a:avLst/>
+          </a:prstGeom>
+          <a:noFill/>
+        </p:spPr>
+        <p:txBody>
+          <a:bodyPr wrap="square">
+            <a:spAutoFit/>
+          </a:bodyPr>
+          <a:lstStyle/>
+          <a:p>
+            <a:pPr algn="ctr"/>
+            <a:r>
+              <a:rPr sz="900" b="1" i="0">
+                <a:solidFill>
+                  <a:srgbClr val="FFFFFF"/>
+                </a:solidFill>
+              </a:rPr>
+              <a:t>À 15€/mois
+moyenne</a:t>
+            </a:r>
+          </a:p>
+        </p:txBody>
+      </p:sp>
+      <p:sp>
+        <p:nvSpPr>
+          <p:cNvPr id="23" name="Rectangle 22"/>
+          <p:cNvSpPr/>
+          <p:nvPr/>
+        </p:nvSpPr>
+        <p:spPr>
+          <a:xfrm>
+            <a:off x="4992624" y="1691640"/>
+            <a:ext cx="2240280" cy="1097280"/>
+          </a:xfrm>
+          <a:prstGeom prst="rect">
+            <a:avLst/>
+          </a:prstGeom>
+          <a:solidFill>
+            <a:srgbClr val="FFFFFF"/>
+          </a:solidFill>
+          <a:ln w="19050">
+            <a:solidFill>
+              <a:srgbClr val="2A7A50"/>
+            </a:solidFill>
+          </a:ln>
+        </p:spPr>
+        <p:style>
+          <a:lnRef idx="1">
+            <a:schemeClr val="accent1"/>
+          </a:lnRef>
+          <a:fillRef idx="3">
+            <a:schemeClr val="accent1"/>
+          </a:fillRef>
+          <a:effectRef idx="2">
+            <a:schemeClr val="accent1"/>
+          </a:effectRef>
+          <a:fontRef idx="minor">
+            <a:schemeClr val="lt1"/>
+          </a:fontRef>
+        </p:style>
+        <p:txBody>
+          <a:bodyPr rtlCol="0" anchor="ctr"/>
+          <a:lstStyle/>
+          <a:p>
+            <a:pPr algn="ctr"/>
+          </a:p>
+        </p:txBody>
+      </p:sp>
+      <p:sp>
+        <p:nvSpPr>
+          <p:cNvPr id="24" name="TextBox 23"/>
+          <p:cNvSpPr txBox="1"/>
+          <p:nvPr/>
+        </p:nvSpPr>
+        <p:spPr>
+          <a:xfrm>
+            <a:off x="5084064" y="1783080"/>
+            <a:ext cx="2057400" cy="914400"/>
+          </a:xfrm>
+          <a:prstGeom prst="rect">
+            <a:avLst/>
+          </a:prstGeom>
+          <a:noFill/>
+        </p:spPr>
+        <p:txBody>
+          <a:bodyPr wrap="square">
+            <a:spAutoFit/>
+          </a:bodyPr>
+          <a:lstStyle/>
+          <a:p>
+            <a:pPr algn="ctr"/>
+            <a:r>
+              <a:rPr sz="1300" b="1" i="0">
+                <a:solidFill>
+                  <a:srgbClr val="2A7A50"/>
+                </a:solidFill>
+              </a:rPr>
+              <a:t>90€ collectés
+par jour</a:t>
+            </a:r>
+          </a:p>
+        </p:txBody>
+      </p:sp>
+      <p:sp>
+        <p:nvSpPr>
+          <p:cNvPr id="25" name="TextBox 24"/>
+          <p:cNvSpPr txBox="1"/>
+          <p:nvPr/>
+        </p:nvSpPr>
+        <p:spPr>
+          <a:xfrm>
+            <a:off x="7260336" y="2057400"/>
+            <a:ext cx="256032" cy="548640"/>
+          </a:xfrm>
+          <a:prstGeom prst="rect">
+            <a:avLst/>
+          </a:prstGeom>
+          <a:noFill/>
+        </p:spPr>
+        <p:txBody>
+          <a:bodyPr wrap="square">
+            <a:spAutoFit/>
+          </a:bodyPr>
+          <a:lstStyle/>
+          <a:p>
+            <a:pPr algn="l"/>
+            <a:r>
+              <a:rPr sz="2000" b="1" i="0">
+                <a:solidFill>
+                  <a:srgbClr val="008080"/>
+                </a:solidFill>
+              </a:rPr>
+              <a:t>=</a:t>
+            </a:r>
+          </a:p>
+        </p:txBody>
+      </p:sp>
+      <p:sp>
+        <p:nvSpPr>
+          <p:cNvPr id="26" name="Rectangle 25"/>
+          <p:cNvSpPr/>
+          <p:nvPr/>
+        </p:nvSpPr>
+        <p:spPr>
+          <a:xfrm>
+            <a:off x="7351775" y="1234440"/>
+            <a:ext cx="2240280" cy="457200"/>
+          </a:xfrm>
+          <a:prstGeom prst="rect">
+            <a:avLst/>
+          </a:prstGeom>
+          <a:solidFill>
+            <a:srgbClr val="FF0000"/>
+          </a:solidFill>
+          <a:ln>
+            <a:noFill/>
+          </a:ln>
+        </p:spPr>
+        <p:style>
+          <a:lnRef idx="1">
+            <a:schemeClr val="accent1"/>
+          </a:lnRef>
+          <a:fillRef idx="3">
+            <a:schemeClr val="accent1"/>
+          </a:fillRef>
+          <a:effectRef idx="2">
+            <a:schemeClr val="accent1"/>
+          </a:effectRef>
+          <a:fontRef idx="minor">
+            <a:schemeClr val="lt1"/>
+          </a:fontRef>
+        </p:style>
+        <p:txBody>
+          <a:bodyPr rtlCol="0" anchor="ctr"/>
+          <a:lstStyle/>
+          <a:p>
+            <a:pPr algn="ctr"/>
+          </a:p>
+        </p:txBody>
+      </p:sp>
+      <p:sp>
+        <p:nvSpPr>
+          <p:cNvPr id="27" name="TextBox 26"/>
+          <p:cNvSpPr txBox="1"/>
+          <p:nvPr/>
+        </p:nvSpPr>
+        <p:spPr>
+          <a:xfrm>
+            <a:off x="7443215" y="1261872"/>
+            <a:ext cx="2057400" cy="384048"/>
+          </a:xfrm>
+          <a:prstGeom prst="rect">
+            <a:avLst/>
+          </a:prstGeom>
+          <a:noFill/>
+        </p:spPr>
+        <p:txBody>
+          <a:bodyPr wrap="square">
+            <a:spAutoFit/>
+          </a:bodyPr>
+          <a:lstStyle/>
+          <a:p>
+            <a:pPr algn="ctr"/>
+            <a:r>
+              <a:rPr sz="900" b="1" i="0">
+                <a:solidFill>
+                  <a:srgbClr val="FFFFFF"/>
+                </a:solidFill>
+              </a:rPr>
+              <a:t>Sur 1 an
+de fidélité</a:t>
+            </a:r>
+          </a:p>
+        </p:txBody>
+      </p:sp>
+      <p:sp>
+        <p:nvSpPr>
+          <p:cNvPr id="28" name="Rectangle 27"/>
+          <p:cNvSpPr/>
+          <p:nvPr/>
+        </p:nvSpPr>
+        <p:spPr>
+          <a:xfrm>
+            <a:off x="7351775" y="1691640"/>
+            <a:ext cx="2240280" cy="1097280"/>
+          </a:xfrm>
+          <a:prstGeom prst="rect">
+            <a:avLst/>
+          </a:prstGeom>
+          <a:solidFill>
+            <a:srgbClr val="FFFFFF"/>
+          </a:solidFill>
+          <a:ln w="19050">
+            <a:solidFill>
+              <a:srgbClr val="FF0000"/>
+            </a:solidFill>
+          </a:ln>
+        </p:spPr>
+        <p:style>
+          <a:lnRef idx="1">
+            <a:schemeClr val="accent1"/>
+          </a:lnRef>
+          <a:fillRef idx="3">
+            <a:schemeClr val="accent1"/>
+          </a:fillRef>
+          <a:effectRef idx="2">
+            <a:schemeClr val="accent1"/>
+          </a:effectRef>
+          <a:fontRef idx="minor">
+            <a:schemeClr val="lt1"/>
+          </a:fontRef>
+        </p:style>
+        <p:txBody>
+          <a:bodyPr rtlCol="0" anchor="ctr"/>
+          <a:lstStyle/>
+          <a:p>
+            <a:pPr algn="ctr"/>
+          </a:p>
+        </p:txBody>
+      </p:sp>
+      <p:sp>
+        <p:nvSpPr>
+          <p:cNvPr id="29" name="TextBox 28"/>
+          <p:cNvSpPr txBox="1"/>
+          <p:nvPr/>
+        </p:nvSpPr>
+        <p:spPr>
+          <a:xfrm>
+            <a:off x="7443215" y="1783080"/>
+            <a:ext cx="2057400" cy="914400"/>
+          </a:xfrm>
+          <a:prstGeom prst="rect">
+            <a:avLst/>
+          </a:prstGeom>
+          <a:noFill/>
+        </p:spPr>
+        <p:txBody>
+          <a:bodyPr wrap="square">
+            <a:spAutoFit/>
+          </a:bodyPr>
+          <a:lstStyle/>
+          <a:p>
+            <a:pPr algn="ctr"/>
+            <a:r>
+              <a:rPr sz="1300" b="1" i="0">
+                <a:solidFill>
+                  <a:srgbClr val="FF0000"/>
+                </a:solidFill>
+              </a:rPr>
+              <a:t>1 080€
+par donateur</a:t>
+            </a:r>
+          </a:p>
+        </p:txBody>
+      </p:sp>
+      <p:sp>
+        <p:nvSpPr>
+          <p:cNvPr id="30" name="TextBox 29"/>
+          <p:cNvSpPr txBox="1"/>
+          <p:nvPr/>
+        </p:nvSpPr>
+        <p:spPr>
+          <a:xfrm>
+            <a:off x="9619488" y="2057400"/>
+            <a:ext cx="256032" cy="548640"/>
+          </a:xfrm>
+          <a:prstGeom prst="rect">
+            <a:avLst/>
+          </a:prstGeom>
+          <a:noFill/>
+        </p:spPr>
+        <p:txBody>
+          <a:bodyPr wrap="square">
+            <a:spAutoFit/>
+          </a:bodyPr>
+          <a:lstStyle/>
+          <a:p>
+            <a:pPr algn="l"/>
+            <a:r>
+              <a:rPr sz="2000" b="1" i="0">
+                <a:solidFill>
+                  <a:srgbClr val="008080"/>
+                </a:solidFill>
+              </a:rPr>
+              <a:t>=</a:t>
+            </a:r>
+          </a:p>
+        </p:txBody>
+      </p:sp>
+      <p:sp>
+        <p:nvSpPr>
+          <p:cNvPr id="31" name="Rectangle 30"/>
+          <p:cNvSpPr/>
+          <p:nvPr/>
+        </p:nvSpPr>
+        <p:spPr>
+          <a:xfrm>
+            <a:off x="9710928" y="1234440"/>
+            <a:ext cx="2240280" cy="457200"/>
+          </a:xfrm>
+          <a:prstGeom prst="rect">
+            <a:avLst/>
+          </a:prstGeom>
+          <a:solidFill>
+            <a:srgbClr val="AA3300"/>
+          </a:solidFill>
+          <a:ln>
+            <a:noFill/>
+          </a:ln>
+        </p:spPr>
+        <p:style>
+          <a:lnRef idx="1">
+            <a:schemeClr val="accent1"/>
+          </a:lnRef>
+          <a:fillRef idx="3">
+            <a:schemeClr val="accent1"/>
+          </a:fillRef>
+          <a:effectRef idx="2">
+            <a:schemeClr val="accent1"/>
+          </a:effectRef>
+          <a:fontRef idx="minor">
+            <a:schemeClr val="lt1"/>
+          </a:fontRef>
+        </p:style>
+        <p:txBody>
+          <a:bodyPr rtlCol="0" anchor="ctr"/>
+          <a:lstStyle/>
+          <a:p>
+            <a:pPr algn="ctr"/>
+          </a:p>
+        </p:txBody>
+      </p:sp>
+      <p:sp>
+        <p:nvSpPr>
+          <p:cNvPr id="32" name="TextBox 31"/>
+          <p:cNvSpPr txBox="1"/>
+          <p:nvPr/>
+        </p:nvSpPr>
+        <p:spPr>
+          <a:xfrm>
+            <a:off x="9802367" y="1261872"/>
+            <a:ext cx="2057400" cy="384048"/>
+          </a:xfrm>
+          <a:prstGeom prst="rect">
+            <a:avLst/>
+          </a:prstGeom>
+          <a:noFill/>
+        </p:spPr>
+        <p:txBody>
+          <a:bodyPr wrap="square">
+            <a:spAutoFit/>
+          </a:bodyPr>
+          <a:lstStyle/>
+          <a:p>
+            <a:pPr algn="ctr"/>
+            <a:r>
+              <a:rPr sz="900" b="1" i="0">
+                <a:solidFill>
+                  <a:srgbClr val="FFFFFF"/>
+                </a:solidFill>
+              </a:rPr>
+              <a:t>Impact UNICEF
+concret</a:t>
+            </a:r>
+          </a:p>
+        </p:txBody>
+      </p:sp>
+      <p:sp>
+        <p:nvSpPr>
+          <p:cNvPr id="33" name="Rectangle 32"/>
+          <p:cNvSpPr/>
+          <p:nvPr/>
+        </p:nvSpPr>
+        <p:spPr>
+          <a:xfrm>
+            <a:off x="9710928" y="1691640"/>
+            <a:ext cx="2240280" cy="1097280"/>
+          </a:xfrm>
+          <a:prstGeom prst="rect">
+            <a:avLst/>
+          </a:prstGeom>
+          <a:solidFill>
+            <a:srgbClr val="FFFFFF"/>
+          </a:solidFill>
+          <a:ln w="19050">
+            <a:solidFill>
+              <a:srgbClr val="AA3300"/>
+            </a:solidFill>
+          </a:ln>
+        </p:spPr>
+        <p:style>
+          <a:lnRef idx="1">
+            <a:schemeClr val="accent1"/>
+          </a:lnRef>
+          <a:fillRef idx="3">
+            <a:schemeClr val="accent1"/>
+          </a:fillRef>
+          <a:effectRef idx="2">
+            <a:schemeClr val="accent1"/>
+          </a:effectRef>
+          <a:fontRef idx="minor">
+            <a:schemeClr val="lt1"/>
+          </a:fontRef>
+        </p:style>
+        <p:txBody>
+          <a:bodyPr rtlCol="0" anchor="ctr"/>
+          <a:lstStyle/>
+          <a:p>
+            <a:pPr algn="ctr"/>
+          </a:p>
+        </p:txBody>
+      </p:sp>
+      <p:sp>
+        <p:nvSpPr>
+          <p:cNvPr id="34" name="TextBox 33"/>
+          <p:cNvSpPr txBox="1"/>
+          <p:nvPr/>
+        </p:nvSpPr>
+        <p:spPr>
+          <a:xfrm>
+            <a:off x="9802367" y="1783080"/>
+            <a:ext cx="2057400" cy="914400"/>
+          </a:xfrm>
+          <a:prstGeom prst="rect">
+            <a:avLst/>
+          </a:prstGeom>
+          <a:noFill/>
+        </p:spPr>
+        <p:txBody>
+          <a:bodyPr wrap="square">
+            <a:spAutoFit/>
+          </a:bodyPr>
+          <a:lstStyle/>
+          <a:p>
+            <a:pPr algn="ctr"/>
+            <a:r>
+              <a:rPr sz="1300" b="1" i="0">
+                <a:solidFill>
+                  <a:srgbClr val="AA3300"/>
+                </a:solidFill>
+              </a:rPr>
+              <a:t>6 enfants vaccinés
+chaque jour</a:t>
+            </a:r>
+          </a:p>
+        </p:txBody>
+      </p:sp>
+      <p:sp>
+        <p:nvSpPr>
+          <p:cNvPr id="35" name="Rectangle 34"/>
+          <p:cNvSpPr/>
+          <p:nvPr/>
+        </p:nvSpPr>
+        <p:spPr>
+          <a:xfrm>
+            <a:off x="274320" y="2999232"/>
+            <a:ext cx="11640312" cy="914400"/>
+          </a:xfrm>
+          <a:prstGeom prst="rect">
+            <a:avLst/>
+          </a:prstGeom>
+          <a:solidFill>
+            <a:srgbClr val="F0F7F7"/>
+          </a:solidFill>
+          <a:ln>
+            <a:noFill/>
+          </a:ln>
+        </p:spPr>
+        <p:style>
+          <a:lnRef idx="1">
+            <a:schemeClr val="accent1"/>
+          </a:lnRef>
+          <a:fillRef idx="3">
+            <a:schemeClr val="accent1"/>
+          </a:fillRef>
+          <a:effectRef idx="2">
+            <a:schemeClr val="accent1"/>
+          </a:effectRef>
+          <a:fontRef idx="minor">
+            <a:schemeClr val="lt1"/>
+          </a:fontRef>
+        </p:style>
+        <p:txBody>
+          <a:bodyPr rtlCol="0" anchor="ctr"/>
+          <a:lstStyle/>
+          <a:p>
+            <a:pPr algn="ctr"/>
+          </a:p>
+        </p:txBody>
+      </p:sp>
+      <p:sp>
+        <p:nvSpPr>
+          <p:cNvPr id="36" name="TextBox 35"/>
+          <p:cNvSpPr txBox="1"/>
+          <p:nvPr/>
+        </p:nvSpPr>
+        <p:spPr>
+          <a:xfrm>
+            <a:off x="411479" y="3072384"/>
+            <a:ext cx="11365992" cy="768096"/>
+          </a:xfrm>
+          <a:prstGeom prst="rect">
+            <a:avLst/>
+          </a:prstGeom>
+          <a:noFill/>
+        </p:spPr>
+        <p:txBody>
+          <a:bodyPr wrap="square">
+            <a:spAutoFit/>
+          </a:bodyPr>
+          <a:lstStyle/>
+          <a:p>
+            <a:pPr algn="l"/>
+            <a:r>
+              <a:rPr sz="1000" b="0" i="0">
+                <a:solidFill>
+                  <a:srgbClr val="1A1A1A"/>
+                </a:solidFill>
+              </a:rPr>
+              <a:t>Message à intégrer : Vous n'êtes pas en train de 'vendre'. Vous offrez à des personnes bienveillantes un moyen concret, simple et traçable
+de transformer leur générosité en impact réel pour des enfants dans le monde entier.</a:t>
+            </a:r>
+          </a:p>
+        </p:txBody>
+      </p:sp>
+      <p:sp>
+        <p:nvSpPr>
+          <p:cNvPr id="37" name="Rectangle 36"/>
+          <p:cNvSpPr/>
+          <p:nvPr/>
+        </p:nvSpPr>
+        <p:spPr>
+          <a:xfrm>
+            <a:off x="274320" y="2999232"/>
+            <a:ext cx="128016" cy="914400"/>
+          </a:xfrm>
+          <a:prstGeom prst="rect">
+            <a:avLst/>
+          </a:prstGeom>
+          <a:solidFill>
+            <a:srgbClr val="FF0000"/>
+          </a:solidFill>
+          <a:ln>
+            <a:noFill/>
+          </a:ln>
+        </p:spPr>
+        <p:style>
+          <a:lnRef idx="1">
+            <a:schemeClr val="accent1"/>
+          </a:lnRef>
+          <a:fillRef idx="3">
+            <a:schemeClr val="accent1"/>
+          </a:fillRef>
+          <a:effectRef idx="2">
+            <a:schemeClr val="accent1"/>
+          </a:effectRef>
+          <a:fontRef idx="minor">
+            <a:schemeClr val="lt1"/>
+          </a:fontRef>
+        </p:style>
+        <p:txBody>
+          <a:bodyPr rtlCol="0" anchor="ctr"/>
+          <a:lstStyle/>
+          <a:p>
+            <a:pPr algn="ctr"/>
+          </a:p>
+        </p:txBody>
+      </p:sp>
+      <p:sp>
+        <p:nvSpPr>
+          <p:cNvPr id="38" name="Rectangle 37"/>
+          <p:cNvSpPr/>
+          <p:nvPr/>
+        </p:nvSpPr>
+        <p:spPr>
+          <a:xfrm>
+            <a:off x="274320" y="4069080"/>
+            <a:ext cx="5669280" cy="329184"/>
+          </a:xfrm>
+          <a:prstGeom prst="rect">
+            <a:avLst/>
+          </a:prstGeom>
+          <a:solidFill>
+            <a:srgbClr val="008080"/>
+          </a:solidFill>
+          <a:ln>
+            <a:noFill/>
+          </a:ln>
+        </p:spPr>
+        <p:style>
+          <a:lnRef idx="1">
+            <a:schemeClr val="accent1"/>
+          </a:lnRef>
+          <a:fillRef idx="3">
+            <a:schemeClr val="accent1"/>
+          </a:fillRef>
+          <a:effectRef idx="2">
+            <a:schemeClr val="accent1"/>
+          </a:effectRef>
+          <a:fontRef idx="minor">
+            <a:schemeClr val="lt1"/>
+          </a:fontRef>
+        </p:style>
+        <p:txBody>
+          <a:bodyPr rtlCol="0" anchor="ctr"/>
+          <a:lstStyle/>
+          <a:p>
+            <a:pPr algn="ctr"/>
+          </a:p>
+        </p:txBody>
+      </p:sp>
+      <p:sp>
+        <p:nvSpPr>
+          <p:cNvPr id="39" name="TextBox 38"/>
+          <p:cNvSpPr txBox="1"/>
+          <p:nvPr/>
+        </p:nvSpPr>
+        <p:spPr>
+          <a:xfrm>
+            <a:off x="384048" y="4114800"/>
+            <a:ext cx="5486400" cy="256032"/>
+          </a:xfrm>
+          <a:prstGeom prst="rect">
+            <a:avLst/>
+          </a:prstGeom>
+          <a:noFill/>
+        </p:spPr>
+        <p:txBody>
+          <a:bodyPr wrap="square">
+            <a:spAutoFit/>
+          </a:bodyPr>
+          <a:lstStyle/>
+          <a:p>
+            <a:pPr algn="l"/>
+            <a:r>
+              <a:rPr sz="1100" b="1" i="0">
+                <a:solidFill>
+                  <a:srgbClr val="FFFFFF"/>
+                </a:solidFill>
+              </a:rPr>
+              <a:t>Don ponctuel (1 fois)</a:t>
+            </a:r>
+          </a:p>
+        </p:txBody>
+      </p:sp>
+      <p:sp>
+        <p:nvSpPr>
+          <p:cNvPr id="40" name="Rectangle 39"/>
+          <p:cNvSpPr/>
+          <p:nvPr/>
+        </p:nvSpPr>
+        <p:spPr>
+          <a:xfrm>
+            <a:off x="6355080" y="4069080"/>
+            <a:ext cx="5669280" cy="329184"/>
+          </a:xfrm>
+          <a:prstGeom prst="rect">
+            <a:avLst/>
+          </a:prstGeom>
+          <a:solidFill>
+            <a:srgbClr val="008080"/>
+          </a:solidFill>
+          <a:ln>
+            <a:noFill/>
+          </a:ln>
+        </p:spPr>
+        <p:style>
+          <a:lnRef idx="1">
+            <a:schemeClr val="accent1"/>
+          </a:lnRef>
+          <a:fillRef idx="3">
+            <a:schemeClr val="accent1"/>
+          </a:fillRef>
+          <a:effectRef idx="2">
+            <a:schemeClr val="accent1"/>
+          </a:effectRef>
+          <a:fontRef idx="minor">
+            <a:schemeClr val="lt1"/>
+          </a:fontRef>
+        </p:style>
+        <p:txBody>
+          <a:bodyPr rtlCol="0" anchor="ctr"/>
+          <a:lstStyle/>
+          <a:p>
+            <a:pPr algn="ctr"/>
+          </a:p>
+        </p:txBody>
+      </p:sp>
+      <p:sp>
+        <p:nvSpPr>
+          <p:cNvPr id="41" name="TextBox 40"/>
+          <p:cNvSpPr txBox="1"/>
+          <p:nvPr/>
+        </p:nvSpPr>
+        <p:spPr>
+          <a:xfrm>
+            <a:off x="6464808" y="4114800"/>
+            <a:ext cx="5486400" cy="256032"/>
+          </a:xfrm>
+          <a:prstGeom prst="rect">
+            <a:avLst/>
+          </a:prstGeom>
+          <a:noFill/>
+        </p:spPr>
+        <p:txBody>
+          <a:bodyPr wrap="square">
+            <a:spAutoFit/>
+          </a:bodyPr>
+          <a:lstStyle/>
+          <a:p>
+            <a:pPr algn="l"/>
+            <a:r>
+              <a:rPr sz="1100" b="1" i="0">
+                <a:solidFill>
+                  <a:srgbClr val="FFFFFF"/>
+                </a:solidFill>
+              </a:rPr>
+              <a:t>Don régulier mensuel (votre cible)</a:t>
+            </a:r>
+          </a:p>
+        </p:txBody>
+      </p:sp>
+      <p:sp>
+        <p:nvSpPr>
+          <p:cNvPr id="42" name="Rectangle 41"/>
+          <p:cNvSpPr/>
+          <p:nvPr/>
+        </p:nvSpPr>
+        <p:spPr>
+          <a:xfrm>
+            <a:off x="274320" y="4453128"/>
+            <a:ext cx="5669280" cy="402336"/>
+          </a:xfrm>
+          <a:prstGeom prst="rect">
+            <a:avLst/>
+          </a:prstGeom>
+          <a:solidFill>
+            <a:srgbClr val="F0F7F7"/>
+          </a:solidFill>
+          <a:ln w="5080">
+            <a:solidFill>
+              <a:srgbClr val="008080"/>
+            </a:solidFill>
+          </a:ln>
+        </p:spPr>
+        <p:style>
+          <a:lnRef idx="1">
+            <a:schemeClr val="accent1"/>
+          </a:lnRef>
+          <a:fillRef idx="3">
+            <a:schemeClr val="accent1"/>
+          </a:fillRef>
+          <a:effectRef idx="2">
+            <a:schemeClr val="accent1"/>
+          </a:effectRef>
+          <a:fontRef idx="minor">
+            <a:schemeClr val="lt1"/>
+          </a:fontRef>
+        </p:style>
+        <p:txBody>
+          <a:bodyPr rtlCol="0" anchor="ctr"/>
+          <a:lstStyle/>
+          <a:p>
+            <a:pPr algn="ctr"/>
+          </a:p>
+        </p:txBody>
+      </p:sp>
+      <p:sp>
+        <p:nvSpPr>
+          <p:cNvPr id="43" name="TextBox 42"/>
+          <p:cNvSpPr txBox="1"/>
+          <p:nvPr/>
+        </p:nvSpPr>
+        <p:spPr>
+          <a:xfrm>
+            <a:off x="402336" y="4507992"/>
+            <a:ext cx="5440680" cy="329184"/>
+          </a:xfrm>
+          <a:prstGeom prst="rect">
+            <a:avLst/>
+          </a:prstGeom>
+          <a:noFill/>
+        </p:spPr>
+        <p:txBody>
+          <a:bodyPr wrap="square">
+            <a:spAutoFit/>
+          </a:bodyPr>
+          <a:lstStyle/>
+          <a:p>
+            <a:pPr algn="l"/>
+            <a:r>
+              <a:rPr sz="1000" b="0" i="0">
+                <a:solidFill>
+                  <a:srgbClr val="1A1A1A"/>
+                </a:solidFill>
+              </a:rPr>
+              <a:t>• Impact immédiat mais unique</a:t>
+            </a:r>
+          </a:p>
+        </p:txBody>
+      </p:sp>
+      <p:sp>
+        <p:nvSpPr>
+          <p:cNvPr id="44" name="Rectangle 43"/>
+          <p:cNvSpPr/>
+          <p:nvPr/>
+        </p:nvSpPr>
+        <p:spPr>
+          <a:xfrm>
+            <a:off x="274320" y="4873752"/>
+            <a:ext cx="5669280" cy="402336"/>
+          </a:xfrm>
+          <a:prstGeom prst="rect">
+            <a:avLst/>
+          </a:prstGeom>
+          <a:solidFill>
+            <a:srgbClr val="F0F7F7"/>
+          </a:solidFill>
+          <a:ln w="5080">
+            <a:solidFill>
+              <a:srgbClr val="008080"/>
+            </a:solidFill>
+          </a:ln>
+        </p:spPr>
+        <p:style>
+          <a:lnRef idx="1">
+            <a:schemeClr val="accent1"/>
+          </a:lnRef>
+          <a:fillRef idx="3">
+            <a:schemeClr val="accent1"/>
+          </a:fillRef>
+          <a:effectRef idx="2">
+            <a:schemeClr val="accent1"/>
+          </a:effectRef>
+          <a:fontRef idx="minor">
+            <a:schemeClr val="lt1"/>
+          </a:fontRef>
+        </p:style>
+        <p:txBody>
+          <a:bodyPr rtlCol="0" anchor="ctr"/>
+          <a:lstStyle/>
+          <a:p>
+            <a:pPr algn="ctr"/>
+          </a:p>
+        </p:txBody>
+      </p:sp>
+      <p:sp>
+        <p:nvSpPr>
+          <p:cNvPr id="45" name="TextBox 44"/>
+          <p:cNvSpPr txBox="1"/>
+          <p:nvPr/>
+        </p:nvSpPr>
+        <p:spPr>
+          <a:xfrm>
+            <a:off x="402336" y="4928616"/>
+            <a:ext cx="5440680" cy="329184"/>
+          </a:xfrm>
+          <a:prstGeom prst="rect">
+            <a:avLst/>
+          </a:prstGeom>
+          <a:noFill/>
+        </p:spPr>
+        <p:txBody>
+          <a:bodyPr wrap="square">
+            <a:spAutoFit/>
+          </a:bodyPr>
+          <a:lstStyle/>
+          <a:p>
+            <a:pPr algn="l"/>
+            <a:r>
+              <a:rPr sz="1000" b="0" i="0">
+                <a:solidFill>
+                  <a:srgbClr val="1A1A1A"/>
+                </a:solidFill>
+              </a:rPr>
+              <a:t>• Valeur moyenne : 30€</a:t>
+            </a:r>
+          </a:p>
+        </p:txBody>
+      </p:sp>
+      <p:sp>
+        <p:nvSpPr>
+          <p:cNvPr id="46" name="Rectangle 45"/>
+          <p:cNvSpPr/>
+          <p:nvPr/>
+        </p:nvSpPr>
+        <p:spPr>
+          <a:xfrm>
+            <a:off x="274320" y="5294376"/>
+            <a:ext cx="5669280" cy="402336"/>
+          </a:xfrm>
+          <a:prstGeom prst="rect">
+            <a:avLst/>
+          </a:prstGeom>
+          <a:solidFill>
+            <a:srgbClr val="F0F7F7"/>
+          </a:solidFill>
+          <a:ln w="5080">
+            <a:solidFill>
+              <a:srgbClr val="008080"/>
+            </a:solidFill>
+          </a:ln>
+        </p:spPr>
+        <p:style>
+          <a:lnRef idx="1">
+            <a:schemeClr val="accent1"/>
+          </a:lnRef>
+          <a:fillRef idx="3">
+            <a:schemeClr val="accent1"/>
+          </a:fillRef>
+          <a:effectRef idx="2">
+            <a:schemeClr val="accent1"/>
+          </a:effectRef>
+          <a:fontRef idx="minor">
+            <a:schemeClr val="lt1"/>
+          </a:fontRef>
+        </p:style>
+        <p:txBody>
+          <a:bodyPr rtlCol="0" anchor="ctr"/>
+          <a:lstStyle/>
+          <a:p>
+            <a:pPr algn="ctr"/>
+          </a:p>
+        </p:txBody>
+      </p:sp>
+      <p:sp>
+        <p:nvSpPr>
+          <p:cNvPr id="47" name="TextBox 46"/>
+          <p:cNvSpPr txBox="1"/>
+          <p:nvPr/>
+        </p:nvSpPr>
+        <p:spPr>
+          <a:xfrm>
+            <a:off x="402336" y="5349240"/>
+            <a:ext cx="5440680" cy="329184"/>
+          </a:xfrm>
+          <a:prstGeom prst="rect">
+            <a:avLst/>
+          </a:prstGeom>
+          <a:noFill/>
+        </p:spPr>
+        <p:txBody>
+          <a:bodyPr wrap="square">
+            <a:spAutoFit/>
+          </a:bodyPr>
+          <a:lstStyle/>
+          <a:p>
+            <a:pPr algn="l"/>
+            <a:r>
+              <a:rPr sz="1000" b="0" i="0">
+                <a:solidFill>
+                  <a:srgbClr val="1A1A1A"/>
+                </a:solidFill>
+              </a:rPr>
+              <a:t>• Relation = 1 transaction</a:t>
+            </a:r>
+          </a:p>
+        </p:txBody>
+      </p:sp>
+      <p:sp>
+        <p:nvSpPr>
+          <p:cNvPr id="48" name="Rectangle 47"/>
+          <p:cNvSpPr/>
+          <p:nvPr/>
+        </p:nvSpPr>
+        <p:spPr>
+          <a:xfrm>
+            <a:off x="274320" y="5715000"/>
+            <a:ext cx="5669280" cy="402336"/>
+          </a:xfrm>
+          <a:prstGeom prst="rect">
+            <a:avLst/>
+          </a:prstGeom>
+          <a:solidFill>
+            <a:srgbClr val="F0F7F7"/>
+          </a:solidFill>
+          <a:ln w="5080">
+            <a:solidFill>
+              <a:srgbClr val="008080"/>
+            </a:solidFill>
+          </a:ln>
+        </p:spPr>
+        <p:style>
+          <a:lnRef idx="1">
+            <a:schemeClr val="accent1"/>
+          </a:lnRef>
+          <a:fillRef idx="3">
+            <a:schemeClr val="accent1"/>
+          </a:fillRef>
+          <a:effectRef idx="2">
+            <a:schemeClr val="accent1"/>
+          </a:effectRef>
+          <a:fontRef idx="minor">
+            <a:schemeClr val="lt1"/>
+          </a:fontRef>
+        </p:style>
+        <p:txBody>
+          <a:bodyPr rtlCol="0" anchor="ctr"/>
+          <a:lstStyle/>
+          <a:p>
+            <a:pPr algn="ctr"/>
+          </a:p>
+        </p:txBody>
+      </p:sp>
+      <p:sp>
+        <p:nvSpPr>
+          <p:cNvPr id="49" name="TextBox 48"/>
+          <p:cNvSpPr txBox="1"/>
+          <p:nvPr/>
+        </p:nvSpPr>
+        <p:spPr>
+          <a:xfrm>
+            <a:off x="402336" y="5769864"/>
+            <a:ext cx="5440680" cy="329184"/>
+          </a:xfrm>
+          <a:prstGeom prst="rect">
+            <a:avLst/>
+          </a:prstGeom>
+          <a:noFill/>
+        </p:spPr>
+        <p:txBody>
+          <a:bodyPr wrap="square">
+            <a:spAutoFit/>
+          </a:bodyPr>
+          <a:lstStyle/>
+          <a:p>
+            <a:pPr algn="l"/>
+            <a:r>
+              <a:rPr sz="1000" b="0" i="0">
+                <a:solidFill>
+                  <a:srgbClr val="1A1A1A"/>
+                </a:solidFill>
+              </a:rPr>
+              <a:t>• Coût de collecte élevé</a:t>
+            </a:r>
+          </a:p>
+        </p:txBody>
+      </p:sp>
+      <p:sp>
+        <p:nvSpPr>
+          <p:cNvPr id="50" name="Rectangle 49"/>
+          <p:cNvSpPr/>
+          <p:nvPr/>
+        </p:nvSpPr>
+        <p:spPr>
+          <a:xfrm>
+            <a:off x="6355080" y="4453128"/>
+            <a:ext cx="5669280" cy="402336"/>
+          </a:xfrm>
+          <a:prstGeom prst="rect">
+            <a:avLst/>
+          </a:prstGeom>
+          <a:solidFill>
+            <a:srgbClr val="F0F7F7"/>
+          </a:solidFill>
+          <a:ln w="5080">
+            <a:solidFill>
+              <a:srgbClr val="008080"/>
+            </a:solidFill>
+          </a:ln>
+        </p:spPr>
+        <p:style>
+          <a:lnRef idx="1">
+            <a:schemeClr val="accent1"/>
+          </a:lnRef>
+          <a:fillRef idx="3">
+            <a:schemeClr val="accent1"/>
+          </a:fillRef>
+          <a:effectRef idx="2">
+            <a:schemeClr val="accent1"/>
+          </a:effectRef>
+          <a:fontRef idx="minor">
+            <a:schemeClr val="lt1"/>
+          </a:fontRef>
+        </p:style>
+        <p:txBody>
+          <a:bodyPr rtlCol="0" anchor="ctr"/>
+          <a:lstStyle/>
+          <a:p>
+            <a:pPr algn="ctr"/>
+          </a:p>
+        </p:txBody>
+      </p:sp>
+      <p:sp>
+        <p:nvSpPr>
+          <p:cNvPr id="51" name="TextBox 50"/>
+          <p:cNvSpPr txBox="1"/>
+          <p:nvPr/>
+        </p:nvSpPr>
+        <p:spPr>
+          <a:xfrm>
+            <a:off x="6483096" y="4507992"/>
+            <a:ext cx="5440680" cy="329184"/>
+          </a:xfrm>
+          <a:prstGeom prst="rect">
+            <a:avLst/>
+          </a:prstGeom>
+          <a:noFill/>
+        </p:spPr>
+        <p:txBody>
+          <a:bodyPr wrap="square">
+            <a:spAutoFit/>
+          </a:bodyPr>
+          <a:lstStyle/>
+          <a:p>
+            <a:pPr algn="l"/>
+            <a:r>
+              <a:rPr sz="1000" b="0" i="0">
+                <a:solidFill>
+                  <a:srgbClr val="1A1A1A"/>
+                </a:solidFill>
+              </a:rPr>
+              <a:t>• Impact continu et planifiable</a:t>
+            </a:r>
+          </a:p>
+        </p:txBody>
+      </p:sp>
+      <p:sp>
+        <p:nvSpPr>
+          <p:cNvPr id="52" name="Rectangle 51"/>
+          <p:cNvSpPr/>
+          <p:nvPr/>
+        </p:nvSpPr>
+        <p:spPr>
+          <a:xfrm>
+            <a:off x="6355080" y="4873752"/>
+            <a:ext cx="5669280" cy="402336"/>
+          </a:xfrm>
+          <a:prstGeom prst="rect">
+            <a:avLst/>
+          </a:prstGeom>
+          <a:solidFill>
+            <a:srgbClr val="F0F7F7"/>
+          </a:solidFill>
+          <a:ln w="5080">
+            <a:solidFill>
+              <a:srgbClr val="008080"/>
+            </a:solidFill>
+          </a:ln>
+        </p:spPr>
+        <p:style>
+          <a:lnRef idx="1">
+            <a:schemeClr val="accent1"/>
+          </a:lnRef>
+          <a:fillRef idx="3">
+            <a:schemeClr val="accent1"/>
+          </a:fillRef>
+          <a:effectRef idx="2">
+            <a:schemeClr val="accent1"/>
+          </a:effectRef>
+          <a:fontRef idx="minor">
+            <a:schemeClr val="lt1"/>
+          </a:fontRef>
+        </p:style>
+        <p:txBody>
+          <a:bodyPr rtlCol="0" anchor="ctr"/>
+          <a:lstStyle/>
+          <a:p>
+            <a:pPr algn="ctr"/>
+          </a:p>
+        </p:txBody>
+      </p:sp>
+      <p:sp>
+        <p:nvSpPr>
+          <p:cNvPr id="53" name="TextBox 52"/>
+          <p:cNvSpPr txBox="1"/>
+          <p:nvPr/>
+        </p:nvSpPr>
+        <p:spPr>
+          <a:xfrm>
+            <a:off x="6483096" y="4928616"/>
+            <a:ext cx="5440680" cy="329184"/>
+          </a:xfrm>
+          <a:prstGeom prst="rect">
+            <a:avLst/>
+          </a:prstGeom>
+          <a:noFill/>
+        </p:spPr>
+        <p:txBody>
+          <a:bodyPr wrap="square">
+            <a:spAutoFit/>
+          </a:bodyPr>
+          <a:lstStyle/>
+          <a:p>
+            <a:pPr algn="l"/>
+            <a:r>
+              <a:rPr sz="1000" b="0" i="0">
+                <a:solidFill>
+                  <a:srgbClr val="1A1A1A"/>
+                </a:solidFill>
+              </a:rPr>
+              <a:t>• Valeur sur 3 ans : 540–900€</a:t>
+            </a:r>
+          </a:p>
+        </p:txBody>
+      </p:sp>
+      <p:sp>
+        <p:nvSpPr>
+          <p:cNvPr id="54" name="Rectangle 53"/>
+          <p:cNvSpPr/>
+          <p:nvPr/>
+        </p:nvSpPr>
+        <p:spPr>
+          <a:xfrm>
+            <a:off x="6355080" y="5294376"/>
+            <a:ext cx="5669280" cy="402336"/>
+          </a:xfrm>
+          <a:prstGeom prst="rect">
+            <a:avLst/>
+          </a:prstGeom>
+          <a:solidFill>
+            <a:srgbClr val="F0F7F7"/>
+          </a:solidFill>
+          <a:ln w="5080">
+            <a:solidFill>
+              <a:srgbClr val="008080"/>
+            </a:solidFill>
+          </a:ln>
+        </p:spPr>
+        <p:style>
+          <a:lnRef idx="1">
+            <a:schemeClr val="accent1"/>
+          </a:lnRef>
+          <a:fillRef idx="3">
+            <a:schemeClr val="accent1"/>
+          </a:fillRef>
+          <a:effectRef idx="2">
+            <a:schemeClr val="accent1"/>
+          </a:effectRef>
+          <a:fontRef idx="minor">
+            <a:schemeClr val="lt1"/>
+          </a:fontRef>
+        </p:style>
+        <p:txBody>
+          <a:bodyPr rtlCol="0" anchor="ctr"/>
+          <a:lstStyle/>
+          <a:p>
+            <a:pPr algn="ctr"/>
+          </a:p>
+        </p:txBody>
+      </p:sp>
+      <p:sp>
+        <p:nvSpPr>
+          <p:cNvPr id="55" name="TextBox 54"/>
+          <p:cNvSpPr txBox="1"/>
+          <p:nvPr/>
+        </p:nvSpPr>
+        <p:spPr>
+          <a:xfrm>
+            <a:off x="6483096" y="5349240"/>
+            <a:ext cx="5440680" cy="329184"/>
+          </a:xfrm>
+          <a:prstGeom prst="rect">
+            <a:avLst/>
+          </a:prstGeom>
+          <a:noFill/>
+        </p:spPr>
+        <p:txBody>
+          <a:bodyPr wrap="square">
+            <a:spAutoFit/>
+          </a:bodyPr>
+          <a:lstStyle/>
+          <a:p>
+            <a:pPr algn="l"/>
+            <a:r>
+              <a:rPr sz="1000" b="0" i="0">
+                <a:solidFill>
+                  <a:srgbClr val="1A1A1A"/>
+                </a:solidFill>
+              </a:rPr>
+              <a:t>• Relation = engagement durable</a:t>
+            </a:r>
+          </a:p>
+        </p:txBody>
+      </p:sp>
+      <p:sp>
+        <p:nvSpPr>
+          <p:cNvPr id="56" name="Rectangle 55"/>
+          <p:cNvSpPr/>
+          <p:nvPr/>
+        </p:nvSpPr>
+        <p:spPr>
+          <a:xfrm>
+            <a:off x="6355080" y="5715000"/>
+            <a:ext cx="5669280" cy="402336"/>
+          </a:xfrm>
+          <a:prstGeom prst="rect">
+            <a:avLst/>
+          </a:prstGeom>
+          <a:solidFill>
+            <a:srgbClr val="F0F7F7"/>
+          </a:solidFill>
+          <a:ln w="5080">
+            <a:solidFill>
+              <a:srgbClr val="008080"/>
+            </a:solidFill>
+          </a:ln>
+        </p:spPr>
+        <p:style>
+          <a:lnRef idx="1">
+            <a:schemeClr val="accent1"/>
+          </a:lnRef>
+          <a:fillRef idx="3">
+            <a:schemeClr val="accent1"/>
+          </a:fillRef>
+          <a:effectRef idx="2">
+            <a:schemeClr val="accent1"/>
+          </a:effectRef>
+          <a:fontRef idx="minor">
+            <a:schemeClr val="lt1"/>
+          </a:fontRef>
+        </p:style>
+        <p:txBody>
+          <a:bodyPr rtlCol="0" anchor="ctr"/>
+          <a:lstStyle/>
+          <a:p>
+            <a:pPr algn="ctr"/>
+          </a:p>
+        </p:txBody>
+      </p:sp>
+      <p:sp>
+        <p:nvSpPr>
+          <p:cNvPr id="57" name="TextBox 56"/>
+          <p:cNvSpPr txBox="1"/>
+          <p:nvPr/>
+        </p:nvSpPr>
+        <p:spPr>
+          <a:xfrm>
+            <a:off x="6483096" y="5769864"/>
+            <a:ext cx="5440680" cy="329184"/>
+          </a:xfrm>
+          <a:prstGeom prst="rect">
+            <a:avLst/>
+          </a:prstGeom>
+          <a:noFill/>
+        </p:spPr>
+        <p:txBody>
+          <a:bodyPr wrap="square">
+            <a:spAutoFit/>
+          </a:bodyPr>
+          <a:lstStyle/>
+          <a:p>
+            <a:pPr algn="l"/>
+            <a:r>
+              <a:rPr sz="1000" b="0" i="0">
+                <a:solidFill>
+                  <a:srgbClr val="1A1A1A"/>
+                </a:solidFill>
+              </a:rPr>
+              <a:t>• Rentabilité programme × 8</a:t>
+            </a:r>
+          </a:p>
+        </p:txBody>
+      </p:sp>
+      <p:sp>
+        <p:nvSpPr>
+          <p:cNvPr id="58" name="Rectangle 57"/>
+          <p:cNvSpPr/>
+          <p:nvPr/>
+        </p:nvSpPr>
+        <p:spPr>
+          <a:xfrm>
+            <a:off x="274320" y="6053328"/>
+            <a:ext cx="11640312" cy="347472"/>
+          </a:xfrm>
+          <a:prstGeom prst="rect">
+            <a:avLst/>
+          </a:prstGeom>
+          <a:solidFill>
+            <a:srgbClr val="FF0000"/>
+          </a:solidFill>
+          <a:ln>
+            <a:noFill/>
+          </a:ln>
+        </p:spPr>
+        <p:style>
+          <a:lnRef idx="1">
+            <a:schemeClr val="accent1"/>
+          </a:lnRef>
+          <a:fillRef idx="3">
+            <a:schemeClr val="accent1"/>
+          </a:fillRef>
+          <a:effectRef idx="2">
+            <a:schemeClr val="accent1"/>
+          </a:effectRef>
+          <a:fontRef idx="minor">
+            <a:schemeClr val="lt1"/>
+          </a:fontRef>
+        </p:style>
+        <p:txBody>
+          <a:bodyPr rtlCol="0" anchor="ctr"/>
+          <a:lstStyle/>
+          <a:p>
+            <a:pPr algn="ctr"/>
+          </a:p>
+        </p:txBody>
+      </p:sp>
+      <p:sp>
+        <p:nvSpPr>
+          <p:cNvPr id="59" name="TextBox 58"/>
+          <p:cNvSpPr txBox="1"/>
+          <p:nvPr/>
+        </p:nvSpPr>
+        <p:spPr>
+          <a:xfrm>
+            <a:off x="411479" y="6126480"/>
+            <a:ext cx="11365992" cy="201168"/>
+          </a:xfrm>
+          <a:prstGeom prst="rect">
+            <a:avLst/>
+          </a:prstGeom>
+          <a:noFill/>
+        </p:spPr>
+        <p:txBody>
+          <a:bodyPr wrap="square">
+            <a:spAutoFit/>
+          </a:bodyPr>
+          <a:lstStyle/>
+          <a:p>
+            <a:pPr algn="l"/>
+            <a:r>
+              <a:rPr sz="1000" b="0" i="0">
+                <a:solidFill>
+                  <a:srgbClr val="FFFFFF"/>
+                </a:solidFill>
+              </a:rPr>
+              <a:t>Votre mission : le don régulier. Toujours. Le don ponctuel est un point de départ, jamais un objectif final.</a:t>
             </a:r>
           </a:p>
         </p:txBody>

--- a/FIM_BookJ2_MondeAssociatif_V6-01062026SHY-TE.pptx
+++ b/FIM_BookJ2_MondeAssociatif_V6-01062026SHY-TE.pptx
@@ -8,7 +8,6 @@
     <p:sldId id="256" r:id="rId7"/>
     <p:sldId id="257" r:id="rId8"/>
     <p:sldId id="258" r:id="rId9"/>
-    <p:sldId id="259" r:id="rId10"/>
   </p:sldIdLst>
   <p:sldSz cx="12188952" cy="6858000" type="screen4x3"/>
   <p:notesSz cx="6858000" cy="9144000"/>
@@ -3143,7 +3142,7 @@
         <p:spPr>
           <a:xfrm>
             <a:off x="0" y="0"/>
-            <a:ext cx="12188952" cy="2286000"/>
+            <a:ext cx="12188952" cy="2331720"/>
           </a:xfrm>
           <a:prstGeom prst="rect">
             <a:avLst/>
@@ -3185,14 +3184,14 @@
         </p:nvSpPr>
         <p:spPr>
           <a:xfrm>
-            <a:off x="0" y="2267712"/>
-            <a:ext cx="12188952" cy="73152"/>
+            <a:off x="0" y="2313432"/>
+            <a:ext cx="12188952" cy="54864"/>
           </a:xfrm>
           <a:prstGeom prst="rect">
             <a:avLst/>
           </a:prstGeom>
           <a:solidFill>
-            <a:srgbClr val="FF0000"/>
+            <a:srgbClr val="00AAAA"/>
           </a:solidFill>
           <a:ln>
             <a:noFill/>
@@ -3222,57 +3221,14 @@
       </p:sp>
       <p:sp>
         <p:nvSpPr>
-          <p:cNvPr id="5" name="Rectangle 4"/>
-          <p:cNvSpPr/>
-          <p:nvPr/>
-        </p:nvSpPr>
-        <p:spPr>
-          <a:xfrm>
-            <a:off x="274320" y="109728"/>
-            <a:ext cx="2926080" cy="822960"/>
-          </a:xfrm>
-          <a:prstGeom prst="rect">
-            <a:avLst/>
-          </a:prstGeom>
-          <a:solidFill>
-            <a:srgbClr val="008080"/>
-          </a:solidFill>
-          <a:ln>
-            <a:noFill/>
-          </a:ln>
-        </p:spPr>
-        <p:style>
-          <a:lnRef idx="1">
-            <a:schemeClr val="accent1"/>
-          </a:lnRef>
-          <a:fillRef idx="3">
-            <a:schemeClr val="accent1"/>
-          </a:fillRef>
-          <a:effectRef idx="2">
-            <a:schemeClr val="accent1"/>
-          </a:effectRef>
-          <a:fontRef idx="minor">
-            <a:schemeClr val="lt1"/>
-          </a:fontRef>
-        </p:style>
-        <p:txBody>
-          <a:bodyPr rtlCol="0" anchor="ctr"/>
-          <a:lstStyle/>
-          <a:p>
-            <a:pPr algn="ctr"/>
-          </a:p>
-        </p:txBody>
-      </p:sp>
-      <p:sp>
-        <p:nvSpPr>
-          <p:cNvPr id="6" name="TextBox 5"/>
+          <p:cNvPr id="5" name="TextBox 4"/>
           <p:cNvSpPr txBox="1"/>
           <p:nvPr/>
         </p:nvSpPr>
         <p:spPr>
           <a:xfrm>
-            <a:off x="320040" y="118872"/>
-            <a:ext cx="1097280" cy="804672"/>
+            <a:off x="347472" y="91440"/>
+            <a:ext cx="3200400" cy="438912"/>
           </a:xfrm>
           <a:prstGeom prst="rect">
             <a:avLst/>
@@ -3287,26 +3243,26 @@
           <a:p>
             <a:pPr algn="l"/>
             <a:r>
-              <a:rPr sz="3600" b="1" i="0">
+              <a:rPr sz="2200" b="1" i="0">
                 <a:solidFill>
                   <a:srgbClr val="FFFFFF"/>
                 </a:solidFill>
               </a:rPr>
-              <a:t>SHY</a:t>
-            </a:r>
-          </a:p>
-        </p:txBody>
-      </p:sp>
-      <p:sp>
-        <p:nvSpPr>
-          <p:cNvPr id="7" name="TextBox 6"/>
+              <a:t>SHY-Performance</a:t>
+            </a:r>
+          </a:p>
+        </p:txBody>
+      </p:sp>
+      <p:sp>
+        <p:nvSpPr>
+          <p:cNvPr id="6" name="TextBox 5"/>
           <p:cNvSpPr txBox="1"/>
           <p:nvPr/>
         </p:nvSpPr>
         <p:spPr>
           <a:xfrm>
-            <a:off x="1371600" y="347472"/>
-            <a:ext cx="1828800" cy="411480"/>
+            <a:off x="347472" y="530352"/>
+            <a:ext cx="7772400" cy="347472"/>
           </a:xfrm>
           <a:prstGeom prst="rect">
             <a:avLst/>
@@ -3321,103 +3277,60 @@
           <a:p>
             <a:pPr algn="l"/>
             <a:r>
-              <a:rPr sz="1400" b="1" i="0">
-                <a:solidFill>
-                  <a:srgbClr val="FFFFFF"/>
-                </a:solidFill>
-              </a:rPr>
-              <a:t>Performance</a:t>
-            </a:r>
-          </a:p>
-        </p:txBody>
-      </p:sp>
-      <p:sp>
-        <p:nvSpPr>
-          <p:cNvPr id="8" name="Rectangle 7"/>
-          <p:cNvSpPr/>
-          <p:nvPr/>
-        </p:nvSpPr>
-        <p:spPr>
-          <a:xfrm>
-            <a:off x="3337560" y="164592"/>
-            <a:ext cx="36576" cy="658368"/>
-          </a:xfrm>
-          <a:prstGeom prst="rect">
-            <a:avLst/>
-          </a:prstGeom>
-          <a:solidFill>
-            <a:srgbClr val="FF0000"/>
-          </a:solidFill>
-          <a:ln>
-            <a:noFill/>
-          </a:ln>
-        </p:spPr>
-        <p:style>
-          <a:lnRef idx="1">
-            <a:schemeClr val="accent1"/>
-          </a:lnRef>
-          <a:fillRef idx="3">
-            <a:schemeClr val="accent1"/>
-          </a:fillRef>
-          <a:effectRef idx="2">
-            <a:schemeClr val="accent1"/>
-          </a:effectRef>
-          <a:fontRef idx="minor">
-            <a:schemeClr val="lt1"/>
-          </a:fontRef>
-        </p:style>
-        <p:txBody>
-          <a:bodyPr rtlCol="0" anchor="ctr"/>
-          <a:lstStyle/>
-          <a:p>
-            <a:pPr algn="ctr"/>
-          </a:p>
-        </p:txBody>
-      </p:sp>
-      <p:sp>
-        <p:nvSpPr>
-          <p:cNvPr id="9" name="TextBox 8"/>
-          <p:cNvSpPr txBox="1"/>
-          <p:nvPr/>
-        </p:nvSpPr>
-        <p:spPr>
-          <a:xfrm>
-            <a:off x="3474720" y="164592"/>
-            <a:ext cx="8503920" cy="347472"/>
-          </a:xfrm>
-          <a:prstGeom prst="rect">
-            <a:avLst/>
-          </a:prstGeom>
-          <a:noFill/>
-        </p:spPr>
-        <p:txBody>
-          <a:bodyPr wrap="square">
-            <a:spAutoFit/>
-          </a:bodyPr>
-          <a:lstStyle/>
-          <a:p>
-            <a:pPr algn="l"/>
-            <a:r>
-              <a:rPr sz="900" b="1" i="0">
+              <a:rPr sz="1000" b="0" i="1">
                 <a:solidFill>
                   <a:srgbClr val="BBEEEE"/>
                 </a:solidFill>
               </a:rPr>
-              <a:t>BOOK J2  ·  Journée 2  ·  Donateurs français &amp; Don régulier</a:t>
-            </a:r>
-          </a:p>
-        </p:txBody>
-      </p:sp>
-      <p:sp>
-        <p:nvSpPr>
-          <p:cNvPr id="10" name="TextBox 9"/>
+              <a:t>Formation Initiale Module — Fundraising Téléphonique UNICEF</a:t>
+            </a:r>
+          </a:p>
+        </p:txBody>
+      </p:sp>
+      <p:sp>
+        <p:nvSpPr>
+          <p:cNvPr id="7" name="TextBox 6"/>
           <p:cNvSpPr txBox="1"/>
           <p:nvPr/>
         </p:nvSpPr>
         <p:spPr>
           <a:xfrm>
-            <a:off x="320040" y="960120"/>
-            <a:ext cx="11521440" cy="1143000"/>
+            <a:off x="347472" y="932688"/>
+            <a:ext cx="7772400" cy="292608"/>
+          </a:xfrm>
+          <a:prstGeom prst="rect">
+            <a:avLst/>
+          </a:prstGeom>
+          <a:noFill/>
+        </p:spPr>
+        <p:txBody>
+          <a:bodyPr wrap="square">
+            <a:spAutoFit/>
+          </a:bodyPr>
+          <a:lstStyle/>
+          <a:p>
+            <a:pPr algn="l"/>
+            <a:r>
+              <a:rPr sz="900" b="1" i="0">
+                <a:solidFill>
+                  <a:srgbClr val="88DDDD"/>
+                </a:solidFill>
+              </a:rPr>
+              <a:t>BOOK J2  ·  Journée 2  ·  France associative &amp; Histoire humanitaire</a:t>
+            </a:r>
+          </a:p>
+        </p:txBody>
+      </p:sp>
+      <p:sp>
+        <p:nvSpPr>
+          <p:cNvPr id="8" name="TextBox 7"/>
+          <p:cNvSpPr txBox="1"/>
+          <p:nvPr/>
+        </p:nvSpPr>
+        <p:spPr>
+          <a:xfrm>
+            <a:off x="347472" y="1207008"/>
+            <a:ext cx="10515600" cy="914400"/>
           </a:xfrm>
           <a:prstGeom prst="rect">
             <a:avLst/>
@@ -3437,21 +3350,21 @@
                   <a:srgbClr val="FFFFFF"/>
                 </a:solidFill>
               </a:rPr>
-              <a:t>Le Monde du Don en France</a:t>
-            </a:r>
-          </a:p>
-        </p:txBody>
-      </p:sp>
-      <p:sp>
-        <p:nvSpPr>
-          <p:cNvPr id="11" name="TextBox 10"/>
+              <a:t>Le Monde Associatif &amp; Humanitaire</a:t>
+            </a:r>
+          </a:p>
+        </p:txBody>
+      </p:sp>
+      <p:sp>
+        <p:nvSpPr>
+          <p:cNvPr id="9" name="TextBox 8"/>
           <p:cNvSpPr txBox="1"/>
           <p:nvPr/>
         </p:nvSpPr>
         <p:spPr>
           <a:xfrm>
-            <a:off x="320040" y="1920240"/>
-            <a:ext cx="11521440" cy="347472"/>
+            <a:off x="347472" y="1901952"/>
+            <a:ext cx="10515600" cy="402336"/>
           </a:xfrm>
           <a:prstGeom prst="rect">
             <a:avLst/>
@@ -3471,14 +3384,38 @@
                   <a:srgbClr val="CCEEEE"/>
                 </a:solidFill>
               </a:rPr>
-              <a:t>Comprendre qui sont vos donateurs et pourquoi ils donnent</a:t>
-            </a:r>
-          </a:p>
-        </p:txBody>
-      </p:sp>
-      <p:sp>
-        <p:nvSpPr>
-          <p:cNvPr id="12" name="Rectangle 11"/>
+              <a:t>Comprendre le secteur pour représenter la cause avec légitimité</a:t>
+            </a:r>
+          </a:p>
+        </p:txBody>
+      </p:sp>
+      <p:pic>
+        <p:nvPicPr>
+          <p:cNvPr id="10" name="Picture 9" descr="shy_logo_v2.png"/>
+          <p:cNvPicPr>
+            <a:picLocks noChangeAspect="1"/>
+          </p:cNvPicPr>
+          <p:nvPr/>
+        </p:nvPicPr>
+        <p:blipFill>
+          <a:blip r:embed="rId2"/>
+          <a:stretch>
+            <a:fillRect/>
+          </a:stretch>
+        </p:blipFill>
+        <p:spPr>
+          <a:xfrm>
+            <a:off x="11247120" y="45720"/>
+            <a:ext cx="822960" cy="804672"/>
+          </a:xfrm>
+          <a:prstGeom prst="rect">
+            <a:avLst/>
+          </a:prstGeom>
+        </p:spPr>
+      </p:pic>
+      <p:sp>
+        <p:nvSpPr>
+          <p:cNvPr id="11" name="Rectangle 10"/>
           <p:cNvSpPr/>
           <p:nvPr/>
         </p:nvSpPr>
@@ -3521,7 +3458,7 @@
       </p:sp>
       <p:sp>
         <p:nvSpPr>
-          <p:cNvPr id="13" name="TextBox 12"/>
+          <p:cNvPr id="12" name="TextBox 11"/>
           <p:cNvSpPr txBox="1"/>
           <p:nvPr/>
         </p:nvSpPr>
@@ -3543,26 +3480,26 @@
           <a:p>
             <a:pPr algn="ctr"/>
             <a:r>
-              <a:rPr sz="900" b="0" i="0">
+              <a:rPr sz="800" b="0" i="0">
                 <a:solidFill>
                   <a:srgbClr val="FFFFFF"/>
                 </a:solidFill>
               </a:rPr>
-              <a:t>SHY-Performance  ·  Formation FIM  ·  V6-01062026SHY-TE</a:t>
-            </a:r>
-          </a:p>
-        </p:txBody>
-      </p:sp>
-      <p:sp>
-        <p:nvSpPr>
-          <p:cNvPr id="14" name="TextBox 13"/>
+              <a:t>SHY-Performance  ·  Formation FIM  ·  UNICEF France  ·  V6-01062026SHY-TE</a:t>
+            </a:r>
+          </a:p>
+        </p:txBody>
+      </p:sp>
+      <p:sp>
+        <p:nvSpPr>
+          <p:cNvPr id="13" name="TextBox 12"/>
           <p:cNvSpPr txBox="1"/>
           <p:nvPr/>
         </p:nvSpPr>
         <p:spPr>
           <a:xfrm>
             <a:off x="457200" y="2514600"/>
-            <a:ext cx="11247120" cy="1051560"/>
+            <a:ext cx="10789920" cy="1005840"/>
           </a:xfrm>
           <a:prstGeom prst="rect">
             <a:avLst/>
@@ -3582,9 +3519,9 @@
                   <a:srgbClr val="1A1A1A"/>
                 </a:solidFill>
               </a:rPr>
-              <a:t>Aujourd'hui, vous allez comprendre le comportement des donateurs français,
-le modèle économique du don régulier et pourquoi il change tout
-pour les programmes humanitaires de l'UNICEF.</a:t>
+              <a:t>Aujourd'hui vous comprenez le secteur associatif français, l'histoire de l'humanitaire
+et pourquoi le don régulier par prélèvement automatique est le modèle qui change tout
+pour la pérennité des programmes UNICEF.</a:t>
             </a:r>
           </a:p>
         </p:txBody>
@@ -3659,7 +3596,7 @@
         <p:spPr>
           <a:xfrm>
             <a:off x="0" y="0"/>
-            <a:ext cx="12188952" cy="658368"/>
+            <a:ext cx="12188952" cy="685800"/>
           </a:xfrm>
           <a:prstGeom prst="rect">
             <a:avLst/>
@@ -3701,14 +3638,14 @@
         </p:nvSpPr>
         <p:spPr>
           <a:xfrm>
-            <a:off x="0" y="640080"/>
-            <a:ext cx="12188952" cy="54864"/>
+            <a:off x="0" y="667512"/>
+            <a:ext cx="12188952" cy="45720"/>
           </a:xfrm>
           <a:prstGeom prst="rect">
             <a:avLst/>
           </a:prstGeom>
           <a:solidFill>
-            <a:srgbClr val="FF0000"/>
+            <a:srgbClr val="00AAAA"/>
           </a:solidFill>
           <a:ln>
             <a:noFill/>
@@ -3744,8 +3681,8 @@
         </p:nvSpPr>
         <p:spPr>
           <a:xfrm>
-            <a:off x="164592" y="64008"/>
-            <a:ext cx="685800" cy="530352"/>
+            <a:off x="164592" y="73152"/>
+            <a:ext cx="2011680" cy="347472"/>
           </a:xfrm>
           <a:prstGeom prst="rect">
             <a:avLst/>
@@ -3760,12 +3697,12 @@
           <a:p>
             <a:pPr algn="l"/>
             <a:r>
-              <a:rPr sz="2000" b="1" i="0">
+              <a:rPr sz="1400" b="1" i="0">
                 <a:solidFill>
                   <a:srgbClr val="FFFFFF"/>
                 </a:solidFill>
               </a:rPr>
-              <a:t>SHY</a:t>
+              <a:t>SHY-Performance</a:t>
             </a:r>
           </a:p>
         </p:txBody>
@@ -3778,14 +3715,14 @@
         </p:nvSpPr>
         <p:spPr>
           <a:xfrm>
-            <a:off x="914400" y="91440"/>
-            <a:ext cx="36576" cy="475488"/>
+            <a:off x="2286000" y="91440"/>
+            <a:ext cx="36576" cy="502920"/>
           </a:xfrm>
           <a:prstGeom prst="rect">
             <a:avLst/>
           </a:prstGeom>
           <a:solidFill>
-            <a:srgbClr val="FF0000"/>
+            <a:srgbClr val="00AAAA"/>
           </a:solidFill>
           <a:ln>
             <a:noFill/>
@@ -3821,8 +3758,8 @@
         </p:nvSpPr>
         <p:spPr>
           <a:xfrm>
-            <a:off x="1024128" y="91440"/>
-            <a:ext cx="10881360" cy="475488"/>
+            <a:off x="2423160" y="91440"/>
+            <a:ext cx="9235440" cy="502920"/>
           </a:xfrm>
           <a:prstGeom prst="rect">
             <a:avLst/>
@@ -3837,7 +3774,7 @@
           <a:p>
             <a:pPr algn="l"/>
             <a:r>
-              <a:rPr sz="1700" b="1" i="0">
+              <a:rPr sz="1600" b="1" i="0">
                 <a:solidFill>
                   <a:srgbClr val="FFFFFF"/>
                 </a:solidFill>
@@ -3847,9 +3784,33 @@
           </a:p>
         </p:txBody>
       </p:sp>
-      <p:sp>
-        <p:nvSpPr>
-          <p:cNvPr id="8" name="Rectangle 7"/>
+      <p:pic>
+        <p:nvPicPr>
+          <p:cNvPr id="8" name="Picture 7" descr="shy_logo_v2.png"/>
+          <p:cNvPicPr>
+            <a:picLocks noChangeAspect="1"/>
+          </p:cNvPicPr>
+          <p:nvPr/>
+        </p:nvPicPr>
+        <p:blipFill>
+          <a:blip r:embed="rId2"/>
+          <a:stretch>
+            <a:fillRect/>
+          </a:stretch>
+        </p:blipFill>
+        <p:spPr>
+          <a:xfrm>
+            <a:off x="11247120" y="0"/>
+            <a:ext cx="822960" cy="676656"/>
+          </a:xfrm>
+          <a:prstGeom prst="rect">
+            <a:avLst/>
+          </a:prstGeom>
+        </p:spPr>
+      </p:pic>
+      <p:sp>
+        <p:nvSpPr>
+          <p:cNvPr id="9" name="Rectangle 8"/>
           <p:cNvSpPr/>
           <p:nvPr/>
         </p:nvSpPr>
@@ -3892,7 +3853,7 @@
       </p:sp>
       <p:sp>
         <p:nvSpPr>
-          <p:cNvPr id="9" name="TextBox 8"/>
+          <p:cNvPr id="10" name="TextBox 9"/>
           <p:cNvSpPr txBox="1"/>
           <p:nvPr/>
         </p:nvSpPr>
@@ -3914,26 +3875,26 @@
           <a:p>
             <a:pPr algn="ctr"/>
             <a:r>
-              <a:rPr sz="900" b="0" i="0">
+              <a:rPr sz="800" b="0" i="0">
                 <a:solidFill>
                   <a:srgbClr val="FFFFFF"/>
                 </a:solidFill>
               </a:rPr>
-              <a:t>SHY-Performance  ·  Formation FIM  ·  V6-01062026SHY-TE</a:t>
-            </a:r>
-          </a:p>
-        </p:txBody>
-      </p:sp>
-      <p:sp>
-        <p:nvSpPr>
-          <p:cNvPr id="10" name="Rectangle 9"/>
+              <a:t>SHY-Performance  ·  Formation FIM  ·  UNICEF France  ·  V6-01062026SHY-TE</a:t>
+            </a:r>
+          </a:p>
+        </p:txBody>
+      </p:sp>
+      <p:sp>
+        <p:nvSpPr>
+          <p:cNvPr id="11" name="Rectangle 10"/>
           <p:cNvSpPr/>
           <p:nvPr/>
         </p:nvSpPr>
         <p:spPr>
           <a:xfrm>
             <a:off x="274320" y="804672"/>
-            <a:ext cx="2910078" cy="274320"/>
+            <a:ext cx="2910078" cy="292608"/>
           </a:xfrm>
           <a:prstGeom prst="rect">
             <a:avLst/>
@@ -3969,14 +3930,14 @@
       </p:sp>
       <p:sp>
         <p:nvSpPr>
-          <p:cNvPr id="11" name="TextBox 10"/>
+          <p:cNvPr id="12" name="TextBox 11"/>
           <p:cNvSpPr txBox="1"/>
           <p:nvPr/>
         </p:nvSpPr>
         <p:spPr>
           <a:xfrm>
-            <a:off x="347472" y="841248"/>
-            <a:ext cx="2763774" cy="219456"/>
+            <a:off x="365760" y="841248"/>
+            <a:ext cx="2745486" cy="237744"/>
           </a:xfrm>
           <a:prstGeom prst="rect">
             <a:avLst/>
@@ -3991,7 +3952,7 @@
           <a:p>
             <a:pPr algn="l"/>
             <a:r>
-              <a:rPr sz="800" b="1" i="0">
+              <a:rPr sz="900" b="1" i="0">
                 <a:solidFill>
                   <a:srgbClr val="FFFFFF"/>
                 </a:solidFill>
@@ -4003,14 +3964,14 @@
       </p:sp>
       <p:sp>
         <p:nvSpPr>
-          <p:cNvPr id="12" name="Rectangle 11"/>
+          <p:cNvPr id="13" name="Rectangle 12"/>
           <p:cNvSpPr/>
           <p:nvPr/>
         </p:nvSpPr>
         <p:spPr>
           <a:xfrm>
-            <a:off x="274320" y="1078992"/>
-            <a:ext cx="2910078" cy="3840480"/>
+            <a:off x="274320" y="1097280"/>
+            <a:ext cx="2910078" cy="4370831"/>
           </a:xfrm>
           <a:prstGeom prst="rect">
             <a:avLst/>
@@ -4018,7 +3979,7 @@
           <a:solidFill>
             <a:srgbClr val="FFFFFF"/>
           </a:solidFill>
-          <a:ln w="12700">
+          <a:ln w="15240">
             <a:solidFill>
               <a:srgbClr val="005555"/>
             </a:solidFill>
@@ -4048,14 +4009,14 @@
       </p:sp>
       <p:sp>
         <p:nvSpPr>
-          <p:cNvPr id="13" name="TextBox 12"/>
+          <p:cNvPr id="14" name="TextBox 13"/>
           <p:cNvSpPr txBox="1"/>
           <p:nvPr/>
         </p:nvSpPr>
         <p:spPr>
           <a:xfrm>
-            <a:off x="384048" y="1124712"/>
-            <a:ext cx="2690622" cy="3657600"/>
+            <a:off x="384048" y="1152144"/>
+            <a:ext cx="2708910" cy="4160520"/>
           </a:xfrm>
           <a:prstGeom prst="rect">
             <a:avLst/>
@@ -4070,28 +4031,28 @@
           <a:p>
             <a:pPr algn="l"/>
             <a:r>
-              <a:rPr sz="900" b="0" i="0">
+              <a:rPr sz="950" b="0" i="0">
                 <a:solidFill>
                   <a:srgbClr val="1A1A1A"/>
                 </a:solidFill>
               </a:rPr>
-              <a:t>Vous analysez 3 campagnes
-de collecte en France :
-deux succès, un échec.</a:t>
-            </a:r>
-          </a:p>
-        </p:txBody>
-      </p:sp>
-      <p:sp>
-        <p:nvSpPr>
-          <p:cNvPr id="14" name="Rectangle 13"/>
+              <a:t>Vous analysez 2 campagnes
+de collecte téléphonique :
+une réussie, une en difficulté.</a:t>
+            </a:r>
+          </a:p>
+        </p:txBody>
+      </p:sp>
+      <p:sp>
+        <p:nvSpPr>
+          <p:cNvPr id="15" name="Rectangle 14"/>
           <p:cNvSpPr/>
           <p:nvPr/>
         </p:nvSpPr>
         <p:spPr>
           <a:xfrm>
             <a:off x="3202686" y="804672"/>
-            <a:ext cx="2910078" cy="274320"/>
+            <a:ext cx="2910078" cy="292608"/>
           </a:xfrm>
           <a:prstGeom prst="rect">
             <a:avLst/>
@@ -4127,14 +4088,14 @@
       </p:sp>
       <p:sp>
         <p:nvSpPr>
-          <p:cNvPr id="15" name="TextBox 14"/>
+          <p:cNvPr id="16" name="TextBox 15"/>
           <p:cNvSpPr txBox="1"/>
           <p:nvPr/>
         </p:nvSpPr>
         <p:spPr>
           <a:xfrm>
-            <a:off x="3275838" y="841248"/>
-            <a:ext cx="2763774" cy="219456"/>
+            <a:off x="3294126" y="841248"/>
+            <a:ext cx="2745486" cy="237744"/>
           </a:xfrm>
           <a:prstGeom prst="rect">
             <a:avLst/>
@@ -4149,7 +4110,7 @@
           <a:p>
             <a:pPr algn="l"/>
             <a:r>
-              <a:rPr sz="800" b="1" i="0">
+              <a:rPr sz="900" b="1" i="0">
                 <a:solidFill>
                   <a:srgbClr val="FFFFFF"/>
                 </a:solidFill>
@@ -4161,14 +4122,14 @@
       </p:sp>
       <p:sp>
         <p:nvSpPr>
-          <p:cNvPr id="16" name="Rectangle 15"/>
+          <p:cNvPr id="17" name="Rectangle 16"/>
           <p:cNvSpPr/>
           <p:nvPr/>
         </p:nvSpPr>
         <p:spPr>
           <a:xfrm>
-            <a:off x="3202686" y="1078992"/>
-            <a:ext cx="2910078" cy="3840480"/>
+            <a:off x="3202686" y="1097280"/>
+            <a:ext cx="2910078" cy="4370831"/>
           </a:xfrm>
           <a:prstGeom prst="rect">
             <a:avLst/>
@@ -4176,7 +4137,7 @@
           <a:solidFill>
             <a:srgbClr val="FFFFFF"/>
           </a:solidFill>
-          <a:ln w="12700">
+          <a:ln w="15240">
             <a:solidFill>
               <a:srgbClr val="008080"/>
             </a:solidFill>
@@ -4206,14 +4167,14 @@
       </p:sp>
       <p:sp>
         <p:nvSpPr>
-          <p:cNvPr id="17" name="TextBox 16"/>
+          <p:cNvPr id="18" name="TextBox 17"/>
           <p:cNvSpPr txBox="1"/>
           <p:nvPr/>
         </p:nvSpPr>
         <p:spPr>
           <a:xfrm>
-            <a:off x="3312414" y="1124712"/>
-            <a:ext cx="2690622" cy="3657600"/>
+            <a:off x="3312414" y="1152144"/>
+            <a:ext cx="2708910" cy="4160520"/>
           </a:xfrm>
           <a:prstGeom prst="rect">
             <a:avLst/>
@@ -4228,34 +4189,34 @@
           <a:p>
             <a:pPr algn="l"/>
             <a:r>
-              <a:rPr sz="900" b="0" i="0">
+              <a:rPr sz="950" b="0" i="0">
                 <a:solidFill>
                   <a:srgbClr val="1A1A1A"/>
                 </a:solidFill>
               </a:rPr>
               <a:t>'Qu'est-ce qui a fait
 la différence ?
-Pourquoi ça a marché ?'</a:t>
-            </a:r>
-          </a:p>
-        </p:txBody>
-      </p:sp>
-      <p:sp>
-        <p:nvSpPr>
-          <p:cNvPr id="18" name="Rectangle 17"/>
+Pourquoi l'une a converti ?'</a:t>
+            </a:r>
+          </a:p>
+        </p:txBody>
+      </p:sp>
+      <p:sp>
+        <p:nvSpPr>
+          <p:cNvPr id="19" name="Rectangle 18"/>
           <p:cNvSpPr/>
           <p:nvPr/>
         </p:nvSpPr>
         <p:spPr>
           <a:xfrm>
             <a:off x="6131052" y="804672"/>
-            <a:ext cx="2910078" cy="274320"/>
+            <a:ext cx="2910078" cy="292608"/>
           </a:xfrm>
           <a:prstGeom prst="rect">
             <a:avLst/>
           </a:prstGeom>
           <a:solidFill>
-            <a:srgbClr val="2A7A50"/>
+            <a:srgbClr val="006A6A"/>
           </a:solidFill>
           <a:ln>
             <a:noFill/>
@@ -4285,14 +4246,330 @@
       </p:sp>
       <p:sp>
         <p:nvSpPr>
-          <p:cNvPr id="19" name="TextBox 18"/>
+          <p:cNvPr id="20" name="TextBox 19"/>
           <p:cNvSpPr txBox="1"/>
           <p:nvPr/>
         </p:nvSpPr>
         <p:spPr>
           <a:xfrm>
-            <a:off x="6204204" y="841248"/>
-            <a:ext cx="2763774" cy="219456"/>
+            <a:off x="6222492" y="841248"/>
+            <a:ext cx="2745486" cy="237744"/>
+          </a:xfrm>
+          <a:prstGeom prst="rect">
+            <a:avLst/>
+          </a:prstGeom>
+          <a:noFill/>
+        </p:spPr>
+        <p:txBody>
+          <a:bodyPr wrap="square">
+            <a:spAutoFit/>
+          </a:bodyPr>
+          <a:lstStyle/>
+          <a:p>
+            <a:pPr algn="l"/>
+            <a:r>
+              <a:rPr sz="900" b="1" i="0">
+                <a:solidFill>
+                  <a:srgbClr val="FFFFFF"/>
+                </a:solidFill>
+              </a:rPr>
+              <a:t>APPORT</a:t>
+            </a:r>
+          </a:p>
+        </p:txBody>
+      </p:sp>
+      <p:sp>
+        <p:nvSpPr>
+          <p:cNvPr id="21" name="Rectangle 20"/>
+          <p:cNvSpPr/>
+          <p:nvPr/>
+        </p:nvSpPr>
+        <p:spPr>
+          <a:xfrm>
+            <a:off x="6131052" y="1097280"/>
+            <a:ext cx="2910078" cy="4370831"/>
+          </a:xfrm>
+          <a:prstGeom prst="rect">
+            <a:avLst/>
+          </a:prstGeom>
+          <a:solidFill>
+            <a:srgbClr val="FFFFFF"/>
+          </a:solidFill>
+          <a:ln w="15240">
+            <a:solidFill>
+              <a:srgbClr val="006A6A"/>
+            </a:solidFill>
+          </a:ln>
+        </p:spPr>
+        <p:style>
+          <a:lnRef idx="1">
+            <a:schemeClr val="accent1"/>
+          </a:lnRef>
+          <a:fillRef idx="3">
+            <a:schemeClr val="accent1"/>
+          </a:fillRef>
+          <a:effectRef idx="2">
+            <a:schemeClr val="accent1"/>
+          </a:effectRef>
+          <a:fontRef idx="minor">
+            <a:schemeClr val="lt1"/>
+          </a:fontRef>
+        </p:style>
+        <p:txBody>
+          <a:bodyPr rtlCol="0" anchor="ctr"/>
+          <a:lstStyle/>
+          <a:p>
+            <a:pPr algn="ctr"/>
+          </a:p>
+        </p:txBody>
+      </p:sp>
+      <p:sp>
+        <p:nvSpPr>
+          <p:cNvPr id="22" name="TextBox 21"/>
+          <p:cNvSpPr txBox="1"/>
+          <p:nvPr/>
+        </p:nvSpPr>
+        <p:spPr>
+          <a:xfrm>
+            <a:off x="6240780" y="1152144"/>
+            <a:ext cx="2708910" cy="4160520"/>
+          </a:xfrm>
+          <a:prstGeom prst="rect">
+            <a:avLst/>
+          </a:prstGeom>
+          <a:noFill/>
+        </p:spPr>
+        <p:txBody>
+          <a:bodyPr wrap="square">
+            <a:spAutoFit/>
+          </a:bodyPr>
+          <a:lstStyle/>
+          <a:p>
+            <a:pPr algn="l"/>
+            <a:r>
+              <a:rPr sz="950" b="0" i="0">
+                <a:solidFill>
+                  <a:srgbClr val="1A1A1A"/>
+                </a:solidFill>
+              </a:rPr>
+              <a:t>France associative · Loi 1901
+Histoire humanitaire
+Don régulier · Don en Confiance</a:t>
+            </a:r>
+          </a:p>
+        </p:txBody>
+      </p:sp>
+      <p:sp>
+        <p:nvSpPr>
+          <p:cNvPr id="23" name="Rectangle 22"/>
+          <p:cNvSpPr/>
+          <p:nvPr/>
+        </p:nvSpPr>
+        <p:spPr>
+          <a:xfrm>
+            <a:off x="9059418" y="804672"/>
+            <a:ext cx="2910078" cy="292608"/>
+          </a:xfrm>
+          <a:prstGeom prst="rect">
+            <a:avLst/>
+          </a:prstGeom>
+          <a:solidFill>
+            <a:srgbClr val="00AAAA"/>
+          </a:solidFill>
+          <a:ln>
+            <a:noFill/>
+          </a:ln>
+        </p:spPr>
+        <p:style>
+          <a:lnRef idx="1">
+            <a:schemeClr val="accent1"/>
+          </a:lnRef>
+          <a:fillRef idx="3">
+            <a:schemeClr val="accent1"/>
+          </a:fillRef>
+          <a:effectRef idx="2">
+            <a:schemeClr val="accent1"/>
+          </a:effectRef>
+          <a:fontRef idx="minor">
+            <a:schemeClr val="lt1"/>
+          </a:fontRef>
+        </p:style>
+        <p:txBody>
+          <a:bodyPr rtlCol="0" anchor="ctr"/>
+          <a:lstStyle/>
+          <a:p>
+            <a:pPr algn="ctr"/>
+          </a:p>
+        </p:txBody>
+      </p:sp>
+      <p:sp>
+        <p:nvSpPr>
+          <p:cNvPr id="24" name="TextBox 23"/>
+          <p:cNvSpPr txBox="1"/>
+          <p:nvPr/>
+        </p:nvSpPr>
+        <p:spPr>
+          <a:xfrm>
+            <a:off x="9150858" y="841248"/>
+            <a:ext cx="2745486" cy="237744"/>
+          </a:xfrm>
+          <a:prstGeom prst="rect">
+            <a:avLst/>
+          </a:prstGeom>
+          <a:noFill/>
+        </p:spPr>
+        <p:txBody>
+          <a:bodyPr wrap="square">
+            <a:spAutoFit/>
+          </a:bodyPr>
+          <a:lstStyle/>
+          <a:p>
+            <a:pPr algn="l"/>
+            <a:r>
+              <a:rPr sz="900" b="1" i="0">
+                <a:solidFill>
+                  <a:srgbClr val="FFFFFF"/>
+                </a:solidFill>
+              </a:rPr>
+              <a:t>MISE EN PRATIQUE</a:t>
+            </a:r>
+          </a:p>
+        </p:txBody>
+      </p:sp>
+      <p:sp>
+        <p:nvSpPr>
+          <p:cNvPr id="25" name="Rectangle 24"/>
+          <p:cNvSpPr/>
+          <p:nvPr/>
+        </p:nvSpPr>
+        <p:spPr>
+          <a:xfrm>
+            <a:off x="9059418" y="1097280"/>
+            <a:ext cx="2910078" cy="4370831"/>
+          </a:xfrm>
+          <a:prstGeom prst="rect">
+            <a:avLst/>
+          </a:prstGeom>
+          <a:solidFill>
+            <a:srgbClr val="FFFFFF"/>
+          </a:solidFill>
+          <a:ln w="15240">
+            <a:solidFill>
+              <a:srgbClr val="00AAAA"/>
+            </a:solidFill>
+          </a:ln>
+        </p:spPr>
+        <p:style>
+          <a:lnRef idx="1">
+            <a:schemeClr val="accent1"/>
+          </a:lnRef>
+          <a:fillRef idx="3">
+            <a:schemeClr val="accent1"/>
+          </a:fillRef>
+          <a:effectRef idx="2">
+            <a:schemeClr val="accent1"/>
+          </a:effectRef>
+          <a:fontRef idx="minor">
+            <a:schemeClr val="lt1"/>
+          </a:fontRef>
+        </p:style>
+        <p:txBody>
+          <a:bodyPr rtlCol="0" anchor="ctr"/>
+          <a:lstStyle/>
+          <a:p>
+            <a:pPr algn="ctr"/>
+          </a:p>
+        </p:txBody>
+      </p:sp>
+      <p:sp>
+        <p:nvSpPr>
+          <p:cNvPr id="26" name="TextBox 25"/>
+          <p:cNvSpPr txBox="1"/>
+          <p:nvPr/>
+        </p:nvSpPr>
+        <p:spPr>
+          <a:xfrm>
+            <a:off x="9169146" y="1152144"/>
+            <a:ext cx="2708910" cy="4160520"/>
+          </a:xfrm>
+          <a:prstGeom prst="rect">
+            <a:avLst/>
+          </a:prstGeom>
+          <a:noFill/>
+        </p:spPr>
+        <p:txBody>
+          <a:bodyPr wrap="square">
+            <a:spAutoFit/>
+          </a:bodyPr>
+          <a:lstStyle/>
+          <a:p>
+            <a:pPr algn="l"/>
+            <a:r>
+              <a:rPr sz="950" b="0" i="0">
+                <a:solidFill>
+                  <a:srgbClr val="1A1A1A"/>
+                </a:solidFill>
+              </a:rPr>
+              <a:t>Simulation : 'Expliquez
+le don régulier à un prospect
+sceptique en 90 secondes.'</a:t>
+            </a:r>
+          </a:p>
+        </p:txBody>
+      </p:sp>
+      <p:sp>
+        <p:nvSpPr>
+          <p:cNvPr id="27" name="Rectangle 26"/>
+          <p:cNvSpPr/>
+          <p:nvPr/>
+        </p:nvSpPr>
+        <p:spPr>
+          <a:xfrm>
+            <a:off x="274320" y="5596128"/>
+            <a:ext cx="11640312" cy="256032"/>
+          </a:xfrm>
+          <a:prstGeom prst="rect">
+            <a:avLst/>
+          </a:prstGeom>
+          <a:solidFill>
+            <a:srgbClr val="008080"/>
+          </a:solidFill>
+          <a:ln>
+            <a:noFill/>
+          </a:ln>
+        </p:spPr>
+        <p:style>
+          <a:lnRef idx="1">
+            <a:schemeClr val="accent1"/>
+          </a:lnRef>
+          <a:fillRef idx="3">
+            <a:schemeClr val="accent1"/>
+          </a:fillRef>
+          <a:effectRef idx="2">
+            <a:schemeClr val="accent1"/>
+          </a:effectRef>
+          <a:fontRef idx="minor">
+            <a:schemeClr val="lt1"/>
+          </a:fontRef>
+        </p:style>
+        <p:txBody>
+          <a:bodyPr rtlCol="0" anchor="ctr"/>
+          <a:lstStyle/>
+          <a:p>
+            <a:pPr algn="ctr"/>
+          </a:p>
+        </p:txBody>
+      </p:sp>
+      <p:sp>
+        <p:nvSpPr>
+          <p:cNvPr id="28" name="TextBox 27"/>
+          <p:cNvSpPr txBox="1"/>
+          <p:nvPr/>
+        </p:nvSpPr>
+        <p:spPr>
+          <a:xfrm>
+            <a:off x="384048" y="5632704"/>
+            <a:ext cx="11430000" cy="201168"/>
           </a:xfrm>
           <a:prstGeom prst="rect">
             <a:avLst/>
@@ -4312,21 +4589,21 @@
                   <a:srgbClr val="FFFFFF"/>
                 </a:solidFill>
               </a:rPr>
-              <a:t>APPORT</a:t>
-            </a:r>
-          </a:p>
-        </p:txBody>
-      </p:sp>
-      <p:sp>
-        <p:nvSpPr>
-          <p:cNvPr id="20" name="Rectangle 19"/>
+              <a:t>Vos 3 réussites à valider aujourd'hui</a:t>
+            </a:r>
+          </a:p>
+        </p:txBody>
+      </p:sp>
+      <p:sp>
+        <p:nvSpPr>
+          <p:cNvPr id="29" name="Rectangle 28"/>
           <p:cNvSpPr/>
           <p:nvPr/>
         </p:nvSpPr>
         <p:spPr>
           <a:xfrm>
-            <a:off x="6131052" y="1078992"/>
-            <a:ext cx="2910078" cy="3840480"/>
+            <a:off x="274320" y="5870448"/>
+            <a:ext cx="3843528" cy="502920"/>
           </a:xfrm>
           <a:prstGeom prst="rect">
             <a:avLst/>
@@ -4334,9 +4611,9 @@
           <a:solidFill>
             <a:srgbClr val="FFFFFF"/>
           </a:solidFill>
-          <a:ln w="12700">
+          <a:ln w="7620">
             <a:solidFill>
-              <a:srgbClr val="2A7A50"/>
+              <a:srgbClr val="008080"/>
             </a:solidFill>
           </a:ln>
         </p:spPr>
@@ -4364,14 +4641,14 @@
       </p:sp>
       <p:sp>
         <p:nvSpPr>
-          <p:cNvPr id="21" name="TextBox 20"/>
+          <p:cNvPr id="30" name="TextBox 29"/>
           <p:cNvSpPr txBox="1"/>
           <p:nvPr/>
         </p:nvSpPr>
         <p:spPr>
           <a:xfrm>
-            <a:off x="6240780" y="1124712"/>
-            <a:ext cx="2690622" cy="3657600"/>
+            <a:off x="384048" y="5907024"/>
+            <a:ext cx="3715512" cy="420624"/>
           </a:xfrm>
           <a:prstGeom prst="rect">
             <a:avLst/>
@@ -4391,32 +4668,32 @@
                   <a:srgbClr val="1A1A1A"/>
                 </a:solidFill>
               </a:rPr>
-              <a:t>Portrait du donateur
-français. Économie
-du don régulier.</a:t>
-            </a:r>
-          </a:p>
-        </p:txBody>
-      </p:sp>
-      <p:sp>
-        <p:nvSpPr>
-          <p:cNvPr id="22" name="Rectangle 21"/>
+              <a:t>✔ Restitution orale étude de cas (5 min)</a:t>
+            </a:r>
+          </a:p>
+        </p:txBody>
+      </p:sp>
+      <p:sp>
+        <p:nvSpPr>
+          <p:cNvPr id="31" name="Rectangle 30"/>
           <p:cNvSpPr/>
           <p:nvPr/>
         </p:nvSpPr>
         <p:spPr>
           <a:xfrm>
-            <a:off x="9059418" y="804672"/>
-            <a:ext cx="2910078" cy="274320"/>
+            <a:off x="4154423" y="5870448"/>
+            <a:ext cx="3843528" cy="502920"/>
           </a:xfrm>
           <a:prstGeom prst="rect">
             <a:avLst/>
           </a:prstGeom>
           <a:solidFill>
-            <a:srgbClr val="FF0000"/>
+            <a:srgbClr val="F0F7F7"/>
           </a:solidFill>
-          <a:ln>
-            <a:noFill/>
+          <a:ln w="7620">
+            <a:solidFill>
+              <a:srgbClr val="008080"/>
+            </a:solidFill>
           </a:ln>
         </p:spPr>
         <p:style>
@@ -4443,14 +4720,14 @@
       </p:sp>
       <p:sp>
         <p:nvSpPr>
-          <p:cNvPr id="23" name="TextBox 22"/>
+          <p:cNvPr id="32" name="TextBox 31"/>
           <p:cNvSpPr txBox="1"/>
           <p:nvPr/>
         </p:nvSpPr>
         <p:spPr>
           <a:xfrm>
-            <a:off x="9132570" y="841248"/>
-            <a:ext cx="2763774" cy="219456"/>
+            <a:off x="4264152" y="5907024"/>
+            <a:ext cx="3715512" cy="420624"/>
           </a:xfrm>
           <a:prstGeom prst="rect">
             <a:avLst/>
@@ -4465,26 +4742,26 @@
           <a:p>
             <a:pPr algn="l"/>
             <a:r>
-              <a:rPr sz="800" b="1" i="0">
+              <a:rPr sz="900" b="0" i="0">
                 <a:solidFill>
-                  <a:srgbClr val="FFFFFF"/>
+                  <a:srgbClr val="1A1A1A"/>
                 </a:solidFill>
               </a:rPr>
-              <a:t>MISE EN PRATIQUE</a:t>
-            </a:r>
-          </a:p>
-        </p:txBody>
-      </p:sp>
-      <p:sp>
-        <p:nvSpPr>
-          <p:cNvPr id="24" name="Rectangle 23"/>
+              <a:t>✔ Fiche 'Secteur associatif' complétée</a:t>
+            </a:r>
+          </a:p>
+        </p:txBody>
+      </p:sp>
+      <p:sp>
+        <p:nvSpPr>
+          <p:cNvPr id="33" name="Rectangle 32"/>
           <p:cNvSpPr/>
           <p:nvPr/>
         </p:nvSpPr>
         <p:spPr>
           <a:xfrm>
-            <a:off x="9059418" y="1078992"/>
-            <a:ext cx="2910078" cy="3840480"/>
+            <a:off x="8034528" y="5870448"/>
+            <a:ext cx="3843528" cy="502920"/>
           </a:xfrm>
           <a:prstGeom prst="rect">
             <a:avLst/>
@@ -4492,9 +4769,9 @@
           <a:solidFill>
             <a:srgbClr val="FFFFFF"/>
           </a:solidFill>
-          <a:ln w="12700">
+          <a:ln w="7620">
             <a:solidFill>
-              <a:srgbClr val="FF0000"/>
+              <a:srgbClr val="008080"/>
             </a:solidFill>
           </a:ln>
         </p:spPr>
@@ -4522,14 +4799,14 @@
       </p:sp>
       <p:sp>
         <p:nvSpPr>
-          <p:cNvPr id="25" name="TextBox 24"/>
+          <p:cNvPr id="34" name="TextBox 33"/>
           <p:cNvSpPr txBox="1"/>
           <p:nvPr/>
         </p:nvSpPr>
         <p:spPr>
           <a:xfrm>
-            <a:off x="9169146" y="1124712"/>
-            <a:ext cx="2690622" cy="3657600"/>
+            <a:off x="8144256" y="5907024"/>
+            <a:ext cx="3715512" cy="420624"/>
           </a:xfrm>
           <a:prstGeom prst="rect">
             <a:avLst/>
@@ -4549,323 +4826,7 @@
                   <a:srgbClr val="1A1A1A"/>
                 </a:solidFill>
               </a:rPr>
-              <a:t>Simulation : 'Si 50
-français donnent 10€/mois,
-quel impact en 1 an ?'</a:t>
-            </a:r>
-          </a:p>
-        </p:txBody>
-      </p:sp>
-      <p:sp>
-        <p:nvSpPr>
-          <p:cNvPr id="26" name="Rectangle 25"/>
-          <p:cNvSpPr/>
-          <p:nvPr/>
-        </p:nvSpPr>
-        <p:spPr>
-          <a:xfrm>
-            <a:off x="274320" y="5074920"/>
-            <a:ext cx="11640312" cy="274320"/>
-          </a:xfrm>
-          <a:prstGeom prst="rect">
-            <a:avLst/>
-          </a:prstGeom>
-          <a:solidFill>
-            <a:srgbClr val="FF0000"/>
-          </a:solidFill>
-          <a:ln>
-            <a:noFill/>
-          </a:ln>
-        </p:spPr>
-        <p:style>
-          <a:lnRef idx="1">
-            <a:schemeClr val="accent1"/>
-          </a:lnRef>
-          <a:fillRef idx="3">
-            <a:schemeClr val="accent1"/>
-          </a:fillRef>
-          <a:effectRef idx="2">
-            <a:schemeClr val="accent1"/>
-          </a:effectRef>
-          <a:fontRef idx="minor">
-            <a:schemeClr val="lt1"/>
-          </a:fontRef>
-        </p:style>
-        <p:txBody>
-          <a:bodyPr rtlCol="0" anchor="ctr"/>
-          <a:lstStyle/>
-          <a:p>
-            <a:pPr algn="ctr"/>
-          </a:p>
-        </p:txBody>
-      </p:sp>
-      <p:sp>
-        <p:nvSpPr>
-          <p:cNvPr id="27" name="TextBox 26"/>
-          <p:cNvSpPr txBox="1"/>
-          <p:nvPr/>
-        </p:nvSpPr>
-        <p:spPr>
-          <a:xfrm>
-            <a:off x="384048" y="5111496"/>
-            <a:ext cx="11430000" cy="219456"/>
-          </a:xfrm>
-          <a:prstGeom prst="rect">
-            <a:avLst/>
-          </a:prstGeom>
-          <a:noFill/>
-        </p:spPr>
-        <p:txBody>
-          <a:bodyPr wrap="square">
-            <a:spAutoFit/>
-          </a:bodyPr>
-          <a:lstStyle/>
-          <a:p>
-            <a:pPr algn="l"/>
-            <a:r>
-              <a:rPr sz="900" b="1" i="0">
-                <a:solidFill>
-                  <a:srgbClr val="FFFFFF"/>
-                </a:solidFill>
-              </a:rPr>
-              <a:t>Vos 3 réussites à valider aujourd'hui</a:t>
-            </a:r>
-          </a:p>
-        </p:txBody>
-      </p:sp>
-      <p:sp>
-        <p:nvSpPr>
-          <p:cNvPr id="28" name="Rectangle 27"/>
-          <p:cNvSpPr/>
-          <p:nvPr/>
-        </p:nvSpPr>
-        <p:spPr>
-          <a:xfrm>
-            <a:off x="274320" y="5367528"/>
-            <a:ext cx="3843528" cy="502920"/>
-          </a:xfrm>
-          <a:prstGeom prst="rect">
-            <a:avLst/>
-          </a:prstGeom>
-          <a:solidFill>
-            <a:srgbClr val="FFFFFF"/>
-          </a:solidFill>
-          <a:ln w="10160">
-            <a:solidFill>
-              <a:srgbClr val="FF0000"/>
-            </a:solidFill>
-          </a:ln>
-        </p:spPr>
-        <p:style>
-          <a:lnRef idx="1">
-            <a:schemeClr val="accent1"/>
-          </a:lnRef>
-          <a:fillRef idx="3">
-            <a:schemeClr val="accent1"/>
-          </a:fillRef>
-          <a:effectRef idx="2">
-            <a:schemeClr val="accent1"/>
-          </a:effectRef>
-          <a:fontRef idx="minor">
-            <a:schemeClr val="lt1"/>
-          </a:fontRef>
-        </p:style>
-        <p:txBody>
-          <a:bodyPr rtlCol="0" anchor="ctr"/>
-          <a:lstStyle/>
-          <a:p>
-            <a:pPr algn="ctr"/>
-          </a:p>
-        </p:txBody>
-      </p:sp>
-      <p:sp>
-        <p:nvSpPr>
-          <p:cNvPr id="29" name="TextBox 28"/>
-          <p:cNvSpPr txBox="1"/>
-          <p:nvPr/>
-        </p:nvSpPr>
-        <p:spPr>
-          <a:xfrm>
-            <a:off x="365760" y="5404104"/>
-            <a:ext cx="3715512" cy="420624"/>
-          </a:xfrm>
-          <a:prstGeom prst="rect">
-            <a:avLst/>
-          </a:prstGeom>
-          <a:noFill/>
-        </p:spPr>
-        <p:txBody>
-          <a:bodyPr wrap="square">
-            <a:spAutoFit/>
-          </a:bodyPr>
-          <a:lstStyle/>
-          <a:p>
-            <a:pPr algn="l"/>
-            <a:r>
-              <a:rPr sz="900" b="0" i="0">
-                <a:solidFill>
-                  <a:srgbClr val="1A1A1A"/>
-                </a:solidFill>
-              </a:rPr>
-              <a:t>✔ Restitution orale de l'étude de cas (5 min)</a:t>
-            </a:r>
-          </a:p>
-        </p:txBody>
-      </p:sp>
-      <p:sp>
-        <p:nvSpPr>
-          <p:cNvPr id="30" name="Rectangle 29"/>
-          <p:cNvSpPr/>
-          <p:nvPr/>
-        </p:nvSpPr>
-        <p:spPr>
-          <a:xfrm>
-            <a:off x="4154423" y="5367528"/>
-            <a:ext cx="3843528" cy="502920"/>
-          </a:xfrm>
-          <a:prstGeom prst="rect">
-            <a:avLst/>
-          </a:prstGeom>
-          <a:solidFill>
-            <a:srgbClr val="FFFFFF"/>
-          </a:solidFill>
-          <a:ln w="10160">
-            <a:solidFill>
-              <a:srgbClr val="FF0000"/>
-            </a:solidFill>
-          </a:ln>
-        </p:spPr>
-        <p:style>
-          <a:lnRef idx="1">
-            <a:schemeClr val="accent1"/>
-          </a:lnRef>
-          <a:fillRef idx="3">
-            <a:schemeClr val="accent1"/>
-          </a:fillRef>
-          <a:effectRef idx="2">
-            <a:schemeClr val="accent1"/>
-          </a:effectRef>
-          <a:fontRef idx="minor">
-            <a:schemeClr val="lt1"/>
-          </a:fontRef>
-        </p:style>
-        <p:txBody>
-          <a:bodyPr rtlCol="0" anchor="ctr"/>
-          <a:lstStyle/>
-          <a:p>
-            <a:pPr algn="ctr"/>
-          </a:p>
-        </p:txBody>
-      </p:sp>
-      <p:sp>
-        <p:nvSpPr>
-          <p:cNvPr id="31" name="TextBox 30"/>
-          <p:cNvSpPr txBox="1"/>
-          <p:nvPr/>
-        </p:nvSpPr>
-        <p:spPr>
-          <a:xfrm>
-            <a:off x="4245863" y="5404104"/>
-            <a:ext cx="3715512" cy="420624"/>
-          </a:xfrm>
-          <a:prstGeom prst="rect">
-            <a:avLst/>
-          </a:prstGeom>
-          <a:noFill/>
-        </p:spPr>
-        <p:txBody>
-          <a:bodyPr wrap="square">
-            <a:spAutoFit/>
-          </a:bodyPr>
-          <a:lstStyle/>
-          <a:p>
-            <a:pPr algn="l"/>
-            <a:r>
-              <a:rPr sz="900" b="0" i="0">
-                <a:solidFill>
-                  <a:srgbClr val="1A1A1A"/>
-                </a:solidFill>
-              </a:rPr>
-              <a:t>✔ Fiche 'Portrait donateur' complétée</a:t>
-            </a:r>
-          </a:p>
-        </p:txBody>
-      </p:sp>
-      <p:sp>
-        <p:nvSpPr>
-          <p:cNvPr id="32" name="Rectangle 31"/>
-          <p:cNvSpPr/>
-          <p:nvPr/>
-        </p:nvSpPr>
-        <p:spPr>
-          <a:xfrm>
-            <a:off x="8034527" y="5367528"/>
-            <a:ext cx="3843528" cy="502920"/>
-          </a:xfrm>
-          <a:prstGeom prst="rect">
-            <a:avLst/>
-          </a:prstGeom>
-          <a:solidFill>
-            <a:srgbClr val="FFFFFF"/>
-          </a:solidFill>
-          <a:ln w="10160">
-            <a:solidFill>
-              <a:srgbClr val="FF0000"/>
-            </a:solidFill>
-          </a:ln>
-        </p:spPr>
-        <p:style>
-          <a:lnRef idx="1">
-            <a:schemeClr val="accent1"/>
-          </a:lnRef>
-          <a:fillRef idx="3">
-            <a:schemeClr val="accent1"/>
-          </a:fillRef>
-          <a:effectRef idx="2">
-            <a:schemeClr val="accent1"/>
-          </a:effectRef>
-          <a:fontRef idx="minor">
-            <a:schemeClr val="lt1"/>
-          </a:fontRef>
-        </p:style>
-        <p:txBody>
-          <a:bodyPr rtlCol="0" anchor="ctr"/>
-          <a:lstStyle/>
-          <a:p>
-            <a:pPr algn="ctr"/>
-          </a:p>
-        </p:txBody>
-      </p:sp>
-      <p:sp>
-        <p:nvSpPr>
-          <p:cNvPr id="33" name="TextBox 32"/>
-          <p:cNvSpPr txBox="1"/>
-          <p:nvPr/>
-        </p:nvSpPr>
-        <p:spPr>
-          <a:xfrm>
-            <a:off x="8125967" y="5404104"/>
-            <a:ext cx="3715512" cy="420624"/>
-          </a:xfrm>
-          <a:prstGeom prst="rect">
-            <a:avLst/>
-          </a:prstGeom>
-          <a:noFill/>
-        </p:spPr>
-        <p:txBody>
-          <a:bodyPr wrap="square">
-            <a:spAutoFit/>
-          </a:bodyPr>
-          <a:lstStyle/>
-          <a:p>
-            <a:pPr algn="l"/>
-            <a:r>
-              <a:rPr sz="900" b="0" i="0">
-                <a:solidFill>
-                  <a:srgbClr val="1A1A1A"/>
-                </a:solidFill>
-              </a:rPr>
-              <a:t>✔ 1 réflexion dans votre livret personnel</a:t>
+              <a:t>✔ Réflexion LFI : légitimité du PA</a:t>
             </a:r>
           </a:p>
         </p:txBody>
@@ -4940,7 +4901,7 @@
         <p:spPr>
           <a:xfrm>
             <a:off x="0" y="0"/>
-            <a:ext cx="12188952" cy="658368"/>
+            <a:ext cx="12188952" cy="685800"/>
           </a:xfrm>
           <a:prstGeom prst="rect">
             <a:avLst/>
@@ -4982,14 +4943,14 @@
         </p:nvSpPr>
         <p:spPr>
           <a:xfrm>
-            <a:off x="0" y="640080"/>
-            <a:ext cx="12188952" cy="54864"/>
+            <a:off x="0" y="667512"/>
+            <a:ext cx="12188952" cy="45720"/>
           </a:xfrm>
           <a:prstGeom prst="rect">
             <a:avLst/>
           </a:prstGeom>
           <a:solidFill>
-            <a:srgbClr val="FF0000"/>
+            <a:srgbClr val="00AAAA"/>
           </a:solidFill>
           <a:ln>
             <a:noFill/>
@@ -5025,8 +4986,8 @@
         </p:nvSpPr>
         <p:spPr>
           <a:xfrm>
-            <a:off x="164592" y="64008"/>
-            <a:ext cx="685800" cy="530352"/>
+            <a:off x="164592" y="73152"/>
+            <a:ext cx="2011680" cy="347472"/>
           </a:xfrm>
           <a:prstGeom prst="rect">
             <a:avLst/>
@@ -5041,12 +5002,12 @@
           <a:p>
             <a:pPr algn="l"/>
             <a:r>
-              <a:rPr sz="2000" b="1" i="0">
+              <a:rPr sz="1400" b="1" i="0">
                 <a:solidFill>
                   <a:srgbClr val="FFFFFF"/>
                 </a:solidFill>
               </a:rPr>
-              <a:t>SHY</a:t>
+              <a:t>SHY-Performance</a:t>
             </a:r>
           </a:p>
         </p:txBody>
@@ -5059,14 +5020,14 @@
         </p:nvSpPr>
         <p:spPr>
           <a:xfrm>
-            <a:off x="914400" y="91440"/>
-            <a:ext cx="36576" cy="475488"/>
+            <a:off x="2286000" y="91440"/>
+            <a:ext cx="36576" cy="502920"/>
           </a:xfrm>
           <a:prstGeom prst="rect">
             <a:avLst/>
           </a:prstGeom>
           <a:solidFill>
-            <a:srgbClr val="FF0000"/>
+            <a:srgbClr val="00AAAA"/>
           </a:solidFill>
           <a:ln>
             <a:noFill/>
@@ -5102,8 +5063,8 @@
         </p:nvSpPr>
         <p:spPr>
           <a:xfrm>
-            <a:off x="1024128" y="91440"/>
-            <a:ext cx="10881360" cy="475488"/>
+            <a:off x="2423160" y="91440"/>
+            <a:ext cx="9235440" cy="502920"/>
           </a:xfrm>
           <a:prstGeom prst="rect">
             <a:avLst/>
@@ -5118,19 +5079,43 @@
           <a:p>
             <a:pPr algn="l"/>
             <a:r>
-              <a:rPr sz="1700" b="1" i="0">
+              <a:rPr sz="1600" b="1" i="0">
                 <a:solidFill>
                   <a:srgbClr val="FFFFFF"/>
                 </a:solidFill>
               </a:rPr>
-              <a:t>Le Donateur Français — Qui est-il vraiment ?</a:t>
-            </a:r>
-          </a:p>
-        </p:txBody>
-      </p:sp>
-      <p:sp>
-        <p:nvSpPr>
-          <p:cNvPr id="8" name="Rectangle 7"/>
+              <a:t>La France Associative — Votre Cadre de Légitimité</a:t>
+            </a:r>
+          </a:p>
+        </p:txBody>
+      </p:sp>
+      <p:pic>
+        <p:nvPicPr>
+          <p:cNvPr id="8" name="Picture 7" descr="shy_logo_v2.png"/>
+          <p:cNvPicPr>
+            <a:picLocks noChangeAspect="1"/>
+          </p:cNvPicPr>
+          <p:nvPr/>
+        </p:nvPicPr>
+        <p:blipFill>
+          <a:blip r:embed="rId2"/>
+          <a:stretch>
+            <a:fillRect/>
+          </a:stretch>
+        </p:blipFill>
+        <p:spPr>
+          <a:xfrm>
+            <a:off x="11247120" y="0"/>
+            <a:ext cx="822960" cy="676656"/>
+          </a:xfrm>
+          <a:prstGeom prst="rect">
+            <a:avLst/>
+          </a:prstGeom>
+        </p:spPr>
+      </p:pic>
+      <p:sp>
+        <p:nvSpPr>
+          <p:cNvPr id="9" name="Rectangle 8"/>
           <p:cNvSpPr/>
           <p:nvPr/>
         </p:nvSpPr>
@@ -5173,7 +5158,7 @@
       </p:sp>
       <p:sp>
         <p:nvSpPr>
-          <p:cNvPr id="9" name="TextBox 8"/>
+          <p:cNvPr id="10" name="TextBox 9"/>
           <p:cNvSpPr txBox="1"/>
           <p:nvPr/>
         </p:nvSpPr>
@@ -5195,26 +5180,26 @@
           <a:p>
             <a:pPr algn="ctr"/>
             <a:r>
-              <a:rPr sz="900" b="0" i="0">
+              <a:rPr sz="800" b="0" i="0">
                 <a:solidFill>
                   <a:srgbClr val="FFFFFF"/>
                 </a:solidFill>
               </a:rPr>
-              <a:t>SHY-Performance  ·  Formation FIM  ·  V6-01062026SHY-TE</a:t>
-            </a:r>
-          </a:p>
-        </p:txBody>
-      </p:sp>
-      <p:sp>
-        <p:nvSpPr>
-          <p:cNvPr id="10" name="Rectangle 9"/>
+              <a:t>SHY-Performance  ·  Formation FIM  ·  UNICEF France  ·  V6-01062026SHY-TE</a:t>
+            </a:r>
+          </a:p>
+        </p:txBody>
+      </p:sp>
+      <p:sp>
+        <p:nvSpPr>
+          <p:cNvPr id="11" name="Rectangle 10"/>
           <p:cNvSpPr/>
           <p:nvPr/>
         </p:nvSpPr>
         <p:spPr>
           <a:xfrm>
             <a:off x="274320" y="804672"/>
-            <a:ext cx="3794760" cy="457200"/>
+            <a:ext cx="1920240" cy="960120"/>
           </a:xfrm>
           <a:prstGeom prst="rect">
             <a:avLst/>
@@ -5250,14 +5235,14 @@
       </p:sp>
       <p:sp>
         <p:nvSpPr>
-          <p:cNvPr id="11" name="TextBox 10"/>
+          <p:cNvPr id="12" name="TextBox 11"/>
           <p:cNvSpPr txBox="1"/>
           <p:nvPr/>
         </p:nvSpPr>
         <p:spPr>
           <a:xfrm>
-            <a:off x="384048" y="841248"/>
-            <a:ext cx="3566160" cy="384048"/>
+            <a:off x="365760" y="822960"/>
+            <a:ext cx="1737360" cy="548640"/>
           </a:xfrm>
           <a:prstGeom prst="rect">
             <a:avLst/>
@@ -5270,61 +5255,15 @@
           </a:bodyPr>
           <a:lstStyle/>
           <a:p>
-            <a:pPr algn="l"/>
-            <a:r>
-              <a:rPr sz="1200" b="1" i="0">
+            <a:pPr algn="ctr"/>
+            <a:r>
+              <a:rPr sz="1600" b="1" i="0">
                 <a:solidFill>
                   <a:srgbClr val="FFFFFF"/>
                 </a:solidFill>
               </a:rPr>
-              <a:t>Profil A
-Le Régulier engagé</a:t>
-            </a:r>
-          </a:p>
-        </p:txBody>
-      </p:sp>
-      <p:sp>
-        <p:nvSpPr>
-          <p:cNvPr id="12" name="Rectangle 11"/>
-          <p:cNvSpPr/>
-          <p:nvPr/>
-        </p:nvSpPr>
-        <p:spPr>
-          <a:xfrm>
-            <a:off x="274320" y="1261872"/>
-            <a:ext cx="3794760" cy="2926080"/>
-          </a:xfrm>
-          <a:prstGeom prst="rect">
-            <a:avLst/>
-          </a:prstGeom>
-          <a:solidFill>
-            <a:srgbClr val="FFFFFF"/>
-          </a:solidFill>
-          <a:ln w="19050">
-            <a:solidFill>
-              <a:srgbClr val="005555"/>
-            </a:solidFill>
-          </a:ln>
-        </p:spPr>
-        <p:style>
-          <a:lnRef idx="1">
-            <a:schemeClr val="accent1"/>
-          </a:lnRef>
-          <a:fillRef idx="3">
-            <a:schemeClr val="accent1"/>
-          </a:fillRef>
-          <a:effectRef idx="2">
-            <a:schemeClr val="accent1"/>
-          </a:effectRef>
-          <a:fontRef idx="minor">
-            <a:schemeClr val="lt1"/>
-          </a:fontRef>
-        </p:style>
-        <p:txBody>
-          <a:bodyPr rtlCol="0" anchor="ctr"/>
-          <a:lstStyle/>
-          <a:p>
-            <a:pPr algn="ctr"/>
+              <a:t>1,5M</a:t>
+            </a:r>
           </a:p>
         </p:txBody>
       </p:sp>
@@ -5336,8 +5275,8 @@
         </p:nvSpPr>
         <p:spPr>
           <a:xfrm>
-            <a:off x="411479" y="1335024"/>
-            <a:ext cx="3520440" cy="2743200"/>
+            <a:off x="365760" y="1371600"/>
+            <a:ext cx="1737360" cy="365760"/>
           </a:xfrm>
           <a:prstGeom prst="rect">
             <a:avLst/>
@@ -5350,16 +5289,15 @@
           </a:bodyPr>
           <a:lstStyle/>
           <a:p>
-            <a:pPr algn="l"/>
-            <a:r>
-              <a:rPr sz="1000" b="0" i="0">
+            <a:pPr algn="ctr"/>
+            <a:r>
+              <a:rPr sz="900" b="0" i="0">
                 <a:solidFill>
-                  <a:srgbClr val="1A1A1A"/>
+                  <a:srgbClr val="CCEEEE"/>
                 </a:solidFill>
               </a:rPr>
-              <a:t>35–55 ans · CSP+ · Sensible aux causes humanitaires
-Donne déjà à 1 ou 2 associations · Cherche un impact mesurable
-▶ Votre message : transparence des fonds + chiffres concrets</a:t>
+              <a:t>associations en
+France</a:t>
             </a:r>
           </a:p>
         </p:txBody>
@@ -5372,360 +5310,8 @@
         </p:nvSpPr>
         <p:spPr>
           <a:xfrm>
-            <a:off x="4178807" y="804672"/>
-            <a:ext cx="3794760" cy="457200"/>
-          </a:xfrm>
-          <a:prstGeom prst="rect">
-            <a:avLst/>
-          </a:prstGeom>
-          <a:solidFill>
-            <a:srgbClr val="2A7A50"/>
-          </a:solidFill>
-          <a:ln>
-            <a:noFill/>
-          </a:ln>
-        </p:spPr>
-        <p:style>
-          <a:lnRef idx="1">
-            <a:schemeClr val="accent1"/>
-          </a:lnRef>
-          <a:fillRef idx="3">
-            <a:schemeClr val="accent1"/>
-          </a:fillRef>
-          <a:effectRef idx="2">
-            <a:schemeClr val="accent1"/>
-          </a:effectRef>
-          <a:fontRef idx="minor">
-            <a:schemeClr val="lt1"/>
-          </a:fontRef>
-        </p:style>
-        <p:txBody>
-          <a:bodyPr rtlCol="0" anchor="ctr"/>
-          <a:lstStyle/>
-          <a:p>
-            <a:pPr algn="ctr"/>
-          </a:p>
-        </p:txBody>
-      </p:sp>
-      <p:sp>
-        <p:nvSpPr>
-          <p:cNvPr id="15" name="TextBox 14"/>
-          <p:cNvSpPr txBox="1"/>
-          <p:nvPr/>
-        </p:nvSpPr>
-        <p:spPr>
-          <a:xfrm>
-            <a:off x="4288536" y="841248"/>
-            <a:ext cx="3566160" cy="384048"/>
-          </a:xfrm>
-          <a:prstGeom prst="rect">
-            <a:avLst/>
-          </a:prstGeom>
-          <a:noFill/>
-        </p:spPr>
-        <p:txBody>
-          <a:bodyPr wrap="square">
-            <a:spAutoFit/>
-          </a:bodyPr>
-          <a:lstStyle/>
-          <a:p>
-            <a:pPr algn="l"/>
-            <a:r>
-              <a:rPr sz="1200" b="1" i="0">
-                <a:solidFill>
-                  <a:srgbClr val="FFFFFF"/>
-                </a:solidFill>
-              </a:rPr>
-              <a:t>Profil B
-Le Curieux bienveillant</a:t>
-            </a:r>
-          </a:p>
-        </p:txBody>
-      </p:sp>
-      <p:sp>
-        <p:nvSpPr>
-          <p:cNvPr id="16" name="Rectangle 15"/>
-          <p:cNvSpPr/>
-          <p:nvPr/>
-        </p:nvSpPr>
-        <p:spPr>
-          <a:xfrm>
-            <a:off x="4178807" y="1261872"/>
-            <a:ext cx="3794760" cy="2926080"/>
-          </a:xfrm>
-          <a:prstGeom prst="rect">
-            <a:avLst/>
-          </a:prstGeom>
-          <a:solidFill>
-            <a:srgbClr val="FFFFFF"/>
-          </a:solidFill>
-          <a:ln w="19050">
-            <a:solidFill>
-              <a:srgbClr val="2A7A50"/>
-            </a:solidFill>
-          </a:ln>
-        </p:spPr>
-        <p:style>
-          <a:lnRef idx="1">
-            <a:schemeClr val="accent1"/>
-          </a:lnRef>
-          <a:fillRef idx="3">
-            <a:schemeClr val="accent1"/>
-          </a:fillRef>
-          <a:effectRef idx="2">
-            <a:schemeClr val="accent1"/>
-          </a:effectRef>
-          <a:fontRef idx="minor">
-            <a:schemeClr val="lt1"/>
-          </a:fontRef>
-        </p:style>
-        <p:txBody>
-          <a:bodyPr rtlCol="0" anchor="ctr"/>
-          <a:lstStyle/>
-          <a:p>
-            <a:pPr algn="ctr"/>
-          </a:p>
-        </p:txBody>
-      </p:sp>
-      <p:sp>
-        <p:nvSpPr>
-          <p:cNvPr id="17" name="TextBox 16"/>
-          <p:cNvSpPr txBox="1"/>
-          <p:nvPr/>
-        </p:nvSpPr>
-        <p:spPr>
-          <a:xfrm>
-            <a:off x="4315968" y="1335024"/>
-            <a:ext cx="3520440" cy="2743200"/>
-          </a:xfrm>
-          <a:prstGeom prst="rect">
-            <a:avLst/>
-          </a:prstGeom>
-          <a:noFill/>
-        </p:spPr>
-        <p:txBody>
-          <a:bodyPr wrap="square">
-            <a:spAutoFit/>
-          </a:bodyPr>
-          <a:lstStyle/>
-          <a:p>
-            <a:pPr algn="l"/>
-            <a:r>
-              <a:rPr sz="1000" b="0" i="0">
-                <a:solidFill>
-                  <a:srgbClr val="1A1A1A"/>
-                </a:solidFill>
-              </a:rPr>
-              <a:t>25–40 ans · Actif · Empathique mais pressé
-N'a jamais fait de don régulier · Sensible aux histoires vraies
-▶ Votre message : Impact Story + facilité du prélèvement</a:t>
-            </a:r>
-          </a:p>
-        </p:txBody>
-      </p:sp>
-      <p:sp>
-        <p:nvSpPr>
-          <p:cNvPr id="18" name="Rectangle 17"/>
-          <p:cNvSpPr/>
-          <p:nvPr/>
-        </p:nvSpPr>
-        <p:spPr>
-          <a:xfrm>
-            <a:off x="8083296" y="804672"/>
-            <a:ext cx="3794760" cy="457200"/>
-          </a:xfrm>
-          <a:prstGeom prst="rect">
-            <a:avLst/>
-          </a:prstGeom>
-          <a:solidFill>
-            <a:srgbClr val="FF0000"/>
-          </a:solidFill>
-          <a:ln>
-            <a:noFill/>
-          </a:ln>
-        </p:spPr>
-        <p:style>
-          <a:lnRef idx="1">
-            <a:schemeClr val="accent1"/>
-          </a:lnRef>
-          <a:fillRef idx="3">
-            <a:schemeClr val="accent1"/>
-          </a:fillRef>
-          <a:effectRef idx="2">
-            <a:schemeClr val="accent1"/>
-          </a:effectRef>
-          <a:fontRef idx="minor">
-            <a:schemeClr val="lt1"/>
-          </a:fontRef>
-        </p:style>
-        <p:txBody>
-          <a:bodyPr rtlCol="0" anchor="ctr"/>
-          <a:lstStyle/>
-          <a:p>
-            <a:pPr algn="ctr"/>
-          </a:p>
-        </p:txBody>
-      </p:sp>
-      <p:sp>
-        <p:nvSpPr>
-          <p:cNvPr id="19" name="TextBox 18"/>
-          <p:cNvSpPr txBox="1"/>
-          <p:nvPr/>
-        </p:nvSpPr>
-        <p:spPr>
-          <a:xfrm>
-            <a:off x="8193023" y="841248"/>
-            <a:ext cx="3566160" cy="384048"/>
-          </a:xfrm>
-          <a:prstGeom prst="rect">
-            <a:avLst/>
-          </a:prstGeom>
-          <a:noFill/>
-        </p:spPr>
-        <p:txBody>
-          <a:bodyPr wrap="square">
-            <a:spAutoFit/>
-          </a:bodyPr>
-          <a:lstStyle/>
-          <a:p>
-            <a:pPr algn="l"/>
-            <a:r>
-              <a:rPr sz="1200" b="1" i="0">
-                <a:solidFill>
-                  <a:srgbClr val="FFFFFF"/>
-                </a:solidFill>
-              </a:rPr>
-              <a:t>Profil C
-Le Méfiant converti</a:t>
-            </a:r>
-          </a:p>
-        </p:txBody>
-      </p:sp>
-      <p:sp>
-        <p:nvSpPr>
-          <p:cNvPr id="20" name="Rectangle 19"/>
-          <p:cNvSpPr/>
-          <p:nvPr/>
-        </p:nvSpPr>
-        <p:spPr>
-          <a:xfrm>
-            <a:off x="8083296" y="1261872"/>
-            <a:ext cx="3794760" cy="2926080"/>
-          </a:xfrm>
-          <a:prstGeom prst="rect">
-            <a:avLst/>
-          </a:prstGeom>
-          <a:solidFill>
-            <a:srgbClr val="FFFFFF"/>
-          </a:solidFill>
-          <a:ln w="19050">
-            <a:solidFill>
-              <a:srgbClr val="FF0000"/>
-            </a:solidFill>
-          </a:ln>
-        </p:spPr>
-        <p:style>
-          <a:lnRef idx="1">
-            <a:schemeClr val="accent1"/>
-          </a:lnRef>
-          <a:fillRef idx="3">
-            <a:schemeClr val="accent1"/>
-          </a:fillRef>
-          <a:effectRef idx="2">
-            <a:schemeClr val="accent1"/>
-          </a:effectRef>
-          <a:fontRef idx="minor">
-            <a:schemeClr val="lt1"/>
-          </a:fontRef>
-        </p:style>
-        <p:txBody>
-          <a:bodyPr rtlCol="0" anchor="ctr"/>
-          <a:lstStyle/>
-          <a:p>
-            <a:pPr algn="ctr"/>
-          </a:p>
-        </p:txBody>
-      </p:sp>
-      <p:sp>
-        <p:nvSpPr>
-          <p:cNvPr id="21" name="TextBox 20"/>
-          <p:cNvSpPr txBox="1"/>
-          <p:nvPr/>
-        </p:nvSpPr>
-        <p:spPr>
-          <a:xfrm>
-            <a:off x="8220456" y="1335024"/>
-            <a:ext cx="3520440" cy="2743200"/>
-          </a:xfrm>
-          <a:prstGeom prst="rect">
-            <a:avLst/>
-          </a:prstGeom>
-          <a:noFill/>
-        </p:spPr>
-        <p:txBody>
-          <a:bodyPr wrap="square">
-            <a:spAutoFit/>
-          </a:bodyPr>
-          <a:lstStyle/>
-          <a:p>
-            <a:pPr algn="l"/>
-            <a:r>
-              <a:rPr sz="1000" b="0" i="0">
-                <a:solidFill>
-                  <a:srgbClr val="1A1A1A"/>
-                </a:solidFill>
-              </a:rPr>
-              <a:t>40–65 ans · Expérience passée négative avec les ONG
-Demande des preuves · Teste votre connaissance du sujet
-▶ Votre message : preuves d'audit, rapport annuel public, traçabilité</a:t>
-            </a:r>
-          </a:p>
-        </p:txBody>
-      </p:sp>
-      <p:sp>
-        <p:nvSpPr>
-          <p:cNvPr id="22" name="TextBox 21"/>
-          <p:cNvSpPr txBox="1"/>
-          <p:nvPr/>
-        </p:nvSpPr>
-        <p:spPr>
-          <a:xfrm>
-            <a:off x="274320" y="4352544"/>
-            <a:ext cx="11640312" cy="274320"/>
-          </a:xfrm>
-          <a:prstGeom prst="rect">
-            <a:avLst/>
-          </a:prstGeom>
-          <a:noFill/>
-        </p:spPr>
-        <p:txBody>
-          <a:bodyPr wrap="square">
-            <a:spAutoFit/>
-          </a:bodyPr>
-          <a:lstStyle/>
-          <a:p>
-            <a:pPr algn="l"/>
-            <a:r>
-              <a:rPr sz="1200" b="1" i="0">
-                <a:solidFill>
-                  <a:srgbClr val="005555"/>
-                </a:solidFill>
-              </a:rPr>
-              <a:t>Données clés France 2024 :</a:t>
-            </a:r>
-          </a:p>
-        </p:txBody>
-      </p:sp>
-      <p:sp>
-        <p:nvSpPr>
-          <p:cNvPr id="23" name="Rectangle 22"/>
-          <p:cNvSpPr/>
-          <p:nvPr/>
-        </p:nvSpPr>
-        <p:spPr>
-          <a:xfrm>
-            <a:off x="274320" y="4663440"/>
-            <a:ext cx="2798064" cy="841248"/>
+            <a:off x="2249424" y="804672"/>
+            <a:ext cx="1920240" cy="960120"/>
           </a:xfrm>
           <a:prstGeom prst="rect">
             <a:avLst/>
@@ -5761,14 +5347,14 @@
       </p:sp>
       <p:sp>
         <p:nvSpPr>
-          <p:cNvPr id="24" name="TextBox 23"/>
+          <p:cNvPr id="15" name="TextBox 14"/>
           <p:cNvSpPr txBox="1"/>
           <p:nvPr/>
         </p:nvSpPr>
         <p:spPr>
           <a:xfrm>
-            <a:off x="365760" y="4681728"/>
-            <a:ext cx="2615184" cy="457200"/>
+            <a:off x="2340864" y="822960"/>
+            <a:ext cx="1737360" cy="548640"/>
           </a:xfrm>
           <a:prstGeom prst="rect">
             <a:avLst/>
@@ -5783,26 +5369,26 @@
           <a:p>
             <a:pPr algn="ctr"/>
             <a:r>
-              <a:rPr sz="2200" b="1" i="0">
+              <a:rPr sz="1600" b="1" i="0">
                 <a:solidFill>
                   <a:srgbClr val="FFFFFF"/>
                 </a:solidFill>
               </a:rPr>
-              <a:t>5,2M</a:t>
-            </a:r>
-          </a:p>
-        </p:txBody>
-      </p:sp>
-      <p:sp>
-        <p:nvSpPr>
-          <p:cNvPr id="25" name="TextBox 24"/>
+              <a:t>22M</a:t>
+            </a:r>
+          </a:p>
+        </p:txBody>
+      </p:sp>
+      <p:sp>
+        <p:nvSpPr>
+          <p:cNvPr id="16" name="TextBox 15"/>
           <p:cNvSpPr txBox="1"/>
           <p:nvPr/>
         </p:nvSpPr>
         <p:spPr>
           <a:xfrm>
-            <a:off x="365760" y="5138928"/>
-            <a:ext cx="2615184" cy="329184"/>
+            <a:off x="2340864" y="1371600"/>
+            <a:ext cx="1737360" cy="365760"/>
           </a:xfrm>
           <a:prstGeom prst="rect">
             <a:avLst/>
@@ -5822,22 +5408,22 @@
                   <a:srgbClr val="CCEEEE"/>
                 </a:solidFill>
               </a:rPr>
-              <a:t>donateurs
-réguliers en France</a:t>
-            </a:r>
-          </a:p>
-        </p:txBody>
-      </p:sp>
-      <p:sp>
-        <p:nvSpPr>
-          <p:cNvPr id="26" name="Rectangle 25"/>
+              <a:t>bénévoles en
+France</a:t>
+            </a:r>
+          </a:p>
+        </p:txBody>
+      </p:sp>
+      <p:sp>
+        <p:nvSpPr>
+          <p:cNvPr id="17" name="Rectangle 16"/>
           <p:cNvSpPr/>
           <p:nvPr/>
         </p:nvSpPr>
         <p:spPr>
           <a:xfrm>
-            <a:off x="3182112" y="4663440"/>
-            <a:ext cx="2798064" cy="841248"/>
+            <a:off x="4224528" y="804672"/>
+            <a:ext cx="1920240" cy="960120"/>
           </a:xfrm>
           <a:prstGeom prst="rect">
             <a:avLst/>
@@ -5873,14 +5459,14 @@
       </p:sp>
       <p:sp>
         <p:nvSpPr>
-          <p:cNvPr id="27" name="TextBox 26"/>
+          <p:cNvPr id="18" name="TextBox 17"/>
           <p:cNvSpPr txBox="1"/>
           <p:nvPr/>
         </p:nvSpPr>
         <p:spPr>
           <a:xfrm>
-            <a:off x="3273552" y="4681728"/>
-            <a:ext cx="2615184" cy="457200"/>
+            <a:off x="4315968" y="822960"/>
+            <a:ext cx="1737360" cy="548640"/>
           </a:xfrm>
           <a:prstGeom prst="rect">
             <a:avLst/>
@@ -5895,26 +5481,27 @@
           <a:p>
             <a:pPr algn="ctr"/>
             <a:r>
-              <a:rPr sz="2200" b="1" i="0">
+              <a:rPr sz="1600" b="1" i="0">
                 <a:solidFill>
                   <a:srgbClr val="FFFFFF"/>
                 </a:solidFill>
               </a:rPr>
-              <a:t>24€/mois</a:t>
-            </a:r>
-          </a:p>
-        </p:txBody>
-      </p:sp>
-      <p:sp>
-        <p:nvSpPr>
-          <p:cNvPr id="28" name="TextBox 27"/>
+              <a:t>1er juil.
+1901</a:t>
+            </a:r>
+          </a:p>
+        </p:txBody>
+      </p:sp>
+      <p:sp>
+        <p:nvSpPr>
+          <p:cNvPr id="19" name="TextBox 18"/>
           <p:cNvSpPr txBox="1"/>
           <p:nvPr/>
         </p:nvSpPr>
         <p:spPr>
           <a:xfrm>
-            <a:off x="3273552" y="5138928"/>
-            <a:ext cx="2615184" cy="329184"/>
+            <a:off x="4315968" y="1371600"/>
+            <a:ext cx="1737360" cy="365760"/>
           </a:xfrm>
           <a:prstGeom prst="rect">
             <a:avLst/>
@@ -5934,22 +5521,22 @@
                   <a:srgbClr val="CCEEEE"/>
                 </a:solidFill>
               </a:rPr>
-              <a:t>montant moyen
-don régulier</a:t>
-            </a:r>
-          </a:p>
-        </p:txBody>
-      </p:sp>
-      <p:sp>
-        <p:nvSpPr>
-          <p:cNvPr id="29" name="Rectangle 28"/>
+              <a:t>Loi fondatrice
+du droit associatif</a:t>
+            </a:r>
+          </a:p>
+        </p:txBody>
+      </p:sp>
+      <p:sp>
+        <p:nvSpPr>
+          <p:cNvPr id="20" name="Rectangle 19"/>
           <p:cNvSpPr/>
           <p:nvPr/>
         </p:nvSpPr>
         <p:spPr>
           <a:xfrm>
-            <a:off x="6089904" y="4663440"/>
-            <a:ext cx="2798064" cy="841248"/>
+            <a:off x="6199632" y="804672"/>
+            <a:ext cx="1920240" cy="960120"/>
           </a:xfrm>
           <a:prstGeom prst="rect">
             <a:avLst/>
@@ -5985,14 +5572,14 @@
       </p:sp>
       <p:sp>
         <p:nvSpPr>
-          <p:cNvPr id="30" name="TextBox 29"/>
+          <p:cNvPr id="21" name="TextBox 20"/>
           <p:cNvSpPr txBox="1"/>
           <p:nvPr/>
         </p:nvSpPr>
         <p:spPr>
           <a:xfrm>
-            <a:off x="6181344" y="4681728"/>
-            <a:ext cx="2615184" cy="457200"/>
+            <a:off x="6291072" y="822960"/>
+            <a:ext cx="1737360" cy="548640"/>
           </a:xfrm>
           <a:prstGeom prst="rect">
             <a:avLst/>
@@ -6007,26 +5594,26 @@
           <a:p>
             <a:pPr algn="ctr"/>
             <a:r>
-              <a:rPr sz="2200" b="1" i="0">
+              <a:rPr sz="1600" b="1" i="0">
                 <a:solidFill>
                   <a:srgbClr val="FFFFFF"/>
                 </a:solidFill>
               </a:rPr>
-              <a:t>8×</a:t>
-            </a:r>
-          </a:p>
-        </p:txBody>
-      </p:sp>
-      <p:sp>
-        <p:nvSpPr>
-          <p:cNvPr id="31" name="TextBox 30"/>
+              <a:t>3 types</a:t>
+            </a:r>
+          </a:p>
+        </p:txBody>
+      </p:sp>
+      <p:sp>
+        <p:nvSpPr>
+          <p:cNvPr id="22" name="TextBox 21"/>
           <p:cNvSpPr txBox="1"/>
           <p:nvPr/>
         </p:nvSpPr>
         <p:spPr>
           <a:xfrm>
-            <a:off x="6181344" y="5138928"/>
-            <a:ext cx="2615184" cy="329184"/>
+            <a:off x="6291072" y="1371600"/>
+            <a:ext cx="1737360" cy="365760"/>
           </a:xfrm>
           <a:prstGeom prst="rect">
             <a:avLst/>
@@ -6046,22 +5633,22 @@
                   <a:srgbClr val="CCEEEE"/>
                 </a:solidFill>
               </a:rPr>
-              <a:t>LTV donateur régulier
-vs ponctuel</a:t>
-            </a:r>
-          </a:p>
-        </p:txBody>
-      </p:sp>
-      <p:sp>
-        <p:nvSpPr>
-          <p:cNvPr id="32" name="Rectangle 31"/>
+              <a:t>De fait / Déclarée /
+Reconnue utilité pub.</a:t>
+            </a:r>
+          </a:p>
+        </p:txBody>
+      </p:sp>
+      <p:sp>
+        <p:nvSpPr>
+          <p:cNvPr id="23" name="Rectangle 22"/>
           <p:cNvSpPr/>
           <p:nvPr/>
         </p:nvSpPr>
         <p:spPr>
           <a:xfrm>
-            <a:off x="8997696" y="4663440"/>
-            <a:ext cx="2798064" cy="841248"/>
+            <a:off x="8174736" y="804672"/>
+            <a:ext cx="1920240" cy="960120"/>
           </a:xfrm>
           <a:prstGeom prst="rect">
             <a:avLst/>
@@ -6097,14 +5684,14 @@
       </p:sp>
       <p:sp>
         <p:nvSpPr>
-          <p:cNvPr id="33" name="TextBox 32"/>
+          <p:cNvPr id="24" name="TextBox 23"/>
           <p:cNvSpPr txBox="1"/>
           <p:nvPr/>
         </p:nvSpPr>
         <p:spPr>
           <a:xfrm>
-            <a:off x="9089136" y="4681728"/>
-            <a:ext cx="2615184" cy="457200"/>
+            <a:off x="8266176" y="822960"/>
+            <a:ext cx="1737360" cy="548640"/>
           </a:xfrm>
           <a:prstGeom prst="rect">
             <a:avLst/>
@@ -6119,26 +5706,27 @@
           <a:p>
             <a:pPr algn="ctr"/>
             <a:r>
-              <a:rPr sz="2200" b="1" i="0">
+              <a:rPr sz="1600" b="1" i="0">
                 <a:solidFill>
                   <a:srgbClr val="FFFFFF"/>
                 </a:solidFill>
               </a:rPr>
-              <a:t>63%</a:t>
-            </a:r>
-          </a:p>
-        </p:txBody>
-      </p:sp>
-      <p:sp>
-        <p:nvSpPr>
-          <p:cNvPr id="34" name="TextBox 33"/>
+              <a:t>Don en
+Confiance</a:t>
+            </a:r>
+          </a:p>
+        </p:txBody>
+      </p:sp>
+      <p:sp>
+        <p:nvSpPr>
+          <p:cNvPr id="25" name="TextBox 24"/>
           <p:cNvSpPr txBox="1"/>
           <p:nvPr/>
         </p:nvSpPr>
         <p:spPr>
           <a:xfrm>
-            <a:off x="9089136" y="5138928"/>
-            <a:ext cx="2615184" cy="329184"/>
+            <a:off x="8266176" y="1371600"/>
+            <a:ext cx="1737360" cy="365760"/>
           </a:xfrm>
           <a:prstGeom prst="rect">
             <a:avLst/>
@@ -6158,83 +5746,22 @@
                   <a:srgbClr val="CCEEEE"/>
                 </a:solidFill>
               </a:rPr>
-              <a:t>des Français font
-un don chaque année</a:t>
-            </a:r>
-          </a:p>
-        </p:txBody>
-      </p:sp>
-    </p:spTree>
-  </p:cSld>
-  <p:clrMapOvr>
-    <a:masterClrMapping/>
-  </p:clrMapOvr>
-</p:sld>
-</file>
-
-<file path=ppt/slides/slide4.xml><?xml version="1.0" encoding="utf-8"?>
-<p:sld xmlns:a="http://schemas.openxmlformats.org/drawingml/2006/main" xmlns:p="http://schemas.openxmlformats.org/presentationml/2006/main" xmlns:r="http://schemas.openxmlformats.org/officeDocument/2006/relationships">
-  <p:cSld>
-    <p:spTree>
-      <p:nvGrpSpPr>
-        <p:cNvPr id="1" name=""/>
-        <p:cNvGrpSpPr/>
-        <p:nvPr/>
-      </p:nvGrpSpPr>
-      <p:grpSpPr/>
-      <p:sp>
-        <p:nvSpPr>
-          <p:cNvPr id="2" name="Rectangle 1"/>
+              <a:t>Label indépendant
+de contrôle et garantie</a:t>
+            </a:r>
+          </a:p>
+        </p:txBody>
+      </p:sp>
+      <p:sp>
+        <p:nvSpPr>
+          <p:cNvPr id="26" name="Rectangle 25"/>
           <p:cNvSpPr/>
           <p:nvPr/>
         </p:nvSpPr>
         <p:spPr>
           <a:xfrm>
-            <a:off x="0" y="0"/>
-            <a:ext cx="12188952" cy="6858000"/>
-          </a:xfrm>
-          <a:prstGeom prst="rect">
-            <a:avLst/>
-          </a:prstGeom>
-          <a:solidFill>
-            <a:srgbClr val="F0F7F7"/>
-          </a:solidFill>
-          <a:ln>
-            <a:noFill/>
-          </a:ln>
-        </p:spPr>
-        <p:style>
-          <a:lnRef idx="1">
-            <a:schemeClr val="accent1"/>
-          </a:lnRef>
-          <a:fillRef idx="3">
-            <a:schemeClr val="accent1"/>
-          </a:fillRef>
-          <a:effectRef idx="2">
-            <a:schemeClr val="accent1"/>
-          </a:effectRef>
-          <a:fontRef idx="minor">
-            <a:schemeClr val="lt1"/>
-          </a:fontRef>
-        </p:style>
-        <p:txBody>
-          <a:bodyPr rtlCol="0" anchor="ctr"/>
-          <a:lstStyle/>
-          <a:p>
-            <a:pPr algn="ctr"/>
-          </a:p>
-        </p:txBody>
-      </p:sp>
-      <p:sp>
-        <p:nvSpPr>
-          <p:cNvPr id="3" name="Rectangle 2"/>
-          <p:cNvSpPr/>
-          <p:nvPr/>
-        </p:nvSpPr>
-        <p:spPr>
-          <a:xfrm>
-            <a:off x="0" y="0"/>
-            <a:ext cx="12188952" cy="658368"/>
+            <a:off x="10149840" y="804672"/>
+            <a:ext cx="1920240" cy="960120"/>
           </a:xfrm>
           <a:prstGeom prst="rect">
             <a:avLst/>
@@ -6270,57 +5797,14 @@
       </p:sp>
       <p:sp>
         <p:nvSpPr>
-          <p:cNvPr id="4" name="Rectangle 3"/>
-          <p:cNvSpPr/>
-          <p:nvPr/>
-        </p:nvSpPr>
-        <p:spPr>
-          <a:xfrm>
-            <a:off x="0" y="640080"/>
-            <a:ext cx="12188952" cy="54864"/>
-          </a:xfrm>
-          <a:prstGeom prst="rect">
-            <a:avLst/>
-          </a:prstGeom>
-          <a:solidFill>
-            <a:srgbClr val="FF0000"/>
-          </a:solidFill>
-          <a:ln>
-            <a:noFill/>
-          </a:ln>
-        </p:spPr>
-        <p:style>
-          <a:lnRef idx="1">
-            <a:schemeClr val="accent1"/>
-          </a:lnRef>
-          <a:fillRef idx="3">
-            <a:schemeClr val="accent1"/>
-          </a:fillRef>
-          <a:effectRef idx="2">
-            <a:schemeClr val="accent1"/>
-          </a:effectRef>
-          <a:fontRef idx="minor">
-            <a:schemeClr val="lt1"/>
-          </a:fontRef>
-        </p:style>
-        <p:txBody>
-          <a:bodyPr rtlCol="0" anchor="ctr"/>
-          <a:lstStyle/>
-          <a:p>
-            <a:pPr algn="ctr"/>
-          </a:p>
-        </p:txBody>
-      </p:sp>
-      <p:sp>
-        <p:nvSpPr>
-          <p:cNvPr id="5" name="TextBox 4"/>
+          <p:cNvPr id="27" name="TextBox 26"/>
           <p:cNvSpPr txBox="1"/>
           <p:nvPr/>
         </p:nvSpPr>
         <p:spPr>
           <a:xfrm>
-            <a:off x="164592" y="64008"/>
-            <a:ext cx="685800" cy="530352"/>
+            <a:off x="10241280" y="822960"/>
+            <a:ext cx="1737360" cy="548640"/>
           </a:xfrm>
           <a:prstGeom prst="rect">
             <a:avLst/>
@@ -6333,71 +5817,29 @@
           </a:bodyPr>
           <a:lstStyle/>
           <a:p>
-            <a:pPr algn="l"/>
-            <a:r>
-              <a:rPr sz="2000" b="1" i="0">
+            <a:pPr algn="ctr"/>
+            <a:r>
+              <a:rPr sz="1600" b="1" i="0">
                 <a:solidFill>
                   <a:srgbClr val="FFFFFF"/>
                 </a:solidFill>
               </a:rPr>
-              <a:t>SHY</a:t>
-            </a:r>
-          </a:p>
-        </p:txBody>
-      </p:sp>
-      <p:sp>
-        <p:nvSpPr>
-          <p:cNvPr id="6" name="Rectangle 5"/>
-          <p:cNvSpPr/>
-          <p:nvPr/>
-        </p:nvSpPr>
-        <p:spPr>
-          <a:xfrm>
-            <a:off x="914400" y="91440"/>
-            <a:ext cx="36576" cy="475488"/>
-          </a:xfrm>
-          <a:prstGeom prst="rect">
-            <a:avLst/>
-          </a:prstGeom>
-          <a:solidFill>
-            <a:srgbClr val="FF0000"/>
-          </a:solidFill>
-          <a:ln>
-            <a:noFill/>
-          </a:ln>
-        </p:spPr>
-        <p:style>
-          <a:lnRef idx="1">
-            <a:schemeClr val="accent1"/>
-          </a:lnRef>
-          <a:fillRef idx="3">
-            <a:schemeClr val="accent1"/>
-          </a:fillRef>
-          <a:effectRef idx="2">
-            <a:schemeClr val="accent1"/>
-          </a:effectRef>
-          <a:fontRef idx="minor">
-            <a:schemeClr val="lt1"/>
-          </a:fontRef>
-        </p:style>
-        <p:txBody>
-          <a:bodyPr rtlCol="0" anchor="ctr"/>
-          <a:lstStyle/>
-          <a:p>
-            <a:pPr algn="ctr"/>
-          </a:p>
-        </p:txBody>
-      </p:sp>
-      <p:sp>
-        <p:nvSpPr>
-          <p:cNvPr id="7" name="TextBox 6"/>
+              <a:t>RGPD
+Bloctel</a:t>
+            </a:r>
+          </a:p>
+        </p:txBody>
+      </p:sp>
+      <p:sp>
+        <p:nvSpPr>
+          <p:cNvPr id="28" name="TextBox 27"/>
           <p:cNvSpPr txBox="1"/>
           <p:nvPr/>
         </p:nvSpPr>
         <p:spPr>
           <a:xfrm>
-            <a:off x="1024128" y="91440"/>
-            <a:ext cx="10881360" cy="475488"/>
+            <a:off x="10241280" y="1371600"/>
+            <a:ext cx="1737360" cy="365760"/>
           </a:xfrm>
           <a:prstGeom prst="rect">
             <a:avLst/>
@@ -6410,71 +5852,29 @@
           </a:bodyPr>
           <a:lstStyle/>
           <a:p>
-            <a:pPr algn="l"/>
-            <a:r>
-              <a:rPr sz="1700" b="1" i="0">
+            <a:pPr algn="ctr"/>
+            <a:r>
+              <a:rPr sz="900" b="0" i="0">
                 <a:solidFill>
-                  <a:srgbClr val="FFFFFF"/>
+                  <a:srgbClr val="CCEEEE"/>
                 </a:solidFill>
               </a:rPr>
-              <a:t>L'Impact de Votre Travail — Chaque Signature Compte</a:t>
-            </a:r>
-          </a:p>
-        </p:txBody>
-      </p:sp>
-      <p:sp>
-        <p:nvSpPr>
-          <p:cNvPr id="8" name="Rectangle 7"/>
-          <p:cNvSpPr/>
-          <p:nvPr/>
-        </p:nvSpPr>
-        <p:spPr>
-          <a:xfrm>
-            <a:off x="0" y="6492240"/>
-            <a:ext cx="12188952" cy="365760"/>
-          </a:xfrm>
-          <a:prstGeom prst="rect">
-            <a:avLst/>
-          </a:prstGeom>
-          <a:solidFill>
-            <a:srgbClr val="005555"/>
-          </a:solidFill>
-          <a:ln>
-            <a:noFill/>
-          </a:ln>
-        </p:spPr>
-        <p:style>
-          <a:lnRef idx="1">
-            <a:schemeClr val="accent1"/>
-          </a:lnRef>
-          <a:fillRef idx="3">
-            <a:schemeClr val="accent1"/>
-          </a:fillRef>
-          <a:effectRef idx="2">
-            <a:schemeClr val="accent1"/>
-          </a:effectRef>
-          <a:fontRef idx="minor">
-            <a:schemeClr val="lt1"/>
-          </a:fontRef>
-        </p:style>
-        <p:txBody>
-          <a:bodyPr rtlCol="0" anchor="ctr"/>
-          <a:lstStyle/>
-          <a:p>
-            <a:pPr algn="ctr"/>
-          </a:p>
-        </p:txBody>
-      </p:sp>
-      <p:sp>
-        <p:nvSpPr>
-          <p:cNvPr id="9" name="TextBox 8"/>
+              <a:t>Cadre légal données
+prospects à respecter</a:t>
+            </a:r>
+          </a:p>
+        </p:txBody>
+      </p:sp>
+      <p:sp>
+        <p:nvSpPr>
+          <p:cNvPr id="29" name="TextBox 28"/>
           <p:cNvSpPr txBox="1"/>
           <p:nvPr/>
         </p:nvSpPr>
         <p:spPr>
           <a:xfrm>
-            <a:off x="0" y="6519672"/>
-            <a:ext cx="12188952" cy="274320"/>
+            <a:off x="274320" y="1920240"/>
+            <a:ext cx="11640312" cy="274320"/>
           </a:xfrm>
           <a:prstGeom prst="rect">
             <a:avLst/>
@@ -6487,253 +5887,28 @@
           </a:bodyPr>
           <a:lstStyle/>
           <a:p>
-            <a:pPr algn="ctr"/>
-            <a:r>
-              <a:rPr sz="900" b="0" i="0">
-                <a:solidFill>
-                  <a:srgbClr val="FFFFFF"/>
-                </a:solidFill>
-              </a:rPr>
-              <a:t>SHY-Performance  ·  Formation FIM  ·  V6-01062026SHY-TE</a:t>
-            </a:r>
-          </a:p>
-        </p:txBody>
-      </p:sp>
-      <p:sp>
-        <p:nvSpPr>
-          <p:cNvPr id="10" name="TextBox 9"/>
-          <p:cNvSpPr txBox="1"/>
-          <p:nvPr/>
-        </p:nvSpPr>
-        <p:spPr>
-          <a:xfrm>
-            <a:off x="274320" y="804672"/>
-            <a:ext cx="11640312" cy="329184"/>
-          </a:xfrm>
-          <a:prstGeom prst="rect">
-            <a:avLst/>
-          </a:prstGeom>
-          <a:noFill/>
-        </p:spPr>
-        <p:txBody>
-          <a:bodyPr wrap="square">
-            <a:spAutoFit/>
-          </a:bodyPr>
-          <a:lstStyle/>
-          <a:p>
             <a:pPr algn="l"/>
             <a:r>
-              <a:rPr sz="1300" b="1" i="0">
+              <a:rPr sz="1200" b="1" i="0">
                 <a:solidFill>
                   <a:srgbClr val="005555"/>
                 </a:solidFill>
               </a:rPr>
-              <a:t>Simulation collective — Ce que représente 1 journée de travail :</a:t>
-            </a:r>
-          </a:p>
-        </p:txBody>
-      </p:sp>
-      <p:sp>
-        <p:nvSpPr>
-          <p:cNvPr id="11" name="Rectangle 10"/>
+              <a:t>Histoire de l'humanitaire — Les jalons que vous devez connaître :</a:t>
+            </a:r>
+          </a:p>
+        </p:txBody>
+      </p:sp>
+      <p:sp>
+        <p:nvSpPr>
+          <p:cNvPr id="30" name="Rectangle 29"/>
           <p:cNvSpPr/>
           <p:nvPr/>
         </p:nvSpPr>
         <p:spPr>
           <a:xfrm>
-            <a:off x="274320" y="1234440"/>
-            <a:ext cx="2240280" cy="457200"/>
-          </a:xfrm>
-          <a:prstGeom prst="rect">
-            <a:avLst/>
-          </a:prstGeom>
-          <a:solidFill>
-            <a:srgbClr val="005555"/>
-          </a:solidFill>
-          <a:ln>
-            <a:noFill/>
-          </a:ln>
-        </p:spPr>
-        <p:style>
-          <a:lnRef idx="1">
-            <a:schemeClr val="accent1"/>
-          </a:lnRef>
-          <a:fillRef idx="3">
-            <a:schemeClr val="accent1"/>
-          </a:fillRef>
-          <a:effectRef idx="2">
-            <a:schemeClr val="accent1"/>
-          </a:effectRef>
-          <a:fontRef idx="minor">
-            <a:schemeClr val="lt1"/>
-          </a:fontRef>
-        </p:style>
-        <p:txBody>
-          <a:bodyPr rtlCol="0" anchor="ctr"/>
-          <a:lstStyle/>
-          <a:p>
-            <a:pPr algn="ctr"/>
-          </a:p>
-        </p:txBody>
-      </p:sp>
-      <p:sp>
-        <p:nvSpPr>
-          <p:cNvPr id="12" name="TextBox 11"/>
-          <p:cNvSpPr txBox="1"/>
-          <p:nvPr/>
-        </p:nvSpPr>
-        <p:spPr>
-          <a:xfrm>
-            <a:off x="365760" y="1261872"/>
-            <a:ext cx="2057400" cy="384048"/>
-          </a:xfrm>
-          <a:prstGeom prst="rect">
-            <a:avLst/>
-          </a:prstGeom>
-          <a:noFill/>
-        </p:spPr>
-        <p:txBody>
-          <a:bodyPr wrap="square">
-            <a:spAutoFit/>
-          </a:bodyPr>
-          <a:lstStyle/>
-          <a:p>
-            <a:pPr algn="ctr"/>
-            <a:r>
-              <a:rPr sz="900" b="1" i="0">
-                <a:solidFill>
-                  <a:srgbClr val="FFFFFF"/>
-                </a:solidFill>
-              </a:rPr>
-              <a:t>Vous signez</a:t>
-            </a:r>
-          </a:p>
-        </p:txBody>
-      </p:sp>
-      <p:sp>
-        <p:nvSpPr>
-          <p:cNvPr id="13" name="Rectangle 12"/>
-          <p:cNvSpPr/>
-          <p:nvPr/>
-        </p:nvSpPr>
-        <p:spPr>
-          <a:xfrm>
-            <a:off x="274320" y="1691640"/>
-            <a:ext cx="2240280" cy="1097280"/>
-          </a:xfrm>
-          <a:prstGeom prst="rect">
-            <a:avLst/>
-          </a:prstGeom>
-          <a:solidFill>
-            <a:srgbClr val="FFFFFF"/>
-          </a:solidFill>
-          <a:ln w="19050">
-            <a:solidFill>
-              <a:srgbClr val="005555"/>
-            </a:solidFill>
-          </a:ln>
-        </p:spPr>
-        <p:style>
-          <a:lnRef idx="1">
-            <a:schemeClr val="accent1"/>
-          </a:lnRef>
-          <a:fillRef idx="3">
-            <a:schemeClr val="accent1"/>
-          </a:fillRef>
-          <a:effectRef idx="2">
-            <a:schemeClr val="accent1"/>
-          </a:effectRef>
-          <a:fontRef idx="minor">
-            <a:schemeClr val="lt1"/>
-          </a:fontRef>
-        </p:style>
-        <p:txBody>
-          <a:bodyPr rtlCol="0" anchor="ctr"/>
-          <a:lstStyle/>
-          <a:p>
-            <a:pPr algn="ctr"/>
-          </a:p>
-        </p:txBody>
-      </p:sp>
-      <p:sp>
-        <p:nvSpPr>
-          <p:cNvPr id="14" name="TextBox 13"/>
-          <p:cNvSpPr txBox="1"/>
-          <p:nvPr/>
-        </p:nvSpPr>
-        <p:spPr>
-          <a:xfrm>
-            <a:off x="365760" y="1783080"/>
-            <a:ext cx="2057400" cy="914400"/>
-          </a:xfrm>
-          <a:prstGeom prst="rect">
-            <a:avLst/>
-          </a:prstGeom>
-          <a:noFill/>
-        </p:spPr>
-        <p:txBody>
-          <a:bodyPr wrap="square">
-            <a:spAutoFit/>
-          </a:bodyPr>
-          <a:lstStyle/>
-          <a:p>
-            <a:pPr algn="ctr"/>
-            <a:r>
-              <a:rPr sz="1300" b="1" i="0">
-                <a:solidFill>
-                  <a:srgbClr val="005555"/>
-                </a:solidFill>
-              </a:rPr>
-              <a:t>1 don régulier
-par heure</a:t>
-            </a:r>
-          </a:p>
-        </p:txBody>
-      </p:sp>
-      <p:sp>
-        <p:nvSpPr>
-          <p:cNvPr id="15" name="TextBox 14"/>
-          <p:cNvSpPr txBox="1"/>
-          <p:nvPr/>
-        </p:nvSpPr>
-        <p:spPr>
-          <a:xfrm>
-            <a:off x="2542032" y="2057400"/>
-            <a:ext cx="256032" cy="548640"/>
-          </a:xfrm>
-          <a:prstGeom prst="rect">
-            <a:avLst/>
-          </a:prstGeom>
-          <a:noFill/>
-        </p:spPr>
-        <p:txBody>
-          <a:bodyPr wrap="square">
-            <a:spAutoFit/>
-          </a:bodyPr>
-          <a:lstStyle/>
-          <a:p>
-            <a:pPr algn="l"/>
-            <a:r>
-              <a:rPr sz="2000" b="1" i="0">
-                <a:solidFill>
-                  <a:srgbClr val="008080"/>
-                </a:solidFill>
-              </a:rPr>
-              <a:t>=</a:t>
-            </a:r>
-          </a:p>
-        </p:txBody>
-      </p:sp>
-      <p:sp>
-        <p:nvSpPr>
-          <p:cNvPr id="16" name="Rectangle 15"/>
-          <p:cNvSpPr/>
-          <p:nvPr/>
-        </p:nvSpPr>
-        <p:spPr>
-          <a:xfrm>
-            <a:off x="2633472" y="1234440"/>
-            <a:ext cx="2240280" cy="457200"/>
+            <a:off x="274320" y="2286000"/>
+            <a:ext cx="1920240" cy="347472"/>
           </a:xfrm>
           <a:prstGeom prst="rect">
             <a:avLst/>
@@ -6769,14 +5944,14 @@
       </p:sp>
       <p:sp>
         <p:nvSpPr>
-          <p:cNvPr id="17" name="TextBox 16"/>
+          <p:cNvPr id="31" name="TextBox 30"/>
           <p:cNvSpPr txBox="1"/>
           <p:nvPr/>
         </p:nvSpPr>
         <p:spPr>
           <a:xfrm>
-            <a:off x="2724912" y="1261872"/>
-            <a:ext cx="2057400" cy="384048"/>
+            <a:off x="365760" y="2313432"/>
+            <a:ext cx="1737360" cy="256032"/>
           </a:xfrm>
           <a:prstGeom prst="rect">
             <a:avLst/>
@@ -6791,35 +5966,34 @@
           <a:p>
             <a:pPr algn="ctr"/>
             <a:r>
-              <a:rPr sz="900" b="1" i="0">
+              <a:rPr sz="1200" b="1" i="0">
                 <a:solidFill>
                   <a:srgbClr val="FFFFFF"/>
                 </a:solidFill>
               </a:rPr>
-              <a:t>En 1 journée
-(6h actives)</a:t>
-            </a:r>
-          </a:p>
-        </p:txBody>
-      </p:sp>
-      <p:sp>
-        <p:nvSpPr>
-          <p:cNvPr id="18" name="Rectangle 17"/>
+              <a:t>1859</a:t>
+            </a:r>
+          </a:p>
+        </p:txBody>
+      </p:sp>
+      <p:sp>
+        <p:nvSpPr>
+          <p:cNvPr id="32" name="Rectangle 31"/>
           <p:cNvSpPr/>
           <p:nvPr/>
         </p:nvSpPr>
         <p:spPr>
           <a:xfrm>
-            <a:off x="2633472" y="1691640"/>
-            <a:ext cx="2240280" cy="1097280"/>
+            <a:off x="274320" y="2633472"/>
+            <a:ext cx="1920240" cy="1143000"/>
           </a:xfrm>
           <a:prstGeom prst="rect">
             <a:avLst/>
           </a:prstGeom>
           <a:solidFill>
-            <a:srgbClr val="FFFFFF"/>
+            <a:srgbClr val="F0F7F7"/>
           </a:solidFill>
-          <a:ln w="19050">
+          <a:ln w="10160">
             <a:solidFill>
               <a:srgbClr val="008080"/>
             </a:solidFill>
@@ -6849,668 +6023,14 @@
       </p:sp>
       <p:sp>
         <p:nvSpPr>
-          <p:cNvPr id="19" name="TextBox 18"/>
+          <p:cNvPr id="33" name="TextBox 32"/>
           <p:cNvSpPr txBox="1"/>
           <p:nvPr/>
         </p:nvSpPr>
         <p:spPr>
           <a:xfrm>
-            <a:off x="2724912" y="1783080"/>
-            <a:ext cx="2057400" cy="914400"/>
-          </a:xfrm>
-          <a:prstGeom prst="rect">
-            <a:avLst/>
-          </a:prstGeom>
-          <a:noFill/>
-        </p:spPr>
-        <p:txBody>
-          <a:bodyPr wrap="square">
-            <a:spAutoFit/>
-          </a:bodyPr>
-          <a:lstStyle/>
-          <a:p>
-            <a:pPr algn="ctr"/>
-            <a:r>
-              <a:rPr sz="1300" b="1" i="0">
-                <a:solidFill>
-                  <a:srgbClr val="008080"/>
-                </a:solidFill>
-              </a:rPr>
-              <a:t>6 nouveaux
-donateurs</a:t>
-            </a:r>
-          </a:p>
-        </p:txBody>
-      </p:sp>
-      <p:sp>
-        <p:nvSpPr>
-          <p:cNvPr id="20" name="TextBox 19"/>
-          <p:cNvSpPr txBox="1"/>
-          <p:nvPr/>
-        </p:nvSpPr>
-        <p:spPr>
-          <a:xfrm>
-            <a:off x="4901183" y="2057400"/>
-            <a:ext cx="256032" cy="548640"/>
-          </a:xfrm>
-          <a:prstGeom prst="rect">
-            <a:avLst/>
-          </a:prstGeom>
-          <a:noFill/>
-        </p:spPr>
-        <p:txBody>
-          <a:bodyPr wrap="square">
-            <a:spAutoFit/>
-          </a:bodyPr>
-          <a:lstStyle/>
-          <a:p>
-            <a:pPr algn="l"/>
-            <a:r>
-              <a:rPr sz="2000" b="1" i="0">
-                <a:solidFill>
-                  <a:srgbClr val="008080"/>
-                </a:solidFill>
-              </a:rPr>
-              <a:t>=</a:t>
-            </a:r>
-          </a:p>
-        </p:txBody>
-      </p:sp>
-      <p:sp>
-        <p:nvSpPr>
-          <p:cNvPr id="21" name="Rectangle 20"/>
-          <p:cNvSpPr/>
-          <p:nvPr/>
-        </p:nvSpPr>
-        <p:spPr>
-          <a:xfrm>
-            <a:off x="4992624" y="1234440"/>
-            <a:ext cx="2240280" cy="457200"/>
-          </a:xfrm>
-          <a:prstGeom prst="rect">
-            <a:avLst/>
-          </a:prstGeom>
-          <a:solidFill>
-            <a:srgbClr val="2A7A50"/>
-          </a:solidFill>
-          <a:ln>
-            <a:noFill/>
-          </a:ln>
-        </p:spPr>
-        <p:style>
-          <a:lnRef idx="1">
-            <a:schemeClr val="accent1"/>
-          </a:lnRef>
-          <a:fillRef idx="3">
-            <a:schemeClr val="accent1"/>
-          </a:fillRef>
-          <a:effectRef idx="2">
-            <a:schemeClr val="accent1"/>
-          </a:effectRef>
-          <a:fontRef idx="minor">
-            <a:schemeClr val="lt1"/>
-          </a:fontRef>
-        </p:style>
-        <p:txBody>
-          <a:bodyPr rtlCol="0" anchor="ctr"/>
-          <a:lstStyle/>
-          <a:p>
-            <a:pPr algn="ctr"/>
-          </a:p>
-        </p:txBody>
-      </p:sp>
-      <p:sp>
-        <p:nvSpPr>
-          <p:cNvPr id="22" name="TextBox 21"/>
-          <p:cNvSpPr txBox="1"/>
-          <p:nvPr/>
-        </p:nvSpPr>
-        <p:spPr>
-          <a:xfrm>
-            <a:off x="5084064" y="1261872"/>
-            <a:ext cx="2057400" cy="384048"/>
-          </a:xfrm>
-          <a:prstGeom prst="rect">
-            <a:avLst/>
-          </a:prstGeom>
-          <a:noFill/>
-        </p:spPr>
-        <p:txBody>
-          <a:bodyPr wrap="square">
-            <a:spAutoFit/>
-          </a:bodyPr>
-          <a:lstStyle/>
-          <a:p>
-            <a:pPr algn="ctr"/>
-            <a:r>
-              <a:rPr sz="900" b="1" i="0">
-                <a:solidFill>
-                  <a:srgbClr val="FFFFFF"/>
-                </a:solidFill>
-              </a:rPr>
-              <a:t>À 15€/mois
-moyenne</a:t>
-            </a:r>
-          </a:p>
-        </p:txBody>
-      </p:sp>
-      <p:sp>
-        <p:nvSpPr>
-          <p:cNvPr id="23" name="Rectangle 22"/>
-          <p:cNvSpPr/>
-          <p:nvPr/>
-        </p:nvSpPr>
-        <p:spPr>
-          <a:xfrm>
-            <a:off x="4992624" y="1691640"/>
-            <a:ext cx="2240280" cy="1097280"/>
-          </a:xfrm>
-          <a:prstGeom prst="rect">
-            <a:avLst/>
-          </a:prstGeom>
-          <a:solidFill>
-            <a:srgbClr val="FFFFFF"/>
-          </a:solidFill>
-          <a:ln w="19050">
-            <a:solidFill>
-              <a:srgbClr val="2A7A50"/>
-            </a:solidFill>
-          </a:ln>
-        </p:spPr>
-        <p:style>
-          <a:lnRef idx="1">
-            <a:schemeClr val="accent1"/>
-          </a:lnRef>
-          <a:fillRef idx="3">
-            <a:schemeClr val="accent1"/>
-          </a:fillRef>
-          <a:effectRef idx="2">
-            <a:schemeClr val="accent1"/>
-          </a:effectRef>
-          <a:fontRef idx="minor">
-            <a:schemeClr val="lt1"/>
-          </a:fontRef>
-        </p:style>
-        <p:txBody>
-          <a:bodyPr rtlCol="0" anchor="ctr"/>
-          <a:lstStyle/>
-          <a:p>
-            <a:pPr algn="ctr"/>
-          </a:p>
-        </p:txBody>
-      </p:sp>
-      <p:sp>
-        <p:nvSpPr>
-          <p:cNvPr id="24" name="TextBox 23"/>
-          <p:cNvSpPr txBox="1"/>
-          <p:nvPr/>
-        </p:nvSpPr>
-        <p:spPr>
-          <a:xfrm>
-            <a:off x="5084064" y="1783080"/>
-            <a:ext cx="2057400" cy="914400"/>
-          </a:xfrm>
-          <a:prstGeom prst="rect">
-            <a:avLst/>
-          </a:prstGeom>
-          <a:noFill/>
-        </p:spPr>
-        <p:txBody>
-          <a:bodyPr wrap="square">
-            <a:spAutoFit/>
-          </a:bodyPr>
-          <a:lstStyle/>
-          <a:p>
-            <a:pPr algn="ctr"/>
-            <a:r>
-              <a:rPr sz="1300" b="1" i="0">
-                <a:solidFill>
-                  <a:srgbClr val="2A7A50"/>
-                </a:solidFill>
-              </a:rPr>
-              <a:t>90€ collectés
-par jour</a:t>
-            </a:r>
-          </a:p>
-        </p:txBody>
-      </p:sp>
-      <p:sp>
-        <p:nvSpPr>
-          <p:cNvPr id="25" name="TextBox 24"/>
-          <p:cNvSpPr txBox="1"/>
-          <p:nvPr/>
-        </p:nvSpPr>
-        <p:spPr>
-          <a:xfrm>
-            <a:off x="7260336" y="2057400"/>
-            <a:ext cx="256032" cy="548640"/>
-          </a:xfrm>
-          <a:prstGeom prst="rect">
-            <a:avLst/>
-          </a:prstGeom>
-          <a:noFill/>
-        </p:spPr>
-        <p:txBody>
-          <a:bodyPr wrap="square">
-            <a:spAutoFit/>
-          </a:bodyPr>
-          <a:lstStyle/>
-          <a:p>
-            <a:pPr algn="l"/>
-            <a:r>
-              <a:rPr sz="2000" b="1" i="0">
-                <a:solidFill>
-                  <a:srgbClr val="008080"/>
-                </a:solidFill>
-              </a:rPr>
-              <a:t>=</a:t>
-            </a:r>
-          </a:p>
-        </p:txBody>
-      </p:sp>
-      <p:sp>
-        <p:nvSpPr>
-          <p:cNvPr id="26" name="Rectangle 25"/>
-          <p:cNvSpPr/>
-          <p:nvPr/>
-        </p:nvSpPr>
-        <p:spPr>
-          <a:xfrm>
-            <a:off x="7351775" y="1234440"/>
-            <a:ext cx="2240280" cy="457200"/>
-          </a:xfrm>
-          <a:prstGeom prst="rect">
-            <a:avLst/>
-          </a:prstGeom>
-          <a:solidFill>
-            <a:srgbClr val="FF0000"/>
-          </a:solidFill>
-          <a:ln>
-            <a:noFill/>
-          </a:ln>
-        </p:spPr>
-        <p:style>
-          <a:lnRef idx="1">
-            <a:schemeClr val="accent1"/>
-          </a:lnRef>
-          <a:fillRef idx="3">
-            <a:schemeClr val="accent1"/>
-          </a:fillRef>
-          <a:effectRef idx="2">
-            <a:schemeClr val="accent1"/>
-          </a:effectRef>
-          <a:fontRef idx="minor">
-            <a:schemeClr val="lt1"/>
-          </a:fontRef>
-        </p:style>
-        <p:txBody>
-          <a:bodyPr rtlCol="0" anchor="ctr"/>
-          <a:lstStyle/>
-          <a:p>
-            <a:pPr algn="ctr"/>
-          </a:p>
-        </p:txBody>
-      </p:sp>
-      <p:sp>
-        <p:nvSpPr>
-          <p:cNvPr id="27" name="TextBox 26"/>
-          <p:cNvSpPr txBox="1"/>
-          <p:nvPr/>
-        </p:nvSpPr>
-        <p:spPr>
-          <a:xfrm>
-            <a:off x="7443215" y="1261872"/>
-            <a:ext cx="2057400" cy="384048"/>
-          </a:xfrm>
-          <a:prstGeom prst="rect">
-            <a:avLst/>
-          </a:prstGeom>
-          <a:noFill/>
-        </p:spPr>
-        <p:txBody>
-          <a:bodyPr wrap="square">
-            <a:spAutoFit/>
-          </a:bodyPr>
-          <a:lstStyle/>
-          <a:p>
-            <a:pPr algn="ctr"/>
-            <a:r>
-              <a:rPr sz="900" b="1" i="0">
-                <a:solidFill>
-                  <a:srgbClr val="FFFFFF"/>
-                </a:solidFill>
-              </a:rPr>
-              <a:t>Sur 1 an
-de fidélité</a:t>
-            </a:r>
-          </a:p>
-        </p:txBody>
-      </p:sp>
-      <p:sp>
-        <p:nvSpPr>
-          <p:cNvPr id="28" name="Rectangle 27"/>
-          <p:cNvSpPr/>
-          <p:nvPr/>
-        </p:nvSpPr>
-        <p:spPr>
-          <a:xfrm>
-            <a:off x="7351775" y="1691640"/>
-            <a:ext cx="2240280" cy="1097280"/>
-          </a:xfrm>
-          <a:prstGeom prst="rect">
-            <a:avLst/>
-          </a:prstGeom>
-          <a:solidFill>
-            <a:srgbClr val="FFFFFF"/>
-          </a:solidFill>
-          <a:ln w="19050">
-            <a:solidFill>
-              <a:srgbClr val="FF0000"/>
-            </a:solidFill>
-          </a:ln>
-        </p:spPr>
-        <p:style>
-          <a:lnRef idx="1">
-            <a:schemeClr val="accent1"/>
-          </a:lnRef>
-          <a:fillRef idx="3">
-            <a:schemeClr val="accent1"/>
-          </a:fillRef>
-          <a:effectRef idx="2">
-            <a:schemeClr val="accent1"/>
-          </a:effectRef>
-          <a:fontRef idx="minor">
-            <a:schemeClr val="lt1"/>
-          </a:fontRef>
-        </p:style>
-        <p:txBody>
-          <a:bodyPr rtlCol="0" anchor="ctr"/>
-          <a:lstStyle/>
-          <a:p>
-            <a:pPr algn="ctr"/>
-          </a:p>
-        </p:txBody>
-      </p:sp>
-      <p:sp>
-        <p:nvSpPr>
-          <p:cNvPr id="29" name="TextBox 28"/>
-          <p:cNvSpPr txBox="1"/>
-          <p:nvPr/>
-        </p:nvSpPr>
-        <p:spPr>
-          <a:xfrm>
-            <a:off x="7443215" y="1783080"/>
-            <a:ext cx="2057400" cy="914400"/>
-          </a:xfrm>
-          <a:prstGeom prst="rect">
-            <a:avLst/>
-          </a:prstGeom>
-          <a:noFill/>
-        </p:spPr>
-        <p:txBody>
-          <a:bodyPr wrap="square">
-            <a:spAutoFit/>
-          </a:bodyPr>
-          <a:lstStyle/>
-          <a:p>
-            <a:pPr algn="ctr"/>
-            <a:r>
-              <a:rPr sz="1300" b="1" i="0">
-                <a:solidFill>
-                  <a:srgbClr val="FF0000"/>
-                </a:solidFill>
-              </a:rPr>
-              <a:t>1 080€
-par donateur</a:t>
-            </a:r>
-          </a:p>
-        </p:txBody>
-      </p:sp>
-      <p:sp>
-        <p:nvSpPr>
-          <p:cNvPr id="30" name="TextBox 29"/>
-          <p:cNvSpPr txBox="1"/>
-          <p:nvPr/>
-        </p:nvSpPr>
-        <p:spPr>
-          <a:xfrm>
-            <a:off x="9619488" y="2057400"/>
-            <a:ext cx="256032" cy="548640"/>
-          </a:xfrm>
-          <a:prstGeom prst="rect">
-            <a:avLst/>
-          </a:prstGeom>
-          <a:noFill/>
-        </p:spPr>
-        <p:txBody>
-          <a:bodyPr wrap="square">
-            <a:spAutoFit/>
-          </a:bodyPr>
-          <a:lstStyle/>
-          <a:p>
-            <a:pPr algn="l"/>
-            <a:r>
-              <a:rPr sz="2000" b="1" i="0">
-                <a:solidFill>
-                  <a:srgbClr val="008080"/>
-                </a:solidFill>
-              </a:rPr>
-              <a:t>=</a:t>
-            </a:r>
-          </a:p>
-        </p:txBody>
-      </p:sp>
-      <p:sp>
-        <p:nvSpPr>
-          <p:cNvPr id="31" name="Rectangle 30"/>
-          <p:cNvSpPr/>
-          <p:nvPr/>
-        </p:nvSpPr>
-        <p:spPr>
-          <a:xfrm>
-            <a:off x="9710928" y="1234440"/>
-            <a:ext cx="2240280" cy="457200"/>
-          </a:xfrm>
-          <a:prstGeom prst="rect">
-            <a:avLst/>
-          </a:prstGeom>
-          <a:solidFill>
-            <a:srgbClr val="AA3300"/>
-          </a:solidFill>
-          <a:ln>
-            <a:noFill/>
-          </a:ln>
-        </p:spPr>
-        <p:style>
-          <a:lnRef idx="1">
-            <a:schemeClr val="accent1"/>
-          </a:lnRef>
-          <a:fillRef idx="3">
-            <a:schemeClr val="accent1"/>
-          </a:fillRef>
-          <a:effectRef idx="2">
-            <a:schemeClr val="accent1"/>
-          </a:effectRef>
-          <a:fontRef idx="minor">
-            <a:schemeClr val="lt1"/>
-          </a:fontRef>
-        </p:style>
-        <p:txBody>
-          <a:bodyPr rtlCol="0" anchor="ctr"/>
-          <a:lstStyle/>
-          <a:p>
-            <a:pPr algn="ctr"/>
-          </a:p>
-        </p:txBody>
-      </p:sp>
-      <p:sp>
-        <p:nvSpPr>
-          <p:cNvPr id="32" name="TextBox 31"/>
-          <p:cNvSpPr txBox="1"/>
-          <p:nvPr/>
-        </p:nvSpPr>
-        <p:spPr>
-          <a:xfrm>
-            <a:off x="9802367" y="1261872"/>
-            <a:ext cx="2057400" cy="384048"/>
-          </a:xfrm>
-          <a:prstGeom prst="rect">
-            <a:avLst/>
-          </a:prstGeom>
-          <a:noFill/>
-        </p:spPr>
-        <p:txBody>
-          <a:bodyPr wrap="square">
-            <a:spAutoFit/>
-          </a:bodyPr>
-          <a:lstStyle/>
-          <a:p>
-            <a:pPr algn="ctr"/>
-            <a:r>
-              <a:rPr sz="900" b="1" i="0">
-                <a:solidFill>
-                  <a:srgbClr val="FFFFFF"/>
-                </a:solidFill>
-              </a:rPr>
-              <a:t>Impact UNICEF
-concret</a:t>
-            </a:r>
-          </a:p>
-        </p:txBody>
-      </p:sp>
-      <p:sp>
-        <p:nvSpPr>
-          <p:cNvPr id="33" name="Rectangle 32"/>
-          <p:cNvSpPr/>
-          <p:nvPr/>
-        </p:nvSpPr>
-        <p:spPr>
-          <a:xfrm>
-            <a:off x="9710928" y="1691640"/>
-            <a:ext cx="2240280" cy="1097280"/>
-          </a:xfrm>
-          <a:prstGeom prst="rect">
-            <a:avLst/>
-          </a:prstGeom>
-          <a:solidFill>
-            <a:srgbClr val="FFFFFF"/>
-          </a:solidFill>
-          <a:ln w="19050">
-            <a:solidFill>
-              <a:srgbClr val="AA3300"/>
-            </a:solidFill>
-          </a:ln>
-        </p:spPr>
-        <p:style>
-          <a:lnRef idx="1">
-            <a:schemeClr val="accent1"/>
-          </a:lnRef>
-          <a:fillRef idx="3">
-            <a:schemeClr val="accent1"/>
-          </a:fillRef>
-          <a:effectRef idx="2">
-            <a:schemeClr val="accent1"/>
-          </a:effectRef>
-          <a:fontRef idx="minor">
-            <a:schemeClr val="lt1"/>
-          </a:fontRef>
-        </p:style>
-        <p:txBody>
-          <a:bodyPr rtlCol="0" anchor="ctr"/>
-          <a:lstStyle/>
-          <a:p>
-            <a:pPr algn="ctr"/>
-          </a:p>
-        </p:txBody>
-      </p:sp>
-      <p:sp>
-        <p:nvSpPr>
-          <p:cNvPr id="34" name="TextBox 33"/>
-          <p:cNvSpPr txBox="1"/>
-          <p:nvPr/>
-        </p:nvSpPr>
-        <p:spPr>
-          <a:xfrm>
-            <a:off x="9802367" y="1783080"/>
-            <a:ext cx="2057400" cy="914400"/>
-          </a:xfrm>
-          <a:prstGeom prst="rect">
-            <a:avLst/>
-          </a:prstGeom>
-          <a:noFill/>
-        </p:spPr>
-        <p:txBody>
-          <a:bodyPr wrap="square">
-            <a:spAutoFit/>
-          </a:bodyPr>
-          <a:lstStyle/>
-          <a:p>
-            <a:pPr algn="ctr"/>
-            <a:r>
-              <a:rPr sz="1300" b="1" i="0">
-                <a:solidFill>
-                  <a:srgbClr val="AA3300"/>
-                </a:solidFill>
-              </a:rPr>
-              <a:t>6 enfants vaccinés
-chaque jour</a:t>
-            </a:r>
-          </a:p>
-        </p:txBody>
-      </p:sp>
-      <p:sp>
-        <p:nvSpPr>
-          <p:cNvPr id="35" name="Rectangle 34"/>
-          <p:cNvSpPr/>
-          <p:nvPr/>
-        </p:nvSpPr>
-        <p:spPr>
-          <a:xfrm>
-            <a:off x="274320" y="2999232"/>
-            <a:ext cx="11640312" cy="914400"/>
-          </a:xfrm>
-          <a:prstGeom prst="rect">
-            <a:avLst/>
-          </a:prstGeom>
-          <a:solidFill>
-            <a:srgbClr val="F0F7F7"/>
-          </a:solidFill>
-          <a:ln>
-            <a:noFill/>
-          </a:ln>
-        </p:spPr>
-        <p:style>
-          <a:lnRef idx="1">
-            <a:schemeClr val="accent1"/>
-          </a:lnRef>
-          <a:fillRef idx="3">
-            <a:schemeClr val="accent1"/>
-          </a:fillRef>
-          <a:effectRef idx="2">
-            <a:schemeClr val="accent1"/>
-          </a:effectRef>
-          <a:fontRef idx="minor">
-            <a:schemeClr val="lt1"/>
-          </a:fontRef>
-        </p:style>
-        <p:txBody>
-          <a:bodyPr rtlCol="0" anchor="ctr"/>
-          <a:lstStyle/>
-          <a:p>
-            <a:pPr algn="ctr"/>
-          </a:p>
-        </p:txBody>
-      </p:sp>
-      <p:sp>
-        <p:nvSpPr>
-          <p:cNvPr id="36" name="TextBox 35"/>
-          <p:cNvSpPr txBox="1"/>
-          <p:nvPr/>
-        </p:nvSpPr>
-        <p:spPr>
-          <a:xfrm>
-            <a:off x="411479" y="3072384"/>
-            <a:ext cx="11365992" cy="768096"/>
+            <a:off x="384048" y="2688336"/>
+            <a:ext cx="1700784" cy="1005840"/>
           </a:xfrm>
           <a:prstGeom prst="rect">
             <a:avLst/>
@@ -7530,65 +6050,22 @@
                   <a:srgbClr val="1A1A1A"/>
                 </a:solidFill>
               </a:rPr>
-              <a:t>Message à intégrer : Vous n'êtes pas en train de 'vendre'. Vous offrez à des personnes bienveillantes un moyen concret, simple et traçable
-de transformer leur générosité en impact réel pour des enfants dans le monde entier.</a:t>
-            </a:r>
-          </a:p>
-        </p:txBody>
-      </p:sp>
-      <p:sp>
-        <p:nvSpPr>
-          <p:cNvPr id="37" name="Rectangle 36"/>
+              <a:t>Bataille de Solférino
+→ Naissance Croix-Rouge</a:t>
+            </a:r>
+          </a:p>
+        </p:txBody>
+      </p:sp>
+      <p:sp>
+        <p:nvSpPr>
+          <p:cNvPr id="34" name="Rectangle 33"/>
           <p:cNvSpPr/>
           <p:nvPr/>
         </p:nvSpPr>
         <p:spPr>
           <a:xfrm>
-            <a:off x="274320" y="2999232"/>
-            <a:ext cx="128016" cy="914400"/>
-          </a:xfrm>
-          <a:prstGeom prst="rect">
-            <a:avLst/>
-          </a:prstGeom>
-          <a:solidFill>
-            <a:srgbClr val="FF0000"/>
-          </a:solidFill>
-          <a:ln>
-            <a:noFill/>
-          </a:ln>
-        </p:spPr>
-        <p:style>
-          <a:lnRef idx="1">
-            <a:schemeClr val="accent1"/>
-          </a:lnRef>
-          <a:fillRef idx="3">
-            <a:schemeClr val="accent1"/>
-          </a:fillRef>
-          <a:effectRef idx="2">
-            <a:schemeClr val="accent1"/>
-          </a:effectRef>
-          <a:fontRef idx="minor">
-            <a:schemeClr val="lt1"/>
-          </a:fontRef>
-        </p:style>
-        <p:txBody>
-          <a:bodyPr rtlCol="0" anchor="ctr"/>
-          <a:lstStyle/>
-          <a:p>
-            <a:pPr algn="ctr"/>
-          </a:p>
-        </p:txBody>
-      </p:sp>
-      <p:sp>
-        <p:nvSpPr>
-          <p:cNvPr id="38" name="Rectangle 37"/>
-          <p:cNvSpPr/>
-          <p:nvPr/>
-        </p:nvSpPr>
-        <p:spPr>
-          <a:xfrm>
-            <a:off x="274320" y="4069080"/>
-            <a:ext cx="5669280" cy="329184"/>
+            <a:off x="2249424" y="2286000"/>
+            <a:ext cx="1920240" cy="347472"/>
           </a:xfrm>
           <a:prstGeom prst="rect">
             <a:avLst/>
@@ -7624,14 +6101,14 @@
       </p:sp>
       <p:sp>
         <p:nvSpPr>
-          <p:cNvPr id="39" name="TextBox 38"/>
+          <p:cNvPr id="35" name="TextBox 34"/>
           <p:cNvSpPr txBox="1"/>
           <p:nvPr/>
         </p:nvSpPr>
         <p:spPr>
           <a:xfrm>
-            <a:off x="384048" y="4114800"/>
-            <a:ext cx="5486400" cy="256032"/>
+            <a:off x="2340864" y="2313432"/>
+            <a:ext cx="1737360" cy="256032"/>
           </a:xfrm>
           <a:prstGeom prst="rect">
             <a:avLst/>
@@ -7644,28 +6121,108 @@
           </a:bodyPr>
           <a:lstStyle/>
           <a:p>
-            <a:pPr algn="l"/>
-            <a:r>
-              <a:rPr sz="1100" b="1" i="0">
+            <a:pPr algn="ctr"/>
+            <a:r>
+              <a:rPr sz="1200" b="1" i="0">
                 <a:solidFill>
                   <a:srgbClr val="FFFFFF"/>
                 </a:solidFill>
               </a:rPr>
-              <a:t>Don ponctuel (1 fois)</a:t>
-            </a:r>
-          </a:p>
-        </p:txBody>
-      </p:sp>
-      <p:sp>
-        <p:nvSpPr>
-          <p:cNvPr id="40" name="Rectangle 39"/>
+              <a:t>1863</a:t>
+            </a:r>
+          </a:p>
+        </p:txBody>
+      </p:sp>
+      <p:sp>
+        <p:nvSpPr>
+          <p:cNvPr id="36" name="Rectangle 35"/>
           <p:cNvSpPr/>
           <p:nvPr/>
         </p:nvSpPr>
         <p:spPr>
           <a:xfrm>
-            <a:off x="6355080" y="4069080"/>
-            <a:ext cx="5669280" cy="329184"/>
+            <a:off x="2249424" y="2633472"/>
+            <a:ext cx="1920240" cy="1143000"/>
+          </a:xfrm>
+          <a:prstGeom prst="rect">
+            <a:avLst/>
+          </a:prstGeom>
+          <a:solidFill>
+            <a:srgbClr val="F0F7F7"/>
+          </a:solidFill>
+          <a:ln w="10160">
+            <a:solidFill>
+              <a:srgbClr val="008080"/>
+            </a:solidFill>
+          </a:ln>
+        </p:spPr>
+        <p:style>
+          <a:lnRef idx="1">
+            <a:schemeClr val="accent1"/>
+          </a:lnRef>
+          <a:fillRef idx="3">
+            <a:schemeClr val="accent1"/>
+          </a:fillRef>
+          <a:effectRef idx="2">
+            <a:schemeClr val="accent1"/>
+          </a:effectRef>
+          <a:fontRef idx="minor">
+            <a:schemeClr val="lt1"/>
+          </a:fontRef>
+        </p:style>
+        <p:txBody>
+          <a:bodyPr rtlCol="0" anchor="ctr"/>
+          <a:lstStyle/>
+          <a:p>
+            <a:pPr algn="ctr"/>
+          </a:p>
+        </p:txBody>
+      </p:sp>
+      <p:sp>
+        <p:nvSpPr>
+          <p:cNvPr id="37" name="TextBox 36"/>
+          <p:cNvSpPr txBox="1"/>
+          <p:nvPr/>
+        </p:nvSpPr>
+        <p:spPr>
+          <a:xfrm>
+            <a:off x="2359152" y="2688336"/>
+            <a:ext cx="1700784" cy="1005840"/>
+          </a:xfrm>
+          <a:prstGeom prst="rect">
+            <a:avLst/>
+          </a:prstGeom>
+          <a:noFill/>
+        </p:spPr>
+        <p:txBody>
+          <a:bodyPr wrap="square">
+            <a:spAutoFit/>
+          </a:bodyPr>
+          <a:lstStyle/>
+          <a:p>
+            <a:pPr algn="l"/>
+            <a:r>
+              <a:rPr sz="1000" b="0" i="0">
+                <a:solidFill>
+                  <a:srgbClr val="1A1A1A"/>
+                </a:solidFill>
+              </a:rPr>
+              <a:t>Fondation Croix-Rouge
+par Henry Dunant</a:t>
+            </a:r>
+          </a:p>
+        </p:txBody>
+      </p:sp>
+      <p:sp>
+        <p:nvSpPr>
+          <p:cNvPr id="38" name="Rectangle 37"/>
+          <p:cNvSpPr/>
+          <p:nvPr/>
+        </p:nvSpPr>
+        <p:spPr>
+          <a:xfrm>
+            <a:off x="4224528" y="2286000"/>
+            <a:ext cx="1920240" cy="347472"/>
           </a:xfrm>
           <a:prstGeom prst="rect">
             <a:avLst/>
@@ -7701,14 +6258,14 @@
       </p:sp>
       <p:sp>
         <p:nvSpPr>
-          <p:cNvPr id="41" name="TextBox 40"/>
+          <p:cNvPr id="39" name="TextBox 38"/>
           <p:cNvSpPr txBox="1"/>
           <p:nvPr/>
         </p:nvSpPr>
         <p:spPr>
           <a:xfrm>
-            <a:off x="6464808" y="4114800"/>
-            <a:ext cx="5486400" cy="256032"/>
+            <a:off x="4315968" y="2313432"/>
+            <a:ext cx="1737360" cy="256032"/>
           </a:xfrm>
           <a:prstGeom prst="rect">
             <a:avLst/>
@@ -7721,28 +6278,28 @@
           </a:bodyPr>
           <a:lstStyle/>
           <a:p>
-            <a:pPr algn="l"/>
-            <a:r>
-              <a:rPr sz="1100" b="1" i="0">
+            <a:pPr algn="ctr"/>
+            <a:r>
+              <a:rPr sz="1200" b="1" i="0">
                 <a:solidFill>
                   <a:srgbClr val="FFFFFF"/>
                 </a:solidFill>
               </a:rPr>
-              <a:t>Don régulier mensuel (votre cible)</a:t>
-            </a:r>
-          </a:p>
-        </p:txBody>
-      </p:sp>
-      <p:sp>
-        <p:nvSpPr>
-          <p:cNvPr id="42" name="Rectangle 41"/>
+              <a:t>1946</a:t>
+            </a:r>
+          </a:p>
+        </p:txBody>
+      </p:sp>
+      <p:sp>
+        <p:nvSpPr>
+          <p:cNvPr id="40" name="Rectangle 39"/>
           <p:cNvSpPr/>
           <p:nvPr/>
         </p:nvSpPr>
         <p:spPr>
           <a:xfrm>
-            <a:off x="274320" y="4453128"/>
-            <a:ext cx="5669280" cy="402336"/>
+            <a:off x="4224528" y="2633472"/>
+            <a:ext cx="1920240" cy="1143000"/>
           </a:xfrm>
           <a:prstGeom prst="rect">
             <a:avLst/>
@@ -7750,7 +6307,7 @@
           <a:solidFill>
             <a:srgbClr val="F0F7F7"/>
           </a:solidFill>
-          <a:ln w="5080">
+          <a:ln w="10160">
             <a:solidFill>
               <a:srgbClr val="008080"/>
             </a:solidFill>
@@ -7780,14 +6337,14 @@
       </p:sp>
       <p:sp>
         <p:nvSpPr>
-          <p:cNvPr id="43" name="TextBox 42"/>
+          <p:cNvPr id="41" name="TextBox 40"/>
           <p:cNvSpPr txBox="1"/>
           <p:nvPr/>
         </p:nvSpPr>
         <p:spPr>
           <a:xfrm>
-            <a:off x="402336" y="4507992"/>
-            <a:ext cx="5440680" cy="329184"/>
+            <a:off x="4334256" y="2688336"/>
+            <a:ext cx="1700784" cy="1005840"/>
           </a:xfrm>
           <a:prstGeom prst="rect">
             <a:avLst/>
@@ -7807,32 +6364,31 @@
                   <a:srgbClr val="1A1A1A"/>
                 </a:solidFill>
               </a:rPr>
-              <a:t>• Impact immédiat mais unique</a:t>
-            </a:r>
-          </a:p>
-        </p:txBody>
-      </p:sp>
-      <p:sp>
-        <p:nvSpPr>
-          <p:cNvPr id="44" name="Rectangle 43"/>
+              <a:t>Fondation UNICEF
+(ONU - après WWII)</a:t>
+            </a:r>
+          </a:p>
+        </p:txBody>
+      </p:sp>
+      <p:sp>
+        <p:nvSpPr>
+          <p:cNvPr id="42" name="Rectangle 41"/>
           <p:cNvSpPr/>
           <p:nvPr/>
         </p:nvSpPr>
         <p:spPr>
           <a:xfrm>
-            <a:off x="274320" y="4873752"/>
-            <a:ext cx="5669280" cy="402336"/>
+            <a:off x="6199632" y="2286000"/>
+            <a:ext cx="1920240" cy="347472"/>
           </a:xfrm>
           <a:prstGeom prst="rect">
             <a:avLst/>
           </a:prstGeom>
           <a:solidFill>
-            <a:srgbClr val="F0F7F7"/>
+            <a:srgbClr val="008080"/>
           </a:solidFill>
-          <a:ln w="5080">
-            <a:solidFill>
-              <a:srgbClr val="008080"/>
-            </a:solidFill>
+          <a:ln>
+            <a:noFill/>
           </a:ln>
         </p:spPr>
         <p:style>
@@ -7859,14 +6415,93 @@
       </p:sp>
       <p:sp>
         <p:nvSpPr>
+          <p:cNvPr id="43" name="TextBox 42"/>
+          <p:cNvSpPr txBox="1"/>
+          <p:nvPr/>
+        </p:nvSpPr>
+        <p:spPr>
+          <a:xfrm>
+            <a:off x="6291072" y="2313432"/>
+            <a:ext cx="1737360" cy="256032"/>
+          </a:xfrm>
+          <a:prstGeom prst="rect">
+            <a:avLst/>
+          </a:prstGeom>
+          <a:noFill/>
+        </p:spPr>
+        <p:txBody>
+          <a:bodyPr wrap="square">
+            <a:spAutoFit/>
+          </a:bodyPr>
+          <a:lstStyle/>
+          <a:p>
+            <a:pPr algn="ctr"/>
+            <a:r>
+              <a:rPr sz="1200" b="1" i="0">
+                <a:solidFill>
+                  <a:srgbClr val="FFFFFF"/>
+                </a:solidFill>
+              </a:rPr>
+              <a:t>1989</a:t>
+            </a:r>
+          </a:p>
+        </p:txBody>
+      </p:sp>
+      <p:sp>
+        <p:nvSpPr>
+          <p:cNvPr id="44" name="Rectangle 43"/>
+          <p:cNvSpPr/>
+          <p:nvPr/>
+        </p:nvSpPr>
+        <p:spPr>
+          <a:xfrm>
+            <a:off x="6199632" y="2633472"/>
+            <a:ext cx="1920240" cy="1143000"/>
+          </a:xfrm>
+          <a:prstGeom prst="rect">
+            <a:avLst/>
+          </a:prstGeom>
+          <a:solidFill>
+            <a:srgbClr val="F0F7F7"/>
+          </a:solidFill>
+          <a:ln w="10160">
+            <a:solidFill>
+              <a:srgbClr val="008080"/>
+            </a:solidFill>
+          </a:ln>
+        </p:spPr>
+        <p:style>
+          <a:lnRef idx="1">
+            <a:schemeClr val="accent1"/>
+          </a:lnRef>
+          <a:fillRef idx="3">
+            <a:schemeClr val="accent1"/>
+          </a:fillRef>
+          <a:effectRef idx="2">
+            <a:schemeClr val="accent1"/>
+          </a:effectRef>
+          <a:fontRef idx="minor">
+            <a:schemeClr val="lt1"/>
+          </a:fontRef>
+        </p:style>
+        <p:txBody>
+          <a:bodyPr rtlCol="0" anchor="ctr"/>
+          <a:lstStyle/>
+          <a:p>
+            <a:pPr algn="ctr"/>
+          </a:p>
+        </p:txBody>
+      </p:sp>
+      <p:sp>
+        <p:nvSpPr>
           <p:cNvPr id="45" name="TextBox 44"/>
           <p:cNvSpPr txBox="1"/>
           <p:nvPr/>
         </p:nvSpPr>
         <p:spPr>
           <a:xfrm>
-            <a:off x="402336" y="4928616"/>
-            <a:ext cx="5440680" cy="329184"/>
+            <a:off x="6309360" y="2688336"/>
+            <a:ext cx="1700784" cy="1005840"/>
           </a:xfrm>
           <a:prstGeom prst="rect">
             <a:avLst/>
@@ -7886,7 +6521,8 @@
                   <a:srgbClr val="1A1A1A"/>
                 </a:solidFill>
               </a:rPr>
-              <a:t>• Valeur moyenne : 30€</a:t>
+              <a:t>Convention Droits
+de l'Enfant (ONU)</a:t>
             </a:r>
           </a:p>
         </p:txBody>
@@ -7899,19 +6535,17 @@
         </p:nvSpPr>
         <p:spPr>
           <a:xfrm>
-            <a:off x="274320" y="5294376"/>
-            <a:ext cx="5669280" cy="402336"/>
+            <a:off x="8174736" y="2286000"/>
+            <a:ext cx="1920240" cy="347472"/>
           </a:xfrm>
           <a:prstGeom prst="rect">
             <a:avLst/>
           </a:prstGeom>
           <a:solidFill>
-            <a:srgbClr val="F0F7F7"/>
+            <a:srgbClr val="008080"/>
           </a:solidFill>
-          <a:ln w="5080">
-            <a:solidFill>
-              <a:srgbClr val="008080"/>
-            </a:solidFill>
+          <a:ln>
+            <a:noFill/>
           </a:ln>
         </p:spPr>
         <p:style>
@@ -7944,8 +6578,87 @@
         </p:nvSpPr>
         <p:spPr>
           <a:xfrm>
-            <a:off x="402336" y="5349240"/>
-            <a:ext cx="5440680" cy="329184"/>
+            <a:off x="8266176" y="2313432"/>
+            <a:ext cx="1737360" cy="256032"/>
+          </a:xfrm>
+          <a:prstGeom prst="rect">
+            <a:avLst/>
+          </a:prstGeom>
+          <a:noFill/>
+        </p:spPr>
+        <p:txBody>
+          <a:bodyPr wrap="square">
+            <a:spAutoFit/>
+          </a:bodyPr>
+          <a:lstStyle/>
+          <a:p>
+            <a:pPr algn="ctr"/>
+            <a:r>
+              <a:rPr sz="1200" b="1" i="0">
+                <a:solidFill>
+                  <a:srgbClr val="FFFFFF"/>
+                </a:solidFill>
+              </a:rPr>
+              <a:t>1989</a:t>
+            </a:r>
+          </a:p>
+        </p:txBody>
+      </p:sp>
+      <p:sp>
+        <p:nvSpPr>
+          <p:cNvPr id="48" name="Rectangle 47"/>
+          <p:cNvSpPr/>
+          <p:nvPr/>
+        </p:nvSpPr>
+        <p:spPr>
+          <a:xfrm>
+            <a:off x="8174736" y="2633472"/>
+            <a:ext cx="1920240" cy="1143000"/>
+          </a:xfrm>
+          <a:prstGeom prst="rect">
+            <a:avLst/>
+          </a:prstGeom>
+          <a:solidFill>
+            <a:srgbClr val="F0F7F7"/>
+          </a:solidFill>
+          <a:ln w="10160">
+            <a:solidFill>
+              <a:srgbClr val="008080"/>
+            </a:solidFill>
+          </a:ln>
+        </p:spPr>
+        <p:style>
+          <a:lnRef idx="1">
+            <a:schemeClr val="accent1"/>
+          </a:lnRef>
+          <a:fillRef idx="3">
+            <a:schemeClr val="accent1"/>
+          </a:fillRef>
+          <a:effectRef idx="2">
+            <a:schemeClr val="accent1"/>
+          </a:effectRef>
+          <a:fontRef idx="minor">
+            <a:schemeClr val="lt1"/>
+          </a:fontRef>
+        </p:style>
+        <p:txBody>
+          <a:bodyPr rtlCol="0" anchor="ctr"/>
+          <a:lstStyle/>
+          <a:p>
+            <a:pPr algn="ctr"/>
+          </a:p>
+        </p:txBody>
+      </p:sp>
+      <p:sp>
+        <p:nvSpPr>
+          <p:cNvPr id="49" name="TextBox 48"/>
+          <p:cNvSpPr txBox="1"/>
+          <p:nvPr/>
+        </p:nvSpPr>
+        <p:spPr>
+          <a:xfrm>
+            <a:off x="8284464" y="2688336"/>
+            <a:ext cx="1700784" cy="1005840"/>
           </a:xfrm>
           <a:prstGeom prst="rect">
             <a:avLst/>
@@ -7965,32 +6678,31 @@
                   <a:srgbClr val="1A1A1A"/>
                 </a:solidFill>
               </a:rPr>
-              <a:t>• Relation = 1 transaction</a:t>
-            </a:r>
-          </a:p>
-        </p:txBody>
-      </p:sp>
-      <p:sp>
-        <p:nvSpPr>
-          <p:cNvPr id="48" name="Rectangle 47"/>
+              <a:t>Création Comité
+Don en Confiance</a:t>
+            </a:r>
+          </a:p>
+        </p:txBody>
+      </p:sp>
+      <p:sp>
+        <p:nvSpPr>
+          <p:cNvPr id="50" name="Rectangle 49"/>
           <p:cNvSpPr/>
           <p:nvPr/>
         </p:nvSpPr>
         <p:spPr>
           <a:xfrm>
-            <a:off x="274320" y="5715000"/>
-            <a:ext cx="5669280" cy="402336"/>
+            <a:off x="10149840" y="2286000"/>
+            <a:ext cx="1920240" cy="347472"/>
           </a:xfrm>
           <a:prstGeom prst="rect">
             <a:avLst/>
           </a:prstGeom>
           <a:solidFill>
-            <a:srgbClr val="F0F7F7"/>
+            <a:srgbClr val="008080"/>
           </a:solidFill>
-          <a:ln w="5080">
-            <a:solidFill>
-              <a:srgbClr val="008080"/>
-            </a:solidFill>
+          <a:ln>
+            <a:noFill/>
           </a:ln>
         </p:spPr>
         <p:style>
@@ -8017,14 +6729,93 @@
       </p:sp>
       <p:sp>
         <p:nvSpPr>
-          <p:cNvPr id="49" name="TextBox 48"/>
+          <p:cNvPr id="51" name="TextBox 50"/>
           <p:cNvSpPr txBox="1"/>
           <p:nvPr/>
         </p:nvSpPr>
         <p:spPr>
           <a:xfrm>
-            <a:off x="402336" y="5769864"/>
-            <a:ext cx="5440680" cy="329184"/>
+            <a:off x="10241280" y="2313432"/>
+            <a:ext cx="1737360" cy="256032"/>
+          </a:xfrm>
+          <a:prstGeom prst="rect">
+            <a:avLst/>
+          </a:prstGeom>
+          <a:noFill/>
+        </p:spPr>
+        <p:txBody>
+          <a:bodyPr wrap="square">
+            <a:spAutoFit/>
+          </a:bodyPr>
+          <a:lstStyle/>
+          <a:p>
+            <a:pPr algn="ctr"/>
+            <a:r>
+              <a:rPr sz="1200" b="1" i="0">
+                <a:solidFill>
+                  <a:srgbClr val="FFFFFF"/>
+                </a:solidFill>
+              </a:rPr>
+              <a:t>2000s</a:t>
+            </a:r>
+          </a:p>
+        </p:txBody>
+      </p:sp>
+      <p:sp>
+        <p:nvSpPr>
+          <p:cNvPr id="52" name="Rectangle 51"/>
+          <p:cNvSpPr/>
+          <p:nvPr/>
+        </p:nvSpPr>
+        <p:spPr>
+          <a:xfrm>
+            <a:off x="10149840" y="2633472"/>
+            <a:ext cx="1920240" cy="1143000"/>
+          </a:xfrm>
+          <a:prstGeom prst="rect">
+            <a:avLst/>
+          </a:prstGeom>
+          <a:solidFill>
+            <a:srgbClr val="F0F7F7"/>
+          </a:solidFill>
+          <a:ln w="10160">
+            <a:solidFill>
+              <a:srgbClr val="008080"/>
+            </a:solidFill>
+          </a:ln>
+        </p:spPr>
+        <p:style>
+          <a:lnRef idx="1">
+            <a:schemeClr val="accent1"/>
+          </a:lnRef>
+          <a:fillRef idx="3">
+            <a:schemeClr val="accent1"/>
+          </a:fillRef>
+          <a:effectRef idx="2">
+            <a:schemeClr val="accent1"/>
+          </a:effectRef>
+          <a:fontRef idx="minor">
+            <a:schemeClr val="lt1"/>
+          </a:fontRef>
+        </p:style>
+        <p:txBody>
+          <a:bodyPr rtlCol="0" anchor="ctr"/>
+          <a:lstStyle/>
+          <a:p>
+            <a:pPr algn="ctr"/>
+          </a:p>
+        </p:txBody>
+      </p:sp>
+      <p:sp>
+        <p:nvSpPr>
+          <p:cNvPr id="53" name="TextBox 52"/>
+          <p:cNvSpPr txBox="1"/>
+          <p:nvPr/>
+        </p:nvSpPr>
+        <p:spPr>
+          <a:xfrm>
+            <a:off x="10259568" y="2688336"/>
+            <a:ext cx="1700784" cy="1005840"/>
           </a:xfrm>
           <a:prstGeom prst="rect">
             <a:avLst/>
@@ -8044,32 +6835,31 @@
                   <a:srgbClr val="1A1A1A"/>
                 </a:solidFill>
               </a:rPr>
-              <a:t>• Coût de collecte élevé</a:t>
-            </a:r>
-          </a:p>
-        </p:txBody>
-      </p:sp>
-      <p:sp>
-        <p:nvSpPr>
-          <p:cNvPr id="50" name="Rectangle 49"/>
+              <a:t>RGPD &amp; Bloctel
+encadrement légal</a:t>
+            </a:r>
+          </a:p>
+        </p:txBody>
+      </p:sp>
+      <p:sp>
+        <p:nvSpPr>
+          <p:cNvPr id="54" name="Rectangle 53"/>
           <p:cNvSpPr/>
           <p:nvPr/>
         </p:nvSpPr>
         <p:spPr>
           <a:xfrm>
-            <a:off x="6355080" y="4453128"/>
-            <a:ext cx="5669280" cy="402336"/>
+            <a:off x="274320" y="3931920"/>
+            <a:ext cx="11640312" cy="658368"/>
           </a:xfrm>
           <a:prstGeom prst="rect">
             <a:avLst/>
           </a:prstGeom>
           <a:solidFill>
-            <a:srgbClr val="F0F7F7"/>
+            <a:srgbClr val="008080"/>
           </a:solidFill>
-          <a:ln w="5080">
-            <a:solidFill>
-              <a:srgbClr val="008080"/>
-            </a:solidFill>
+          <a:ln>
+            <a:noFill/>
           </a:ln>
         </p:spPr>
         <p:style>
@@ -8096,14 +6886,14 @@
       </p:sp>
       <p:sp>
         <p:nvSpPr>
-          <p:cNvPr id="51" name="TextBox 50"/>
+          <p:cNvPr id="55" name="TextBox 54"/>
           <p:cNvSpPr txBox="1"/>
           <p:nvPr/>
         </p:nvSpPr>
         <p:spPr>
           <a:xfrm>
-            <a:off x="6483096" y="4507992"/>
-            <a:ext cx="5440680" cy="329184"/>
+            <a:off x="411479" y="4005072"/>
+            <a:ext cx="11365992" cy="512063"/>
           </a:xfrm>
           <a:prstGeom prst="rect">
             <a:avLst/>
@@ -8120,35 +6910,34 @@
             <a:r>
               <a:rPr sz="1000" b="0" i="0">
                 <a:solidFill>
-                  <a:srgbClr val="1A1A1A"/>
+                  <a:srgbClr val="FFFFFF"/>
                 </a:solidFill>
               </a:rPr>
-              <a:t>• Impact continu et planifiable</a:t>
-            </a:r>
-          </a:p>
-        </p:txBody>
-      </p:sp>
-      <p:sp>
-        <p:nvSpPr>
-          <p:cNvPr id="52" name="Rectangle 51"/>
+              <a:t>Les 3 principes humanitaires fondamentaux que vous incarnez chaque jour :
+HUMANITÉ — Soulager la souffrance humaine sans discrimination  ·  IMPARTIALITÉ — Sans distinction de nationalité, race, religion  ·  NEUTRALITÉ — Aucun parti pris politique</a:t>
+            </a:r>
+          </a:p>
+        </p:txBody>
+      </p:sp>
+      <p:sp>
+        <p:nvSpPr>
+          <p:cNvPr id="56" name="Rectangle 55"/>
           <p:cNvSpPr/>
           <p:nvPr/>
         </p:nvSpPr>
         <p:spPr>
           <a:xfrm>
-            <a:off x="6355080" y="4873752"/>
-            <a:ext cx="5669280" cy="402336"/>
+            <a:off x="274320" y="4709160"/>
+            <a:ext cx="11640312" cy="402336"/>
           </a:xfrm>
           <a:prstGeom prst="rect">
             <a:avLst/>
           </a:prstGeom>
           <a:solidFill>
-            <a:srgbClr val="F0F7F7"/>
+            <a:srgbClr val="008080"/>
           </a:solidFill>
-          <a:ln w="5080">
-            <a:solidFill>
-              <a:srgbClr val="008080"/>
-            </a:solidFill>
+          <a:ln>
+            <a:noFill/>
           </a:ln>
         </p:spPr>
         <p:style>
@@ -8175,249 +6964,14 @@
       </p:sp>
       <p:sp>
         <p:nvSpPr>
-          <p:cNvPr id="53" name="TextBox 52"/>
-          <p:cNvSpPr txBox="1"/>
-          <p:nvPr/>
-        </p:nvSpPr>
-        <p:spPr>
-          <a:xfrm>
-            <a:off x="6483096" y="4928616"/>
-            <a:ext cx="5440680" cy="329184"/>
-          </a:xfrm>
-          <a:prstGeom prst="rect">
-            <a:avLst/>
-          </a:prstGeom>
-          <a:noFill/>
-        </p:spPr>
-        <p:txBody>
-          <a:bodyPr wrap="square">
-            <a:spAutoFit/>
-          </a:bodyPr>
-          <a:lstStyle/>
-          <a:p>
-            <a:pPr algn="l"/>
-            <a:r>
-              <a:rPr sz="1000" b="0" i="0">
-                <a:solidFill>
-                  <a:srgbClr val="1A1A1A"/>
-                </a:solidFill>
-              </a:rPr>
-              <a:t>• Valeur sur 3 ans : 540–900€</a:t>
-            </a:r>
-          </a:p>
-        </p:txBody>
-      </p:sp>
-      <p:sp>
-        <p:nvSpPr>
-          <p:cNvPr id="54" name="Rectangle 53"/>
-          <p:cNvSpPr/>
-          <p:nvPr/>
-        </p:nvSpPr>
-        <p:spPr>
-          <a:xfrm>
-            <a:off x="6355080" y="5294376"/>
-            <a:ext cx="5669280" cy="402336"/>
-          </a:xfrm>
-          <a:prstGeom prst="rect">
-            <a:avLst/>
-          </a:prstGeom>
-          <a:solidFill>
-            <a:srgbClr val="F0F7F7"/>
-          </a:solidFill>
-          <a:ln w="5080">
-            <a:solidFill>
-              <a:srgbClr val="008080"/>
-            </a:solidFill>
-          </a:ln>
-        </p:spPr>
-        <p:style>
-          <a:lnRef idx="1">
-            <a:schemeClr val="accent1"/>
-          </a:lnRef>
-          <a:fillRef idx="3">
-            <a:schemeClr val="accent1"/>
-          </a:fillRef>
-          <a:effectRef idx="2">
-            <a:schemeClr val="accent1"/>
-          </a:effectRef>
-          <a:fontRef idx="minor">
-            <a:schemeClr val="lt1"/>
-          </a:fontRef>
-        </p:style>
-        <p:txBody>
-          <a:bodyPr rtlCol="0" anchor="ctr"/>
-          <a:lstStyle/>
-          <a:p>
-            <a:pPr algn="ctr"/>
-          </a:p>
-        </p:txBody>
-      </p:sp>
-      <p:sp>
-        <p:nvSpPr>
-          <p:cNvPr id="55" name="TextBox 54"/>
-          <p:cNvSpPr txBox="1"/>
-          <p:nvPr/>
-        </p:nvSpPr>
-        <p:spPr>
-          <a:xfrm>
-            <a:off x="6483096" y="5349240"/>
-            <a:ext cx="5440680" cy="329184"/>
-          </a:xfrm>
-          <a:prstGeom prst="rect">
-            <a:avLst/>
-          </a:prstGeom>
-          <a:noFill/>
-        </p:spPr>
-        <p:txBody>
-          <a:bodyPr wrap="square">
-            <a:spAutoFit/>
-          </a:bodyPr>
-          <a:lstStyle/>
-          <a:p>
-            <a:pPr algn="l"/>
-            <a:r>
-              <a:rPr sz="1000" b="0" i="0">
-                <a:solidFill>
-                  <a:srgbClr val="1A1A1A"/>
-                </a:solidFill>
-              </a:rPr>
-              <a:t>• Relation = engagement durable</a:t>
-            </a:r>
-          </a:p>
-        </p:txBody>
-      </p:sp>
-      <p:sp>
-        <p:nvSpPr>
-          <p:cNvPr id="56" name="Rectangle 55"/>
-          <p:cNvSpPr/>
-          <p:nvPr/>
-        </p:nvSpPr>
-        <p:spPr>
-          <a:xfrm>
-            <a:off x="6355080" y="5715000"/>
-            <a:ext cx="5669280" cy="402336"/>
-          </a:xfrm>
-          <a:prstGeom prst="rect">
-            <a:avLst/>
-          </a:prstGeom>
-          <a:solidFill>
-            <a:srgbClr val="F0F7F7"/>
-          </a:solidFill>
-          <a:ln w="5080">
-            <a:solidFill>
-              <a:srgbClr val="008080"/>
-            </a:solidFill>
-          </a:ln>
-        </p:spPr>
-        <p:style>
-          <a:lnRef idx="1">
-            <a:schemeClr val="accent1"/>
-          </a:lnRef>
-          <a:fillRef idx="3">
-            <a:schemeClr val="accent1"/>
-          </a:fillRef>
-          <a:effectRef idx="2">
-            <a:schemeClr val="accent1"/>
-          </a:effectRef>
-          <a:fontRef idx="minor">
-            <a:schemeClr val="lt1"/>
-          </a:fontRef>
-        </p:style>
-        <p:txBody>
-          <a:bodyPr rtlCol="0" anchor="ctr"/>
-          <a:lstStyle/>
-          <a:p>
-            <a:pPr algn="ctr"/>
-          </a:p>
-        </p:txBody>
-      </p:sp>
-      <p:sp>
-        <p:nvSpPr>
           <p:cNvPr id="57" name="TextBox 56"/>
           <p:cNvSpPr txBox="1"/>
           <p:nvPr/>
         </p:nvSpPr>
         <p:spPr>
           <a:xfrm>
-            <a:off x="6483096" y="5769864"/>
-            <a:ext cx="5440680" cy="329184"/>
-          </a:xfrm>
-          <a:prstGeom prst="rect">
-            <a:avLst/>
-          </a:prstGeom>
-          <a:noFill/>
-        </p:spPr>
-        <p:txBody>
-          <a:bodyPr wrap="square">
-            <a:spAutoFit/>
-          </a:bodyPr>
-          <a:lstStyle/>
-          <a:p>
-            <a:pPr algn="l"/>
-            <a:r>
-              <a:rPr sz="1000" b="0" i="0">
-                <a:solidFill>
-                  <a:srgbClr val="1A1A1A"/>
-                </a:solidFill>
-              </a:rPr>
-              <a:t>• Rentabilité programme × 8</a:t>
-            </a:r>
-          </a:p>
-        </p:txBody>
-      </p:sp>
-      <p:sp>
-        <p:nvSpPr>
-          <p:cNvPr id="58" name="Rectangle 57"/>
-          <p:cNvSpPr/>
-          <p:nvPr/>
-        </p:nvSpPr>
-        <p:spPr>
-          <a:xfrm>
-            <a:off x="274320" y="6053328"/>
-            <a:ext cx="11640312" cy="347472"/>
-          </a:xfrm>
-          <a:prstGeom prst="rect">
-            <a:avLst/>
-          </a:prstGeom>
-          <a:solidFill>
-            <a:srgbClr val="FF0000"/>
-          </a:solidFill>
-          <a:ln>
-            <a:noFill/>
-          </a:ln>
-        </p:spPr>
-        <p:style>
-          <a:lnRef idx="1">
-            <a:schemeClr val="accent1"/>
-          </a:lnRef>
-          <a:fillRef idx="3">
-            <a:schemeClr val="accent1"/>
-          </a:fillRef>
-          <a:effectRef idx="2">
-            <a:schemeClr val="accent1"/>
-          </a:effectRef>
-          <a:fontRef idx="minor">
-            <a:schemeClr val="lt1"/>
-          </a:fontRef>
-        </p:style>
-        <p:txBody>
-          <a:bodyPr rtlCol="0" anchor="ctr"/>
-          <a:lstStyle/>
-          <a:p>
-            <a:pPr algn="ctr"/>
-          </a:p>
-        </p:txBody>
-      </p:sp>
-      <p:sp>
-        <p:nvSpPr>
-          <p:cNvPr id="59" name="TextBox 58"/>
-          <p:cNvSpPr txBox="1"/>
-          <p:nvPr/>
-        </p:nvSpPr>
-        <p:spPr>
-          <a:xfrm>
-            <a:off x="411479" y="6126480"/>
-            <a:ext cx="11365992" cy="201168"/>
+            <a:off x="411479" y="4782312"/>
+            <a:ext cx="11365992" cy="256032"/>
           </a:xfrm>
           <a:prstGeom prst="rect">
             <a:avLst/>
@@ -8437,7 +6991,7 @@
                   <a:srgbClr val="FFFFFF"/>
                 </a:solidFill>
               </a:rPr>
-              <a:t>Votre mission : le don régulier. Toujours. Le don ponctuel est un point de départ, jamais un objectif final.</a:t>
+              <a:t>Le don régulier par PA : Valeur à vie du donateur régulier = 8× celle d'un donateur ponctuel — c'est la colonne vertébrale des programmes UNICEF.</a:t>
             </a:r>
           </a:p>
         </p:txBody>

--- a/FIM_BookJ2_MondeAssociatif_V6-01062026SHY-TE.pptx
+++ b/FIM_BookJ2_MondeAssociatif_V6-01062026SHY-TE.pptx
@@ -8,6 +8,7 @@
     <p:sldId id="256" r:id="rId7"/>
     <p:sldId id="257" r:id="rId8"/>
     <p:sldId id="258" r:id="rId9"/>
+    <p:sldId id="259" r:id="rId10"/>
   </p:sldIdLst>
   <p:sldSz cx="12188952" cy="6858000" type="screen4x3"/>
   <p:notesSz cx="6858000" cy="9144000"/>
@@ -3148,7 +3149,7 @@
             <a:avLst/>
           </a:prstGeom>
           <a:solidFill>
-            <a:srgbClr val="005555"/>
+            <a:srgbClr val="005050"/>
           </a:solidFill>
           <a:ln>
             <a:noFill/>
@@ -3228,7 +3229,7 @@
         <p:spPr>
           <a:xfrm>
             <a:off x="347472" y="91440"/>
-            <a:ext cx="3200400" cy="438912"/>
+            <a:ext cx="4572000" cy="402336"/>
           </a:xfrm>
           <a:prstGeom prst="rect">
             <a:avLst/>
@@ -3261,8 +3262,8 @@
         </p:nvSpPr>
         <p:spPr>
           <a:xfrm>
-            <a:off x="347472" y="530352"/>
-            <a:ext cx="7772400" cy="347472"/>
+            <a:off x="347472" y="493776"/>
+            <a:ext cx="8229600" cy="329184"/>
           </a:xfrm>
           <a:prstGeom prst="rect">
             <a:avLst/>
@@ -3295,8 +3296,8 @@
         </p:nvSpPr>
         <p:spPr>
           <a:xfrm>
-            <a:off x="347472" y="932688"/>
-            <a:ext cx="7772400" cy="292608"/>
+            <a:off x="347472" y="877824"/>
+            <a:ext cx="8229600" cy="274320"/>
           </a:xfrm>
           <a:prstGeom prst="rect">
             <a:avLst/>
@@ -3329,8 +3330,8 @@
         </p:nvSpPr>
         <p:spPr>
           <a:xfrm>
-            <a:off x="347472" y="1207008"/>
-            <a:ext cx="10515600" cy="914400"/>
+            <a:off x="347472" y="1188720"/>
+            <a:ext cx="10515600" cy="960120"/>
           </a:xfrm>
           <a:prstGeom prst="rect">
             <a:avLst/>
@@ -3345,7 +3346,7 @@
           <a:p>
             <a:pPr algn="l"/>
             <a:r>
-              <a:rPr sz="3000" b="1" i="0">
+              <a:rPr sz="2900" b="1" i="0">
                 <a:solidFill>
                   <a:srgbClr val="FFFFFF"/>
                 </a:solidFill>
@@ -3363,8 +3364,8 @@
         </p:nvSpPr>
         <p:spPr>
           <a:xfrm>
-            <a:off x="347472" y="1901952"/>
-            <a:ext cx="10515600" cy="402336"/>
+            <a:off x="347472" y="1920240"/>
+            <a:ext cx="10515600" cy="384048"/>
           </a:xfrm>
           <a:prstGeom prst="rect">
             <a:avLst/>
@@ -3405,8 +3406,8 @@
         </p:blipFill>
         <p:spPr>
           <a:xfrm>
-            <a:off x="11247120" y="45720"/>
-            <a:ext cx="822960" cy="804672"/>
+            <a:off x="11228832" y="0"/>
+            <a:ext cx="841248" cy="676656"/>
           </a:xfrm>
           <a:prstGeom prst="rect">
             <a:avLst/>
@@ -3428,7 +3429,7 @@
             <a:avLst/>
           </a:prstGeom>
           <a:solidFill>
-            <a:srgbClr val="005555"/>
+            <a:srgbClr val="005050"/>
           </a:solidFill>
           <a:ln>
             <a:noFill/>
@@ -3486,42 +3487,6 @@
                 </a:solidFill>
               </a:rPr>
               <a:t>SHY-Performance  ·  Formation FIM  ·  UNICEF France  ·  V6-01062026SHY-TE</a:t>
-            </a:r>
-          </a:p>
-        </p:txBody>
-      </p:sp>
-      <p:sp>
-        <p:nvSpPr>
-          <p:cNvPr id="13" name="TextBox 12"/>
-          <p:cNvSpPr txBox="1"/>
-          <p:nvPr/>
-        </p:nvSpPr>
-        <p:spPr>
-          <a:xfrm>
-            <a:off x="457200" y="2514600"/>
-            <a:ext cx="10789920" cy="1005840"/>
-          </a:xfrm>
-          <a:prstGeom prst="rect">
-            <a:avLst/>
-          </a:prstGeom>
-          <a:noFill/>
-        </p:spPr>
-        <p:txBody>
-          <a:bodyPr wrap="square">
-            <a:spAutoFit/>
-          </a:bodyPr>
-          <a:lstStyle/>
-          <a:p>
-            <a:pPr algn="l"/>
-            <a:r>
-              <a:rPr sz="1400" b="0" i="0">
-                <a:solidFill>
-                  <a:srgbClr val="1A1A1A"/>
-                </a:solidFill>
-              </a:rPr>
-              <a:t>Aujourd'hui vous comprenez le secteur associatif français, l'histoire de l'humanitaire
-et pourquoi le don régulier par prélèvement automatique est le modèle qui change tout
-pour la pérennité des programmes UNICEF.</a:t>
             </a:r>
           </a:p>
         </p:txBody>
@@ -3602,7 +3567,7 @@
             <a:avLst/>
           </a:prstGeom>
           <a:solidFill>
-            <a:srgbClr val="005555"/>
+            <a:srgbClr val="005050"/>
           </a:solidFill>
           <a:ln>
             <a:noFill/>
@@ -3681,8 +3646,8 @@
         </p:nvSpPr>
         <p:spPr>
           <a:xfrm>
-            <a:off x="164592" y="73152"/>
-            <a:ext cx="2011680" cy="347472"/>
+            <a:off x="164592" y="91440"/>
+            <a:ext cx="1920240" cy="329184"/>
           </a:xfrm>
           <a:prstGeom prst="rect">
             <a:avLst/>
@@ -3715,8 +3680,8 @@
         </p:nvSpPr>
         <p:spPr>
           <a:xfrm>
-            <a:off x="2286000" y="91440"/>
-            <a:ext cx="36576" cy="502920"/>
+            <a:off x="2212848" y="109728"/>
+            <a:ext cx="36576" cy="475488"/>
           </a:xfrm>
           <a:prstGeom prst="rect">
             <a:avLst/>
@@ -3758,8 +3723,8 @@
         </p:nvSpPr>
         <p:spPr>
           <a:xfrm>
-            <a:off x="2423160" y="91440"/>
-            <a:ext cx="9235440" cy="502920"/>
+            <a:off x="2350008" y="91440"/>
+            <a:ext cx="8823960" cy="502920"/>
           </a:xfrm>
           <a:prstGeom prst="rect">
             <a:avLst/>
@@ -3800,8 +3765,8 @@
         </p:blipFill>
         <p:spPr>
           <a:xfrm>
-            <a:off x="11247120" y="0"/>
-            <a:ext cx="822960" cy="676656"/>
+            <a:off x="11228832" y="0"/>
+            <a:ext cx="841248" cy="676656"/>
           </a:xfrm>
           <a:prstGeom prst="rect">
             <a:avLst/>
@@ -3823,7 +3788,7 @@
             <a:avLst/>
           </a:prstGeom>
           <a:solidFill>
-            <a:srgbClr val="005555"/>
+            <a:srgbClr val="005050"/>
           </a:solidFill>
           <a:ln>
             <a:noFill/>
@@ -3900,7 +3865,7 @@
             <a:avLst/>
           </a:prstGeom>
           <a:solidFill>
-            <a:srgbClr val="005555"/>
+            <a:srgbClr val="005050"/>
           </a:solidFill>
           <a:ln>
             <a:noFill/>
@@ -3981,7 +3946,7 @@
           </a:solidFill>
           <a:ln w="15240">
             <a:solidFill>
-              <a:srgbClr val="005555"/>
+              <a:srgbClr val="005050"/>
             </a:solidFill>
           </a:ln>
         </p:spPr>
@@ -4036,9 +4001,8 @@
                   <a:srgbClr val="1A1A1A"/>
                 </a:solidFill>
               </a:rPr>
-              <a:t>Vous analysez 2 campagnes
-de collecte téléphonique :
-une réussie, une en difficulté.</a:t>
+              <a:t>Analyse de 2 campagnes téléphoniques :
+1 réussie, 1 en difficulté.</a:t>
             </a:r>
           </a:p>
         </p:txBody>
@@ -4194,8 +4158,7 @@
                   <a:srgbClr val="1A1A1A"/>
                 </a:solidFill>
               </a:rPr>
-              <a:t>'Qu'est-ce qui a fait
-la différence ?
+              <a:t>'Qu'est-ce qui a fait la différence ?
 Pourquoi l'une a converti ?'</a:t>
             </a:r>
           </a:p>
@@ -4352,8 +4315,7 @@
                   <a:srgbClr val="1A1A1A"/>
                 </a:solidFill>
               </a:rPr>
-              <a:t>France associative · Loi 1901
-Histoire humanitaire
+              <a:t>Loi 1901 · Histoire humanitaire
 Don régulier · Don en Confiance</a:t>
             </a:r>
           </a:p>
@@ -4510,9 +4472,8 @@
                   <a:srgbClr val="1A1A1A"/>
                 </a:solidFill>
               </a:rPr>
-              <a:t>Simulation : 'Expliquez
-le don régulier à un prospect
-sceptique en 90 secondes.'</a:t>
+              <a:t>'Expliquez le don régulier à un
+prospect sceptique en 90 secondes.'</a:t>
             </a:r>
           </a:p>
         </p:txBody>
@@ -4589,7 +4550,7 @@
                   <a:srgbClr val="FFFFFF"/>
                 </a:solidFill>
               </a:rPr>
-              <a:t>Vos 3 réussites à valider aujourd'hui</a:t>
+              <a:t>À retenir</a:t>
             </a:r>
           </a:p>
         </p:txBody>
@@ -4747,7 +4708,7 @@
                   <a:srgbClr val="1A1A1A"/>
                 </a:solidFill>
               </a:rPr>
-              <a:t>✔ Fiche 'Secteur associatif' complétée</a:t>
+              <a:t>✔ Fiche secteur associatif complétée</a:t>
             </a:r>
           </a:p>
         </p:txBody>
@@ -4907,7 +4868,7 @@
             <a:avLst/>
           </a:prstGeom>
           <a:solidFill>
-            <a:srgbClr val="005555"/>
+            <a:srgbClr val="005050"/>
           </a:solidFill>
           <a:ln>
             <a:noFill/>
@@ -4986,8 +4947,8 @@
         </p:nvSpPr>
         <p:spPr>
           <a:xfrm>
-            <a:off x="164592" y="73152"/>
-            <a:ext cx="2011680" cy="347472"/>
+            <a:off x="164592" y="91440"/>
+            <a:ext cx="1920240" cy="329184"/>
           </a:xfrm>
           <a:prstGeom prst="rect">
             <a:avLst/>
@@ -5020,8 +4981,8 @@
         </p:nvSpPr>
         <p:spPr>
           <a:xfrm>
-            <a:off x="2286000" y="91440"/>
-            <a:ext cx="36576" cy="502920"/>
+            <a:off x="2212848" y="109728"/>
+            <a:ext cx="36576" cy="475488"/>
           </a:xfrm>
           <a:prstGeom prst="rect">
             <a:avLst/>
@@ -5063,8 +5024,8 @@
         </p:nvSpPr>
         <p:spPr>
           <a:xfrm>
-            <a:off x="2423160" y="91440"/>
-            <a:ext cx="9235440" cy="502920"/>
+            <a:off x="2350008" y="91440"/>
+            <a:ext cx="8823960" cy="502920"/>
           </a:xfrm>
           <a:prstGeom prst="rect">
             <a:avLst/>
@@ -5084,7 +5045,7 @@
                   <a:srgbClr val="FFFFFF"/>
                 </a:solidFill>
               </a:rPr>
-              <a:t>La France Associative — Votre Cadre de Légitimité</a:t>
+              <a:t>La France Associative &amp; L'Histoire de l'Humanitaire</a:t>
             </a:r>
           </a:p>
         </p:txBody>
@@ -5105,8 +5066,8 @@
         </p:blipFill>
         <p:spPr>
           <a:xfrm>
-            <a:off x="11247120" y="0"/>
-            <a:ext cx="822960" cy="676656"/>
+            <a:off x="11228832" y="0"/>
+            <a:ext cx="841248" cy="676656"/>
           </a:xfrm>
           <a:prstGeom prst="rect">
             <a:avLst/>
@@ -5128,7 +5089,7 @@
             <a:avLst/>
           </a:prstGeom>
           <a:solidFill>
-            <a:srgbClr val="005555"/>
+            <a:srgbClr val="005050"/>
           </a:solidFill>
           <a:ln>
             <a:noFill/>
@@ -5205,7 +5166,7 @@
             <a:avLst/>
           </a:prstGeom>
           <a:solidFill>
-            <a:srgbClr val="005555"/>
+            <a:srgbClr val="005050"/>
           </a:solidFill>
           <a:ln>
             <a:noFill/>
@@ -5257,7 +5218,7 @@
           <a:p>
             <a:pPr algn="ctr"/>
             <a:r>
-              <a:rPr sz="1600" b="1" i="0">
+              <a:rPr sz="1500" b="1" i="0">
                 <a:solidFill>
                   <a:srgbClr val="FFFFFF"/>
                 </a:solidFill>
@@ -5296,8 +5257,7 @@
                   <a:srgbClr val="CCEEEE"/>
                 </a:solidFill>
               </a:rPr>
-              <a:t>associations en
-France</a:t>
+              <a:t>associations en France</a:t>
             </a:r>
           </a:p>
         </p:txBody>
@@ -5317,7 +5277,7 @@
             <a:avLst/>
           </a:prstGeom>
           <a:solidFill>
-            <a:srgbClr val="005555"/>
+            <a:srgbClr val="005050"/>
           </a:solidFill>
           <a:ln>
             <a:noFill/>
@@ -5369,7 +5329,7 @@
           <a:p>
             <a:pPr algn="ctr"/>
             <a:r>
-              <a:rPr sz="1600" b="1" i="0">
+              <a:rPr sz="1500" b="1" i="0">
                 <a:solidFill>
                   <a:srgbClr val="FFFFFF"/>
                 </a:solidFill>
@@ -5408,8 +5368,7 @@
                   <a:srgbClr val="CCEEEE"/>
                 </a:solidFill>
               </a:rPr>
-              <a:t>bénévoles en
-France</a:t>
+              <a:t>bénévoles en France</a:t>
             </a:r>
           </a:p>
         </p:txBody>
@@ -5429,7 +5388,7 @@
             <a:avLst/>
           </a:prstGeom>
           <a:solidFill>
-            <a:srgbClr val="005555"/>
+            <a:srgbClr val="005050"/>
           </a:solidFill>
           <a:ln>
             <a:noFill/>
@@ -5481,12 +5440,12 @@
           <a:p>
             <a:pPr algn="ctr"/>
             <a:r>
-              <a:rPr sz="1600" b="1" i="0">
+              <a:rPr sz="1500" b="1" i="0">
                 <a:solidFill>
                   <a:srgbClr val="FFFFFF"/>
                 </a:solidFill>
               </a:rPr>
-              <a:t>1er juil.
+              <a:t>1er juil
 1901</a:t>
             </a:r>
           </a:p>
@@ -5521,8 +5480,7 @@
                   <a:srgbClr val="CCEEEE"/>
                 </a:solidFill>
               </a:rPr>
-              <a:t>Loi fondatrice
-du droit associatif</a:t>
+              <a:t>Loi droit associatif</a:t>
             </a:r>
           </a:p>
         </p:txBody>
@@ -5542,7 +5500,7 @@
             <a:avLst/>
           </a:prstGeom>
           <a:solidFill>
-            <a:srgbClr val="005555"/>
+            <a:srgbClr val="005050"/>
           </a:solidFill>
           <a:ln>
             <a:noFill/>
@@ -5594,7 +5552,7 @@
           <a:p>
             <a:pPr algn="ctr"/>
             <a:r>
-              <a:rPr sz="1600" b="1" i="0">
+              <a:rPr sz="1500" b="1" i="0">
                 <a:solidFill>
                   <a:srgbClr val="FFFFFF"/>
                 </a:solidFill>
@@ -5634,7 +5592,7 @@
                 </a:solidFill>
               </a:rPr>
               <a:t>De fait / Déclarée /
-Reconnue utilité pub.</a:t>
+Utilité publique</a:t>
             </a:r>
           </a:p>
         </p:txBody>
@@ -5654,7 +5612,7 @@
             <a:avLst/>
           </a:prstGeom>
           <a:solidFill>
-            <a:srgbClr val="005555"/>
+            <a:srgbClr val="005050"/>
           </a:solidFill>
           <a:ln>
             <a:noFill/>
@@ -5706,7 +5664,7 @@
           <a:p>
             <a:pPr algn="ctr"/>
             <a:r>
-              <a:rPr sz="1600" b="1" i="0">
+              <a:rPr sz="1500" b="1" i="0">
                 <a:solidFill>
                   <a:srgbClr val="FFFFFF"/>
                 </a:solidFill>
@@ -5747,7 +5705,7 @@
                 </a:solidFill>
               </a:rPr>
               <a:t>Label indépendant
-de contrôle et garantie</a:t>
+de contrôle</a:t>
             </a:r>
           </a:p>
         </p:txBody>
@@ -5767,7 +5725,7 @@
             <a:avLst/>
           </a:prstGeom>
           <a:solidFill>
-            <a:srgbClr val="005555"/>
+            <a:srgbClr val="005050"/>
           </a:solidFill>
           <a:ln>
             <a:noFill/>
@@ -5819,7 +5777,7 @@
           <a:p>
             <a:pPr algn="ctr"/>
             <a:r>
-              <a:rPr sz="1600" b="1" i="0">
+              <a:rPr sz="1500" b="1" i="0">
                 <a:solidFill>
                   <a:srgbClr val="FFFFFF"/>
                 </a:solidFill>
@@ -5860,55 +5818,21 @@
                 </a:solidFill>
               </a:rPr>
               <a:t>Cadre légal données
-prospects à respecter</a:t>
-            </a:r>
-          </a:p>
-        </p:txBody>
-      </p:sp>
-      <p:sp>
-        <p:nvSpPr>
-          <p:cNvPr id="29" name="TextBox 28"/>
-          <p:cNvSpPr txBox="1"/>
+prospects</a:t>
+            </a:r>
+          </a:p>
+        </p:txBody>
+      </p:sp>
+      <p:sp>
+        <p:nvSpPr>
+          <p:cNvPr id="29" name="Rectangle 28"/>
+          <p:cNvSpPr/>
           <p:nvPr/>
         </p:nvSpPr>
         <p:spPr>
           <a:xfrm>
             <a:off x="274320" y="1920240"/>
-            <a:ext cx="11640312" cy="274320"/>
-          </a:xfrm>
-          <a:prstGeom prst="rect">
-            <a:avLst/>
-          </a:prstGeom>
-          <a:noFill/>
-        </p:spPr>
-        <p:txBody>
-          <a:bodyPr wrap="square">
-            <a:spAutoFit/>
-          </a:bodyPr>
-          <a:lstStyle/>
-          <a:p>
-            <a:pPr algn="l"/>
-            <a:r>
-              <a:rPr sz="1200" b="1" i="0">
-                <a:solidFill>
-                  <a:srgbClr val="005555"/>
-                </a:solidFill>
-              </a:rPr>
-              <a:t>Histoire de l'humanitaire — Les jalons que vous devez connaître :</a:t>
-            </a:r>
-          </a:p>
-        </p:txBody>
-      </p:sp>
-      <p:sp>
-        <p:nvSpPr>
-          <p:cNvPr id="30" name="Rectangle 29"/>
-          <p:cNvSpPr/>
-          <p:nvPr/>
-        </p:nvSpPr>
-        <p:spPr>
-          <a:xfrm>
-            <a:off x="274320" y="2286000"/>
-            <a:ext cx="1920240" cy="347472"/>
+            <a:ext cx="1920240" cy="329184"/>
           </a:xfrm>
           <a:prstGeom prst="rect">
             <a:avLst/>
@@ -5944,14 +5868,14 @@
       </p:sp>
       <p:sp>
         <p:nvSpPr>
-          <p:cNvPr id="31" name="TextBox 30"/>
+          <p:cNvPr id="30" name="TextBox 29"/>
           <p:cNvSpPr txBox="1"/>
           <p:nvPr/>
         </p:nvSpPr>
         <p:spPr>
           <a:xfrm>
-            <a:off x="365760" y="2313432"/>
-            <a:ext cx="1737360" cy="256032"/>
+            <a:off x="365760" y="1947672"/>
+            <a:ext cx="1737360" cy="237744"/>
           </a:xfrm>
           <a:prstGeom prst="rect">
             <a:avLst/>
@@ -5966,7 +5890,7 @@
           <a:p>
             <a:pPr algn="ctr"/>
             <a:r>
-              <a:rPr sz="1200" b="1" i="0">
+              <a:rPr sz="1100" b="1" i="0">
                 <a:solidFill>
                   <a:srgbClr val="FFFFFF"/>
                 </a:solidFill>
@@ -5978,14 +5902,14 @@
       </p:sp>
       <p:sp>
         <p:nvSpPr>
-          <p:cNvPr id="32" name="Rectangle 31"/>
+          <p:cNvPr id="31" name="Rectangle 30"/>
           <p:cNvSpPr/>
           <p:nvPr/>
         </p:nvSpPr>
         <p:spPr>
           <a:xfrm>
-            <a:off x="274320" y="2633472"/>
-            <a:ext cx="1920240" cy="1143000"/>
+            <a:off x="274320" y="2249424"/>
+            <a:ext cx="1920240" cy="1097280"/>
           </a:xfrm>
           <a:prstGeom prst="rect">
             <a:avLst/>
@@ -6023,14 +5947,14 @@
       </p:sp>
       <p:sp>
         <p:nvSpPr>
-          <p:cNvPr id="33" name="TextBox 32"/>
+          <p:cNvPr id="32" name="TextBox 31"/>
           <p:cNvSpPr txBox="1"/>
           <p:nvPr/>
         </p:nvSpPr>
         <p:spPr>
           <a:xfrm>
-            <a:off x="384048" y="2688336"/>
-            <a:ext cx="1700784" cy="1005840"/>
+            <a:off x="384048" y="2304288"/>
+            <a:ext cx="1700784" cy="987552"/>
           </a:xfrm>
           <a:prstGeom prst="rect">
             <a:avLst/>
@@ -6058,14 +5982,14 @@
       </p:sp>
       <p:sp>
         <p:nvSpPr>
-          <p:cNvPr id="34" name="Rectangle 33"/>
+          <p:cNvPr id="33" name="Rectangle 32"/>
           <p:cNvSpPr/>
           <p:nvPr/>
         </p:nvSpPr>
         <p:spPr>
           <a:xfrm>
-            <a:off x="2249424" y="2286000"/>
-            <a:ext cx="1920240" cy="347472"/>
+            <a:off x="2249424" y="1920240"/>
+            <a:ext cx="1920240" cy="329184"/>
           </a:xfrm>
           <a:prstGeom prst="rect">
             <a:avLst/>
@@ -6101,14 +6025,14 @@
       </p:sp>
       <p:sp>
         <p:nvSpPr>
-          <p:cNvPr id="35" name="TextBox 34"/>
+          <p:cNvPr id="34" name="TextBox 33"/>
           <p:cNvSpPr txBox="1"/>
           <p:nvPr/>
         </p:nvSpPr>
         <p:spPr>
           <a:xfrm>
-            <a:off x="2340864" y="2313432"/>
-            <a:ext cx="1737360" cy="256032"/>
+            <a:off x="2340864" y="1947672"/>
+            <a:ext cx="1737360" cy="237744"/>
           </a:xfrm>
           <a:prstGeom prst="rect">
             <a:avLst/>
@@ -6123,7 +6047,7 @@
           <a:p>
             <a:pPr algn="ctr"/>
             <a:r>
-              <a:rPr sz="1200" b="1" i="0">
+              <a:rPr sz="1100" b="1" i="0">
                 <a:solidFill>
                   <a:srgbClr val="FFFFFF"/>
                 </a:solidFill>
@@ -6135,14 +6059,14 @@
       </p:sp>
       <p:sp>
         <p:nvSpPr>
-          <p:cNvPr id="36" name="Rectangle 35"/>
+          <p:cNvPr id="35" name="Rectangle 34"/>
           <p:cNvSpPr/>
           <p:nvPr/>
         </p:nvSpPr>
         <p:spPr>
           <a:xfrm>
-            <a:off x="2249424" y="2633472"/>
-            <a:ext cx="1920240" cy="1143000"/>
+            <a:off x="2249424" y="2249424"/>
+            <a:ext cx="1920240" cy="1097280"/>
           </a:xfrm>
           <a:prstGeom prst="rect">
             <a:avLst/>
@@ -6180,14 +6104,14 @@
       </p:sp>
       <p:sp>
         <p:nvSpPr>
-          <p:cNvPr id="37" name="TextBox 36"/>
+          <p:cNvPr id="36" name="TextBox 35"/>
           <p:cNvSpPr txBox="1"/>
           <p:nvPr/>
         </p:nvSpPr>
         <p:spPr>
           <a:xfrm>
-            <a:off x="2359152" y="2688336"/>
-            <a:ext cx="1700784" cy="1005840"/>
+            <a:off x="2359152" y="2304288"/>
+            <a:ext cx="1700784" cy="987552"/>
           </a:xfrm>
           <a:prstGeom prst="rect">
             <a:avLst/>
@@ -6215,14 +6139,14 @@
       </p:sp>
       <p:sp>
         <p:nvSpPr>
-          <p:cNvPr id="38" name="Rectangle 37"/>
+          <p:cNvPr id="37" name="Rectangle 36"/>
           <p:cNvSpPr/>
           <p:nvPr/>
         </p:nvSpPr>
         <p:spPr>
           <a:xfrm>
-            <a:off x="4224528" y="2286000"/>
-            <a:ext cx="1920240" cy="347472"/>
+            <a:off x="4224528" y="1920240"/>
+            <a:ext cx="1920240" cy="329184"/>
           </a:xfrm>
           <a:prstGeom prst="rect">
             <a:avLst/>
@@ -6258,14 +6182,14 @@
       </p:sp>
       <p:sp>
         <p:nvSpPr>
-          <p:cNvPr id="39" name="TextBox 38"/>
+          <p:cNvPr id="38" name="TextBox 37"/>
           <p:cNvSpPr txBox="1"/>
           <p:nvPr/>
         </p:nvSpPr>
         <p:spPr>
           <a:xfrm>
-            <a:off x="4315968" y="2313432"/>
-            <a:ext cx="1737360" cy="256032"/>
+            <a:off x="4315968" y="1947672"/>
+            <a:ext cx="1737360" cy="237744"/>
           </a:xfrm>
           <a:prstGeom prst="rect">
             <a:avLst/>
@@ -6280,7 +6204,7 @@
           <a:p>
             <a:pPr algn="ctr"/>
             <a:r>
-              <a:rPr sz="1200" b="1" i="0">
+              <a:rPr sz="1100" b="1" i="0">
                 <a:solidFill>
                   <a:srgbClr val="FFFFFF"/>
                 </a:solidFill>
@@ -6292,14 +6216,14 @@
       </p:sp>
       <p:sp>
         <p:nvSpPr>
-          <p:cNvPr id="40" name="Rectangle 39"/>
+          <p:cNvPr id="39" name="Rectangle 38"/>
           <p:cNvSpPr/>
           <p:nvPr/>
         </p:nvSpPr>
         <p:spPr>
           <a:xfrm>
-            <a:off x="4224528" y="2633472"/>
-            <a:ext cx="1920240" cy="1143000"/>
+            <a:off x="4224528" y="2249424"/>
+            <a:ext cx="1920240" cy="1097280"/>
           </a:xfrm>
           <a:prstGeom prst="rect">
             <a:avLst/>
@@ -6337,14 +6261,14 @@
       </p:sp>
       <p:sp>
         <p:nvSpPr>
-          <p:cNvPr id="41" name="TextBox 40"/>
+          <p:cNvPr id="40" name="TextBox 39"/>
           <p:cNvSpPr txBox="1"/>
           <p:nvPr/>
         </p:nvSpPr>
         <p:spPr>
           <a:xfrm>
-            <a:off x="4334256" y="2688336"/>
-            <a:ext cx="1700784" cy="1005840"/>
+            <a:off x="4334256" y="2304288"/>
+            <a:ext cx="1700784" cy="987552"/>
           </a:xfrm>
           <a:prstGeom prst="rect">
             <a:avLst/>
@@ -6365,21 +6289,21 @@
                 </a:solidFill>
               </a:rPr>
               <a:t>Fondation UNICEF
-(ONU - après WWII)</a:t>
-            </a:r>
-          </a:p>
-        </p:txBody>
-      </p:sp>
-      <p:sp>
-        <p:nvSpPr>
-          <p:cNvPr id="42" name="Rectangle 41"/>
+(ONU après WWII)</a:t>
+            </a:r>
+          </a:p>
+        </p:txBody>
+      </p:sp>
+      <p:sp>
+        <p:nvSpPr>
+          <p:cNvPr id="41" name="Rectangle 40"/>
           <p:cNvSpPr/>
           <p:nvPr/>
         </p:nvSpPr>
         <p:spPr>
           <a:xfrm>
-            <a:off x="6199632" y="2286000"/>
-            <a:ext cx="1920240" cy="347472"/>
+            <a:off x="6199632" y="1920240"/>
+            <a:ext cx="1920240" cy="329184"/>
           </a:xfrm>
           <a:prstGeom prst="rect">
             <a:avLst/>
@@ -6415,14 +6339,14 @@
       </p:sp>
       <p:sp>
         <p:nvSpPr>
-          <p:cNvPr id="43" name="TextBox 42"/>
+          <p:cNvPr id="42" name="TextBox 41"/>
           <p:cNvSpPr txBox="1"/>
           <p:nvPr/>
         </p:nvSpPr>
         <p:spPr>
           <a:xfrm>
-            <a:off x="6291072" y="2313432"/>
-            <a:ext cx="1737360" cy="256032"/>
+            <a:off x="6291072" y="1947672"/>
+            <a:ext cx="1737360" cy="237744"/>
           </a:xfrm>
           <a:prstGeom prst="rect">
             <a:avLst/>
@@ -6437,7 +6361,7 @@
           <a:p>
             <a:pPr algn="ctr"/>
             <a:r>
-              <a:rPr sz="1200" b="1" i="0">
+              <a:rPr sz="1100" b="1" i="0">
                 <a:solidFill>
                   <a:srgbClr val="FFFFFF"/>
                 </a:solidFill>
@@ -6449,14 +6373,14 @@
       </p:sp>
       <p:sp>
         <p:nvSpPr>
-          <p:cNvPr id="44" name="Rectangle 43"/>
+          <p:cNvPr id="43" name="Rectangle 42"/>
           <p:cNvSpPr/>
           <p:nvPr/>
         </p:nvSpPr>
         <p:spPr>
           <a:xfrm>
-            <a:off x="6199632" y="2633472"/>
-            <a:ext cx="1920240" cy="1143000"/>
+            <a:off x="6199632" y="2249424"/>
+            <a:ext cx="1920240" cy="1097280"/>
           </a:xfrm>
           <a:prstGeom prst="rect">
             <a:avLst/>
@@ -6494,14 +6418,14 @@
       </p:sp>
       <p:sp>
         <p:nvSpPr>
-          <p:cNvPr id="45" name="TextBox 44"/>
+          <p:cNvPr id="44" name="TextBox 43"/>
           <p:cNvSpPr txBox="1"/>
           <p:nvPr/>
         </p:nvSpPr>
         <p:spPr>
           <a:xfrm>
-            <a:off x="6309360" y="2688336"/>
-            <a:ext cx="1700784" cy="1005840"/>
+            <a:off x="6309360" y="2304288"/>
+            <a:ext cx="1700784" cy="987552"/>
           </a:xfrm>
           <a:prstGeom prst="rect">
             <a:avLst/>
@@ -6529,14 +6453,14 @@
       </p:sp>
       <p:sp>
         <p:nvSpPr>
-          <p:cNvPr id="46" name="Rectangle 45"/>
+          <p:cNvPr id="45" name="Rectangle 44"/>
           <p:cNvSpPr/>
           <p:nvPr/>
         </p:nvSpPr>
         <p:spPr>
           <a:xfrm>
-            <a:off x="8174736" y="2286000"/>
-            <a:ext cx="1920240" cy="347472"/>
+            <a:off x="8174736" y="1920240"/>
+            <a:ext cx="1920240" cy="329184"/>
           </a:xfrm>
           <a:prstGeom prst="rect">
             <a:avLst/>
@@ -6572,14 +6496,14 @@
       </p:sp>
       <p:sp>
         <p:nvSpPr>
-          <p:cNvPr id="47" name="TextBox 46"/>
+          <p:cNvPr id="46" name="TextBox 45"/>
           <p:cNvSpPr txBox="1"/>
           <p:nvPr/>
         </p:nvSpPr>
         <p:spPr>
           <a:xfrm>
-            <a:off x="8266176" y="2313432"/>
-            <a:ext cx="1737360" cy="256032"/>
+            <a:off x="8266176" y="1947672"/>
+            <a:ext cx="1737360" cy="237744"/>
           </a:xfrm>
           <a:prstGeom prst="rect">
             <a:avLst/>
@@ -6594,7 +6518,7 @@
           <a:p>
             <a:pPr algn="ctr"/>
             <a:r>
-              <a:rPr sz="1200" b="1" i="0">
+              <a:rPr sz="1100" b="1" i="0">
                 <a:solidFill>
                   <a:srgbClr val="FFFFFF"/>
                 </a:solidFill>
@@ -6606,14 +6530,14 @@
       </p:sp>
       <p:sp>
         <p:nvSpPr>
-          <p:cNvPr id="48" name="Rectangle 47"/>
+          <p:cNvPr id="47" name="Rectangle 46"/>
           <p:cNvSpPr/>
           <p:nvPr/>
         </p:nvSpPr>
         <p:spPr>
           <a:xfrm>
-            <a:off x="8174736" y="2633472"/>
-            <a:ext cx="1920240" cy="1143000"/>
+            <a:off x="8174736" y="2249424"/>
+            <a:ext cx="1920240" cy="1097280"/>
           </a:xfrm>
           <a:prstGeom prst="rect">
             <a:avLst/>
@@ -6651,14 +6575,14 @@
       </p:sp>
       <p:sp>
         <p:nvSpPr>
-          <p:cNvPr id="49" name="TextBox 48"/>
+          <p:cNvPr id="48" name="TextBox 47"/>
           <p:cNvSpPr txBox="1"/>
           <p:nvPr/>
         </p:nvSpPr>
         <p:spPr>
           <a:xfrm>
-            <a:off x="8284464" y="2688336"/>
-            <a:ext cx="1700784" cy="1005840"/>
+            <a:off x="8284464" y="2304288"/>
+            <a:ext cx="1700784" cy="987552"/>
           </a:xfrm>
           <a:prstGeom prst="rect">
             <a:avLst/>
@@ -6678,22 +6602,22 @@
                   <a:srgbClr val="1A1A1A"/>
                 </a:solidFill>
               </a:rPr>
-              <a:t>Création Comité
-Don en Confiance</a:t>
-            </a:r>
-          </a:p>
-        </p:txBody>
-      </p:sp>
-      <p:sp>
-        <p:nvSpPr>
-          <p:cNvPr id="50" name="Rectangle 49"/>
+              <a:t>Comité Don
+en Confiance</a:t>
+            </a:r>
+          </a:p>
+        </p:txBody>
+      </p:sp>
+      <p:sp>
+        <p:nvSpPr>
+          <p:cNvPr id="49" name="Rectangle 48"/>
           <p:cNvSpPr/>
           <p:nvPr/>
         </p:nvSpPr>
         <p:spPr>
           <a:xfrm>
-            <a:off x="10149840" y="2286000"/>
-            <a:ext cx="1920240" cy="347472"/>
+            <a:off x="10149840" y="1920240"/>
+            <a:ext cx="1920240" cy="329184"/>
           </a:xfrm>
           <a:prstGeom prst="rect">
             <a:avLst/>
@@ -6729,14 +6653,14 @@
       </p:sp>
       <p:sp>
         <p:nvSpPr>
-          <p:cNvPr id="51" name="TextBox 50"/>
+          <p:cNvPr id="50" name="TextBox 49"/>
           <p:cNvSpPr txBox="1"/>
           <p:nvPr/>
         </p:nvSpPr>
         <p:spPr>
           <a:xfrm>
-            <a:off x="10241280" y="2313432"/>
-            <a:ext cx="1737360" cy="256032"/>
+            <a:off x="10241280" y="1947672"/>
+            <a:ext cx="1737360" cy="237744"/>
           </a:xfrm>
           <a:prstGeom prst="rect">
             <a:avLst/>
@@ -6751,7 +6675,7 @@
           <a:p>
             <a:pPr algn="ctr"/>
             <a:r>
-              <a:rPr sz="1200" b="1" i="0">
+              <a:rPr sz="1100" b="1" i="0">
                 <a:solidFill>
                   <a:srgbClr val="FFFFFF"/>
                 </a:solidFill>
@@ -6763,14 +6687,14 @@
       </p:sp>
       <p:sp>
         <p:nvSpPr>
-          <p:cNvPr id="52" name="Rectangle 51"/>
+          <p:cNvPr id="51" name="Rectangle 50"/>
           <p:cNvSpPr/>
           <p:nvPr/>
         </p:nvSpPr>
         <p:spPr>
           <a:xfrm>
-            <a:off x="10149840" y="2633472"/>
-            <a:ext cx="1920240" cy="1143000"/>
+            <a:off x="10149840" y="2249424"/>
+            <a:ext cx="1920240" cy="1097280"/>
           </a:xfrm>
           <a:prstGeom prst="rect">
             <a:avLst/>
@@ -6808,14 +6732,14 @@
       </p:sp>
       <p:sp>
         <p:nvSpPr>
-          <p:cNvPr id="53" name="TextBox 52"/>
+          <p:cNvPr id="52" name="TextBox 51"/>
           <p:cNvSpPr txBox="1"/>
           <p:nvPr/>
         </p:nvSpPr>
         <p:spPr>
           <a:xfrm>
-            <a:off x="10259568" y="2688336"/>
-            <a:ext cx="1700784" cy="1005840"/>
+            <a:off x="10259568" y="2304288"/>
+            <a:ext cx="1700784" cy="987552"/>
           </a:xfrm>
           <a:prstGeom prst="rect">
             <a:avLst/>
@@ -6843,14 +6767,14 @@
       </p:sp>
       <p:sp>
         <p:nvSpPr>
-          <p:cNvPr id="54" name="Rectangle 53"/>
+          <p:cNvPr id="53" name="Rectangle 52"/>
           <p:cNvSpPr/>
           <p:nvPr/>
         </p:nvSpPr>
         <p:spPr>
           <a:xfrm>
-            <a:off x="274320" y="3931920"/>
-            <a:ext cx="11640312" cy="658368"/>
+            <a:off x="274320" y="3493008"/>
+            <a:ext cx="11640312" cy="347472"/>
           </a:xfrm>
           <a:prstGeom prst="rect">
             <a:avLst/>
@@ -6886,14 +6810,14 @@
       </p:sp>
       <p:sp>
         <p:nvSpPr>
-          <p:cNvPr id="55" name="TextBox 54"/>
+          <p:cNvPr id="54" name="TextBox 53"/>
           <p:cNvSpPr txBox="1"/>
           <p:nvPr/>
         </p:nvSpPr>
         <p:spPr>
           <a:xfrm>
-            <a:off x="411479" y="4005072"/>
-            <a:ext cx="11365992" cy="512063"/>
+            <a:off x="411479" y="3566160"/>
+            <a:ext cx="11365992" cy="201168"/>
           </a:xfrm>
           <a:prstGeom prst="rect">
             <a:avLst/>
@@ -6913,22 +6837,21 @@
                   <a:srgbClr val="FFFFFF"/>
                 </a:solidFill>
               </a:rPr>
-              <a:t>Les 3 principes humanitaires fondamentaux que vous incarnez chaque jour :
-HUMANITÉ — Soulager la souffrance humaine sans discrimination  ·  IMPARTIALITÉ — Sans distinction de nationalité, race, religion  ·  NEUTRALITÉ — Aucun parti pris politique</a:t>
-            </a:r>
-          </a:p>
-        </p:txBody>
-      </p:sp>
-      <p:sp>
-        <p:nvSpPr>
-          <p:cNvPr id="56" name="Rectangle 55"/>
+              <a:t>3 principes humanitaires que vous incarnez : HUMANITÉ · IMPARTIALITÉ · NEUTRALITÉ</a:t>
+            </a:r>
+          </a:p>
+        </p:txBody>
+      </p:sp>
+      <p:sp>
+        <p:nvSpPr>
+          <p:cNvPr id="55" name="Rectangle 54"/>
           <p:cNvSpPr/>
           <p:nvPr/>
         </p:nvSpPr>
         <p:spPr>
           <a:xfrm>
-            <a:off x="274320" y="4709160"/>
-            <a:ext cx="11640312" cy="402336"/>
+            <a:off x="274320" y="3950208"/>
+            <a:ext cx="11640312" cy="347472"/>
           </a:xfrm>
           <a:prstGeom prst="rect">
             <a:avLst/>
@@ -6964,14 +6887,14 @@
       </p:sp>
       <p:sp>
         <p:nvSpPr>
-          <p:cNvPr id="57" name="TextBox 56"/>
+          <p:cNvPr id="56" name="TextBox 55"/>
           <p:cNvSpPr txBox="1"/>
           <p:nvPr/>
         </p:nvSpPr>
         <p:spPr>
           <a:xfrm>
-            <a:off x="411479" y="4782312"/>
-            <a:ext cx="11365992" cy="256032"/>
+            <a:off x="411479" y="4023360"/>
+            <a:ext cx="11365992" cy="201168"/>
           </a:xfrm>
           <a:prstGeom prst="rect">
             <a:avLst/>
@@ -6991,7 +6914,536 @@
                   <a:srgbClr val="FFFFFF"/>
                 </a:solidFill>
               </a:rPr>
-              <a:t>Le don régulier par PA : Valeur à vie du donateur régulier = 8× celle d'un donateur ponctuel — c'est la colonne vertébrale des programmes UNICEF.</a:t>
+              <a:t>Don régulier PA : valeur à vie × 8 vs don ponctuel — colonne vertébrale des programmes UNICEF France.</a:t>
+            </a:r>
+          </a:p>
+        </p:txBody>
+      </p:sp>
+      <p:sp>
+        <p:nvSpPr>
+          <p:cNvPr id="57" name="Rectangle 56"/>
+          <p:cNvSpPr/>
+          <p:nvPr/>
+        </p:nvSpPr>
+        <p:spPr>
+          <a:xfrm>
+            <a:off x="274320" y="4425696"/>
+            <a:ext cx="11640312" cy="402336"/>
+          </a:xfrm>
+          <a:prstGeom prst="rect">
+            <a:avLst/>
+          </a:prstGeom>
+          <a:solidFill>
+            <a:srgbClr val="008080"/>
+          </a:solidFill>
+          <a:ln>
+            <a:noFill/>
+          </a:ln>
+        </p:spPr>
+        <p:style>
+          <a:lnRef idx="1">
+            <a:schemeClr val="accent1"/>
+          </a:lnRef>
+          <a:fillRef idx="3">
+            <a:schemeClr val="accent1"/>
+          </a:fillRef>
+          <a:effectRef idx="2">
+            <a:schemeClr val="accent1"/>
+          </a:effectRef>
+          <a:fontRef idx="minor">
+            <a:schemeClr val="lt1"/>
+          </a:fontRef>
+        </p:style>
+        <p:txBody>
+          <a:bodyPr rtlCol="0" anchor="ctr"/>
+          <a:lstStyle/>
+          <a:p>
+            <a:pPr algn="ctr"/>
+          </a:p>
+        </p:txBody>
+      </p:sp>
+      <p:sp>
+        <p:nvSpPr>
+          <p:cNvPr id="58" name="TextBox 57"/>
+          <p:cNvSpPr txBox="1"/>
+          <p:nvPr/>
+        </p:nvSpPr>
+        <p:spPr>
+          <a:xfrm>
+            <a:off x="411479" y="4498848"/>
+            <a:ext cx="11365992" cy="256032"/>
+          </a:xfrm>
+          <a:prstGeom prst="rect">
+            <a:avLst/>
+          </a:prstGeom>
+          <a:noFill/>
+        </p:spPr>
+        <p:txBody>
+          <a:bodyPr wrap="square">
+            <a:spAutoFit/>
+          </a:bodyPr>
+          <a:lstStyle/>
+          <a:p>
+            <a:pPr algn="l"/>
+            <a:r>
+              <a:rPr sz="1000" b="0" i="0">
+                <a:solidFill>
+                  <a:srgbClr val="FFFFFF"/>
+                </a:solidFill>
+              </a:rPr>
+              <a:t>Exercice : Expliquez en 90 secondes pourquoi le PA est préférable au don ponctuel. Votre binôme joue le prospect sceptique.</a:t>
+            </a:r>
+          </a:p>
+        </p:txBody>
+      </p:sp>
+    </p:spTree>
+  </p:cSld>
+  <p:clrMapOvr>
+    <a:masterClrMapping/>
+  </p:clrMapOvr>
+</p:sld>
+</file>
+
+<file path=ppt/slides/slide4.xml><?xml version="1.0" encoding="utf-8"?>
+<p:sld xmlns:a="http://schemas.openxmlformats.org/drawingml/2006/main" xmlns:p="http://schemas.openxmlformats.org/presentationml/2006/main" xmlns:r="http://schemas.openxmlformats.org/officeDocument/2006/relationships">
+  <p:cSld>
+    <p:spTree>
+      <p:nvGrpSpPr>
+        <p:cNvPr id="1" name=""/>
+        <p:cNvGrpSpPr/>
+        <p:nvPr/>
+      </p:nvGrpSpPr>
+      <p:grpSpPr/>
+      <p:sp>
+        <p:nvSpPr>
+          <p:cNvPr id="2" name="Rectangle 1"/>
+          <p:cNvSpPr/>
+          <p:nvPr/>
+        </p:nvSpPr>
+        <p:spPr>
+          <a:xfrm>
+            <a:off x="0" y="0"/>
+            <a:ext cx="12188952" cy="6858000"/>
+          </a:xfrm>
+          <a:prstGeom prst="rect">
+            <a:avLst/>
+          </a:prstGeom>
+          <a:solidFill>
+            <a:srgbClr val="005050"/>
+          </a:solidFill>
+          <a:ln>
+            <a:noFill/>
+          </a:ln>
+        </p:spPr>
+        <p:style>
+          <a:lnRef idx="1">
+            <a:schemeClr val="accent1"/>
+          </a:lnRef>
+          <a:fillRef idx="3">
+            <a:schemeClr val="accent1"/>
+          </a:fillRef>
+          <a:effectRef idx="2">
+            <a:schemeClr val="accent1"/>
+          </a:effectRef>
+          <a:fontRef idx="minor">
+            <a:schemeClr val="lt1"/>
+          </a:fontRef>
+        </p:style>
+        <p:txBody>
+          <a:bodyPr rtlCol="0" anchor="ctr"/>
+          <a:lstStyle/>
+          <a:p>
+            <a:pPr algn="ctr"/>
+          </a:p>
+        </p:txBody>
+      </p:sp>
+      <p:sp>
+        <p:nvSpPr>
+          <p:cNvPr id="3" name="Rectangle 2"/>
+          <p:cNvSpPr/>
+          <p:nvPr/>
+        </p:nvSpPr>
+        <p:spPr>
+          <a:xfrm>
+            <a:off x="0" y="0"/>
+            <a:ext cx="12188952" cy="73152"/>
+          </a:xfrm>
+          <a:prstGeom prst="rect">
+            <a:avLst/>
+          </a:prstGeom>
+          <a:solidFill>
+            <a:srgbClr val="00AAAA"/>
+          </a:solidFill>
+          <a:ln>
+            <a:noFill/>
+          </a:ln>
+        </p:spPr>
+        <p:style>
+          <a:lnRef idx="1">
+            <a:schemeClr val="accent1"/>
+          </a:lnRef>
+          <a:fillRef idx="3">
+            <a:schemeClr val="accent1"/>
+          </a:fillRef>
+          <a:effectRef idx="2">
+            <a:schemeClr val="accent1"/>
+          </a:effectRef>
+          <a:fontRef idx="minor">
+            <a:schemeClr val="lt1"/>
+          </a:fontRef>
+        </p:style>
+        <p:txBody>
+          <a:bodyPr rtlCol="0" anchor="ctr"/>
+          <a:lstStyle/>
+          <a:p>
+            <a:pPr algn="ctr"/>
+          </a:p>
+        </p:txBody>
+      </p:sp>
+      <p:sp>
+        <p:nvSpPr>
+          <p:cNvPr id="4" name="Rectangle 3"/>
+          <p:cNvSpPr/>
+          <p:nvPr/>
+        </p:nvSpPr>
+        <p:spPr>
+          <a:xfrm>
+            <a:off x="0" y="6784848"/>
+            <a:ext cx="12188952" cy="73152"/>
+          </a:xfrm>
+          <a:prstGeom prst="rect">
+            <a:avLst/>
+          </a:prstGeom>
+          <a:solidFill>
+            <a:srgbClr val="00AAAA"/>
+          </a:solidFill>
+          <a:ln>
+            <a:noFill/>
+          </a:ln>
+        </p:spPr>
+        <p:style>
+          <a:lnRef idx="1">
+            <a:schemeClr val="accent1"/>
+          </a:lnRef>
+          <a:fillRef idx="3">
+            <a:schemeClr val="accent1"/>
+          </a:fillRef>
+          <a:effectRef idx="2">
+            <a:schemeClr val="accent1"/>
+          </a:effectRef>
+          <a:fontRef idx="minor">
+            <a:schemeClr val="lt1"/>
+          </a:fontRef>
+        </p:style>
+        <p:txBody>
+          <a:bodyPr rtlCol="0" anchor="ctr"/>
+          <a:lstStyle/>
+          <a:p>
+            <a:pPr algn="ctr"/>
+          </a:p>
+        </p:txBody>
+      </p:sp>
+      <p:sp>
+        <p:nvSpPr>
+          <p:cNvPr id="5" name="Oval 4"/>
+          <p:cNvSpPr/>
+          <p:nvPr/>
+        </p:nvSpPr>
+        <p:spPr>
+          <a:xfrm>
+            <a:off x="4114800" y="1097280"/>
+            <a:ext cx="3931920" cy="3931920"/>
+          </a:xfrm>
+          <a:prstGeom prst="ellipse">
+            <a:avLst/>
+          </a:prstGeom>
+          <a:solidFill>
+            <a:srgbClr val="006A6A"/>
+          </a:solidFill>
+          <a:ln>
+            <a:noFill/>
+          </a:ln>
+        </p:spPr>
+        <p:style>
+          <a:lnRef idx="1">
+            <a:schemeClr val="accent1"/>
+          </a:lnRef>
+          <a:fillRef idx="3">
+            <a:schemeClr val="accent1"/>
+          </a:fillRef>
+          <a:effectRef idx="2">
+            <a:schemeClr val="accent1"/>
+          </a:effectRef>
+          <a:fontRef idx="minor">
+            <a:schemeClr val="lt1"/>
+          </a:fontRef>
+        </p:style>
+        <p:txBody>
+          <a:bodyPr rtlCol="0" anchor="ctr"/>
+          <a:lstStyle/>
+          <a:p>
+            <a:pPr algn="ctr"/>
+          </a:p>
+        </p:txBody>
+      </p:sp>
+      <p:sp>
+        <p:nvSpPr>
+          <p:cNvPr id="6" name="TextBox 5"/>
+          <p:cNvSpPr txBox="1"/>
+          <p:nvPr/>
+        </p:nvSpPr>
+        <p:spPr>
+          <a:xfrm>
+            <a:off x="5029200" y="2011680"/>
+            <a:ext cx="2103120" cy="1371600"/>
+          </a:xfrm>
+          <a:prstGeom prst="rect">
+            <a:avLst/>
+          </a:prstGeom>
+          <a:noFill/>
+        </p:spPr>
+        <p:txBody>
+          <a:bodyPr wrap="square">
+            <a:spAutoFit/>
+          </a:bodyPr>
+          <a:lstStyle/>
+          <a:p>
+            <a:pPr algn="ctr"/>
+            <a:r>
+              <a:rPr sz="4800" b="0" i="0">
+                <a:solidFill>
+                  <a:srgbClr val="FFFFFF"/>
+                </a:solidFill>
+              </a:rPr>
+              <a:t>🙏</a:t>
+            </a:r>
+          </a:p>
+        </p:txBody>
+      </p:sp>
+      <p:sp>
+        <p:nvSpPr>
+          <p:cNvPr id="7" name="TextBox 6"/>
+          <p:cNvSpPr txBox="1"/>
+          <p:nvPr/>
+        </p:nvSpPr>
+        <p:spPr>
+          <a:xfrm>
+            <a:off x="1371600" y="1280160"/>
+            <a:ext cx="9418320" cy="1097280"/>
+          </a:xfrm>
+          <a:prstGeom prst="rect">
+            <a:avLst/>
+          </a:prstGeom>
+          <a:noFill/>
+        </p:spPr>
+        <p:txBody>
+          <a:bodyPr wrap="square">
+            <a:spAutoFit/>
+          </a:bodyPr>
+          <a:lstStyle/>
+          <a:p>
+            <a:pPr algn="ctr"/>
+            <a:r>
+              <a:rPr sz="4600" b="1" i="0">
+                <a:solidFill>
+                  <a:srgbClr val="FFFFFF"/>
+                </a:solidFill>
+              </a:rPr>
+              <a:t>Merci à Tous !</a:t>
+            </a:r>
+          </a:p>
+        </p:txBody>
+      </p:sp>
+      <p:sp>
+        <p:nvSpPr>
+          <p:cNvPr id="8" name="TextBox 7"/>
+          <p:cNvSpPr txBox="1"/>
+          <p:nvPr/>
+        </p:nvSpPr>
+        <p:spPr>
+          <a:xfrm>
+            <a:off x="1371600" y="2606040"/>
+            <a:ext cx="9418320" cy="548640"/>
+          </a:xfrm>
+          <a:prstGeom prst="rect">
+            <a:avLst/>
+          </a:prstGeom>
+          <a:noFill/>
+        </p:spPr>
+        <p:txBody>
+          <a:bodyPr wrap="square">
+            <a:spAutoFit/>
+          </a:bodyPr>
+          <a:lstStyle/>
+          <a:p>
+            <a:pPr algn="ctr"/>
+            <a:r>
+              <a:rPr sz="1800" b="0" i="1">
+                <a:solidFill>
+                  <a:srgbClr val="CCEEEE"/>
+                </a:solidFill>
+              </a:rPr>
+              <a:t>Votre engagement fait la différence pour les enfants du monde entier.</a:t>
+            </a:r>
+          </a:p>
+        </p:txBody>
+      </p:sp>
+      <p:sp>
+        <p:nvSpPr>
+          <p:cNvPr id="9" name="TextBox 8"/>
+          <p:cNvSpPr txBox="1"/>
+          <p:nvPr/>
+        </p:nvSpPr>
+        <p:spPr>
+          <a:xfrm>
+            <a:off x="1371600" y="3246120"/>
+            <a:ext cx="9418320" cy="347472"/>
+          </a:xfrm>
+          <a:prstGeom prst="rect">
+            <a:avLst/>
+          </a:prstGeom>
+          <a:noFill/>
+        </p:spPr>
+        <p:txBody>
+          <a:bodyPr wrap="square">
+            <a:spAutoFit/>
+          </a:bodyPr>
+          <a:lstStyle/>
+          <a:p>
+            <a:pPr algn="ctr"/>
+            <a:r>
+              <a:rPr sz="1200" b="0" i="0">
+                <a:solidFill>
+                  <a:srgbClr val="88DDDD"/>
+                </a:solidFill>
+              </a:rPr>
+              <a:t>BOOK J2  ·  Journée 2  ·  France associative &amp; Histoire humanitaire</a:t>
+            </a:r>
+          </a:p>
+        </p:txBody>
+      </p:sp>
+      <p:sp>
+        <p:nvSpPr>
+          <p:cNvPr id="10" name="TextBox 9"/>
+          <p:cNvSpPr txBox="1"/>
+          <p:nvPr/>
+        </p:nvSpPr>
+        <p:spPr>
+          <a:xfrm>
+            <a:off x="1828800" y="3749039"/>
+            <a:ext cx="8531352" cy="457200"/>
+          </a:xfrm>
+          <a:prstGeom prst="rect">
+            <a:avLst/>
+          </a:prstGeom>
+          <a:noFill/>
+        </p:spPr>
+        <p:txBody>
+          <a:bodyPr wrap="square">
+            <a:spAutoFit/>
+          </a:bodyPr>
+          <a:lstStyle/>
+          <a:p>
+            <a:pPr algn="ctr"/>
+            <a:r>
+              <a:rPr sz="1400" b="0" i="1">
+                <a:solidFill>
+                  <a:srgbClr val="AADDDD"/>
+                </a:solidFill>
+              </a:rPr>
+              <a:t>« Le refus d'aujourd'hui peut être le don de demain »</a:t>
+            </a:r>
+          </a:p>
+        </p:txBody>
+      </p:sp>
+      <p:sp>
+        <p:nvSpPr>
+          <p:cNvPr id="11" name="TextBox 10"/>
+          <p:cNvSpPr txBox="1"/>
+          <p:nvPr/>
+        </p:nvSpPr>
+        <p:spPr>
+          <a:xfrm>
+            <a:off x="0" y="4572000"/>
+            <a:ext cx="12188952" cy="329184"/>
+          </a:xfrm>
+          <a:prstGeom prst="rect">
+            <a:avLst/>
+          </a:prstGeom>
+          <a:noFill/>
+        </p:spPr>
+        <p:txBody>
+          <a:bodyPr wrap="square">
+            <a:spAutoFit/>
+          </a:bodyPr>
+          <a:lstStyle/>
+          <a:p>
+            <a:pPr algn="ctr"/>
+            <a:r>
+              <a:rPr sz="1000" b="0" i="0">
+                <a:solidFill>
+                  <a:srgbClr val="88DDDD"/>
+                </a:solidFill>
+              </a:rPr>
+              <a:t>SHY-Performance  ·  Formation FIM  ·  UNICEF France  ·  V6-01062026SHY-TE</a:t>
+            </a:r>
+          </a:p>
+        </p:txBody>
+      </p:sp>
+      <p:pic>
+        <p:nvPicPr>
+          <p:cNvPr id="12" name="Picture 11" descr="shy_logo_v2.png"/>
+          <p:cNvPicPr>
+            <a:picLocks noChangeAspect="1"/>
+          </p:cNvPicPr>
+          <p:nvPr/>
+        </p:nvPicPr>
+        <p:blipFill>
+          <a:blip r:embed="rId2"/>
+          <a:stretch>
+            <a:fillRect/>
+          </a:stretch>
+        </p:blipFill>
+        <p:spPr>
+          <a:xfrm>
+            <a:off x="5669280" y="5120640"/>
+            <a:ext cx="914400" cy="896112"/>
+          </a:xfrm>
+          <a:prstGeom prst="rect">
+            <a:avLst/>
+          </a:prstGeom>
+        </p:spPr>
+      </p:pic>
+      <p:sp>
+        <p:nvSpPr>
+          <p:cNvPr id="13" name="TextBox 12"/>
+          <p:cNvSpPr txBox="1"/>
+          <p:nvPr/>
+        </p:nvSpPr>
+        <p:spPr>
+          <a:xfrm>
+            <a:off x="0" y="6035040"/>
+            <a:ext cx="12188952" cy="329184"/>
+          </a:xfrm>
+          <a:prstGeom prst="rect">
+            <a:avLst/>
+          </a:prstGeom>
+          <a:noFill/>
+        </p:spPr>
+        <p:txBody>
+          <a:bodyPr wrap="square">
+            <a:spAutoFit/>
+          </a:bodyPr>
+          <a:lstStyle/>
+          <a:p>
+            <a:pPr algn="ctr"/>
+            <a:r>
+              <a:rPr sz="1000" b="1" i="0">
+                <a:solidFill>
+                  <a:srgbClr val="FFFFFF"/>
+                </a:solidFill>
+              </a:rPr>
+              <a:t>SHY-Performance  ×  FIDELIS  ×  UNICEF France</a:t>
             </a:r>
           </a:p>
         </p:txBody>
